--- a/decks/Valletta_DOI_OSSTP_Capability_Overview.pptx
+++ b/decks/Valletta_DOI_OSSTP_Capability_Overview.pptx
@@ -1322,14 +1322,53 @@
       </p:grpSpPr>
       <p:sp>
         <p:nvSpPr>
-          <p:cNvPr id="2" name="Shape 0"/>
+          <p:cNvPr id="2" name="Text 0"/>
+          <p:cNvSpPr txBox="1"/>
+          <p:nvPr/>
+        </p:nvSpPr>
+        <p:spPr>
+          <a:xfrm>
+            <a:off x="6949440" y="0"/>
+            <a:ext cx="5486400" cy="6858000"/>
+          </a:xfrm>
+          <a:prstGeom prst="rect">
+            <a:avLst/>
+          </a:prstGeom>
+          <a:noFill/>
+          <a:ln/>
+        </p:spPr>
+        <p:txBody>
+          <a:bodyPr wrap="square" lIns="0" tIns="0" rIns="0" bIns="0" rtlCol="0" anchor="t"/>
+          <a:lstStyle/>
+          <a:p>
+            <a:pPr algn="r" indent="0" marL="0">
+              <a:buNone/>
+            </a:pPr>
+            <a:r>
+              <a:rPr lang="en-US" sz="36000" b="1" dirty="0">
+                <a:solidFill>
+                  <a:srgbClr val="141414"/>
+                </a:solidFill>
+                <a:latin typeface="Bookman Old Style" pitchFamily="34" charset="0"/>
+                <a:ea typeface="Bookman Old Style" pitchFamily="34" charset="-122"/>
+                <a:cs typeface="Bookman Old Style" pitchFamily="34" charset="-120"/>
+              </a:rPr>
+              <a:t>01</a:t>
+            </a:r>
+            <a:endParaRPr lang="en-US" sz="36000" dirty="0"/>
+          </a:p>
+        </p:txBody>
+      </p:sp>
+      <p:sp>
+        <p:nvSpPr>
+          <p:cNvPr id="3" name="Shape 1"/>
           <p:cNvSpPr/>
           <p:nvPr/>
         </p:nvSpPr>
         <p:spPr>
           <a:xfrm>
-            <a:off x="457200" y="457200"/>
-            <a:ext cx="365760" cy="25603"/>
+            <a:off x="457200" y="384048"/>
+            <a:ext cx="310896" cy="29261"/>
           </a:xfrm>
           <a:prstGeom prst="rect">
             <a:avLst/>
@@ -1342,14 +1381,14 @@
       </p:sp>
       <p:sp>
         <p:nvSpPr>
-          <p:cNvPr id="3" name="Shape 1"/>
+          <p:cNvPr id="4" name="Shape 2"/>
           <p:cNvSpPr/>
           <p:nvPr/>
         </p:nvSpPr>
         <p:spPr>
           <a:xfrm>
-            <a:off x="457200" y="457200"/>
-            <a:ext cx="25603" cy="365760"/>
+            <a:off x="457200" y="384048"/>
+            <a:ext cx="29261" cy="310896"/>
           </a:xfrm>
           <a:prstGeom prst="rect">
             <a:avLst/>
@@ -1362,76 +1401,155 @@
       </p:sp>
       <p:sp>
         <p:nvSpPr>
-          <p:cNvPr id="4" name="Text 2"/>
-          <p:cNvSpPr txBox="1"/>
-          <p:nvPr/>
-        </p:nvSpPr>
-        <p:spPr>
-          <a:xfrm>
-            <a:off x="6245352" y="411480"/>
-            <a:ext cx="5486400" cy="274320"/>
-          </a:xfrm>
-          <a:prstGeom prst="rect">
-            <a:avLst/>
-          </a:prstGeom>
-          <a:noFill/>
-          <a:ln/>
-        </p:spPr>
-        <p:txBody>
-          <a:bodyPr wrap="square" lIns="0" tIns="0" rIns="0" bIns="0" rtlCol="0" anchor="ctr"/>
-          <a:lstStyle/>
-          <a:p>
-            <a:pPr algn="r" indent="0" marL="0">
-              <a:buNone/>
-            </a:pPr>
-            <a:r>
-              <a:rPr lang="en-US" sz="1000" b="1" spc="150" kern="0" dirty="0">
-                <a:solidFill>
-                  <a:srgbClr val="D8D9DB"/>
+          <p:cNvPr id="5" name="Text 3"/>
+          <p:cNvSpPr txBox="1"/>
+          <p:nvPr/>
+        </p:nvSpPr>
+        <p:spPr>
+          <a:xfrm>
+            <a:off x="896112" y="329184"/>
+            <a:ext cx="2926080" cy="292608"/>
+          </a:xfrm>
+          <a:prstGeom prst="rect">
+            <a:avLst/>
+          </a:prstGeom>
+          <a:noFill/>
+          <a:ln/>
+        </p:spPr>
+        <p:txBody>
+          <a:bodyPr wrap="square" lIns="0" tIns="0" rIns="0" bIns="0" rtlCol="0" anchor="ctr"/>
+          <a:lstStyle/>
+          <a:p>
+            <a:pPr indent="0" marL="0">
+              <a:buNone/>
+            </a:pPr>
+            <a:r>
+              <a:rPr lang="en-US" sz="1500" b="1" spc="200" kern="0" dirty="0">
+                <a:solidFill>
+                  <a:srgbClr val="FFFFFF"/>
                 </a:solidFill>
                 <a:latin typeface="Arial" pitchFamily="34" charset="0"/>
                 <a:ea typeface="Arial" pitchFamily="34" charset="-122"/>
                 <a:cs typeface="Arial" pitchFamily="34" charset="-120"/>
               </a:rPr>
-              <a:t>VALLETTA INDUSTRIES, INC.</a:t>
-            </a:r>
-            <a:endParaRPr lang="en-US" sz="1000" dirty="0"/>
-          </a:p>
-        </p:txBody>
-      </p:sp>
-      <p:sp>
-        <p:nvSpPr>
-          <p:cNvPr id="5" name="Text 3"/>
-          <p:cNvSpPr txBox="1"/>
-          <p:nvPr/>
-        </p:nvSpPr>
-        <p:spPr>
-          <a:xfrm>
-            <a:off x="457200" y="1463040"/>
-            <a:ext cx="10058400" cy="320040"/>
-          </a:xfrm>
-          <a:prstGeom prst="rect">
-            <a:avLst/>
-          </a:prstGeom>
-          <a:noFill/>
-          <a:ln/>
-        </p:spPr>
-        <p:txBody>
-          <a:bodyPr wrap="square" lIns="0" tIns="0" rIns="0" bIns="0" rtlCol="0" anchor="ctr"/>
-          <a:lstStyle/>
-          <a:p>
-            <a:pPr algn="l" indent="0" marL="0">
-              <a:buNone/>
-            </a:pPr>
-            <a:r>
-              <a:rPr lang="en-US" sz="1100" b="1" spc="150" kern="0" dirty="0">
-                <a:solidFill>
-                  <a:srgbClr val="D8D9DB"/>
+              <a:t>VALLETTA</a:t>
+            </a:r>
+            <a:endParaRPr lang="en-US" sz="1500" dirty="0"/>
+          </a:p>
+        </p:txBody>
+      </p:sp>
+      <p:sp>
+        <p:nvSpPr>
+          <p:cNvPr id="6" name="Text 4"/>
+          <p:cNvSpPr txBox="1"/>
+          <p:nvPr/>
+        </p:nvSpPr>
+        <p:spPr>
+          <a:xfrm>
+            <a:off x="896112" y="603504"/>
+            <a:ext cx="2926080" cy="219456"/>
+          </a:xfrm>
+          <a:prstGeom prst="rect">
+            <a:avLst/>
+          </a:prstGeom>
+          <a:noFill/>
+          <a:ln/>
+        </p:spPr>
+        <p:txBody>
+          <a:bodyPr wrap="square" lIns="0" tIns="0" rIns="0" bIns="0" rtlCol="0" anchor="ctr"/>
+          <a:lstStyle/>
+          <a:p>
+            <a:pPr indent="0" marL="0">
+              <a:buNone/>
+            </a:pPr>
+            <a:r>
+              <a:rPr lang="en-US" sz="750" b="1" spc="200" kern="0" dirty="0">
+                <a:solidFill>
+                  <a:srgbClr val="5B5F66"/>
                 </a:solidFill>
                 <a:latin typeface="Arial" pitchFamily="34" charset="0"/>
                 <a:ea typeface="Arial" pitchFamily="34" charset="-122"/>
                 <a:cs typeface="Arial" pitchFamily="34" charset="-120"/>
               </a:rPr>
+              <a:t>INDUSTRIES, INC.</a:t>
+            </a:r>
+            <a:endParaRPr lang="en-US" sz="750" dirty="0"/>
+          </a:p>
+        </p:txBody>
+      </p:sp>
+      <p:sp>
+        <p:nvSpPr>
+          <p:cNvPr id="7" name="Shape 5"/>
+          <p:cNvSpPr/>
+          <p:nvPr/>
+        </p:nvSpPr>
+        <p:spPr>
+          <a:xfrm>
+            <a:off x="457200" y="1371600"/>
+            <a:ext cx="502920" cy="45720"/>
+          </a:xfrm>
+          <a:prstGeom prst="rect">
+            <a:avLst/>
+          </a:prstGeom>
+          <a:solidFill>
+            <a:srgbClr val="FF002B"/>
+          </a:solidFill>
+          <a:ln/>
+        </p:spPr>
+      </p:sp>
+      <p:sp>
+        <p:nvSpPr>
+          <p:cNvPr id="8" name="Shape 6"/>
+          <p:cNvSpPr/>
+          <p:nvPr/>
+        </p:nvSpPr>
+        <p:spPr>
+          <a:xfrm>
+            <a:off x="457200" y="1371600"/>
+            <a:ext cx="45720" cy="502920"/>
+          </a:xfrm>
+          <a:prstGeom prst="rect">
+            <a:avLst/>
+          </a:prstGeom>
+          <a:solidFill>
+            <a:srgbClr val="FF002B"/>
+          </a:solidFill>
+          <a:ln/>
+        </p:spPr>
+      </p:sp>
+      <p:sp>
+        <p:nvSpPr>
+          <p:cNvPr id="9" name="Text 7"/>
+          <p:cNvSpPr txBox="1"/>
+          <p:nvPr/>
+        </p:nvSpPr>
+        <p:spPr>
+          <a:xfrm>
+            <a:off x="777240" y="1481328"/>
+            <a:ext cx="10058400" cy="320040"/>
+          </a:xfrm>
+          <a:prstGeom prst="rect">
+            <a:avLst/>
+          </a:prstGeom>
+          <a:noFill/>
+          <a:ln/>
+        </p:spPr>
+        <p:txBody>
+          <a:bodyPr wrap="square" lIns="0" tIns="0" rIns="0" bIns="0" rtlCol="0" anchor="ctr"/>
+          <a:lstStyle/>
+          <a:p>
+            <a:pPr algn="l" indent="0" marL="0">
+              <a:buNone/>
+            </a:pPr>
+            <a:r>
+              <a:rPr lang="en-US" sz="1100" b="1" spc="150" kern="0" dirty="0">
+                <a:solidFill>
+                  <a:srgbClr val="D8D9DB"/>
+                </a:solidFill>
+                <a:latin typeface="Arial" pitchFamily="34" charset="0"/>
+                <a:ea typeface="Arial" pitchFamily="34" charset="-122"/>
+                <a:cs typeface="Arial" pitchFamily="34" charset="-120"/>
+              </a:rPr>
               <a:t>CAPABILITY &amp; SOLUTION OVERVIEW  —  CLIENT BRIEFING</a:t>
             </a:r>
             <a:endParaRPr lang="en-US" sz="1100" dirty="0"/>
@@ -1440,14 +1558,14 @@
       </p:sp>
       <p:sp>
         <p:nvSpPr>
-          <p:cNvPr id="6" name="Text 4"/>
-          <p:cNvSpPr txBox="1"/>
-          <p:nvPr/>
-        </p:nvSpPr>
-        <p:spPr>
-          <a:xfrm>
-            <a:off x="457200" y="1828800"/>
-            <a:ext cx="11274552" cy="1600200"/>
+          <p:cNvPr id="10" name="Text 8"/>
+          <p:cNvSpPr txBox="1"/>
+          <p:nvPr/>
+        </p:nvSpPr>
+        <p:spPr>
+          <a:xfrm>
+            <a:off x="777240" y="1828800"/>
+            <a:ext cx="10607040" cy="1600200"/>
           </a:xfrm>
           <a:prstGeom prst="rect">
             <a:avLst/>
@@ -1502,14 +1620,14 @@
       </p:sp>
       <p:sp>
         <p:nvSpPr>
-          <p:cNvPr id="7" name="Text 5"/>
-          <p:cNvSpPr txBox="1"/>
-          <p:nvPr/>
-        </p:nvSpPr>
-        <p:spPr>
-          <a:xfrm>
-            <a:off x="457200" y="3429000"/>
-            <a:ext cx="11274552" cy="365760"/>
+          <p:cNvPr id="11" name="Text 9"/>
+          <p:cNvSpPr txBox="1"/>
+          <p:nvPr/>
+        </p:nvSpPr>
+        <p:spPr>
+          <a:xfrm>
+            <a:off x="777240" y="3429000"/>
+            <a:ext cx="10607040" cy="329184"/>
           </a:xfrm>
           <a:prstGeom prst="rect">
             <a:avLst/>
@@ -1525,7 +1643,7 @@
               <a:buNone/>
             </a:pPr>
             <a:r>
-              <a:rPr lang="en-US" sz="1400" b="1" spc="100" kern="0" dirty="0">
+              <a:rPr lang="en-US" sz="1300" b="1" spc="100" kern="0" dirty="0">
                 <a:solidFill>
                   <a:srgbClr val="FF002B"/>
                 </a:solidFill>
@@ -1535,20 +1653,59 @@
               </a:rPr>
               <a:t>DEPARTMENT OF THE INTERIOR  |  OFFICE OF LAW ENFORCEMENT AND SECURITY</a:t>
             </a:r>
-            <a:endParaRPr lang="en-US" sz="1400" dirty="0"/>
-          </a:p>
-        </p:txBody>
-      </p:sp>
-      <p:sp>
-        <p:nvSpPr>
-          <p:cNvPr id="8" name="Text 6"/>
-          <p:cNvSpPr txBox="1"/>
-          <p:nvPr/>
-        </p:nvSpPr>
-        <p:spPr>
-          <a:xfrm>
-            <a:off x="457200" y="3840480"/>
-            <a:ext cx="9692640" cy="777240"/>
+            <a:endParaRPr lang="en-US" sz="1300" dirty="0"/>
+          </a:p>
+        </p:txBody>
+      </p:sp>
+      <p:sp>
+        <p:nvSpPr>
+          <p:cNvPr id="12" name="Text 10"/>
+          <p:cNvSpPr txBox="1"/>
+          <p:nvPr/>
+        </p:nvSpPr>
+        <p:spPr>
+          <a:xfrm>
+            <a:off x="777240" y="3822192"/>
+            <a:ext cx="10058400" cy="457200"/>
+          </a:xfrm>
+          <a:prstGeom prst="rect">
+            <a:avLst/>
+          </a:prstGeom>
+          <a:noFill/>
+          <a:ln/>
+        </p:spPr>
+        <p:txBody>
+          <a:bodyPr wrap="square" lIns="0" tIns="0" rIns="0" bIns="0" rtlCol="0" anchor="ctr"/>
+          <a:lstStyle/>
+          <a:p>
+            <a:pPr algn="l" indent="0" marL="0">
+              <a:buNone/>
+            </a:pPr>
+            <a:r>
+              <a:rPr lang="en-US" sz="2400" b="1" dirty="0">
+                <a:solidFill>
+                  <a:srgbClr val="FFFFFF"/>
+                </a:solidFill>
+                <a:latin typeface="Bookman Old Style" pitchFamily="34" charset="0"/>
+                <a:ea typeface="Bookman Old Style" pitchFamily="34" charset="-122"/>
+                <a:cs typeface="Bookman Old Style" pitchFamily="34" charset="-120"/>
+              </a:rPr>
+              <a:t>BUILT BY OPERATORS.</a:t>
+            </a:r>
+            <a:endParaRPr lang="en-US" sz="2400" dirty="0"/>
+          </a:p>
+        </p:txBody>
+      </p:sp>
+      <p:sp>
+        <p:nvSpPr>
+          <p:cNvPr id="13" name="Text 11"/>
+          <p:cNvSpPr txBox="1"/>
+          <p:nvPr/>
+        </p:nvSpPr>
+        <p:spPr>
+          <a:xfrm>
+            <a:off x="777240" y="4315968"/>
+            <a:ext cx="8778240" cy="658368"/>
           </a:xfrm>
           <a:prstGeom prst="rect">
             <a:avLst/>
@@ -1567,9 +1724,9 @@
               <a:buNone/>
             </a:pPr>
             <a:r>
-              <a:rPr lang="en-US" sz="1500" i="1" dirty="0">
-                <a:solidFill>
-                  <a:srgbClr val="F5F5F3"/>
+              <a:rPr lang="en-US" sz="1300" i="1" dirty="0">
+                <a:solidFill>
+                  <a:srgbClr val="D8D9DB"/>
                 </a:solidFill>
                 <a:latin typeface="Calibri" pitchFamily="34" charset="0"/>
                 <a:ea typeface="Calibri" pitchFamily="34" charset="-122"/>
@@ -1577,20 +1734,43 @@
               </a:rPr>
               <a:t>Federal law-enforcement and force-protection training experience, reinforced by current protective-force operations — featuring Mission Protect, our DOI-owned digital training pathway.</a:t>
             </a:r>
-            <a:endParaRPr lang="en-US" sz="1500" dirty="0"/>
-          </a:p>
-        </p:txBody>
-      </p:sp>
-      <p:sp>
-        <p:nvSpPr>
-          <p:cNvPr id="9" name="Text 7"/>
-          <p:cNvSpPr txBox="1"/>
-          <p:nvPr/>
-        </p:nvSpPr>
-        <p:spPr>
-          <a:xfrm>
-            <a:off x="457200" y="5257800"/>
-            <a:ext cx="4572000" cy="274320"/>
+            <a:endParaRPr lang="en-US" sz="1300" dirty="0"/>
+          </a:p>
+        </p:txBody>
+      </p:sp>
+      <p:sp>
+        <p:nvSpPr>
+          <p:cNvPr id="14" name="Shape 12"/>
+          <p:cNvSpPr/>
+          <p:nvPr/>
+        </p:nvSpPr>
+        <p:spPr>
+          <a:xfrm>
+            <a:off x="777240" y="5102352"/>
+            <a:ext cx="10607040" cy="0"/>
+          </a:xfrm>
+          <a:prstGeom prst="line">
+            <a:avLst/>
+          </a:prstGeom>
+          <a:noFill/>
+          <a:ln w="12700">
+            <a:solidFill>
+              <a:srgbClr val="1C1D21"/>
+            </a:solidFill>
+            <a:prstDash val="solid"/>
+          </a:ln>
+        </p:spPr>
+      </p:sp>
+      <p:sp>
+        <p:nvSpPr>
+          <p:cNvPr id="15" name="Text 13"/>
+          <p:cNvSpPr txBox="1"/>
+          <p:nvPr/>
+        </p:nvSpPr>
+        <p:spPr>
+          <a:xfrm>
+            <a:off x="777240" y="5285232"/>
+            <a:ext cx="4572000" cy="256032"/>
           </a:xfrm>
           <a:prstGeom prst="rect">
             <a:avLst/>
@@ -1606,7 +1786,7 @@
               <a:buNone/>
             </a:pPr>
             <a:r>
-              <a:rPr lang="en-US" sz="1000" b="1" spc="150" kern="0" dirty="0">
+              <a:rPr lang="en-US" sz="950" b="1" spc="150" kern="0" dirty="0">
                 <a:solidFill>
                   <a:srgbClr val="5B5F66"/>
                 </a:solidFill>
@@ -1616,20 +1796,20 @@
               </a:rPr>
               <a:t>PREPARED BY</a:t>
             </a:r>
-            <a:endParaRPr lang="en-US" sz="1000" dirty="0"/>
-          </a:p>
-        </p:txBody>
-      </p:sp>
-      <p:sp>
-        <p:nvSpPr>
-          <p:cNvPr id="10" name="Text 8"/>
-          <p:cNvSpPr txBox="1"/>
-          <p:nvPr/>
-        </p:nvSpPr>
-        <p:spPr>
-          <a:xfrm>
-            <a:off x="457200" y="5532120"/>
-            <a:ext cx="6126480" cy="868680"/>
+            <a:endParaRPr lang="en-US" sz="950" dirty="0"/>
+          </a:p>
+        </p:txBody>
+      </p:sp>
+      <p:sp>
+        <p:nvSpPr>
+          <p:cNvPr id="16" name="Text 14"/>
+          <p:cNvSpPr txBox="1"/>
+          <p:nvPr/>
+        </p:nvSpPr>
+        <p:spPr>
+          <a:xfrm>
+            <a:off x="777240" y="5541264"/>
+            <a:ext cx="5943600" cy="777240"/>
           </a:xfrm>
           <a:prstGeom prst="rect">
             <a:avLst/>
@@ -1648,7 +1828,7 @@
               <a:buNone/>
             </a:pPr>
             <a:r>
-              <a:rPr lang="en-US" sz="1200" b="1" dirty="0">
+              <a:rPr lang="en-US" sz="1100" b="1" dirty="0">
                 <a:solidFill>
                   <a:srgbClr val="F5F5F3"/>
                 </a:solidFill>
@@ -1658,7 +1838,7 @@
               </a:rPr>
               <a:t>Valletta Industries, Inc.</a:t>
             </a:r>
-            <a:endParaRPr lang="en-US" sz="1200" dirty="0"/>
+            <a:endParaRPr lang="en-US" sz="1100" dirty="0"/>
           </a:p>
           <a:p>
             <a:pPr indent="0" marL="0">
@@ -1668,7 +1848,7 @@
               <a:buNone/>
             </a:pPr>
             <a:r>
-              <a:rPr lang="en-US" sz="1200" dirty="0">
+              <a:rPr lang="en-US" sz="1100" dirty="0">
                 <a:solidFill>
                   <a:srgbClr val="F5F5F3"/>
                 </a:solidFill>
@@ -1678,7 +1858,7 @@
               </a:rPr>
               <a:t>403 N Columbia Street, Suite 9, Covington, LA 70433</a:t>
             </a:r>
-            <a:endParaRPr lang="en-US" sz="1200" dirty="0"/>
+            <a:endParaRPr lang="en-US" sz="1100" dirty="0"/>
           </a:p>
           <a:p>
             <a:pPr indent="0" marL="0">
@@ -1688,7 +1868,7 @@
               <a:buNone/>
             </a:pPr>
             <a:r>
-              <a:rPr lang="en-US" sz="1200" dirty="0">
+              <a:rPr lang="en-US" sz="1100" dirty="0">
                 <a:solidFill>
                   <a:srgbClr val="F5F5F3"/>
                 </a:solidFill>
@@ -1698,20 +1878,20 @@
               </a:rPr>
               <a:t>(619) 873-5312  |  sam@vallettaindustries.com</a:t>
             </a:r>
-            <a:endParaRPr lang="en-US" sz="1200" dirty="0"/>
-          </a:p>
-        </p:txBody>
-      </p:sp>
-      <p:sp>
-        <p:nvSpPr>
-          <p:cNvPr id="11" name="Text 9"/>
-          <p:cNvSpPr txBox="1"/>
-          <p:nvPr/>
-        </p:nvSpPr>
-        <p:spPr>
-          <a:xfrm>
-            <a:off x="7498080" y="5257800"/>
-            <a:ext cx="4206240" cy="274320"/>
+            <a:endParaRPr lang="en-US" sz="1100" dirty="0"/>
+          </a:p>
+        </p:txBody>
+      </p:sp>
+      <p:sp>
+        <p:nvSpPr>
+          <p:cNvPr id="17" name="Text 15"/>
+          <p:cNvSpPr txBox="1"/>
+          <p:nvPr/>
+        </p:nvSpPr>
+        <p:spPr>
+          <a:xfrm>
+            <a:off x="7498080" y="5285232"/>
+            <a:ext cx="3886200" cy="256032"/>
           </a:xfrm>
           <a:prstGeom prst="rect">
             <a:avLst/>
@@ -1727,7 +1907,7 @@
               <a:buNone/>
             </a:pPr>
             <a:r>
-              <a:rPr lang="en-US" sz="1000" b="1" spc="150" kern="0" dirty="0">
+              <a:rPr lang="en-US" sz="950" b="1" spc="150" kern="0" dirty="0">
                 <a:solidFill>
                   <a:srgbClr val="5B5F66"/>
                 </a:solidFill>
@@ -1737,20 +1917,20 @@
               </a:rPr>
               <a:t>PREPARED FOR</a:t>
             </a:r>
-            <a:endParaRPr lang="en-US" sz="1000" dirty="0"/>
-          </a:p>
-        </p:txBody>
-      </p:sp>
-      <p:sp>
-        <p:nvSpPr>
-          <p:cNvPr id="12" name="Text 10"/>
-          <p:cNvSpPr txBox="1"/>
-          <p:nvPr/>
-        </p:nvSpPr>
-        <p:spPr>
-          <a:xfrm>
-            <a:off x="7498080" y="5532120"/>
-            <a:ext cx="4206240" cy="868680"/>
+            <a:endParaRPr lang="en-US" sz="950" dirty="0"/>
+          </a:p>
+        </p:txBody>
+      </p:sp>
+      <p:sp>
+        <p:nvSpPr>
+          <p:cNvPr id="18" name="Text 16"/>
+          <p:cNvSpPr txBox="1"/>
+          <p:nvPr/>
+        </p:nvSpPr>
+        <p:spPr>
+          <a:xfrm>
+            <a:off x="7498080" y="5541264"/>
+            <a:ext cx="4233672" cy="777240"/>
           </a:xfrm>
           <a:prstGeom prst="rect">
             <a:avLst/>
@@ -1769,7 +1949,7 @@
               <a:buNone/>
             </a:pPr>
             <a:r>
-              <a:rPr lang="en-US" sz="1100" b="1" dirty="0">
+              <a:rPr lang="en-US" sz="1050" b="1" dirty="0">
                 <a:solidFill>
                   <a:srgbClr val="F5F5F3"/>
                 </a:solidFill>
@@ -1779,7 +1959,7 @@
               </a:rPr>
               <a:t>DOI Office of Law Enforcement &amp; Security</a:t>
             </a:r>
-            <a:endParaRPr lang="en-US" sz="1100" dirty="0"/>
+            <a:endParaRPr lang="en-US" sz="1050" dirty="0"/>
           </a:p>
           <a:p>
             <a:pPr algn="r" indent="0" marL="0">
@@ -1789,7 +1969,7 @@
               <a:buNone/>
             </a:pPr>
             <a:r>
-              <a:rPr lang="en-US" sz="1100" dirty="0">
+              <a:rPr lang="en-US" sz="1050" dirty="0">
                 <a:solidFill>
                   <a:srgbClr val="F5F5F3"/>
                 </a:solidFill>
@@ -1799,7 +1979,7 @@
               </a:rPr>
               <a:t>Interior Business Center</a:t>
             </a:r>
-            <a:endParaRPr lang="en-US" sz="1100" dirty="0"/>
+            <a:endParaRPr lang="en-US" sz="1050" dirty="0"/>
           </a:p>
           <a:p>
             <a:pPr algn="r" indent="0" marL="0">
@@ -1809,7 +1989,7 @@
               <a:buNone/>
             </a:pPr>
             <a:r>
-              <a:rPr lang="en-US" sz="1100" dirty="0">
+              <a:rPr lang="en-US" sz="1050" dirty="0">
                 <a:solidFill>
                   <a:srgbClr val="F5F5F3"/>
                 </a:solidFill>
@@ -1817,29 +1997,9 @@
                 <a:ea typeface="Calibri" pitchFamily="34" charset="-122"/>
                 <a:cs typeface="Calibri" pitchFamily="34" charset="-120"/>
               </a:rPr>
-              <a:t>UEI CKXMD3HBP1P7  |  CAGE 92SX6</a:t>
-            </a:r>
-            <a:endParaRPr lang="en-US" sz="1100" dirty="0"/>
-          </a:p>
-          <a:p>
-            <a:pPr algn="r" indent="0" marL="0">
-              <a:lnSpc>
-                <a:spcPct val="115000"/>
-              </a:lnSpc>
-              <a:buNone/>
-            </a:pPr>
-            <a:r>
-              <a:rPr lang="en-US" sz="1100" dirty="0">
-                <a:solidFill>
-                  <a:srgbClr val="F5F5F3"/>
-                </a:solidFill>
-                <a:latin typeface="Calibri" pitchFamily="34" charset="0"/>
-                <a:ea typeface="Calibri" pitchFamily="34" charset="-122"/>
-                <a:cs typeface="Calibri" pitchFamily="34" charset="-120"/>
-              </a:rPr>
-              <a:t>SDVOSB  |  VOSB  |  HUBZone  |  GSA MAS  |  SeaPort-NxG</a:t>
-            </a:r>
-            <a:endParaRPr lang="en-US" sz="1100" dirty="0"/>
+              <a:t>UEI CKXMD3HBP1P7  |  CAGE 92SX6  |  SDVOSB  |  HUBZone</a:t>
+            </a:r>
+            <a:endParaRPr lang="en-US" sz="1050" dirty="0"/>
           </a:p>
         </p:txBody>
       </p:sp>
@@ -1877,30 +2037,110 @@
       </p:grpSpPr>
       <p:sp>
         <p:nvSpPr>
-          <p:cNvPr id="2" name="Text 0"/>
-          <p:cNvSpPr txBox="1"/>
-          <p:nvPr/>
-        </p:nvSpPr>
-        <p:spPr>
-          <a:xfrm>
-            <a:off x="457200" y="457200"/>
-            <a:ext cx="7315200" cy="320040"/>
-          </a:xfrm>
-          <a:prstGeom prst="rect">
-            <a:avLst/>
-          </a:prstGeom>
-          <a:noFill/>
-          <a:ln/>
-        </p:spPr>
-        <p:txBody>
-          <a:bodyPr wrap="square" lIns="0" tIns="0" rIns="0" bIns="0" rtlCol="0" anchor="ctr"/>
-          <a:lstStyle/>
-          <a:p>
-            <a:pPr algn="l" indent="0" marL="0">
-              <a:buNone/>
-            </a:pPr>
-            <a:r>
-              <a:rPr lang="en-US" sz="1100" b="1" spc="150" kern="0" dirty="0">
+          <p:cNvPr id="2" name="Shape 0"/>
+          <p:cNvSpPr/>
+          <p:nvPr/>
+        </p:nvSpPr>
+        <p:spPr>
+          <a:xfrm>
+            <a:off x="0" y="0"/>
+            <a:ext cx="4709160" cy="6858000"/>
+          </a:xfrm>
+          <a:prstGeom prst="rect">
+            <a:avLst/>
+          </a:prstGeom>
+          <a:solidFill>
+            <a:srgbClr val="EAEAE8"/>
+          </a:solidFill>
+          <a:ln/>
+        </p:spPr>
+      </p:sp>
+      <p:sp>
+        <p:nvSpPr>
+          <p:cNvPr id="3" name="Shape 1"/>
+          <p:cNvSpPr/>
+          <p:nvPr/>
+        </p:nvSpPr>
+        <p:spPr>
+          <a:xfrm>
+            <a:off x="1577340" y="2651760"/>
+            <a:ext cx="274320" cy="274320"/>
+          </a:xfrm>
+          <a:prstGeom prst="ellipse">
+            <a:avLst/>
+          </a:prstGeom>
+          <a:solidFill>
+            <a:srgbClr val="FF002B"/>
+          </a:solidFill>
+          <a:ln/>
+        </p:spPr>
+      </p:sp>
+      <p:sp>
+        <p:nvSpPr>
+          <p:cNvPr id="4" name="Shape 2"/>
+          <p:cNvSpPr/>
+          <p:nvPr/>
+        </p:nvSpPr>
+        <p:spPr>
+          <a:xfrm>
+            <a:off x="1668780" y="2971800"/>
+            <a:ext cx="1005840" cy="685800"/>
+          </a:xfrm>
+          <a:prstGeom prst="triangle">
+            <a:avLst/>
+          </a:prstGeom>
+          <a:solidFill>
+            <a:srgbClr val="5B5F66"/>
+          </a:solidFill>
+          <a:ln/>
+        </p:spPr>
+      </p:sp>
+      <p:sp>
+        <p:nvSpPr>
+          <p:cNvPr id="5" name="Shape 3"/>
+          <p:cNvSpPr/>
+          <p:nvPr/>
+        </p:nvSpPr>
+        <p:spPr>
+          <a:xfrm>
+            <a:off x="2217420" y="2788920"/>
+            <a:ext cx="868680" cy="868680"/>
+          </a:xfrm>
+          <a:prstGeom prst="triangle">
+            <a:avLst/>
+          </a:prstGeom>
+          <a:solidFill>
+            <a:srgbClr val="5B5F66"/>
+          </a:solidFill>
+          <a:ln/>
+        </p:spPr>
+      </p:sp>
+      <p:sp>
+        <p:nvSpPr>
+          <p:cNvPr id="6" name="Text 4"/>
+          <p:cNvSpPr txBox="1"/>
+          <p:nvPr/>
+        </p:nvSpPr>
+        <p:spPr>
+          <a:xfrm>
+            <a:off x="182880" y="3611880"/>
+            <a:ext cx="4343400" cy="274320"/>
+          </a:xfrm>
+          <a:prstGeom prst="rect">
+            <a:avLst/>
+          </a:prstGeom>
+          <a:noFill/>
+          <a:ln/>
+        </p:spPr>
+        <p:txBody>
+          <a:bodyPr wrap="square" lIns="0" tIns="0" rIns="0" bIns="0" rtlCol="0" anchor="ctr"/>
+          <a:lstStyle/>
+          <a:p>
+            <a:pPr algn="ctr" indent="0" marL="0">
+              <a:buNone/>
+            </a:pPr>
+            <a:r>
+              <a:rPr lang="en-US" sz="1000" b="1" spc="100" kern="0" dirty="0">
                 <a:solidFill>
                   <a:srgbClr val="FF002B"/>
                 </a:solidFill>
@@ -1908,22 +2148,104 @@
                 <a:ea typeface="Arial" pitchFamily="34" charset="-122"/>
                 <a:cs typeface="Arial" pitchFamily="34" charset="-120"/>
               </a:rPr>
-              <a:t>COMPANY OVERVIEW</a:t>
-            </a:r>
-            <a:endParaRPr lang="en-US" sz="1100" dirty="0"/>
-          </a:p>
-        </p:txBody>
-      </p:sp>
-      <p:sp>
-        <p:nvSpPr>
-          <p:cNvPr id="3" name="Text 1"/>
-          <p:cNvSpPr txBox="1"/>
-          <p:nvPr/>
-        </p:nvSpPr>
-        <p:spPr>
-          <a:xfrm>
-            <a:off x="457200" y="777240"/>
-            <a:ext cx="11274552" cy="685800"/>
+              <a:t>PLACEHOLDER IMAGE</a:t>
+            </a:r>
+            <a:endParaRPr lang="en-US" sz="1000" dirty="0"/>
+          </a:p>
+        </p:txBody>
+      </p:sp>
+      <p:sp>
+        <p:nvSpPr>
+          <p:cNvPr id="7" name="Text 5"/>
+          <p:cNvSpPr txBox="1"/>
+          <p:nvPr/>
+        </p:nvSpPr>
+        <p:spPr>
+          <a:xfrm>
+            <a:off x="274320" y="3904488"/>
+            <a:ext cx="4160520" cy="548640"/>
+          </a:xfrm>
+          <a:prstGeom prst="rect">
+            <a:avLst/>
+          </a:prstGeom>
+          <a:noFill/>
+          <a:ln/>
+        </p:spPr>
+        <p:txBody>
+          <a:bodyPr wrap="square" lIns="0" tIns="0" rIns="0" bIns="0" rtlCol="0" anchor="ctr"/>
+          <a:lstStyle/>
+          <a:p>
+            <a:pPr algn="ctr" indent="0" marL="0">
+              <a:lnSpc>
+                <a:spcPct val="110000"/>
+              </a:lnSpc>
+              <a:buNone/>
+            </a:pPr>
+            <a:r>
+              <a:rPr lang="en-US" sz="1000" i="1" dirty="0">
+                <a:solidFill>
+                  <a:srgbClr val="5B5F66"/>
+                </a:solidFill>
+                <a:latin typeface="Calibri" pitchFamily="34" charset="0"/>
+                <a:ea typeface="Calibri" pitchFamily="34" charset="-122"/>
+                <a:cs typeface="Calibri" pitchFamily="34" charset="-120"/>
+              </a:rPr>
+              <a:t>Operator/instructor in a training environment — provided by Valletta</a:t>
+            </a:r>
+            <a:endParaRPr lang="en-US" sz="1000" dirty="0"/>
+          </a:p>
+        </p:txBody>
+      </p:sp>
+      <p:sp>
+        <p:nvSpPr>
+          <p:cNvPr id="8" name="Shape 6"/>
+          <p:cNvSpPr/>
+          <p:nvPr/>
+        </p:nvSpPr>
+        <p:spPr>
+          <a:xfrm>
+            <a:off x="457200" y="384048"/>
+            <a:ext cx="310896" cy="29261"/>
+          </a:xfrm>
+          <a:prstGeom prst="rect">
+            <a:avLst/>
+          </a:prstGeom>
+          <a:solidFill>
+            <a:srgbClr val="FF002B"/>
+          </a:solidFill>
+          <a:ln/>
+        </p:spPr>
+      </p:sp>
+      <p:sp>
+        <p:nvSpPr>
+          <p:cNvPr id="9" name="Shape 7"/>
+          <p:cNvSpPr/>
+          <p:nvPr/>
+        </p:nvSpPr>
+        <p:spPr>
+          <a:xfrm>
+            <a:off x="457200" y="384048"/>
+            <a:ext cx="29261" cy="310896"/>
+          </a:xfrm>
+          <a:prstGeom prst="rect">
+            <a:avLst/>
+          </a:prstGeom>
+          <a:solidFill>
+            <a:srgbClr val="FF002B"/>
+          </a:solidFill>
+          <a:ln/>
+        </p:spPr>
+      </p:sp>
+      <p:sp>
+        <p:nvSpPr>
+          <p:cNvPr id="10" name="Text 8"/>
+          <p:cNvSpPr txBox="1"/>
+          <p:nvPr/>
+        </p:nvSpPr>
+        <p:spPr>
+          <a:xfrm>
+            <a:off x="896112" y="329184"/>
+            <a:ext cx="2926080" cy="292608"/>
           </a:xfrm>
           <a:prstGeom prst="rect">
             <a:avLst/>
@@ -1939,30 +2261,189 @@
               <a:buNone/>
             </a:pPr>
             <a:r>
-              <a:rPr lang="en-US" sz="2700" b="1" dirty="0">
+              <a:rPr lang="en-US" sz="1500" b="1" spc="200" kern="0" dirty="0">
                 <a:solidFill>
                   <a:srgbClr val="0A0A0A"/>
+                </a:solidFill>
+                <a:latin typeface="Arial" pitchFamily="34" charset="0"/>
+                <a:ea typeface="Arial" pitchFamily="34" charset="-122"/>
+                <a:cs typeface="Arial" pitchFamily="34" charset="-120"/>
+              </a:rPr>
+              <a:t>VALLETTA</a:t>
+            </a:r>
+            <a:endParaRPr lang="en-US" sz="1500" dirty="0"/>
+          </a:p>
+        </p:txBody>
+      </p:sp>
+      <p:sp>
+        <p:nvSpPr>
+          <p:cNvPr id="11" name="Text 9"/>
+          <p:cNvSpPr txBox="1"/>
+          <p:nvPr/>
+        </p:nvSpPr>
+        <p:spPr>
+          <a:xfrm>
+            <a:off x="896112" y="603504"/>
+            <a:ext cx="2926080" cy="219456"/>
+          </a:xfrm>
+          <a:prstGeom prst="rect">
+            <a:avLst/>
+          </a:prstGeom>
+          <a:noFill/>
+          <a:ln/>
+        </p:spPr>
+        <p:txBody>
+          <a:bodyPr wrap="square" lIns="0" tIns="0" rIns="0" bIns="0" rtlCol="0" anchor="ctr"/>
+          <a:lstStyle/>
+          <a:p>
+            <a:pPr indent="0" marL="0">
+              <a:buNone/>
+            </a:pPr>
+            <a:r>
+              <a:rPr lang="en-US" sz="750" b="1" spc="200" kern="0" dirty="0">
+                <a:solidFill>
+                  <a:srgbClr val="5B5F66"/>
+                </a:solidFill>
+                <a:latin typeface="Arial" pitchFamily="34" charset="0"/>
+                <a:ea typeface="Arial" pitchFamily="34" charset="-122"/>
+                <a:cs typeface="Arial" pitchFamily="34" charset="-120"/>
+              </a:rPr>
+              <a:t>INDUSTRIES, INC.</a:t>
+            </a:r>
+            <a:endParaRPr lang="en-US" sz="750" dirty="0"/>
+          </a:p>
+        </p:txBody>
+      </p:sp>
+      <p:sp>
+        <p:nvSpPr>
+          <p:cNvPr id="12" name="Text 10"/>
+          <p:cNvSpPr txBox="1"/>
+          <p:nvPr/>
+        </p:nvSpPr>
+        <p:spPr>
+          <a:xfrm>
+            <a:off x="6949440" y="0"/>
+            <a:ext cx="5486400" cy="6858000"/>
+          </a:xfrm>
+          <a:prstGeom prst="rect">
+            <a:avLst/>
+          </a:prstGeom>
+          <a:noFill/>
+          <a:ln/>
+        </p:spPr>
+        <p:txBody>
+          <a:bodyPr wrap="square" lIns="0" tIns="0" rIns="0" bIns="0" rtlCol="0" anchor="t"/>
+          <a:lstStyle/>
+          <a:p>
+            <a:pPr algn="r" indent="0" marL="0">
+              <a:buNone/>
+            </a:pPr>
+            <a:r>
+              <a:rPr lang="en-US" sz="36000" b="1" dirty="0">
+                <a:solidFill>
+                  <a:srgbClr val="EBEBE9"/>
                 </a:solidFill>
                 <a:latin typeface="Bookman Old Style" pitchFamily="34" charset="0"/>
                 <a:ea typeface="Bookman Old Style" pitchFamily="34" charset="-122"/>
                 <a:cs typeface="Bookman Old Style" pitchFamily="34" charset="-120"/>
               </a:rPr>
+              <a:t>02</a:t>
+            </a:r>
+            <a:endParaRPr lang="en-US" sz="36000" dirty="0"/>
+          </a:p>
+        </p:txBody>
+      </p:sp>
+      <p:sp>
+        <p:nvSpPr>
+          <p:cNvPr id="13" name="Text 11"/>
+          <p:cNvSpPr txBox="1"/>
+          <p:nvPr/>
+        </p:nvSpPr>
+        <p:spPr>
+          <a:xfrm>
+            <a:off x="5074920" y="777240"/>
+            <a:ext cx="7315200" cy="320040"/>
+          </a:xfrm>
+          <a:prstGeom prst="rect">
+            <a:avLst/>
+          </a:prstGeom>
+          <a:noFill/>
+          <a:ln/>
+        </p:spPr>
+        <p:txBody>
+          <a:bodyPr wrap="square" lIns="0" tIns="0" rIns="0" bIns="0" rtlCol="0" anchor="ctr"/>
+          <a:lstStyle/>
+          <a:p>
+            <a:pPr algn="l" indent="0" marL="0">
+              <a:buNone/>
+            </a:pPr>
+            <a:r>
+              <a:rPr lang="en-US" sz="1100" b="1" spc="150" kern="0" dirty="0">
+                <a:solidFill>
+                  <a:srgbClr val="FF002B"/>
+                </a:solidFill>
+                <a:latin typeface="Arial" pitchFamily="34" charset="0"/>
+                <a:ea typeface="Arial" pitchFamily="34" charset="-122"/>
+                <a:cs typeface="Arial" pitchFamily="34" charset="-120"/>
+              </a:rPr>
+              <a:t>COMPANY OVERVIEW</a:t>
+            </a:r>
+            <a:endParaRPr lang="en-US" sz="1100" dirty="0"/>
+          </a:p>
+        </p:txBody>
+      </p:sp>
+      <p:sp>
+        <p:nvSpPr>
+          <p:cNvPr id="14" name="Text 12"/>
+          <p:cNvSpPr txBox="1"/>
+          <p:nvPr/>
+        </p:nvSpPr>
+        <p:spPr>
+          <a:xfrm>
+            <a:off x="5074920" y="1097280"/>
+            <a:ext cx="6675120" cy="1005840"/>
+          </a:xfrm>
+          <a:prstGeom prst="rect">
+            <a:avLst/>
+          </a:prstGeom>
+          <a:noFill/>
+          <a:ln/>
+        </p:spPr>
+        <p:txBody>
+          <a:bodyPr wrap="square" lIns="0" tIns="0" rIns="0" bIns="0" rtlCol="0" anchor="ctr"/>
+          <a:lstStyle/>
+          <a:p>
+            <a:pPr indent="0" marL="0">
+              <a:lnSpc>
+                <a:spcPct val="102000"/>
+              </a:lnSpc>
+              <a:buNone/>
+            </a:pPr>
+            <a:r>
+              <a:rPr lang="en-US" sz="2400" b="1" dirty="0">
+                <a:solidFill>
+                  <a:srgbClr val="0A0A0A"/>
+                </a:solidFill>
+                <a:latin typeface="Bookman Old Style" pitchFamily="34" charset="0"/>
+                <a:ea typeface="Bookman Old Style" pitchFamily="34" charset="-122"/>
+                <a:cs typeface="Bookman Old Style" pitchFamily="34" charset="-120"/>
+              </a:rPr>
               <a:t>Federal Law-Enforcement Training, Built by Current Operators</a:t>
             </a:r>
-            <a:endParaRPr lang="en-US" sz="2700" dirty="0"/>
-          </a:p>
-        </p:txBody>
-      </p:sp>
-      <p:sp>
-        <p:nvSpPr>
-          <p:cNvPr id="4" name="Text 2"/>
-          <p:cNvSpPr txBox="1"/>
-          <p:nvPr/>
-        </p:nvSpPr>
-        <p:spPr>
-          <a:xfrm>
-            <a:off x="457200" y="1600200"/>
-            <a:ext cx="6492240" cy="960120"/>
+            <a:endParaRPr lang="en-US" sz="2400" dirty="0"/>
+          </a:p>
+        </p:txBody>
+      </p:sp>
+      <p:sp>
+        <p:nvSpPr>
+          <p:cNvPr id="15" name="Text 13"/>
+          <p:cNvSpPr txBox="1"/>
+          <p:nvPr/>
+        </p:nvSpPr>
+        <p:spPr>
+          <a:xfrm>
+            <a:off x="5074920" y="2148840"/>
+            <a:ext cx="6675120" cy="960120"/>
           </a:xfrm>
           <a:prstGeom prst="rect">
             <a:avLst/>
@@ -1981,7 +2462,7 @@
               <a:buNone/>
             </a:pPr>
             <a:r>
-              <a:rPr lang="en-US" sz="1250" dirty="0">
+              <a:rPr lang="en-US" sz="1150" dirty="0">
                 <a:solidFill>
                   <a:srgbClr val="0A0A0A"/>
                 </a:solidFill>
@@ -1991,27 +2472,145 @@
               </a:rPr>
               <a:t>Valletta Industries combines federal law-enforcement and force-protection training experience with current protective-force operations — a contractor that understands both how officers must be trained and how training standards, policy, and performance expectations operate in real-world security environments.</a:t>
             </a:r>
-            <a:endParaRPr lang="en-US" sz="1250" dirty="0"/>
-          </a:p>
-        </p:txBody>
-      </p:sp>
-      <p:sp>
-        <p:nvSpPr>
-          <p:cNvPr id="5" name="Shape 3"/>
+            <a:endParaRPr lang="en-US" sz="1150" dirty="0"/>
+          </a:p>
+        </p:txBody>
+      </p:sp>
+      <p:sp>
+        <p:nvSpPr>
+          <p:cNvPr id="16" name="Text 14"/>
+          <p:cNvSpPr txBox="1"/>
+          <p:nvPr/>
+        </p:nvSpPr>
+        <p:spPr>
+          <a:xfrm>
+            <a:off x="5074920" y="3419856"/>
+            <a:ext cx="640080" cy="548640"/>
+          </a:xfrm>
+          <a:prstGeom prst="rect">
+            <a:avLst/>
+          </a:prstGeom>
+          <a:noFill/>
+          <a:ln/>
+        </p:spPr>
+        <p:txBody>
+          <a:bodyPr wrap="square" lIns="0" tIns="0" rIns="0" bIns="0" rtlCol="0" anchor="ctr"/>
+          <a:lstStyle/>
+          <a:p>
+            <a:pPr indent="0" marL="0">
+              <a:buNone/>
+            </a:pPr>
+            <a:r>
+              <a:rPr lang="en-US" sz="2200" b="1" dirty="0">
+                <a:solidFill>
+                  <a:srgbClr val="FF002B"/>
+                </a:solidFill>
+                <a:latin typeface="Bookman Old Style" pitchFamily="34" charset="0"/>
+                <a:ea typeface="Bookman Old Style" pitchFamily="34" charset="-122"/>
+                <a:cs typeface="Bookman Old Style" pitchFamily="34" charset="-120"/>
+              </a:rPr>
+              <a:t>01</a:t>
+            </a:r>
+            <a:endParaRPr lang="en-US" sz="2200" dirty="0"/>
+          </a:p>
+        </p:txBody>
+      </p:sp>
+      <p:sp>
+        <p:nvSpPr>
+          <p:cNvPr id="17" name="Text 15"/>
+          <p:cNvSpPr txBox="1"/>
+          <p:nvPr/>
+        </p:nvSpPr>
+        <p:spPr>
+          <a:xfrm>
+            <a:off x="5806440" y="3401568"/>
+            <a:ext cx="5943600" cy="274320"/>
+          </a:xfrm>
+          <a:prstGeom prst="rect">
+            <a:avLst/>
+          </a:prstGeom>
+          <a:noFill/>
+          <a:ln/>
+        </p:spPr>
+        <p:txBody>
+          <a:bodyPr wrap="square" lIns="0" tIns="0" rIns="0" bIns="0" rtlCol="0" anchor="ctr"/>
+          <a:lstStyle/>
+          <a:p>
+            <a:pPr indent="0" marL="0">
+              <a:buNone/>
+            </a:pPr>
+            <a:r>
+              <a:rPr lang="en-US" sz="1200" b="1" spc="50" kern="0" dirty="0">
+                <a:solidFill>
+                  <a:srgbClr val="0A0A0A"/>
+                </a:solidFill>
+                <a:latin typeface="Arial" pitchFamily="34" charset="0"/>
+                <a:ea typeface="Arial" pitchFamily="34" charset="-122"/>
+                <a:cs typeface="Arial" pitchFamily="34" charset="-120"/>
+              </a:rPr>
+              <a:t>PROFESSIONAL SERVICES</a:t>
+            </a:r>
+            <a:endParaRPr lang="en-US" sz="1200" dirty="0"/>
+          </a:p>
+        </p:txBody>
+      </p:sp>
+      <p:sp>
+        <p:nvSpPr>
+          <p:cNvPr id="18" name="Text 16"/>
+          <p:cNvSpPr txBox="1"/>
+          <p:nvPr/>
+        </p:nvSpPr>
+        <p:spPr>
+          <a:xfrm>
+            <a:off x="5806440" y="3675888"/>
+            <a:ext cx="5943600" cy="384048"/>
+          </a:xfrm>
+          <a:prstGeom prst="rect">
+            <a:avLst/>
+          </a:prstGeom>
+          <a:noFill/>
+          <a:ln/>
+        </p:spPr>
+        <p:txBody>
+          <a:bodyPr wrap="square" lIns="0" tIns="0" rIns="0" bIns="0" rtlCol="0" anchor="ctr"/>
+          <a:lstStyle/>
+          <a:p>
+            <a:pPr indent="0" marL="0">
+              <a:lnSpc>
+                <a:spcPct val="110000"/>
+              </a:lnSpc>
+              <a:buNone/>
+            </a:pPr>
+            <a:r>
+              <a:rPr lang="en-US" sz="1050" dirty="0">
+                <a:solidFill>
+                  <a:srgbClr val="5B5F66"/>
+                </a:solidFill>
+                <a:latin typeface="Calibri" pitchFamily="34" charset="0"/>
+                <a:ea typeface="Calibri" pitchFamily="34" charset="-122"/>
+                <a:cs typeface="Calibri" pitchFamily="34" charset="-120"/>
+              </a:rPr>
+              <a:t>Engineering &amp; program management, data analytics, professional security staffing</a:t>
+            </a:r>
+            <a:endParaRPr lang="en-US" sz="1050" dirty="0"/>
+          </a:p>
+        </p:txBody>
+      </p:sp>
+      <p:sp>
+        <p:nvSpPr>
+          <p:cNvPr id="19" name="Shape 17"/>
           <p:cNvSpPr/>
           <p:nvPr/>
         </p:nvSpPr>
         <p:spPr>
           <a:xfrm>
-            <a:off x="457200" y="2697480"/>
-            <a:ext cx="6492240" cy="896112"/>
-          </a:xfrm>
-          <a:prstGeom prst="rect">
-            <a:avLst/>
-          </a:prstGeom>
-          <a:solidFill>
-            <a:srgbClr val="FFFFFF"/>
-          </a:solidFill>
+            <a:off x="5074920" y="4096512"/>
+            <a:ext cx="6675120" cy="0"/>
+          </a:xfrm>
+          <a:prstGeom prst="line">
+            <a:avLst/>
+          </a:prstGeom>
+          <a:noFill/>
           <a:ln w="12700">
             <a:solidFill>
               <a:srgbClr val="D8D9DB"/>
@@ -2022,34 +2621,53 @@
       </p:sp>
       <p:sp>
         <p:nvSpPr>
-          <p:cNvPr id="6" name="Shape 4"/>
-          <p:cNvSpPr/>
-          <p:nvPr/>
-        </p:nvSpPr>
-        <p:spPr>
-          <a:xfrm>
-            <a:off x="457200" y="2697480"/>
-            <a:ext cx="73152" cy="896112"/>
-          </a:xfrm>
-          <a:prstGeom prst="rect">
-            <a:avLst/>
-          </a:prstGeom>
-          <a:solidFill>
-            <a:srgbClr val="FF002B"/>
-          </a:solidFill>
-          <a:ln/>
-        </p:spPr>
-      </p:sp>
-      <p:sp>
-        <p:nvSpPr>
-          <p:cNvPr id="7" name="Text 5"/>
-          <p:cNvSpPr txBox="1"/>
-          <p:nvPr/>
-        </p:nvSpPr>
-        <p:spPr>
-          <a:xfrm>
-            <a:off x="777240" y="2825496"/>
-            <a:ext cx="6035040" cy="274320"/>
+          <p:cNvPr id="20" name="Text 18"/>
+          <p:cNvSpPr txBox="1"/>
+          <p:nvPr/>
+        </p:nvSpPr>
+        <p:spPr>
+          <a:xfrm>
+            <a:off x="5074920" y="4206240"/>
+            <a:ext cx="640080" cy="548640"/>
+          </a:xfrm>
+          <a:prstGeom prst="rect">
+            <a:avLst/>
+          </a:prstGeom>
+          <a:noFill/>
+          <a:ln/>
+        </p:spPr>
+        <p:txBody>
+          <a:bodyPr wrap="square" lIns="0" tIns="0" rIns="0" bIns="0" rtlCol="0" anchor="ctr"/>
+          <a:lstStyle/>
+          <a:p>
+            <a:pPr indent="0" marL="0">
+              <a:buNone/>
+            </a:pPr>
+            <a:r>
+              <a:rPr lang="en-US" sz="2200" b="1" dirty="0">
+                <a:solidFill>
+                  <a:srgbClr val="FF002B"/>
+                </a:solidFill>
+                <a:latin typeface="Bookman Old Style" pitchFamily="34" charset="0"/>
+                <a:ea typeface="Bookman Old Style" pitchFamily="34" charset="-122"/>
+                <a:cs typeface="Bookman Old Style" pitchFamily="34" charset="-120"/>
+              </a:rPr>
+              <a:t>02</a:t>
+            </a:r>
+            <a:endParaRPr lang="en-US" sz="2200" dirty="0"/>
+          </a:p>
+        </p:txBody>
+      </p:sp>
+      <p:sp>
+        <p:nvSpPr>
+          <p:cNvPr id="21" name="Text 19"/>
+          <p:cNvSpPr txBox="1"/>
+          <p:nvPr/>
+        </p:nvSpPr>
+        <p:spPr>
+          <a:xfrm>
+            <a:off x="5806440" y="4187952"/>
+            <a:ext cx="5943600" cy="274320"/>
           </a:xfrm>
           <a:prstGeom prst="rect">
             <a:avLst/>
@@ -2073,7 +2691,7 @@
                 <a:ea typeface="Arial" pitchFamily="34" charset="-122"/>
                 <a:cs typeface="Arial" pitchFamily="34" charset="-120"/>
               </a:rPr>
-              <a:t>PROFESSIONAL SERVICES</a:t>
+              <a:t>SCENARIO-BASED TRAINING</a:t>
             </a:r>
             <a:endParaRPr lang="en-US" sz="1200" dirty="0"/>
           </a:p>
@@ -2081,14 +2699,14 @@
       </p:sp>
       <p:sp>
         <p:nvSpPr>
-          <p:cNvPr id="8" name="Text 6"/>
-          <p:cNvSpPr txBox="1"/>
-          <p:nvPr/>
-        </p:nvSpPr>
-        <p:spPr>
-          <a:xfrm>
-            <a:off x="777240" y="3118104"/>
-            <a:ext cx="6035040" cy="411480"/>
+          <p:cNvPr id="22" name="Text 20"/>
+          <p:cNvSpPr txBox="1"/>
+          <p:nvPr/>
+        </p:nvSpPr>
+        <p:spPr>
+          <a:xfrm>
+            <a:off x="5806440" y="4462272"/>
+            <a:ext cx="5943600" cy="384048"/>
           </a:xfrm>
           <a:prstGeom prst="rect">
             <a:avLst/>
@@ -2107,7 +2725,7 @@
               <a:buNone/>
             </a:pPr>
             <a:r>
-              <a:rPr lang="en-US" sz="1100" dirty="0">
+              <a:rPr lang="en-US" sz="1050" dirty="0">
                 <a:solidFill>
                   <a:srgbClr val="5B5F66"/>
                 </a:solidFill>
@@ -2115,29 +2733,27 @@
                 <a:ea typeface="Calibri" pitchFamily="34" charset="-122"/>
                 <a:cs typeface="Calibri" pitchFamily="34" charset="-120"/>
               </a:rPr>
-              <a:t>Engineering &amp; program management, data analytics, professional security staffing</a:t>
-            </a:r>
-            <a:endParaRPr lang="en-US" sz="1100" dirty="0"/>
-          </a:p>
-        </p:txBody>
-      </p:sp>
-      <p:sp>
-        <p:nvSpPr>
-          <p:cNvPr id="9" name="Shape 7"/>
+              <a:t>Tactical training, AT/FP, defensive &amp; tactical driving, role-player/OPFOR integration</a:t>
+            </a:r>
+            <a:endParaRPr lang="en-US" sz="1050" dirty="0"/>
+          </a:p>
+        </p:txBody>
+      </p:sp>
+      <p:sp>
+        <p:nvSpPr>
+          <p:cNvPr id="23" name="Shape 21"/>
           <p:cNvSpPr/>
           <p:nvPr/>
         </p:nvSpPr>
         <p:spPr>
           <a:xfrm>
-            <a:off x="457200" y="3703320"/>
-            <a:ext cx="6492240" cy="896112"/>
-          </a:xfrm>
-          <a:prstGeom prst="rect">
-            <a:avLst/>
-          </a:prstGeom>
-          <a:solidFill>
-            <a:srgbClr val="FFFFFF"/>
-          </a:solidFill>
+            <a:off x="5074920" y="4882896"/>
+            <a:ext cx="6675120" cy="0"/>
+          </a:xfrm>
+          <a:prstGeom prst="line">
+            <a:avLst/>
+          </a:prstGeom>
+          <a:noFill/>
           <a:ln w="12700">
             <a:solidFill>
               <a:srgbClr val="D8D9DB"/>
@@ -2148,34 +2764,53 @@
       </p:sp>
       <p:sp>
         <p:nvSpPr>
-          <p:cNvPr id="10" name="Shape 8"/>
-          <p:cNvSpPr/>
-          <p:nvPr/>
-        </p:nvSpPr>
-        <p:spPr>
-          <a:xfrm>
-            <a:off x="457200" y="3703320"/>
-            <a:ext cx="73152" cy="896112"/>
-          </a:xfrm>
-          <a:prstGeom prst="rect">
-            <a:avLst/>
-          </a:prstGeom>
-          <a:solidFill>
-            <a:srgbClr val="FF002B"/>
-          </a:solidFill>
-          <a:ln/>
-        </p:spPr>
-      </p:sp>
-      <p:sp>
-        <p:nvSpPr>
-          <p:cNvPr id="11" name="Text 9"/>
-          <p:cNvSpPr txBox="1"/>
-          <p:nvPr/>
-        </p:nvSpPr>
-        <p:spPr>
-          <a:xfrm>
-            <a:off x="777240" y="3831336"/>
-            <a:ext cx="6035040" cy="274320"/>
+          <p:cNvPr id="24" name="Text 22"/>
+          <p:cNvSpPr txBox="1"/>
+          <p:nvPr/>
+        </p:nvSpPr>
+        <p:spPr>
+          <a:xfrm>
+            <a:off x="5074920" y="4992624"/>
+            <a:ext cx="640080" cy="548640"/>
+          </a:xfrm>
+          <a:prstGeom prst="rect">
+            <a:avLst/>
+          </a:prstGeom>
+          <a:noFill/>
+          <a:ln/>
+        </p:spPr>
+        <p:txBody>
+          <a:bodyPr wrap="square" lIns="0" tIns="0" rIns="0" bIns="0" rtlCol="0" anchor="ctr"/>
+          <a:lstStyle/>
+          <a:p>
+            <a:pPr indent="0" marL="0">
+              <a:buNone/>
+            </a:pPr>
+            <a:r>
+              <a:rPr lang="en-US" sz="2200" b="1" dirty="0">
+                <a:solidFill>
+                  <a:srgbClr val="FF002B"/>
+                </a:solidFill>
+                <a:latin typeface="Bookman Old Style" pitchFamily="34" charset="0"/>
+                <a:ea typeface="Bookman Old Style" pitchFamily="34" charset="-122"/>
+                <a:cs typeface="Bookman Old Style" pitchFamily="34" charset="-120"/>
+              </a:rPr>
+              <a:t>03</a:t>
+            </a:r>
+            <a:endParaRPr lang="en-US" sz="2200" dirty="0"/>
+          </a:p>
+        </p:txBody>
+      </p:sp>
+      <p:sp>
+        <p:nvSpPr>
+          <p:cNvPr id="25" name="Text 23"/>
+          <p:cNvSpPr txBox="1"/>
+          <p:nvPr/>
+        </p:nvSpPr>
+        <p:spPr>
+          <a:xfrm>
+            <a:off x="5806440" y="4974336"/>
+            <a:ext cx="5943600" cy="274320"/>
           </a:xfrm>
           <a:prstGeom prst="rect">
             <a:avLst/>
@@ -2199,7 +2834,7 @@
                 <a:ea typeface="Arial" pitchFamily="34" charset="-122"/>
                 <a:cs typeface="Arial" pitchFamily="34" charset="-120"/>
               </a:rPr>
-              <a:t>SCENARIO-BASED TRAINING</a:t>
+              <a:t>HUMAN PERFORMANCE</a:t>
             </a:r>
             <a:endParaRPr lang="en-US" sz="1200" dirty="0"/>
           </a:p>
@@ -2207,14 +2842,14 @@
       </p:sp>
       <p:sp>
         <p:nvSpPr>
-          <p:cNvPr id="12" name="Text 10"/>
-          <p:cNvSpPr txBox="1"/>
-          <p:nvPr/>
-        </p:nvSpPr>
-        <p:spPr>
-          <a:xfrm>
-            <a:off x="777240" y="4123944"/>
-            <a:ext cx="6035040" cy="411480"/>
+          <p:cNvPr id="26" name="Text 24"/>
+          <p:cNvSpPr txBox="1"/>
+          <p:nvPr/>
+        </p:nvSpPr>
+        <p:spPr>
+          <a:xfrm>
+            <a:off x="5806440" y="5248656"/>
+            <a:ext cx="5943600" cy="384048"/>
           </a:xfrm>
           <a:prstGeom prst="rect">
             <a:avLst/>
@@ -2233,7 +2868,7 @@
               <a:buNone/>
             </a:pPr>
             <a:r>
-              <a:rPr lang="en-US" sz="1100" dirty="0">
+              <a:rPr lang="en-US" sz="1050" dirty="0">
                 <a:solidFill>
                   <a:srgbClr val="5B5F66"/>
                 </a:solidFill>
@@ -2241,67 +2876,22 @@
                 <a:ea typeface="Calibri" pitchFamily="34" charset="-122"/>
                 <a:cs typeface="Calibri" pitchFamily="34" charset="-120"/>
               </a:rPr>
-              <a:t>Tactical training, AT/FP, defensive &amp; tactical driving, role-player/OPFOR integration</a:t>
-            </a:r>
-            <a:endParaRPr lang="en-US" sz="1100" dirty="0"/>
-          </a:p>
-        </p:txBody>
-      </p:sp>
-      <p:sp>
-        <p:nvSpPr>
-          <p:cNvPr id="13" name="Shape 11"/>
-          <p:cNvSpPr/>
-          <p:nvPr/>
-        </p:nvSpPr>
-        <p:spPr>
-          <a:xfrm>
-            <a:off x="457200" y="4709160"/>
-            <a:ext cx="6492240" cy="896112"/>
-          </a:xfrm>
-          <a:prstGeom prst="rect">
-            <a:avLst/>
-          </a:prstGeom>
-          <a:solidFill>
-            <a:srgbClr val="FFFFFF"/>
-          </a:solidFill>
-          <a:ln w="12700">
-            <a:solidFill>
-              <a:srgbClr val="D8D9DB"/>
-            </a:solidFill>
-            <a:prstDash val="solid"/>
-          </a:ln>
-        </p:spPr>
-      </p:sp>
-      <p:sp>
-        <p:nvSpPr>
-          <p:cNvPr id="14" name="Shape 12"/>
-          <p:cNvSpPr/>
-          <p:nvPr/>
-        </p:nvSpPr>
-        <p:spPr>
-          <a:xfrm>
-            <a:off x="457200" y="4709160"/>
-            <a:ext cx="73152" cy="896112"/>
-          </a:xfrm>
-          <a:prstGeom prst="rect">
-            <a:avLst/>
-          </a:prstGeom>
-          <a:solidFill>
-            <a:srgbClr val="FF002B"/>
-          </a:solidFill>
-          <a:ln/>
-        </p:spPr>
-      </p:sp>
-      <p:sp>
-        <p:nvSpPr>
-          <p:cNvPr id="15" name="Text 13"/>
-          <p:cNvSpPr txBox="1"/>
-          <p:nvPr/>
-        </p:nvSpPr>
-        <p:spPr>
-          <a:xfrm>
-            <a:off x="777240" y="4837176"/>
-            <a:ext cx="6035040" cy="274320"/>
+              <a:t>Warfighter performance, resilience, and medical staffing support</a:t>
+            </a:r>
+            <a:endParaRPr lang="en-US" sz="1050" dirty="0"/>
+          </a:p>
+        </p:txBody>
+      </p:sp>
+      <p:sp>
+        <p:nvSpPr>
+          <p:cNvPr id="27" name="Text 25"/>
+          <p:cNvSpPr txBox="1"/>
+          <p:nvPr/>
+        </p:nvSpPr>
+        <p:spPr>
+          <a:xfrm>
+            <a:off x="5074920" y="5870448"/>
+            <a:ext cx="6675120" cy="365760"/>
           </a:xfrm>
           <a:prstGeom prst="rect">
             <a:avLst/>
@@ -2317,276 +2907,29 @@
               <a:buNone/>
             </a:pPr>
             <a:r>
-              <a:rPr lang="en-US" sz="1200" b="1" spc="50" kern="0" dirty="0">
-                <a:solidFill>
-                  <a:srgbClr val="0A0A0A"/>
+              <a:rPr lang="en-US" sz="950" b="1" spc="50" kern="0" dirty="0">
+                <a:solidFill>
+                  <a:srgbClr val="5B5F66"/>
                 </a:solidFill>
                 <a:latin typeface="Arial" pitchFamily="34" charset="0"/>
                 <a:ea typeface="Arial" pitchFamily="34" charset="-122"/>
                 <a:cs typeface="Arial" pitchFamily="34" charset="-120"/>
               </a:rPr>
-              <a:t>HUMAN PERFORMANCE</a:t>
-            </a:r>
-            <a:endParaRPr lang="en-US" sz="1200" dirty="0"/>
-          </a:p>
-        </p:txBody>
-      </p:sp>
-      <p:sp>
-        <p:nvSpPr>
-          <p:cNvPr id="16" name="Text 14"/>
-          <p:cNvSpPr txBox="1"/>
-          <p:nvPr/>
-        </p:nvSpPr>
-        <p:spPr>
-          <a:xfrm>
-            <a:off x="777240" y="5129784"/>
-            <a:ext cx="6035040" cy="411480"/>
-          </a:xfrm>
-          <a:prstGeom prst="rect">
-            <a:avLst/>
-          </a:prstGeom>
-          <a:noFill/>
-          <a:ln/>
-        </p:spPr>
-        <p:txBody>
-          <a:bodyPr wrap="square" lIns="0" tIns="0" rIns="0" bIns="0" rtlCol="0" anchor="ctr"/>
-          <a:lstStyle/>
-          <a:p>
-            <a:pPr indent="0" marL="0">
-              <a:lnSpc>
-                <a:spcPct val="110000"/>
-              </a:lnSpc>
-              <a:buNone/>
-            </a:pPr>
-            <a:r>
-              <a:rPr lang="en-US" sz="1100" dirty="0">
-                <a:solidFill>
-                  <a:srgbClr val="5B5F66"/>
-                </a:solidFill>
-                <a:latin typeface="Calibri" pitchFamily="34" charset="0"/>
-                <a:ea typeface="Calibri" pitchFamily="34" charset="-122"/>
-                <a:cs typeface="Calibri" pitchFamily="34" charset="-120"/>
-              </a:rPr>
-              <a:t>Warfighter performance, resilience, and medical staffing support</a:t>
-            </a:r>
-            <a:endParaRPr lang="en-US" sz="1100" dirty="0"/>
-          </a:p>
-        </p:txBody>
-      </p:sp>
-      <p:sp>
-        <p:nvSpPr>
-          <p:cNvPr id="17" name="Text 15"/>
-          <p:cNvSpPr txBox="1"/>
-          <p:nvPr/>
-        </p:nvSpPr>
-        <p:spPr>
-          <a:xfrm>
-            <a:off x="457200" y="5742432"/>
-            <a:ext cx="6492240" cy="365760"/>
-          </a:xfrm>
-          <a:prstGeom prst="rect">
-            <a:avLst/>
-          </a:prstGeom>
-          <a:noFill/>
-          <a:ln/>
-        </p:spPr>
-        <p:txBody>
-          <a:bodyPr wrap="square" lIns="0" tIns="0" rIns="0" bIns="0" rtlCol="0" anchor="ctr"/>
-          <a:lstStyle/>
-          <a:p>
-            <a:pPr indent="0" marL="0">
-              <a:buNone/>
-            </a:pPr>
-            <a:r>
-              <a:rPr lang="en-US" sz="1000" b="1" spc="50" kern="0" dirty="0">
-                <a:solidFill>
-                  <a:srgbClr val="5B5F66"/>
-                </a:solidFill>
-                <a:latin typeface="Arial" pitchFamily="34" charset="0"/>
-                <a:ea typeface="Arial" pitchFamily="34" charset="-122"/>
-                <a:cs typeface="Arial" pitchFamily="34" charset="-120"/>
-              </a:rPr>
               <a:t>SDVOSB  |  VOSB  |  SBA-Certified HUBZone  |  CMMC Level 1  |  GSA MAS GS-00F-204GA  |  SeaPort-NxG Prime</a:t>
             </a:r>
-            <a:endParaRPr lang="en-US" sz="1000" dirty="0"/>
-          </a:p>
-        </p:txBody>
-      </p:sp>
-      <p:sp>
-        <p:nvSpPr>
-          <p:cNvPr id="18" name="Shape 16"/>
+            <a:endParaRPr lang="en-US" sz="950" dirty="0"/>
+          </a:p>
+        </p:txBody>
+      </p:sp>
+      <p:sp>
+        <p:nvSpPr>
+          <p:cNvPr id="28" name="Shape 26"/>
           <p:cNvSpPr/>
           <p:nvPr/>
         </p:nvSpPr>
         <p:spPr>
           <a:xfrm>
-            <a:off x="7223760" y="1600200"/>
-            <a:ext cx="4507992" cy="4507992"/>
-          </a:xfrm>
-          <a:prstGeom prst="rect">
-            <a:avLst/>
-          </a:prstGeom>
-          <a:solidFill>
-            <a:srgbClr val="EAEAE8"/>
-          </a:solidFill>
-          <a:ln w="12700">
-            <a:solidFill>
-              <a:srgbClr val="FF002B"/>
-            </a:solidFill>
-            <a:prstDash val="dash"/>
-          </a:ln>
-        </p:spPr>
-      </p:sp>
-      <p:sp>
-        <p:nvSpPr>
-          <p:cNvPr id="19" name="Shape 17"/>
-          <p:cNvSpPr/>
-          <p:nvPr/>
-        </p:nvSpPr>
-        <p:spPr>
-          <a:xfrm>
-            <a:off x="8700516" y="3076956"/>
-            <a:ext cx="274320" cy="274320"/>
-          </a:xfrm>
-          <a:prstGeom prst="ellipse">
-            <a:avLst/>
-          </a:prstGeom>
-          <a:solidFill>
-            <a:srgbClr val="FF002B"/>
-          </a:solidFill>
-          <a:ln/>
-        </p:spPr>
-      </p:sp>
-      <p:sp>
-        <p:nvSpPr>
-          <p:cNvPr id="20" name="Shape 18"/>
-          <p:cNvSpPr/>
-          <p:nvPr/>
-        </p:nvSpPr>
-        <p:spPr>
-          <a:xfrm>
-            <a:off x="8791956" y="3396996"/>
-            <a:ext cx="1005840" cy="685800"/>
-          </a:xfrm>
-          <a:prstGeom prst="triangle">
-            <a:avLst/>
-          </a:prstGeom>
-          <a:solidFill>
-            <a:srgbClr val="5B5F66"/>
-          </a:solidFill>
-          <a:ln/>
-        </p:spPr>
-      </p:sp>
-      <p:sp>
-        <p:nvSpPr>
-          <p:cNvPr id="21" name="Shape 19"/>
-          <p:cNvSpPr/>
-          <p:nvPr/>
-        </p:nvSpPr>
-        <p:spPr>
-          <a:xfrm>
-            <a:off x="9340596" y="3214116"/>
-            <a:ext cx="868680" cy="868680"/>
-          </a:xfrm>
-          <a:prstGeom prst="triangle">
-            <a:avLst/>
-          </a:prstGeom>
-          <a:solidFill>
-            <a:srgbClr val="5B5F66"/>
-          </a:solidFill>
-          <a:ln/>
-        </p:spPr>
-      </p:sp>
-      <p:sp>
-        <p:nvSpPr>
-          <p:cNvPr id="22" name="Text 20"/>
-          <p:cNvSpPr txBox="1"/>
-          <p:nvPr/>
-        </p:nvSpPr>
-        <p:spPr>
-          <a:xfrm>
-            <a:off x="7406640" y="4037076"/>
-            <a:ext cx="4142232" cy="274320"/>
-          </a:xfrm>
-          <a:prstGeom prst="rect">
-            <a:avLst/>
-          </a:prstGeom>
-          <a:noFill/>
-          <a:ln/>
-        </p:spPr>
-        <p:txBody>
-          <a:bodyPr wrap="square" lIns="0" tIns="0" rIns="0" bIns="0" rtlCol="0" anchor="ctr"/>
-          <a:lstStyle/>
-          <a:p>
-            <a:pPr algn="ctr" indent="0" marL="0">
-              <a:buNone/>
-            </a:pPr>
-            <a:r>
-              <a:rPr lang="en-US" sz="1000" b="1" spc="100" kern="0" dirty="0">
-                <a:solidFill>
-                  <a:srgbClr val="FF002B"/>
-                </a:solidFill>
-                <a:latin typeface="Arial" pitchFamily="34" charset="0"/>
-                <a:ea typeface="Arial" pitchFamily="34" charset="-122"/>
-                <a:cs typeface="Arial" pitchFamily="34" charset="-120"/>
-              </a:rPr>
-              <a:t>PLACEHOLDER IMAGE</a:t>
-            </a:r>
-            <a:endParaRPr lang="en-US" sz="1000" dirty="0"/>
-          </a:p>
-        </p:txBody>
-      </p:sp>
-      <p:sp>
-        <p:nvSpPr>
-          <p:cNvPr id="23" name="Text 21"/>
-          <p:cNvSpPr txBox="1"/>
-          <p:nvPr/>
-        </p:nvSpPr>
-        <p:spPr>
-          <a:xfrm>
-            <a:off x="7498080" y="4329684"/>
-            <a:ext cx="3959352" cy="548640"/>
-          </a:xfrm>
-          <a:prstGeom prst="rect">
-            <a:avLst/>
-          </a:prstGeom>
-          <a:noFill/>
-          <a:ln/>
-        </p:spPr>
-        <p:txBody>
-          <a:bodyPr wrap="square" lIns="0" tIns="0" rIns="0" bIns="0" rtlCol="0" anchor="ctr"/>
-          <a:lstStyle/>
-          <a:p>
-            <a:pPr algn="ctr" indent="0" marL="0">
-              <a:lnSpc>
-                <a:spcPct val="110000"/>
-              </a:lnSpc>
-              <a:buNone/>
-            </a:pPr>
-            <a:r>
-              <a:rPr lang="en-US" sz="1000" i="1" dirty="0">
-                <a:solidFill>
-                  <a:srgbClr val="5B5F66"/>
-                </a:solidFill>
-                <a:latin typeface="Calibri" pitchFamily="34" charset="0"/>
-                <a:ea typeface="Calibri" pitchFamily="34" charset="-122"/>
-                <a:cs typeface="Calibri" pitchFamily="34" charset="-120"/>
-              </a:rPr>
-              <a:t>Operator/instructor in a training environment — provided by Valletta</a:t>
-            </a:r>
-            <a:endParaRPr lang="en-US" sz="1000" dirty="0"/>
-          </a:p>
-        </p:txBody>
-      </p:sp>
-      <p:sp>
-        <p:nvSpPr>
-          <p:cNvPr id="24" name="Shape 22"/>
-          <p:cNvSpPr/>
-          <p:nvPr/>
-        </p:nvSpPr>
-        <p:spPr>
-          <a:xfrm>
-            <a:off x="9217152" y="6473952"/>
+            <a:off x="9217152" y="6492240"/>
             <a:ext cx="2514600" cy="274320"/>
           </a:xfrm>
           <a:prstGeom prst="roundRect">
@@ -2604,13 +2947,13 @@
       </p:sp>
       <p:sp>
         <p:nvSpPr>
-          <p:cNvPr id="25" name="Text 23"/>
-          <p:cNvSpPr txBox="1"/>
-          <p:nvPr/>
-        </p:nvSpPr>
-        <p:spPr>
-          <a:xfrm>
-            <a:off x="9217152" y="6473952"/>
+          <p:cNvPr id="29" name="Text 27"/>
+          <p:cNvSpPr txBox="1"/>
+          <p:nvPr/>
+        </p:nvSpPr>
+        <p:spPr>
+          <a:xfrm>
+            <a:off x="9217152" y="6492240"/>
             <a:ext cx="2514600" cy="274320"/>
           </a:xfrm>
           <a:prstGeom prst="rect">
@@ -2657,14 +3000,14 @@
       </p:sp>
       <p:sp>
         <p:nvSpPr>
-          <p:cNvPr id="26" name="Text 24"/>
-          <p:cNvSpPr txBox="1"/>
-          <p:nvPr/>
-        </p:nvSpPr>
-        <p:spPr>
-          <a:xfrm>
-            <a:off x="457200" y="6473952"/>
-            <a:ext cx="7772400" cy="274320"/>
+          <p:cNvPr id="30" name="Text 28"/>
+          <p:cNvSpPr txBox="1"/>
+          <p:nvPr/>
+        </p:nvSpPr>
+        <p:spPr>
+          <a:xfrm>
+            <a:off x="5074920" y="6492240"/>
+            <a:ext cx="5029200" cy="274320"/>
           </a:xfrm>
           <a:prstGeom prst="rect">
             <a:avLst/>
@@ -2734,31 +3077,188 @@
         </p:nvSpPr>
         <p:spPr>
           <a:xfrm>
-            <a:off x="457200" y="457200"/>
-            <a:ext cx="9144000" cy="320040"/>
-          </a:xfrm>
-          <a:prstGeom prst="rect">
-            <a:avLst/>
-          </a:prstGeom>
-          <a:noFill/>
-          <a:ln/>
-        </p:spPr>
-        <p:txBody>
-          <a:bodyPr wrap="square" lIns="0" tIns="0" rIns="0" bIns="0" rtlCol="0" anchor="ctr"/>
-          <a:lstStyle/>
-          <a:p>
-            <a:pPr algn="l" indent="0" marL="0">
-              <a:buNone/>
-            </a:pPr>
-            <a:r>
-              <a:rPr lang="en-US" sz="1100" b="1" spc="150" kern="0" dirty="0">
-                <a:solidFill>
-                  <a:srgbClr val="FF002B"/>
+            <a:off x="6949440" y="0"/>
+            <a:ext cx="5486400" cy="6858000"/>
+          </a:xfrm>
+          <a:prstGeom prst="rect">
+            <a:avLst/>
+          </a:prstGeom>
+          <a:noFill/>
+          <a:ln/>
+        </p:spPr>
+        <p:txBody>
+          <a:bodyPr wrap="square" lIns="0" tIns="0" rIns="0" bIns="0" rtlCol="0" anchor="t"/>
+          <a:lstStyle/>
+          <a:p>
+            <a:pPr algn="r" indent="0" marL="0">
+              <a:buNone/>
+            </a:pPr>
+            <a:r>
+              <a:rPr lang="en-US" sz="36000" b="1" dirty="0">
+                <a:solidFill>
+                  <a:srgbClr val="EBEBE9"/>
+                </a:solidFill>
+                <a:latin typeface="Bookman Old Style" pitchFamily="34" charset="0"/>
+                <a:ea typeface="Bookman Old Style" pitchFamily="34" charset="-122"/>
+                <a:cs typeface="Bookman Old Style" pitchFamily="34" charset="-120"/>
+              </a:rPr>
+              <a:t>03</a:t>
+            </a:r>
+            <a:endParaRPr lang="en-US" sz="36000" dirty="0"/>
+          </a:p>
+        </p:txBody>
+      </p:sp>
+      <p:sp>
+        <p:nvSpPr>
+          <p:cNvPr id="3" name="Shape 1"/>
+          <p:cNvSpPr/>
+          <p:nvPr/>
+        </p:nvSpPr>
+        <p:spPr>
+          <a:xfrm>
+            <a:off x="457200" y="384048"/>
+            <a:ext cx="310896" cy="29261"/>
+          </a:xfrm>
+          <a:prstGeom prst="rect">
+            <a:avLst/>
+          </a:prstGeom>
+          <a:solidFill>
+            <a:srgbClr val="FF002B"/>
+          </a:solidFill>
+          <a:ln/>
+        </p:spPr>
+      </p:sp>
+      <p:sp>
+        <p:nvSpPr>
+          <p:cNvPr id="4" name="Shape 2"/>
+          <p:cNvSpPr/>
+          <p:nvPr/>
+        </p:nvSpPr>
+        <p:spPr>
+          <a:xfrm>
+            <a:off x="457200" y="384048"/>
+            <a:ext cx="29261" cy="310896"/>
+          </a:xfrm>
+          <a:prstGeom prst="rect">
+            <a:avLst/>
+          </a:prstGeom>
+          <a:solidFill>
+            <a:srgbClr val="FF002B"/>
+          </a:solidFill>
+          <a:ln/>
+        </p:spPr>
+      </p:sp>
+      <p:sp>
+        <p:nvSpPr>
+          <p:cNvPr id="5" name="Text 3"/>
+          <p:cNvSpPr txBox="1"/>
+          <p:nvPr/>
+        </p:nvSpPr>
+        <p:spPr>
+          <a:xfrm>
+            <a:off x="896112" y="329184"/>
+            <a:ext cx="2926080" cy="292608"/>
+          </a:xfrm>
+          <a:prstGeom prst="rect">
+            <a:avLst/>
+          </a:prstGeom>
+          <a:noFill/>
+          <a:ln/>
+        </p:spPr>
+        <p:txBody>
+          <a:bodyPr wrap="square" lIns="0" tIns="0" rIns="0" bIns="0" rtlCol="0" anchor="ctr"/>
+          <a:lstStyle/>
+          <a:p>
+            <a:pPr indent="0" marL="0">
+              <a:buNone/>
+            </a:pPr>
+            <a:r>
+              <a:rPr lang="en-US" sz="1500" b="1" spc="200" kern="0" dirty="0">
+                <a:solidFill>
+                  <a:srgbClr val="0A0A0A"/>
                 </a:solidFill>
                 <a:latin typeface="Arial" pitchFamily="34" charset="0"/>
                 <a:ea typeface="Arial" pitchFamily="34" charset="-122"/>
                 <a:cs typeface="Arial" pitchFamily="34" charset="-120"/>
               </a:rPr>
+              <a:t>VALLETTA</a:t>
+            </a:r>
+            <a:endParaRPr lang="en-US" sz="1500" dirty="0"/>
+          </a:p>
+        </p:txBody>
+      </p:sp>
+      <p:sp>
+        <p:nvSpPr>
+          <p:cNvPr id="6" name="Text 4"/>
+          <p:cNvSpPr txBox="1"/>
+          <p:nvPr/>
+        </p:nvSpPr>
+        <p:spPr>
+          <a:xfrm>
+            <a:off x="896112" y="603504"/>
+            <a:ext cx="2926080" cy="219456"/>
+          </a:xfrm>
+          <a:prstGeom prst="rect">
+            <a:avLst/>
+          </a:prstGeom>
+          <a:noFill/>
+          <a:ln/>
+        </p:spPr>
+        <p:txBody>
+          <a:bodyPr wrap="square" lIns="0" tIns="0" rIns="0" bIns="0" rtlCol="0" anchor="ctr"/>
+          <a:lstStyle/>
+          <a:p>
+            <a:pPr indent="0" marL="0">
+              <a:buNone/>
+            </a:pPr>
+            <a:r>
+              <a:rPr lang="en-US" sz="750" b="1" spc="200" kern="0" dirty="0">
+                <a:solidFill>
+                  <a:srgbClr val="5B5F66"/>
+                </a:solidFill>
+                <a:latin typeface="Arial" pitchFamily="34" charset="0"/>
+                <a:ea typeface="Arial" pitchFamily="34" charset="-122"/>
+                <a:cs typeface="Arial" pitchFamily="34" charset="-120"/>
+              </a:rPr>
+              <a:t>INDUSTRIES, INC.</a:t>
+            </a:r>
+            <a:endParaRPr lang="en-US" sz="750" dirty="0"/>
+          </a:p>
+        </p:txBody>
+      </p:sp>
+      <p:sp>
+        <p:nvSpPr>
+          <p:cNvPr id="7" name="Text 5"/>
+          <p:cNvSpPr txBox="1"/>
+          <p:nvPr/>
+        </p:nvSpPr>
+        <p:spPr>
+          <a:xfrm>
+            <a:off x="457200" y="777240"/>
+            <a:ext cx="9144000" cy="320040"/>
+          </a:xfrm>
+          <a:prstGeom prst="rect">
+            <a:avLst/>
+          </a:prstGeom>
+          <a:noFill/>
+          <a:ln/>
+        </p:spPr>
+        <p:txBody>
+          <a:bodyPr wrap="square" lIns="0" tIns="0" rIns="0" bIns="0" rtlCol="0" anchor="ctr"/>
+          <a:lstStyle/>
+          <a:p>
+            <a:pPr algn="l" indent="0" marL="0">
+              <a:buNone/>
+            </a:pPr>
+            <a:r>
+              <a:rPr lang="en-US" sz="1100" b="1" spc="150" kern="0" dirty="0">
+                <a:solidFill>
+                  <a:srgbClr val="FF002B"/>
+                </a:solidFill>
+                <a:latin typeface="Arial" pitchFamily="34" charset="0"/>
+                <a:ea typeface="Arial" pitchFamily="34" charset="-122"/>
+                <a:cs typeface="Arial" pitchFamily="34" charset="-120"/>
+              </a:rPr>
               <a:t>PERFORMANCE WORK STATEMENT ALIGNMENT</a:t>
             </a:r>
             <a:endParaRPr lang="en-US" sz="1100" dirty="0"/>
@@ -2767,13 +3267,13 @@
       </p:sp>
       <p:sp>
         <p:nvSpPr>
-          <p:cNvPr id="3" name="Text 1"/>
-          <p:cNvSpPr txBox="1"/>
-          <p:nvPr/>
-        </p:nvSpPr>
-        <p:spPr>
-          <a:xfrm>
-            <a:off x="457200" y="777240"/>
+          <p:cNvPr id="8" name="Text 6"/>
+          <p:cNvSpPr txBox="1"/>
+          <p:nvPr/>
+        </p:nvSpPr>
+        <p:spPr>
+          <a:xfrm>
+            <a:off x="457200" y="1097280"/>
             <a:ext cx="11274552" cy="685800"/>
           </a:xfrm>
           <a:prstGeom prst="rect">
@@ -2790,7 +3290,7 @@
               <a:buNone/>
             </a:pPr>
             <a:r>
-              <a:rPr lang="en-US" sz="2700" b="1" dirty="0">
+              <a:rPr lang="en-US" sz="2600" b="1" dirty="0">
                 <a:solidFill>
                   <a:srgbClr val="0A0A0A"/>
                 </a:solidFill>
@@ -2800,7 +3300,7 @@
               </a:rPr>
               <a:t>Full-Lifecycle Alignment With the Draft PWS Scope</a:t>
             </a:r>
-            <a:endParaRPr lang="en-US" sz="2700" dirty="0"/>
+            <a:endParaRPr lang="en-US" sz="2600" dirty="0"/>
           </a:p>
         </p:txBody>
       </p:sp>
@@ -2819,8 +3319,8 @@
           </p:nvPr>
         </p:nvGraphicFramePr>
         <p:xfrm>
-          <a:off x="457200" y="1600200"/>
-          <a:ext cx="7040880" cy="4572000"/>
+          <a:off x="457200" y="1920240"/>
+          <a:ext cx="7040880" cy="4251960"/>
         </p:xfrm>
         <a:graphic>
           <a:graphicData uri="http://schemas.openxmlformats.org/drawingml/2006/table">
@@ -2830,7 +3330,7 @@
                 <a:gridCol w="3246120"/>
                 <a:gridCol w="3794760"/>
               </a:tblGrid>
-              <a:tr h="762000">
+              <a:tr h="708660">
                 <a:tc>
                   <a:txBody>
                     <a:bodyPr/>
@@ -2954,7 +3454,7 @@
                   </a:tcPr>
                 </a:tc>
               </a:tr>
-              <a:tr h="762000">
+              <a:tr h="708660">
                 <a:tc>
                   <a:txBody>
                     <a:bodyPr/>
@@ -3078,7 +3578,7 @@
                   </a:tcPr>
                 </a:tc>
               </a:tr>
-              <a:tr h="762000">
+              <a:tr h="708660">
                 <a:tc>
                   <a:txBody>
                     <a:bodyPr/>
@@ -3202,7 +3702,7 @@
                   </a:tcPr>
                 </a:tc>
               </a:tr>
-              <a:tr h="762000">
+              <a:tr h="708660">
                 <a:tc>
                   <a:txBody>
                     <a:bodyPr/>
@@ -3326,7 +3826,7 @@
                   </a:tcPr>
                 </a:tc>
               </a:tr>
-              <a:tr h="762000">
+              <a:tr h="708660">
                 <a:tc>
                   <a:txBody>
                     <a:bodyPr/>
@@ -3450,7 +3950,7 @@
                   </a:tcPr>
                 </a:tc>
               </a:tr>
-              <a:tr h="762000">
+              <a:tr h="708660">
                 <a:tc>
                   <a:txBody>
                     <a:bodyPr/>
@@ -3580,14 +4080,14 @@
       </p:graphicFrame>
       <p:sp>
         <p:nvSpPr>
-          <p:cNvPr id="5" name="Shape 2"/>
+          <p:cNvPr id="10" name="Shape 7"/>
           <p:cNvSpPr/>
           <p:nvPr/>
         </p:nvSpPr>
         <p:spPr>
           <a:xfrm>
-            <a:off x="7726680" y="1600200"/>
-            <a:ext cx="4005072" cy="4572000"/>
+            <a:off x="7726680" y="1920240"/>
+            <a:ext cx="4005072" cy="4251960"/>
           </a:xfrm>
           <a:prstGeom prst="rect">
             <a:avLst/>
@@ -3612,13 +4112,53 @@
       </p:sp>
       <p:sp>
         <p:nvSpPr>
-          <p:cNvPr id="6" name="Shape 3"/>
+          <p:cNvPr id="11" name="Shape 8"/>
           <p:cNvSpPr/>
           <p:nvPr/>
         </p:nvSpPr>
         <p:spPr>
           <a:xfrm>
-            <a:off x="7726680" y="1600200"/>
+            <a:off x="7726680" y="1920240"/>
+            <a:ext cx="365760" cy="36576"/>
+          </a:xfrm>
+          <a:prstGeom prst="rect">
+            <a:avLst/>
+          </a:prstGeom>
+          <a:solidFill>
+            <a:srgbClr val="FF002B"/>
+          </a:solidFill>
+          <a:ln/>
+        </p:spPr>
+      </p:sp>
+      <p:sp>
+        <p:nvSpPr>
+          <p:cNvPr id="12" name="Shape 9"/>
+          <p:cNvSpPr/>
+          <p:nvPr/>
+        </p:nvSpPr>
+        <p:spPr>
+          <a:xfrm>
+            <a:off x="7726680" y="1920240"/>
+            <a:ext cx="36576" cy="365760"/>
+          </a:xfrm>
+          <a:prstGeom prst="rect">
+            <a:avLst/>
+          </a:prstGeom>
+          <a:solidFill>
+            <a:srgbClr val="FF002B"/>
+          </a:solidFill>
+          <a:ln/>
+        </p:spPr>
+      </p:sp>
+      <p:sp>
+        <p:nvSpPr>
+          <p:cNvPr id="13" name="Shape 10"/>
+          <p:cNvSpPr/>
+          <p:nvPr/>
+        </p:nvSpPr>
+        <p:spPr>
+          <a:xfrm>
+            <a:off x="7726680" y="1920240"/>
             <a:ext cx="4005072" cy="384048"/>
           </a:xfrm>
           <a:prstGeom prst="rect">
@@ -3632,13 +4172,13 @@
       </p:sp>
       <p:sp>
         <p:nvSpPr>
-          <p:cNvPr id="7" name="Text 4"/>
-          <p:cNvSpPr txBox="1"/>
-          <p:nvPr/>
-        </p:nvSpPr>
-        <p:spPr>
-          <a:xfrm>
-            <a:off x="7863840" y="1600200"/>
+          <p:cNvPr id="14" name="Text 11"/>
+          <p:cNvSpPr txBox="1"/>
+          <p:nvPr/>
+        </p:nvSpPr>
+        <p:spPr>
+          <a:xfrm>
+            <a:off x="7863840" y="1920240"/>
             <a:ext cx="3730752" cy="384048"/>
           </a:xfrm>
           <a:prstGeom prst="rect">
@@ -3671,14 +4211,14 @@
       </p:sp>
       <p:sp>
         <p:nvSpPr>
-          <p:cNvPr id="8" name="Text 5"/>
-          <p:cNvSpPr txBox="1"/>
-          <p:nvPr/>
-        </p:nvSpPr>
-        <p:spPr>
-          <a:xfrm>
-            <a:off x="7955280" y="2148840"/>
-            <a:ext cx="3547872" cy="3383280"/>
+          <p:cNvPr id="15" name="Text 12"/>
+          <p:cNvSpPr txBox="1"/>
+          <p:nvPr/>
+        </p:nvSpPr>
+        <p:spPr>
+          <a:xfrm>
+            <a:off x="7955280" y="2468880"/>
+            <a:ext cx="3547872" cy="3063240"/>
           </a:xfrm>
           <a:prstGeom prst="rect">
             <a:avLst/>
@@ -3893,7 +4433,7 @@
       </p:sp>
       <p:sp>
         <p:nvSpPr>
-          <p:cNvPr id="9" name="Text 6"/>
+          <p:cNvPr id="16" name="Text 13"/>
           <p:cNvSpPr txBox="1"/>
           <p:nvPr/>
         </p:nvSpPr>
@@ -3935,13 +4475,13 @@
       </p:sp>
       <p:sp>
         <p:nvSpPr>
-          <p:cNvPr id="10" name="Shape 7"/>
+          <p:cNvPr id="17" name="Shape 14"/>
           <p:cNvSpPr/>
           <p:nvPr/>
         </p:nvSpPr>
         <p:spPr>
           <a:xfrm>
-            <a:off x="9217152" y="6473952"/>
+            <a:off x="9217152" y="6492240"/>
             <a:ext cx="2514600" cy="274320"/>
           </a:xfrm>
           <a:prstGeom prst="roundRect">
@@ -3959,13 +4499,13 @@
       </p:sp>
       <p:sp>
         <p:nvSpPr>
-          <p:cNvPr id="11" name="Text 8"/>
-          <p:cNvSpPr txBox="1"/>
-          <p:nvPr/>
-        </p:nvSpPr>
-        <p:spPr>
-          <a:xfrm>
-            <a:off x="9217152" y="6473952"/>
+          <p:cNvPr id="18" name="Text 15"/>
+          <p:cNvSpPr txBox="1"/>
+          <p:nvPr/>
+        </p:nvSpPr>
+        <p:spPr>
+          <a:xfrm>
+            <a:off x="9217152" y="6492240"/>
             <a:ext cx="2514600" cy="274320"/>
           </a:xfrm>
           <a:prstGeom prst="rect">
@@ -4012,13 +4552,13 @@
       </p:sp>
       <p:sp>
         <p:nvSpPr>
-          <p:cNvPr id="12" name="Text 9"/>
-          <p:cNvSpPr txBox="1"/>
-          <p:nvPr/>
-        </p:nvSpPr>
-        <p:spPr>
-          <a:xfrm>
-            <a:off x="457200" y="6473952"/>
+          <p:cNvPr id="19" name="Text 16"/>
+          <p:cNvSpPr txBox="1"/>
+          <p:nvPr/>
+        </p:nvSpPr>
+        <p:spPr>
+          <a:xfrm>
+            <a:off x="457200" y="6492240"/>
             <a:ext cx="7772400" cy="274320"/>
           </a:xfrm>
           <a:prstGeom prst="rect">
@@ -4089,31 +4629,188 @@
         </p:nvSpPr>
         <p:spPr>
           <a:xfrm>
-            <a:off x="457200" y="457200"/>
-            <a:ext cx="9144000" cy="320040"/>
-          </a:xfrm>
-          <a:prstGeom prst="rect">
-            <a:avLst/>
-          </a:prstGeom>
-          <a:noFill/>
-          <a:ln/>
-        </p:spPr>
-        <p:txBody>
-          <a:bodyPr wrap="square" lIns="0" tIns="0" rIns="0" bIns="0" rtlCol="0" anchor="ctr"/>
-          <a:lstStyle/>
-          <a:p>
-            <a:pPr algn="l" indent="0" marL="0">
-              <a:buNone/>
-            </a:pPr>
-            <a:r>
-              <a:rPr lang="en-US" sz="1100" b="1" spc="150" kern="0" dirty="0">
-                <a:solidFill>
-                  <a:srgbClr val="FF002B"/>
+            <a:off x="6949440" y="0"/>
+            <a:ext cx="5486400" cy="6858000"/>
+          </a:xfrm>
+          <a:prstGeom prst="rect">
+            <a:avLst/>
+          </a:prstGeom>
+          <a:noFill/>
+          <a:ln/>
+        </p:spPr>
+        <p:txBody>
+          <a:bodyPr wrap="square" lIns="0" tIns="0" rIns="0" bIns="0" rtlCol="0" anchor="t"/>
+          <a:lstStyle/>
+          <a:p>
+            <a:pPr algn="r" indent="0" marL="0">
+              <a:buNone/>
+            </a:pPr>
+            <a:r>
+              <a:rPr lang="en-US" sz="36000" b="1" dirty="0">
+                <a:solidFill>
+                  <a:srgbClr val="141414"/>
+                </a:solidFill>
+                <a:latin typeface="Bookman Old Style" pitchFamily="34" charset="0"/>
+                <a:ea typeface="Bookman Old Style" pitchFamily="34" charset="-122"/>
+                <a:cs typeface="Bookman Old Style" pitchFamily="34" charset="-120"/>
+              </a:rPr>
+              <a:t>04</a:t>
+            </a:r>
+            <a:endParaRPr lang="en-US" sz="36000" dirty="0"/>
+          </a:p>
+        </p:txBody>
+      </p:sp>
+      <p:sp>
+        <p:nvSpPr>
+          <p:cNvPr id="3" name="Shape 1"/>
+          <p:cNvSpPr/>
+          <p:nvPr/>
+        </p:nvSpPr>
+        <p:spPr>
+          <a:xfrm>
+            <a:off x="457200" y="384048"/>
+            <a:ext cx="310896" cy="29261"/>
+          </a:xfrm>
+          <a:prstGeom prst="rect">
+            <a:avLst/>
+          </a:prstGeom>
+          <a:solidFill>
+            <a:srgbClr val="FF002B"/>
+          </a:solidFill>
+          <a:ln/>
+        </p:spPr>
+      </p:sp>
+      <p:sp>
+        <p:nvSpPr>
+          <p:cNvPr id="4" name="Shape 2"/>
+          <p:cNvSpPr/>
+          <p:nvPr/>
+        </p:nvSpPr>
+        <p:spPr>
+          <a:xfrm>
+            <a:off x="457200" y="384048"/>
+            <a:ext cx="29261" cy="310896"/>
+          </a:xfrm>
+          <a:prstGeom prst="rect">
+            <a:avLst/>
+          </a:prstGeom>
+          <a:solidFill>
+            <a:srgbClr val="FF002B"/>
+          </a:solidFill>
+          <a:ln/>
+        </p:spPr>
+      </p:sp>
+      <p:sp>
+        <p:nvSpPr>
+          <p:cNvPr id="5" name="Text 3"/>
+          <p:cNvSpPr txBox="1"/>
+          <p:nvPr/>
+        </p:nvSpPr>
+        <p:spPr>
+          <a:xfrm>
+            <a:off x="896112" y="329184"/>
+            <a:ext cx="2926080" cy="292608"/>
+          </a:xfrm>
+          <a:prstGeom prst="rect">
+            <a:avLst/>
+          </a:prstGeom>
+          <a:noFill/>
+          <a:ln/>
+        </p:spPr>
+        <p:txBody>
+          <a:bodyPr wrap="square" lIns="0" tIns="0" rIns="0" bIns="0" rtlCol="0" anchor="ctr"/>
+          <a:lstStyle/>
+          <a:p>
+            <a:pPr indent="0" marL="0">
+              <a:buNone/>
+            </a:pPr>
+            <a:r>
+              <a:rPr lang="en-US" sz="1500" b="1" spc="200" kern="0" dirty="0">
+                <a:solidFill>
+                  <a:srgbClr val="FFFFFF"/>
                 </a:solidFill>
                 <a:latin typeface="Arial" pitchFamily="34" charset="0"/>
                 <a:ea typeface="Arial" pitchFamily="34" charset="-122"/>
                 <a:cs typeface="Arial" pitchFamily="34" charset="-120"/>
               </a:rPr>
+              <a:t>VALLETTA</a:t>
+            </a:r>
+            <a:endParaRPr lang="en-US" sz="1500" dirty="0"/>
+          </a:p>
+        </p:txBody>
+      </p:sp>
+      <p:sp>
+        <p:nvSpPr>
+          <p:cNvPr id="6" name="Text 4"/>
+          <p:cNvSpPr txBox="1"/>
+          <p:nvPr/>
+        </p:nvSpPr>
+        <p:spPr>
+          <a:xfrm>
+            <a:off x="896112" y="603504"/>
+            <a:ext cx="2926080" cy="219456"/>
+          </a:xfrm>
+          <a:prstGeom prst="rect">
+            <a:avLst/>
+          </a:prstGeom>
+          <a:noFill/>
+          <a:ln/>
+        </p:spPr>
+        <p:txBody>
+          <a:bodyPr wrap="square" lIns="0" tIns="0" rIns="0" bIns="0" rtlCol="0" anchor="ctr"/>
+          <a:lstStyle/>
+          <a:p>
+            <a:pPr indent="0" marL="0">
+              <a:buNone/>
+            </a:pPr>
+            <a:r>
+              <a:rPr lang="en-US" sz="750" b="1" spc="200" kern="0" dirty="0">
+                <a:solidFill>
+                  <a:srgbClr val="5B5F66"/>
+                </a:solidFill>
+                <a:latin typeface="Arial" pitchFamily="34" charset="0"/>
+                <a:ea typeface="Arial" pitchFamily="34" charset="-122"/>
+                <a:cs typeface="Arial" pitchFamily="34" charset="-120"/>
+              </a:rPr>
+              <a:t>INDUSTRIES, INC.</a:t>
+            </a:r>
+            <a:endParaRPr lang="en-US" sz="750" dirty="0"/>
+          </a:p>
+        </p:txBody>
+      </p:sp>
+      <p:sp>
+        <p:nvSpPr>
+          <p:cNvPr id="7" name="Text 5"/>
+          <p:cNvSpPr txBox="1"/>
+          <p:nvPr/>
+        </p:nvSpPr>
+        <p:spPr>
+          <a:xfrm>
+            <a:off x="457200" y="777240"/>
+            <a:ext cx="9144000" cy="320040"/>
+          </a:xfrm>
+          <a:prstGeom prst="rect">
+            <a:avLst/>
+          </a:prstGeom>
+          <a:noFill/>
+          <a:ln/>
+        </p:spPr>
+        <p:txBody>
+          <a:bodyPr wrap="square" lIns="0" tIns="0" rIns="0" bIns="0" rtlCol="0" anchor="ctr"/>
+          <a:lstStyle/>
+          <a:p>
+            <a:pPr algn="l" indent="0" marL="0">
+              <a:buNone/>
+            </a:pPr>
+            <a:r>
+              <a:rPr lang="en-US" sz="1100" b="1" spc="150" kern="0" dirty="0">
+                <a:solidFill>
+                  <a:srgbClr val="FF002B"/>
+                </a:solidFill>
+                <a:latin typeface="Arial" pitchFamily="34" charset="0"/>
+                <a:ea typeface="Arial" pitchFamily="34" charset="-122"/>
+                <a:cs typeface="Arial" pitchFamily="34" charset="-120"/>
+              </a:rPr>
               <a:t>TRAINING DELIVERY CAPABILITY</a:t>
             </a:r>
             <a:endParaRPr lang="en-US" sz="1100" dirty="0"/>
@@ -4122,13 +4819,13 @@
       </p:sp>
       <p:sp>
         <p:nvSpPr>
-          <p:cNvPr id="3" name="Text 1"/>
-          <p:cNvSpPr txBox="1"/>
-          <p:nvPr/>
-        </p:nvSpPr>
-        <p:spPr>
-          <a:xfrm>
-            <a:off x="457200" y="777240"/>
+          <p:cNvPr id="8" name="Text 6"/>
+          <p:cNvSpPr txBox="1"/>
+          <p:nvPr/>
+        </p:nvSpPr>
+        <p:spPr>
+          <a:xfrm>
+            <a:off x="457200" y="1097280"/>
             <a:ext cx="11274552" cy="914400"/>
           </a:xfrm>
           <a:prstGeom prst="rect">
@@ -4148,7 +4845,7 @@
               <a:buNone/>
             </a:pPr>
             <a:r>
-              <a:rPr lang="en-US" sz="2300" b="1" dirty="0">
+              <a:rPr lang="en-US" sz="2200" b="1" dirty="0">
                 <a:solidFill>
                   <a:srgbClr val="FFFFFF"/>
                 </a:solidFill>
@@ -4158,20 +4855,59 @@
               </a:rPr>
               <a:t>Small-Arms, Law-Enforcement &amp; Survivability Training at Allied Ranges Nationwide</a:t>
             </a:r>
-            <a:endParaRPr lang="en-US" sz="2300" dirty="0"/>
-          </a:p>
-        </p:txBody>
-      </p:sp>
-      <p:sp>
-        <p:nvSpPr>
-          <p:cNvPr id="4" name="Shape 2"/>
+            <a:endParaRPr lang="en-US" sz="2200" dirty="0"/>
+          </a:p>
+        </p:txBody>
+      </p:sp>
+      <p:sp>
+        <p:nvSpPr>
+          <p:cNvPr id="9" name="Text 7"/>
+          <p:cNvSpPr txBox="1"/>
+          <p:nvPr/>
+        </p:nvSpPr>
+        <p:spPr>
+          <a:xfrm>
+            <a:off x="457200" y="1956816"/>
+            <a:ext cx="4937760" cy="274320"/>
+          </a:xfrm>
+          <a:prstGeom prst="rect">
+            <a:avLst/>
+          </a:prstGeom>
+          <a:noFill/>
+          <a:ln/>
+        </p:spPr>
+        <p:txBody>
+          <a:bodyPr wrap="square" lIns="0" tIns="0" rIns="0" bIns="0" rtlCol="0" anchor="ctr"/>
+          <a:lstStyle/>
+          <a:p>
+            <a:pPr indent="0" marL="0">
+              <a:buNone/>
+            </a:pPr>
+            <a:r>
+              <a:rPr lang="en-US" sz="1100" b="1" spc="100" kern="0" dirty="0">
+                <a:solidFill>
+                  <a:srgbClr val="FF002B"/>
+                </a:solidFill>
+                <a:latin typeface="Arial" pitchFamily="34" charset="0"/>
+                <a:ea typeface="Arial" pitchFamily="34" charset="-122"/>
+                <a:cs typeface="Arial" pitchFamily="34" charset="-120"/>
+              </a:rPr>
+              <a:t>LIVE-FIRE / SMALL-ARMS RANGE</a:t>
+            </a:r>
+            <a:endParaRPr lang="en-US" sz="1100" dirty="0"/>
+          </a:p>
+        </p:txBody>
+      </p:sp>
+      <p:sp>
+        <p:nvSpPr>
+          <p:cNvPr id="10" name="Shape 8"/>
           <p:cNvSpPr/>
           <p:nvPr/>
         </p:nvSpPr>
         <p:spPr>
           <a:xfrm>
-            <a:off x="457200" y="2148840"/>
-            <a:ext cx="3602736" cy="2788920"/>
+            <a:off x="457200" y="2286000"/>
+            <a:ext cx="4937760" cy="3063240"/>
           </a:xfrm>
           <a:prstGeom prst="rect">
             <a:avLst/>
@@ -4179,26 +4915,21 @@
           <a:solidFill>
             <a:srgbClr val="1C1D21"/>
           </a:solidFill>
-          <a:ln w="12700">
-            <a:solidFill>
-              <a:srgbClr val="FF002B"/>
-            </a:solidFill>
-            <a:prstDash val="dash"/>
-          </a:ln>
-        </p:spPr>
-      </p:sp>
-      <p:sp>
-        <p:nvSpPr>
-          <p:cNvPr id="5" name="Shape 3"/>
+          <a:ln/>
+        </p:spPr>
+      </p:sp>
+      <p:sp>
+        <p:nvSpPr>
+          <p:cNvPr id="11" name="Shape 9"/>
           <p:cNvSpPr/>
           <p:nvPr/>
         </p:nvSpPr>
         <p:spPr>
           <a:xfrm>
-            <a:off x="1481328" y="2766060"/>
-            <a:ext cx="274320" cy="274320"/>
-          </a:xfrm>
-          <a:prstGeom prst="ellipse">
+            <a:off x="457200" y="2286000"/>
+            <a:ext cx="490118" cy="41148"/>
+          </a:xfrm>
+          <a:prstGeom prst="rect">
             <a:avLst/>
           </a:prstGeom>
           <a:solidFill>
@@ -4209,13 +4940,53 @@
       </p:sp>
       <p:sp>
         <p:nvSpPr>
-          <p:cNvPr id="6" name="Shape 4"/>
+          <p:cNvPr id="12" name="Shape 10"/>
           <p:cNvSpPr/>
           <p:nvPr/>
         </p:nvSpPr>
         <p:spPr>
           <a:xfrm>
-            <a:off x="1572768" y="3086100"/>
+            <a:off x="457200" y="2286000"/>
+            <a:ext cx="41148" cy="490118"/>
+          </a:xfrm>
+          <a:prstGeom prst="rect">
+            <a:avLst/>
+          </a:prstGeom>
+          <a:solidFill>
+            <a:srgbClr val="FF002B"/>
+          </a:solidFill>
+          <a:ln/>
+        </p:spPr>
+      </p:sp>
+      <p:sp>
+        <p:nvSpPr>
+          <p:cNvPr id="13" name="Shape 11"/>
+          <p:cNvSpPr/>
+          <p:nvPr/>
+        </p:nvSpPr>
+        <p:spPr>
+          <a:xfrm>
+            <a:off x="2148840" y="3040380"/>
+            <a:ext cx="274320" cy="274320"/>
+          </a:xfrm>
+          <a:prstGeom prst="ellipse">
+            <a:avLst/>
+          </a:prstGeom>
+          <a:solidFill>
+            <a:srgbClr val="FF002B"/>
+          </a:solidFill>
+          <a:ln/>
+        </p:spPr>
+      </p:sp>
+      <p:sp>
+        <p:nvSpPr>
+          <p:cNvPr id="14" name="Shape 12"/>
+          <p:cNvSpPr/>
+          <p:nvPr/>
+        </p:nvSpPr>
+        <p:spPr>
+          <a:xfrm>
+            <a:off x="2240280" y="3360420"/>
             <a:ext cx="1005840" cy="685800"/>
           </a:xfrm>
           <a:prstGeom prst="triangle">
@@ -4229,13 +5000,13 @@
       </p:sp>
       <p:sp>
         <p:nvSpPr>
-          <p:cNvPr id="7" name="Shape 5"/>
+          <p:cNvPr id="15" name="Shape 13"/>
           <p:cNvSpPr/>
           <p:nvPr/>
         </p:nvSpPr>
         <p:spPr>
           <a:xfrm>
-            <a:off x="2121408" y="2903220"/>
+            <a:off x="2788920" y="3177540"/>
             <a:ext cx="868680" cy="868680"/>
           </a:xfrm>
           <a:prstGeom prst="triangle">
@@ -4249,14 +5020,14 @@
       </p:sp>
       <p:sp>
         <p:nvSpPr>
-          <p:cNvPr id="8" name="Text 6"/>
-          <p:cNvSpPr txBox="1"/>
-          <p:nvPr/>
-        </p:nvSpPr>
-        <p:spPr>
-          <a:xfrm>
-            <a:off x="640080" y="3726180"/>
-            <a:ext cx="3236976" cy="274320"/>
+          <p:cNvPr id="16" name="Text 14"/>
+          <p:cNvSpPr txBox="1"/>
+          <p:nvPr/>
+        </p:nvSpPr>
+        <p:spPr>
+          <a:xfrm>
+            <a:off x="640080" y="4000500"/>
+            <a:ext cx="4572000" cy="274320"/>
           </a:xfrm>
           <a:prstGeom prst="rect">
             <a:avLst/>
@@ -4288,14 +5059,14 @@
       </p:sp>
       <p:sp>
         <p:nvSpPr>
-          <p:cNvPr id="9" name="Text 7"/>
-          <p:cNvSpPr txBox="1"/>
-          <p:nvPr/>
-        </p:nvSpPr>
-        <p:spPr>
-          <a:xfrm>
-            <a:off x="731520" y="4018788"/>
-            <a:ext cx="3054096" cy="548640"/>
+          <p:cNvPr id="17" name="Text 15"/>
+          <p:cNvSpPr txBox="1"/>
+          <p:nvPr/>
+        </p:nvSpPr>
+        <p:spPr>
+          <a:xfrm>
+            <a:off x="731520" y="4293108"/>
+            <a:ext cx="4389120" cy="548640"/>
           </a:xfrm>
           <a:prstGeom prst="rect">
             <a:avLst/>
@@ -4330,14 +5101,53 @@
       </p:sp>
       <p:sp>
         <p:nvSpPr>
-          <p:cNvPr id="10" name="Shape 8"/>
+          <p:cNvPr id="18" name="Text 16"/>
+          <p:cNvSpPr txBox="1"/>
+          <p:nvPr/>
+        </p:nvSpPr>
+        <p:spPr>
+          <a:xfrm>
+            <a:off x="5559552" y="1956816"/>
+            <a:ext cx="3003804" cy="274320"/>
+          </a:xfrm>
+          <a:prstGeom prst="rect">
+            <a:avLst/>
+          </a:prstGeom>
+          <a:noFill/>
+          <a:ln/>
+        </p:spPr>
+        <p:txBody>
+          <a:bodyPr wrap="square" lIns="0" tIns="0" rIns="0" bIns="0" rtlCol="0" anchor="ctr"/>
+          <a:lstStyle/>
+          <a:p>
+            <a:pPr indent="0" marL="0">
+              <a:buNone/>
+            </a:pPr>
+            <a:r>
+              <a:rPr lang="en-US" sz="1100" b="1" spc="100" kern="0" dirty="0">
+                <a:solidFill>
+                  <a:srgbClr val="FF002B"/>
+                </a:solidFill>
+                <a:latin typeface="Arial" pitchFamily="34" charset="0"/>
+                <a:ea typeface="Arial" pitchFamily="34" charset="-122"/>
+                <a:cs typeface="Arial" pitchFamily="34" charset="-120"/>
+              </a:rPr>
+              <a:t>TACTICAL &amp; SCENARIO</a:t>
+            </a:r>
+            <a:endParaRPr lang="en-US" sz="1100" dirty="0"/>
+          </a:p>
+        </p:txBody>
+      </p:sp>
+      <p:sp>
+        <p:nvSpPr>
+          <p:cNvPr id="19" name="Shape 17"/>
           <p:cNvSpPr/>
           <p:nvPr/>
         </p:nvSpPr>
         <p:spPr>
           <a:xfrm>
-            <a:off x="4242816" y="2148840"/>
-            <a:ext cx="3602736" cy="2788920"/>
+            <a:off x="5559552" y="2286000"/>
+            <a:ext cx="3003804" cy="3063240"/>
           </a:xfrm>
           <a:prstGeom prst="rect">
             <a:avLst/>
@@ -4345,26 +5155,21 @@
           <a:solidFill>
             <a:srgbClr val="1C1D21"/>
           </a:solidFill>
-          <a:ln w="12700">
-            <a:solidFill>
-              <a:srgbClr val="FF002B"/>
-            </a:solidFill>
-            <a:prstDash val="dash"/>
-          </a:ln>
-        </p:spPr>
-      </p:sp>
-      <p:sp>
-        <p:nvSpPr>
-          <p:cNvPr id="11" name="Shape 9"/>
+          <a:ln/>
+        </p:spPr>
+      </p:sp>
+      <p:sp>
+        <p:nvSpPr>
+          <p:cNvPr id="20" name="Shape 18"/>
           <p:cNvSpPr/>
           <p:nvPr/>
         </p:nvSpPr>
         <p:spPr>
           <a:xfrm>
-            <a:off x="5266944" y="2766060"/>
-            <a:ext cx="274320" cy="274320"/>
-          </a:xfrm>
-          <a:prstGeom prst="ellipse">
+            <a:off x="5559552" y="2286000"/>
+            <a:ext cx="480609" cy="41148"/>
+          </a:xfrm>
+          <a:prstGeom prst="rect">
             <a:avLst/>
           </a:prstGeom>
           <a:solidFill>
@@ -4375,13 +5180,53 @@
       </p:sp>
       <p:sp>
         <p:nvSpPr>
-          <p:cNvPr id="12" name="Shape 10"/>
+          <p:cNvPr id="21" name="Shape 19"/>
           <p:cNvSpPr/>
           <p:nvPr/>
         </p:nvSpPr>
         <p:spPr>
           <a:xfrm>
-            <a:off x="5358384" y="3086100"/>
+            <a:off x="5559552" y="2286000"/>
+            <a:ext cx="41148" cy="480609"/>
+          </a:xfrm>
+          <a:prstGeom prst="rect">
+            <a:avLst/>
+          </a:prstGeom>
+          <a:solidFill>
+            <a:srgbClr val="FF002B"/>
+          </a:solidFill>
+          <a:ln/>
+        </p:spPr>
+      </p:sp>
+      <p:sp>
+        <p:nvSpPr>
+          <p:cNvPr id="22" name="Shape 20"/>
+          <p:cNvSpPr/>
+          <p:nvPr/>
+        </p:nvSpPr>
+        <p:spPr>
+          <a:xfrm>
+            <a:off x="6284214" y="3040380"/>
+            <a:ext cx="274320" cy="274320"/>
+          </a:xfrm>
+          <a:prstGeom prst="ellipse">
+            <a:avLst/>
+          </a:prstGeom>
+          <a:solidFill>
+            <a:srgbClr val="FF002B"/>
+          </a:solidFill>
+          <a:ln/>
+        </p:spPr>
+      </p:sp>
+      <p:sp>
+        <p:nvSpPr>
+          <p:cNvPr id="23" name="Shape 21"/>
+          <p:cNvSpPr/>
+          <p:nvPr/>
+        </p:nvSpPr>
+        <p:spPr>
+          <a:xfrm>
+            <a:off x="6375654" y="3360420"/>
             <a:ext cx="1005840" cy="685800"/>
           </a:xfrm>
           <a:prstGeom prst="triangle">
@@ -4395,13 +5240,13 @@
       </p:sp>
       <p:sp>
         <p:nvSpPr>
-          <p:cNvPr id="13" name="Shape 11"/>
+          <p:cNvPr id="24" name="Shape 22"/>
           <p:cNvSpPr/>
           <p:nvPr/>
         </p:nvSpPr>
         <p:spPr>
           <a:xfrm>
-            <a:off x="5907024" y="2903220"/>
+            <a:off x="6924294" y="3177540"/>
             <a:ext cx="868680" cy="868680"/>
           </a:xfrm>
           <a:prstGeom prst="triangle">
@@ -4415,14 +5260,14 @@
       </p:sp>
       <p:sp>
         <p:nvSpPr>
-          <p:cNvPr id="14" name="Text 12"/>
-          <p:cNvSpPr txBox="1"/>
-          <p:nvPr/>
-        </p:nvSpPr>
-        <p:spPr>
-          <a:xfrm>
-            <a:off x="4425696" y="3726180"/>
-            <a:ext cx="3236976" cy="274320"/>
+          <p:cNvPr id="25" name="Text 23"/>
+          <p:cNvSpPr txBox="1"/>
+          <p:nvPr/>
+        </p:nvSpPr>
+        <p:spPr>
+          <a:xfrm>
+            <a:off x="5742432" y="4000500"/>
+            <a:ext cx="2638044" cy="274320"/>
           </a:xfrm>
           <a:prstGeom prst="rect">
             <a:avLst/>
@@ -4454,14 +5299,14 @@
       </p:sp>
       <p:sp>
         <p:nvSpPr>
-          <p:cNvPr id="15" name="Text 13"/>
-          <p:cNvSpPr txBox="1"/>
-          <p:nvPr/>
-        </p:nvSpPr>
-        <p:spPr>
-          <a:xfrm>
-            <a:off x="4517136" y="4018788"/>
-            <a:ext cx="3054096" cy="548640"/>
+          <p:cNvPr id="26" name="Text 24"/>
+          <p:cNvSpPr txBox="1"/>
+          <p:nvPr/>
+        </p:nvSpPr>
+        <p:spPr>
+          <a:xfrm>
+            <a:off x="5833872" y="4293108"/>
+            <a:ext cx="2455164" cy="548640"/>
           </a:xfrm>
           <a:prstGeom prst="rect">
             <a:avLst/>
@@ -4496,14 +5341,53 @@
       </p:sp>
       <p:sp>
         <p:nvSpPr>
-          <p:cNvPr id="16" name="Shape 14"/>
+          <p:cNvPr id="27" name="Text 25"/>
+          <p:cNvSpPr txBox="1"/>
+          <p:nvPr/>
+        </p:nvSpPr>
+        <p:spPr>
+          <a:xfrm>
+            <a:off x="8727948" y="1956816"/>
+            <a:ext cx="3003804" cy="274320"/>
+          </a:xfrm>
+          <a:prstGeom prst="rect">
+            <a:avLst/>
+          </a:prstGeom>
+          <a:noFill/>
+          <a:ln/>
+        </p:spPr>
+        <p:txBody>
+          <a:bodyPr wrap="square" lIns="0" tIns="0" rIns="0" bIns="0" rtlCol="0" anchor="ctr"/>
+          <a:lstStyle/>
+          <a:p>
+            <a:pPr indent="0" marL="0">
+              <a:buNone/>
+            </a:pPr>
+            <a:r>
+              <a:rPr lang="en-US" sz="1100" b="1" spc="100" kern="0" dirty="0">
+                <a:solidFill>
+                  <a:srgbClr val="FF002B"/>
+                </a:solidFill>
+                <a:latin typeface="Arial" pitchFamily="34" charset="0"/>
+                <a:ea typeface="Arial" pitchFamily="34" charset="-122"/>
+                <a:cs typeface="Arial" pitchFamily="34" charset="-120"/>
+              </a:rPr>
+              <a:t>SURVIVABILITY / DEFENSIVE</a:t>
+            </a:r>
+            <a:endParaRPr lang="en-US" sz="1100" dirty="0"/>
+          </a:p>
+        </p:txBody>
+      </p:sp>
+      <p:sp>
+        <p:nvSpPr>
+          <p:cNvPr id="28" name="Shape 26"/>
           <p:cNvSpPr/>
           <p:nvPr/>
         </p:nvSpPr>
         <p:spPr>
           <a:xfrm>
-            <a:off x="8028432" y="2148840"/>
-            <a:ext cx="3602736" cy="2788920"/>
+            <a:off x="8727948" y="2286000"/>
+            <a:ext cx="3003804" cy="3063240"/>
           </a:xfrm>
           <a:prstGeom prst="rect">
             <a:avLst/>
@@ -4511,26 +5395,21 @@
           <a:solidFill>
             <a:srgbClr val="1C1D21"/>
           </a:solidFill>
-          <a:ln w="12700">
-            <a:solidFill>
-              <a:srgbClr val="FF002B"/>
-            </a:solidFill>
-            <a:prstDash val="dash"/>
-          </a:ln>
-        </p:spPr>
-      </p:sp>
-      <p:sp>
-        <p:nvSpPr>
-          <p:cNvPr id="17" name="Shape 15"/>
+          <a:ln/>
+        </p:spPr>
+      </p:sp>
+      <p:sp>
+        <p:nvSpPr>
+          <p:cNvPr id="29" name="Shape 27"/>
           <p:cNvSpPr/>
           <p:nvPr/>
         </p:nvSpPr>
         <p:spPr>
           <a:xfrm>
-            <a:off x="9052560" y="2766060"/>
-            <a:ext cx="274320" cy="274320"/>
-          </a:xfrm>
-          <a:prstGeom prst="ellipse">
+            <a:off x="8727948" y="2286000"/>
+            <a:ext cx="480609" cy="41148"/>
+          </a:xfrm>
+          <a:prstGeom prst="rect">
             <a:avLst/>
           </a:prstGeom>
           <a:solidFill>
@@ -4541,13 +5420,53 @@
       </p:sp>
       <p:sp>
         <p:nvSpPr>
-          <p:cNvPr id="18" name="Shape 16"/>
+          <p:cNvPr id="30" name="Shape 28"/>
           <p:cNvSpPr/>
           <p:nvPr/>
         </p:nvSpPr>
         <p:spPr>
           <a:xfrm>
-            <a:off x="9144000" y="3086100"/>
+            <a:off x="8727948" y="2286000"/>
+            <a:ext cx="41148" cy="480609"/>
+          </a:xfrm>
+          <a:prstGeom prst="rect">
+            <a:avLst/>
+          </a:prstGeom>
+          <a:solidFill>
+            <a:srgbClr val="FF002B"/>
+          </a:solidFill>
+          <a:ln/>
+        </p:spPr>
+      </p:sp>
+      <p:sp>
+        <p:nvSpPr>
+          <p:cNvPr id="31" name="Shape 29"/>
+          <p:cNvSpPr/>
+          <p:nvPr/>
+        </p:nvSpPr>
+        <p:spPr>
+          <a:xfrm>
+            <a:off x="9452610" y="3040380"/>
+            <a:ext cx="274320" cy="274320"/>
+          </a:xfrm>
+          <a:prstGeom prst="ellipse">
+            <a:avLst/>
+          </a:prstGeom>
+          <a:solidFill>
+            <a:srgbClr val="FF002B"/>
+          </a:solidFill>
+          <a:ln/>
+        </p:spPr>
+      </p:sp>
+      <p:sp>
+        <p:nvSpPr>
+          <p:cNvPr id="32" name="Shape 30"/>
+          <p:cNvSpPr/>
+          <p:nvPr/>
+        </p:nvSpPr>
+        <p:spPr>
+          <a:xfrm>
+            <a:off x="9544050" y="3360420"/>
             <a:ext cx="1005840" cy="685800"/>
           </a:xfrm>
           <a:prstGeom prst="triangle">
@@ -4561,13 +5480,13 @@
       </p:sp>
       <p:sp>
         <p:nvSpPr>
-          <p:cNvPr id="19" name="Shape 17"/>
+          <p:cNvPr id="33" name="Shape 31"/>
           <p:cNvSpPr/>
           <p:nvPr/>
         </p:nvSpPr>
         <p:spPr>
           <a:xfrm>
-            <a:off x="9692640" y="2903220"/>
+            <a:off x="10092690" y="3177540"/>
             <a:ext cx="868680" cy="868680"/>
           </a:xfrm>
           <a:prstGeom prst="triangle">
@@ -4581,14 +5500,14 @@
       </p:sp>
       <p:sp>
         <p:nvSpPr>
-          <p:cNvPr id="20" name="Text 18"/>
-          <p:cNvSpPr txBox="1"/>
-          <p:nvPr/>
-        </p:nvSpPr>
-        <p:spPr>
-          <a:xfrm>
-            <a:off x="8211312" y="3726180"/>
-            <a:ext cx="3236976" cy="274320"/>
+          <p:cNvPr id="34" name="Text 32"/>
+          <p:cNvSpPr txBox="1"/>
+          <p:nvPr/>
+        </p:nvSpPr>
+        <p:spPr>
+          <a:xfrm>
+            <a:off x="8910828" y="4000500"/>
+            <a:ext cx="2638044" cy="274320"/>
           </a:xfrm>
           <a:prstGeom prst="rect">
             <a:avLst/>
@@ -4620,14 +5539,14 @@
       </p:sp>
       <p:sp>
         <p:nvSpPr>
-          <p:cNvPr id="21" name="Text 19"/>
-          <p:cNvSpPr txBox="1"/>
-          <p:nvPr/>
-        </p:nvSpPr>
-        <p:spPr>
-          <a:xfrm>
-            <a:off x="8302752" y="4018788"/>
-            <a:ext cx="3054096" cy="548640"/>
+          <p:cNvPr id="35" name="Text 33"/>
+          <p:cNvSpPr txBox="1"/>
+          <p:nvPr/>
+        </p:nvSpPr>
+        <p:spPr>
+          <a:xfrm>
+            <a:off x="9002268" y="4293108"/>
+            <a:ext cx="2455164" cy="548640"/>
           </a:xfrm>
           <a:prstGeom prst="rect">
             <a:avLst/>
@@ -4662,130 +5581,13 @@
       </p:sp>
       <p:sp>
         <p:nvSpPr>
-          <p:cNvPr id="22" name="Text 20"/>
-          <p:cNvSpPr txBox="1"/>
-          <p:nvPr/>
-        </p:nvSpPr>
-        <p:spPr>
-          <a:xfrm>
-            <a:off x="457200" y="1801368"/>
-            <a:ext cx="3602736" cy="292608"/>
-          </a:xfrm>
-          <a:prstGeom prst="rect">
-            <a:avLst/>
-          </a:prstGeom>
-          <a:noFill/>
-          <a:ln/>
-        </p:spPr>
-        <p:txBody>
-          <a:bodyPr wrap="square" lIns="0" tIns="0" rIns="0" bIns="0" rtlCol="0" anchor="ctr"/>
-          <a:lstStyle/>
-          <a:p>
-            <a:pPr algn="ctr" indent="0" marL="0">
-              <a:buNone/>
-            </a:pPr>
-            <a:r>
-              <a:rPr lang="en-US" sz="1100" b="1" spc="100" kern="0" dirty="0">
-                <a:solidFill>
-                  <a:srgbClr val="FF002B"/>
-                </a:solidFill>
-                <a:latin typeface="Arial" pitchFamily="34" charset="0"/>
-                <a:ea typeface="Arial" pitchFamily="34" charset="-122"/>
-                <a:cs typeface="Arial" pitchFamily="34" charset="-120"/>
-              </a:rPr>
-              <a:t>LIVE-FIRE / SMALL-ARMS</a:t>
-            </a:r>
-            <a:endParaRPr lang="en-US" sz="1100" dirty="0"/>
-          </a:p>
-        </p:txBody>
-      </p:sp>
-      <p:sp>
-        <p:nvSpPr>
-          <p:cNvPr id="23" name="Text 21"/>
-          <p:cNvSpPr txBox="1"/>
-          <p:nvPr/>
-        </p:nvSpPr>
-        <p:spPr>
-          <a:xfrm>
-            <a:off x="4242816" y="1801368"/>
-            <a:ext cx="3602736" cy="292608"/>
-          </a:xfrm>
-          <a:prstGeom prst="rect">
-            <a:avLst/>
-          </a:prstGeom>
-          <a:noFill/>
-          <a:ln/>
-        </p:spPr>
-        <p:txBody>
-          <a:bodyPr wrap="square" lIns="0" tIns="0" rIns="0" bIns="0" rtlCol="0" anchor="ctr"/>
-          <a:lstStyle/>
-          <a:p>
-            <a:pPr algn="ctr" indent="0" marL="0">
-              <a:buNone/>
-            </a:pPr>
-            <a:r>
-              <a:rPr lang="en-US" sz="1100" b="1" spc="100" kern="0" dirty="0">
-                <a:solidFill>
-                  <a:srgbClr val="FF002B"/>
-                </a:solidFill>
-                <a:latin typeface="Arial" pitchFamily="34" charset="0"/>
-                <a:ea typeface="Arial" pitchFamily="34" charset="-122"/>
-                <a:cs typeface="Arial" pitchFamily="34" charset="-120"/>
-              </a:rPr>
-              <a:t>TACTICAL &amp; SCENARIO</a:t>
-            </a:r>
-            <a:endParaRPr lang="en-US" sz="1100" dirty="0"/>
-          </a:p>
-        </p:txBody>
-      </p:sp>
-      <p:sp>
-        <p:nvSpPr>
-          <p:cNvPr id="24" name="Text 22"/>
-          <p:cNvSpPr txBox="1"/>
-          <p:nvPr/>
-        </p:nvSpPr>
-        <p:spPr>
-          <a:xfrm>
-            <a:off x="8028432" y="1801368"/>
-            <a:ext cx="3602736" cy="292608"/>
-          </a:xfrm>
-          <a:prstGeom prst="rect">
-            <a:avLst/>
-          </a:prstGeom>
-          <a:noFill/>
-          <a:ln/>
-        </p:spPr>
-        <p:txBody>
-          <a:bodyPr wrap="square" lIns="0" tIns="0" rIns="0" bIns="0" rtlCol="0" anchor="ctr"/>
-          <a:lstStyle/>
-          <a:p>
-            <a:pPr algn="ctr" indent="0" marL="0">
-              <a:buNone/>
-            </a:pPr>
-            <a:r>
-              <a:rPr lang="en-US" sz="1100" b="1" spc="100" kern="0" dirty="0">
-                <a:solidFill>
-                  <a:srgbClr val="FF002B"/>
-                </a:solidFill>
-                <a:latin typeface="Arial" pitchFamily="34" charset="0"/>
-                <a:ea typeface="Arial" pitchFamily="34" charset="-122"/>
-                <a:cs typeface="Arial" pitchFamily="34" charset="-120"/>
-              </a:rPr>
-              <a:t>SURVIVABILITY / DEFENSIVE TACTICS</a:t>
-            </a:r>
-            <a:endParaRPr lang="en-US" sz="1100" dirty="0"/>
-          </a:p>
-        </p:txBody>
-      </p:sp>
-      <p:sp>
-        <p:nvSpPr>
-          <p:cNvPr id="25" name="Text 23"/>
-          <p:cNvSpPr txBox="1"/>
-          <p:nvPr/>
-        </p:nvSpPr>
-        <p:spPr>
-          <a:xfrm>
-            <a:off x="457200" y="5102352"/>
+          <p:cNvPr id="36" name="Text 34"/>
+          <p:cNvSpPr txBox="1"/>
+          <p:nvPr/>
+        </p:nvSpPr>
+        <p:spPr>
+          <a:xfrm>
+            <a:off x="457200" y="5532120"/>
             <a:ext cx="11274552" cy="502920"/>
           </a:xfrm>
           <a:prstGeom prst="rect">
@@ -4802,7 +5604,7 @@
               <a:buNone/>
             </a:pPr>
             <a:r>
-              <a:rPr lang="en-US" sz="1250" i="1" dirty="0">
+              <a:rPr lang="en-US" sz="1200" i="1" dirty="0">
                 <a:solidFill>
                   <a:srgbClr val="F5F5F3"/>
                 </a:solidFill>
@@ -4812,19 +5614,19 @@
               </a:rPr>
               <a:t>Delivered at allied ranges CONUS/OCONUS  —  small-arms platforms M9 / M4 / M500 / M18 / M14  —  DIA, FBI, Military Sealift Command, and U.S. Navy training programs</a:t>
             </a:r>
-            <a:endParaRPr lang="en-US" sz="1250" dirty="0"/>
-          </a:p>
-        </p:txBody>
-      </p:sp>
-      <p:sp>
-        <p:nvSpPr>
-          <p:cNvPr id="26" name="Shape 24"/>
+            <a:endParaRPr lang="en-US" sz="1200" dirty="0"/>
+          </a:p>
+        </p:txBody>
+      </p:sp>
+      <p:sp>
+        <p:nvSpPr>
+          <p:cNvPr id="37" name="Shape 35"/>
           <p:cNvSpPr/>
           <p:nvPr/>
         </p:nvSpPr>
         <p:spPr>
           <a:xfrm>
-            <a:off x="9217152" y="6473952"/>
+            <a:off x="9217152" y="6492240"/>
             <a:ext cx="2514600" cy="274320"/>
           </a:xfrm>
           <a:prstGeom prst="roundRect">
@@ -4842,13 +5644,13 @@
       </p:sp>
       <p:sp>
         <p:nvSpPr>
-          <p:cNvPr id="27" name="Text 25"/>
-          <p:cNvSpPr txBox="1"/>
-          <p:nvPr/>
-        </p:nvSpPr>
-        <p:spPr>
-          <a:xfrm>
-            <a:off x="9217152" y="6473952"/>
+          <p:cNvPr id="38" name="Text 36"/>
+          <p:cNvSpPr txBox="1"/>
+          <p:nvPr/>
+        </p:nvSpPr>
+        <p:spPr>
+          <a:xfrm>
+            <a:off x="9217152" y="6492240"/>
             <a:ext cx="2514600" cy="274320"/>
           </a:xfrm>
           <a:prstGeom prst="rect">
@@ -4895,13 +5697,13 @@
       </p:sp>
       <p:sp>
         <p:nvSpPr>
-          <p:cNvPr id="28" name="Text 26"/>
-          <p:cNvSpPr txBox="1"/>
-          <p:nvPr/>
-        </p:nvSpPr>
-        <p:spPr>
-          <a:xfrm>
-            <a:off x="457200" y="6473952"/>
+          <p:cNvPr id="39" name="Text 37"/>
+          <p:cNvSpPr txBox="1"/>
+          <p:nvPr/>
+        </p:nvSpPr>
+        <p:spPr>
+          <a:xfrm>
+            <a:off x="457200" y="6492240"/>
             <a:ext cx="7772400" cy="274320"/>
           </a:xfrm>
           <a:prstGeom prst="rect">
@@ -4972,31 +5774,188 @@
         </p:nvSpPr>
         <p:spPr>
           <a:xfrm>
-            <a:off x="457200" y="457200"/>
-            <a:ext cx="7315200" cy="320040"/>
-          </a:xfrm>
-          <a:prstGeom prst="rect">
-            <a:avLst/>
-          </a:prstGeom>
-          <a:noFill/>
-          <a:ln/>
-        </p:spPr>
-        <p:txBody>
-          <a:bodyPr wrap="square" lIns="0" tIns="0" rIns="0" bIns="0" rtlCol="0" anchor="ctr"/>
-          <a:lstStyle/>
-          <a:p>
-            <a:pPr algn="l" indent="0" marL="0">
-              <a:buNone/>
-            </a:pPr>
-            <a:r>
-              <a:rPr lang="en-US" sz="1100" b="1" spc="150" kern="0" dirty="0">
-                <a:solidFill>
-                  <a:srgbClr val="FF002B"/>
+            <a:off x="6949440" y="0"/>
+            <a:ext cx="5486400" cy="6858000"/>
+          </a:xfrm>
+          <a:prstGeom prst="rect">
+            <a:avLst/>
+          </a:prstGeom>
+          <a:noFill/>
+          <a:ln/>
+        </p:spPr>
+        <p:txBody>
+          <a:bodyPr wrap="square" lIns="0" tIns="0" rIns="0" bIns="0" rtlCol="0" anchor="t"/>
+          <a:lstStyle/>
+          <a:p>
+            <a:pPr algn="r" indent="0" marL="0">
+              <a:buNone/>
+            </a:pPr>
+            <a:r>
+              <a:rPr lang="en-US" sz="36000" b="1" dirty="0">
+                <a:solidFill>
+                  <a:srgbClr val="141414"/>
+                </a:solidFill>
+                <a:latin typeface="Bookman Old Style" pitchFamily="34" charset="0"/>
+                <a:ea typeface="Bookman Old Style" pitchFamily="34" charset="-122"/>
+                <a:cs typeface="Bookman Old Style" pitchFamily="34" charset="-120"/>
+              </a:rPr>
+              <a:t>05</a:t>
+            </a:r>
+            <a:endParaRPr lang="en-US" sz="36000" dirty="0"/>
+          </a:p>
+        </p:txBody>
+      </p:sp>
+      <p:sp>
+        <p:nvSpPr>
+          <p:cNvPr id="3" name="Shape 1"/>
+          <p:cNvSpPr/>
+          <p:nvPr/>
+        </p:nvSpPr>
+        <p:spPr>
+          <a:xfrm>
+            <a:off x="457200" y="384048"/>
+            <a:ext cx="310896" cy="29261"/>
+          </a:xfrm>
+          <a:prstGeom prst="rect">
+            <a:avLst/>
+          </a:prstGeom>
+          <a:solidFill>
+            <a:srgbClr val="FF002B"/>
+          </a:solidFill>
+          <a:ln/>
+        </p:spPr>
+      </p:sp>
+      <p:sp>
+        <p:nvSpPr>
+          <p:cNvPr id="4" name="Shape 2"/>
+          <p:cNvSpPr/>
+          <p:nvPr/>
+        </p:nvSpPr>
+        <p:spPr>
+          <a:xfrm>
+            <a:off x="457200" y="384048"/>
+            <a:ext cx="29261" cy="310896"/>
+          </a:xfrm>
+          <a:prstGeom prst="rect">
+            <a:avLst/>
+          </a:prstGeom>
+          <a:solidFill>
+            <a:srgbClr val="FF002B"/>
+          </a:solidFill>
+          <a:ln/>
+        </p:spPr>
+      </p:sp>
+      <p:sp>
+        <p:nvSpPr>
+          <p:cNvPr id="5" name="Text 3"/>
+          <p:cNvSpPr txBox="1"/>
+          <p:nvPr/>
+        </p:nvSpPr>
+        <p:spPr>
+          <a:xfrm>
+            <a:off x="896112" y="329184"/>
+            <a:ext cx="2926080" cy="292608"/>
+          </a:xfrm>
+          <a:prstGeom prst="rect">
+            <a:avLst/>
+          </a:prstGeom>
+          <a:noFill/>
+          <a:ln/>
+        </p:spPr>
+        <p:txBody>
+          <a:bodyPr wrap="square" lIns="0" tIns="0" rIns="0" bIns="0" rtlCol="0" anchor="ctr"/>
+          <a:lstStyle/>
+          <a:p>
+            <a:pPr indent="0" marL="0">
+              <a:buNone/>
+            </a:pPr>
+            <a:r>
+              <a:rPr lang="en-US" sz="1500" b="1" spc="200" kern="0" dirty="0">
+                <a:solidFill>
+                  <a:srgbClr val="FFFFFF"/>
                 </a:solidFill>
                 <a:latin typeface="Arial" pitchFamily="34" charset="0"/>
                 <a:ea typeface="Arial" pitchFamily="34" charset="-122"/>
                 <a:cs typeface="Arial" pitchFamily="34" charset="-120"/>
               </a:rPr>
+              <a:t>VALLETTA</a:t>
+            </a:r>
+            <a:endParaRPr lang="en-US" sz="1500" dirty="0"/>
+          </a:p>
+        </p:txBody>
+      </p:sp>
+      <p:sp>
+        <p:nvSpPr>
+          <p:cNvPr id="6" name="Text 4"/>
+          <p:cNvSpPr txBox="1"/>
+          <p:nvPr/>
+        </p:nvSpPr>
+        <p:spPr>
+          <a:xfrm>
+            <a:off x="896112" y="603504"/>
+            <a:ext cx="2926080" cy="219456"/>
+          </a:xfrm>
+          <a:prstGeom prst="rect">
+            <a:avLst/>
+          </a:prstGeom>
+          <a:noFill/>
+          <a:ln/>
+        </p:spPr>
+        <p:txBody>
+          <a:bodyPr wrap="square" lIns="0" tIns="0" rIns="0" bIns="0" rtlCol="0" anchor="ctr"/>
+          <a:lstStyle/>
+          <a:p>
+            <a:pPr indent="0" marL="0">
+              <a:buNone/>
+            </a:pPr>
+            <a:r>
+              <a:rPr lang="en-US" sz="750" b="1" spc="200" kern="0" dirty="0">
+                <a:solidFill>
+                  <a:srgbClr val="5B5F66"/>
+                </a:solidFill>
+                <a:latin typeface="Arial" pitchFamily="34" charset="0"/>
+                <a:ea typeface="Arial" pitchFamily="34" charset="-122"/>
+                <a:cs typeface="Arial" pitchFamily="34" charset="-120"/>
+              </a:rPr>
+              <a:t>INDUSTRIES, INC.</a:t>
+            </a:r>
+            <a:endParaRPr lang="en-US" sz="750" dirty="0"/>
+          </a:p>
+        </p:txBody>
+      </p:sp>
+      <p:sp>
+        <p:nvSpPr>
+          <p:cNvPr id="7" name="Text 5"/>
+          <p:cNvSpPr txBox="1"/>
+          <p:nvPr/>
+        </p:nvSpPr>
+        <p:spPr>
+          <a:xfrm>
+            <a:off x="457200" y="777240"/>
+            <a:ext cx="7315200" cy="320040"/>
+          </a:xfrm>
+          <a:prstGeom prst="rect">
+            <a:avLst/>
+          </a:prstGeom>
+          <a:noFill/>
+          <a:ln/>
+        </p:spPr>
+        <p:txBody>
+          <a:bodyPr wrap="square" lIns="0" tIns="0" rIns="0" bIns="0" rtlCol="0" anchor="ctr"/>
+          <a:lstStyle/>
+          <a:p>
+            <a:pPr algn="l" indent="0" marL="0">
+              <a:buNone/>
+            </a:pPr>
+            <a:r>
+              <a:rPr lang="en-US" sz="1100" b="1" spc="150" kern="0" dirty="0">
+                <a:solidFill>
+                  <a:srgbClr val="FF002B"/>
+                </a:solidFill>
+                <a:latin typeface="Arial" pitchFamily="34" charset="0"/>
+                <a:ea typeface="Arial" pitchFamily="34" charset="-122"/>
+                <a:cs typeface="Arial" pitchFamily="34" charset="-120"/>
+              </a:rPr>
               <a:t>FEATURED CAPABILITY</a:t>
             </a:r>
             <a:endParaRPr lang="en-US" sz="1100" dirty="0"/>
@@ -5005,14 +5964,14 @@
       </p:sp>
       <p:sp>
         <p:nvSpPr>
-          <p:cNvPr id="3" name="Text 1"/>
-          <p:cNvSpPr txBox="1"/>
-          <p:nvPr/>
-        </p:nvSpPr>
-        <p:spPr>
-          <a:xfrm>
-            <a:off x="457200" y="777240"/>
-            <a:ext cx="11274552" cy="685800"/>
+          <p:cNvPr id="8" name="Text 6"/>
+          <p:cNvSpPr txBox="1"/>
+          <p:nvPr/>
+        </p:nvSpPr>
+        <p:spPr>
+          <a:xfrm>
+            <a:off x="457200" y="1097280"/>
+            <a:ext cx="7315200" cy="731520"/>
           </a:xfrm>
           <a:prstGeom prst="rect">
             <a:avLst/>
@@ -5028,7 +5987,7 @@
               <a:buNone/>
             </a:pPr>
             <a:r>
-              <a:rPr lang="en-US" sz="2700" b="1" dirty="0">
+              <a:rPr lang="en-US" sz="3800" b="1" dirty="0">
                 <a:solidFill>
                   <a:srgbClr val="FFFFFF"/>
                 </a:solidFill>
@@ -5036,24 +5995,83 @@
                 <a:ea typeface="Bookman Old Style" pitchFamily="34" charset="-122"/>
                 <a:cs typeface="Bookman Old Style" pitchFamily="34" charset="-120"/>
               </a:rPr>
-              <a:t>MISSION PROTECT — A DOI-Owned Digital Training Pathway</a:t>
-            </a:r>
-            <a:endParaRPr lang="en-US" sz="2700" dirty="0"/>
-          </a:p>
-        </p:txBody>
-      </p:sp>
-      <p:sp>
-        <p:nvSpPr>
-          <p:cNvPr id="4" name="Shape 2"/>
+              <a:t>MISSION PROTECT</a:t>
+            </a:r>
+            <a:endParaRPr lang="en-US" sz="3800" dirty="0"/>
+          </a:p>
+        </p:txBody>
+      </p:sp>
+      <p:sp>
+        <p:nvSpPr>
+          <p:cNvPr id="9" name="Text 7"/>
+          <p:cNvSpPr txBox="1"/>
+          <p:nvPr/>
+        </p:nvSpPr>
+        <p:spPr>
+          <a:xfrm>
+            <a:off x="457200" y="1828800"/>
+            <a:ext cx="7315200" cy="320040"/>
+          </a:xfrm>
+          <a:prstGeom prst="rect">
+            <a:avLst/>
+          </a:prstGeom>
+          <a:noFill/>
+          <a:ln/>
+        </p:spPr>
+        <p:txBody>
+          <a:bodyPr wrap="square" lIns="0" tIns="0" rIns="0" bIns="0" rtlCol="0" anchor="ctr"/>
+          <a:lstStyle/>
+          <a:p>
+            <a:pPr indent="0" marL="0">
+              <a:buNone/>
+            </a:pPr>
+            <a:r>
+              <a:rPr lang="en-US" sz="1300" b="1" spc="150" kern="0" dirty="0">
+                <a:solidFill>
+                  <a:srgbClr val="FF002B"/>
+                </a:solidFill>
+                <a:latin typeface="Arial" pitchFamily="34" charset="0"/>
+                <a:ea typeface="Arial" pitchFamily="34" charset="-122"/>
+                <a:cs typeface="Arial" pitchFamily="34" charset="-120"/>
+              </a:rPr>
+              <a:t>A DOI-OWNED DIGITAL TRAINING PATHWAY</a:t>
+            </a:r>
+            <a:endParaRPr lang="en-US" sz="1300" dirty="0"/>
+          </a:p>
+        </p:txBody>
+      </p:sp>
+      <p:sp>
+        <p:nvSpPr>
+          <p:cNvPr id="10" name="Shape 8"/>
           <p:cNvSpPr/>
           <p:nvPr/>
         </p:nvSpPr>
         <p:spPr>
           <a:xfrm>
-            <a:off x="457200" y="1783080"/>
-            <a:ext cx="1051560" cy="1051560"/>
-          </a:xfrm>
-          <a:prstGeom prst="ellipse">
+            <a:off x="5989320" y="2331720"/>
+            <a:ext cx="5742432" cy="3749040"/>
+          </a:xfrm>
+          <a:prstGeom prst="rect">
+            <a:avLst/>
+          </a:prstGeom>
+          <a:solidFill>
+            <a:srgbClr val="1C1D21"/>
+          </a:solidFill>
+          <a:ln/>
+        </p:spPr>
+      </p:sp>
+      <p:sp>
+        <p:nvSpPr>
+          <p:cNvPr id="11" name="Shape 9"/>
+          <p:cNvSpPr/>
+          <p:nvPr/>
+        </p:nvSpPr>
+        <p:spPr>
+          <a:xfrm>
+            <a:off x="5989320" y="2331720"/>
+            <a:ext cx="502920" cy="41148"/>
+          </a:xfrm>
+          <a:prstGeom prst="rect">
             <a:avLst/>
           </a:prstGeom>
           <a:solidFill>
@@ -5064,14 +6082,94 @@
       </p:sp>
       <p:sp>
         <p:nvSpPr>
-          <p:cNvPr id="5" name="Text 3"/>
-          <p:cNvSpPr txBox="1"/>
-          <p:nvPr/>
-        </p:nvSpPr>
-        <p:spPr>
-          <a:xfrm>
-            <a:off x="457200" y="1783080"/>
-            <a:ext cx="1051560" cy="1051560"/>
+          <p:cNvPr id="12" name="Shape 10"/>
+          <p:cNvSpPr/>
+          <p:nvPr/>
+        </p:nvSpPr>
+        <p:spPr>
+          <a:xfrm>
+            <a:off x="5989320" y="2331720"/>
+            <a:ext cx="41148" cy="502920"/>
+          </a:xfrm>
+          <a:prstGeom prst="rect">
+            <a:avLst/>
+          </a:prstGeom>
+          <a:solidFill>
+            <a:srgbClr val="FF002B"/>
+          </a:solidFill>
+          <a:ln/>
+        </p:spPr>
+      </p:sp>
+      <p:sp>
+        <p:nvSpPr>
+          <p:cNvPr id="13" name="Shape 11"/>
+          <p:cNvSpPr/>
+          <p:nvPr/>
+        </p:nvSpPr>
+        <p:spPr>
+          <a:xfrm>
+            <a:off x="8083296" y="3429000"/>
+            <a:ext cx="274320" cy="274320"/>
+          </a:xfrm>
+          <a:prstGeom prst="ellipse">
+            <a:avLst/>
+          </a:prstGeom>
+          <a:solidFill>
+            <a:srgbClr val="FF002B"/>
+          </a:solidFill>
+          <a:ln/>
+        </p:spPr>
+      </p:sp>
+      <p:sp>
+        <p:nvSpPr>
+          <p:cNvPr id="14" name="Shape 12"/>
+          <p:cNvSpPr/>
+          <p:nvPr/>
+        </p:nvSpPr>
+        <p:spPr>
+          <a:xfrm>
+            <a:off x="8174736" y="3749040"/>
+            <a:ext cx="1005840" cy="685800"/>
+          </a:xfrm>
+          <a:prstGeom prst="triangle">
+            <a:avLst/>
+          </a:prstGeom>
+          <a:solidFill>
+            <a:srgbClr val="D8D9DB"/>
+          </a:solidFill>
+          <a:ln/>
+        </p:spPr>
+      </p:sp>
+      <p:sp>
+        <p:nvSpPr>
+          <p:cNvPr id="15" name="Shape 13"/>
+          <p:cNvSpPr/>
+          <p:nvPr/>
+        </p:nvSpPr>
+        <p:spPr>
+          <a:xfrm>
+            <a:off x="8723376" y="3566160"/>
+            <a:ext cx="868680" cy="868680"/>
+          </a:xfrm>
+          <a:prstGeom prst="triangle">
+            <a:avLst/>
+          </a:prstGeom>
+          <a:solidFill>
+            <a:srgbClr val="D8D9DB"/>
+          </a:solidFill>
+          <a:ln/>
+        </p:spPr>
+      </p:sp>
+      <p:sp>
+        <p:nvSpPr>
+          <p:cNvPr id="16" name="Text 14"/>
+          <p:cNvSpPr txBox="1"/>
+          <p:nvPr/>
+        </p:nvSpPr>
+        <p:spPr>
+          <a:xfrm>
+            <a:off x="6172200" y="4389120"/>
+            <a:ext cx="5376672" cy="274320"/>
           </a:xfrm>
           <a:prstGeom prst="rect">
             <a:avLst/>
@@ -5087,7 +6185,113 @@
               <a:buNone/>
             </a:pPr>
             <a:r>
-              <a:rPr lang="en-US" sz="3000" b="1" dirty="0">
+              <a:rPr lang="en-US" sz="1000" b="1" spc="100" kern="0" dirty="0">
+                <a:solidFill>
+                  <a:srgbClr val="FF002B"/>
+                </a:solidFill>
+                <a:latin typeface="Arial" pitchFamily="34" charset="0"/>
+                <a:ea typeface="Arial" pitchFamily="34" charset="-122"/>
+                <a:cs typeface="Arial" pitchFamily="34" charset="-120"/>
+              </a:rPr>
+              <a:t>PLACEHOLDER IMAGE</a:t>
+            </a:r>
+            <a:endParaRPr lang="en-US" sz="1000" dirty="0"/>
+          </a:p>
+        </p:txBody>
+      </p:sp>
+      <p:sp>
+        <p:nvSpPr>
+          <p:cNvPr id="17" name="Text 15"/>
+          <p:cNvSpPr txBox="1"/>
+          <p:nvPr/>
+        </p:nvSpPr>
+        <p:spPr>
+          <a:xfrm>
+            <a:off x="6263640" y="4681728"/>
+            <a:ext cx="5193792" cy="548640"/>
+          </a:xfrm>
+          <a:prstGeom prst="rect">
+            <a:avLst/>
+          </a:prstGeom>
+          <a:noFill/>
+          <a:ln/>
+        </p:spPr>
+        <p:txBody>
+          <a:bodyPr wrap="square" lIns="0" tIns="0" rIns="0" bIns="0" rtlCol="0" anchor="ctr"/>
+          <a:lstStyle/>
+          <a:p>
+            <a:pPr algn="ctr" indent="0" marL="0">
+              <a:lnSpc>
+                <a:spcPct val="110000"/>
+              </a:lnSpc>
+              <a:buNone/>
+            </a:pPr>
+            <a:r>
+              <a:rPr lang="en-US" sz="1000" i="1" dirty="0">
+                <a:solidFill>
+                  <a:srgbClr val="D8D9DB"/>
+                </a:solidFill>
+                <a:latin typeface="Calibri" pitchFamily="34" charset="0"/>
+                <a:ea typeface="Calibri" pitchFamily="34" charset="-122"/>
+                <a:cs typeface="Calibri" pitchFamily="34" charset="-120"/>
+              </a:rPr>
+              <a:t>Mission Protect LMS / product screenshot — provided by Valletta</a:t>
+            </a:r>
+            <a:endParaRPr lang="en-US" sz="1000" dirty="0"/>
+          </a:p>
+        </p:txBody>
+      </p:sp>
+      <p:sp>
+        <p:nvSpPr>
+          <p:cNvPr id="18" name="Shape 16"/>
+          <p:cNvSpPr/>
+          <p:nvPr/>
+        </p:nvSpPr>
+        <p:spPr>
+          <a:xfrm>
+            <a:off x="5257800" y="3246120"/>
+            <a:ext cx="1417320" cy="1417320"/>
+          </a:xfrm>
+          <a:prstGeom prst="ellipse">
+            <a:avLst/>
+          </a:prstGeom>
+          <a:solidFill>
+            <a:srgbClr val="FF002B"/>
+          </a:solidFill>
+          <a:ln w="50800">
+            <a:solidFill>
+              <a:srgbClr val="0A0A0A"/>
+            </a:solidFill>
+            <a:prstDash val="solid"/>
+          </a:ln>
+        </p:spPr>
+      </p:sp>
+      <p:sp>
+        <p:nvSpPr>
+          <p:cNvPr id="19" name="Text 17"/>
+          <p:cNvSpPr txBox="1"/>
+          <p:nvPr/>
+        </p:nvSpPr>
+        <p:spPr>
+          <a:xfrm>
+            <a:off x="5257800" y="3246120"/>
+            <a:ext cx="1417320" cy="1417320"/>
+          </a:xfrm>
+          <a:prstGeom prst="rect">
+            <a:avLst/>
+          </a:prstGeom>
+          <a:noFill/>
+          <a:ln/>
+        </p:spPr>
+        <p:txBody>
+          <a:bodyPr wrap="square" lIns="0" tIns="0" rIns="0" bIns="0" rtlCol="0" anchor="ctr"/>
+          <a:lstStyle/>
+          <a:p>
+            <a:pPr algn="ctr" indent="0" marL="0">
+              <a:buNone/>
+            </a:pPr>
+            <a:r>
+              <a:rPr lang="en-US" sz="3400" b="1" dirty="0">
                 <a:solidFill>
                   <a:srgbClr val="FFFFFF"/>
                 </a:solidFill>
@@ -5097,20 +6301,20 @@
               </a:rPr>
               <a:t>MP</a:t>
             </a:r>
-            <a:endParaRPr lang="en-US" sz="3000" dirty="0"/>
-          </a:p>
-        </p:txBody>
-      </p:sp>
-      <p:sp>
-        <p:nvSpPr>
-          <p:cNvPr id="6" name="Text 4"/>
-          <p:cNvSpPr txBox="1"/>
-          <p:nvPr/>
-        </p:nvSpPr>
-        <p:spPr>
-          <a:xfrm>
-            <a:off x="1737360" y="1783080"/>
-            <a:ext cx="4297680" cy="1371600"/>
+            <a:endParaRPr lang="en-US" sz="3400" dirty="0"/>
+          </a:p>
+        </p:txBody>
+      </p:sp>
+      <p:sp>
+        <p:nvSpPr>
+          <p:cNvPr id="20" name="Text 18"/>
+          <p:cNvSpPr txBox="1"/>
+          <p:nvPr/>
+        </p:nvSpPr>
+        <p:spPr>
+          <a:xfrm>
+            <a:off x="457200" y="2331720"/>
+            <a:ext cx="5120640" cy="1417320"/>
           </a:xfrm>
           <a:prstGeom prst="rect">
             <a:avLst/>
@@ -5145,34 +6349,14 @@
       </p:sp>
       <p:sp>
         <p:nvSpPr>
-          <p:cNvPr id="7" name="Shape 5"/>
-          <p:cNvSpPr/>
-          <p:nvPr/>
-        </p:nvSpPr>
-        <p:spPr>
-          <a:xfrm>
-            <a:off x="457200" y="3456432"/>
-            <a:ext cx="274320" cy="274320"/>
-          </a:xfrm>
-          <a:prstGeom prst="ellipse">
-            <a:avLst/>
-          </a:prstGeom>
-          <a:solidFill>
-            <a:srgbClr val="FF002B"/>
-          </a:solidFill>
-          <a:ln/>
-        </p:spPr>
-      </p:sp>
-      <p:sp>
-        <p:nvSpPr>
-          <p:cNvPr id="8" name="Text 6"/>
-          <p:cNvSpPr txBox="1"/>
-          <p:nvPr/>
-        </p:nvSpPr>
-        <p:spPr>
-          <a:xfrm>
-            <a:off x="914400" y="3383280"/>
-            <a:ext cx="5120640" cy="320040"/>
+          <p:cNvPr id="21" name="Text 19"/>
+          <p:cNvSpPr txBox="1"/>
+          <p:nvPr/>
+        </p:nvSpPr>
+        <p:spPr>
+          <a:xfrm>
+            <a:off x="457200" y="4069080"/>
+            <a:ext cx="5120640" cy="274320"/>
           </a:xfrm>
           <a:prstGeom prst="rect">
             <a:avLst/>
@@ -5188,7 +6372,7 @@
               <a:buNone/>
             </a:pPr>
             <a:r>
-              <a:rPr lang="en-US" sz="1150" b="1" spc="50" kern="0" dirty="0">
+              <a:rPr lang="en-US" sz="1050" b="1" spc="50" kern="0" dirty="0">
                 <a:solidFill>
                   <a:srgbClr val="FFFFFF"/>
                 </a:solidFill>
@@ -5198,20 +6382,20 @@
               </a:rPr>
               <a:t>STANDARDS-BASED INTEROPERABILITY</a:t>
             </a:r>
-            <a:endParaRPr lang="en-US" sz="1150" dirty="0"/>
-          </a:p>
-        </p:txBody>
-      </p:sp>
-      <p:sp>
-        <p:nvSpPr>
-          <p:cNvPr id="9" name="Text 7"/>
-          <p:cNvSpPr txBox="1"/>
-          <p:nvPr/>
-        </p:nvSpPr>
-        <p:spPr>
-          <a:xfrm>
-            <a:off x="914400" y="3685032"/>
-            <a:ext cx="5120640" cy="594360"/>
+            <a:endParaRPr lang="en-US" sz="1050" dirty="0"/>
+          </a:p>
+        </p:txBody>
+      </p:sp>
+      <p:sp>
+        <p:nvSpPr>
+          <p:cNvPr id="22" name="Text 20"/>
+          <p:cNvSpPr txBox="1"/>
+          <p:nvPr/>
+        </p:nvSpPr>
+        <p:spPr>
+          <a:xfrm>
+            <a:off x="457200" y="4325112"/>
+            <a:ext cx="5120640" cy="411480"/>
           </a:xfrm>
           <a:prstGeom prst="rect">
             <a:avLst/>
@@ -5225,12 +6409,12 @@
           <a:p>
             <a:pPr indent="0" marL="0">
               <a:lnSpc>
-                <a:spcPct val="115000"/>
+                <a:spcPct val="110000"/>
               </a:lnSpc>
               <a:buNone/>
             </a:pPr>
             <a:r>
-              <a:rPr lang="en-US" sz="1050" dirty="0">
+              <a:rPr lang="en-US" sz="950" dirty="0">
                 <a:solidFill>
                   <a:srgbClr val="D8D9DB"/>
                 </a:solidFill>
@@ -5238,42 +6422,45 @@
                 <a:ea typeface="Calibri" pitchFamily="34" charset="-122"/>
                 <a:cs typeface="Calibri" pitchFamily="34" charset="-120"/>
               </a:rPr>
-              <a:t>Architecture designed for SCORM, xAPI, AICC, and IMS QTI — portable across compatible learning environments.</a:t>
-            </a:r>
-            <a:endParaRPr lang="en-US" sz="1050" dirty="0"/>
-          </a:p>
-        </p:txBody>
-      </p:sp>
-      <p:sp>
-        <p:nvSpPr>
-          <p:cNvPr id="10" name="Shape 8"/>
+              <a:t>Designed for SCORM, xAPI, AICC, and IMS QTI — portable across compatible learning environments.</a:t>
+            </a:r>
+            <a:endParaRPr lang="en-US" sz="950" dirty="0"/>
+          </a:p>
+        </p:txBody>
+      </p:sp>
+      <p:sp>
+        <p:nvSpPr>
+          <p:cNvPr id="23" name="Shape 21"/>
           <p:cNvSpPr/>
           <p:nvPr/>
         </p:nvSpPr>
         <p:spPr>
           <a:xfrm>
-            <a:off x="457200" y="4489704"/>
-            <a:ext cx="274320" cy="274320"/>
-          </a:xfrm>
-          <a:prstGeom prst="ellipse">
-            <a:avLst/>
-          </a:prstGeom>
-          <a:solidFill>
-            <a:srgbClr val="FF002B"/>
-          </a:solidFill>
-          <a:ln/>
-        </p:spPr>
-      </p:sp>
-      <p:sp>
-        <p:nvSpPr>
-          <p:cNvPr id="11" name="Text 9"/>
-          <p:cNvSpPr txBox="1"/>
-          <p:nvPr/>
-        </p:nvSpPr>
-        <p:spPr>
-          <a:xfrm>
-            <a:off x="914400" y="4416552"/>
-            <a:ext cx="5120640" cy="320040"/>
+            <a:off x="457200" y="4782312"/>
+            <a:ext cx="5120640" cy="0"/>
+          </a:xfrm>
+          <a:prstGeom prst="line">
+            <a:avLst/>
+          </a:prstGeom>
+          <a:noFill/>
+          <a:ln w="12700">
+            <a:solidFill>
+              <a:srgbClr val="1C1D21"/>
+            </a:solidFill>
+            <a:prstDash val="solid"/>
+          </a:ln>
+        </p:spPr>
+      </p:sp>
+      <p:sp>
+        <p:nvSpPr>
+          <p:cNvPr id="24" name="Text 22"/>
+          <p:cNvSpPr txBox="1"/>
+          <p:nvPr/>
+        </p:nvSpPr>
+        <p:spPr>
+          <a:xfrm>
+            <a:off x="457200" y="4873752"/>
+            <a:ext cx="5120640" cy="274320"/>
           </a:xfrm>
           <a:prstGeom prst="rect">
             <a:avLst/>
@@ -5289,7 +6476,7 @@
               <a:buNone/>
             </a:pPr>
             <a:r>
-              <a:rPr lang="en-US" sz="1150" b="1" spc="50" kern="0" dirty="0">
+              <a:rPr lang="en-US" sz="1050" b="1" spc="50" kern="0" dirty="0">
                 <a:solidFill>
                   <a:srgbClr val="FFFFFF"/>
                 </a:solidFill>
@@ -5299,20 +6486,20 @@
               </a:rPr>
               <a:t>ADAPTIVE REMEDIATION &amp; ANALYTICS</a:t>
             </a:r>
-            <a:endParaRPr lang="en-US" sz="1150" dirty="0"/>
-          </a:p>
-        </p:txBody>
-      </p:sp>
-      <p:sp>
-        <p:nvSpPr>
-          <p:cNvPr id="12" name="Text 10"/>
-          <p:cNvSpPr txBox="1"/>
-          <p:nvPr/>
-        </p:nvSpPr>
-        <p:spPr>
-          <a:xfrm>
-            <a:off x="914400" y="4718304"/>
-            <a:ext cx="5120640" cy="594360"/>
+            <a:endParaRPr lang="en-US" sz="1050" dirty="0"/>
+          </a:p>
+        </p:txBody>
+      </p:sp>
+      <p:sp>
+        <p:nvSpPr>
+          <p:cNvPr id="25" name="Text 23"/>
+          <p:cNvSpPr txBox="1"/>
+          <p:nvPr/>
+        </p:nvSpPr>
+        <p:spPr>
+          <a:xfrm>
+            <a:off x="457200" y="5129784"/>
+            <a:ext cx="5120640" cy="411480"/>
           </a:xfrm>
           <a:prstGeom prst="rect">
             <a:avLst/>
@@ -5326,12 +6513,12 @@
           <a:p>
             <a:pPr indent="0" marL="0">
               <a:lnSpc>
-                <a:spcPct val="115000"/>
+                <a:spcPct val="110000"/>
               </a:lnSpc>
               <a:buNone/>
             </a:pPr>
             <a:r>
-              <a:rPr lang="en-US" sz="1050" dirty="0">
+              <a:rPr lang="en-US" sz="950" dirty="0">
                 <a:solidFill>
                   <a:srgbClr val="D8D9DB"/>
                 </a:solidFill>
@@ -5341,40 +6528,43 @@
               </a:rPr>
               <a:t>Learner-performance data at the objective and scenario level, feeding targeted refresher content.</a:t>
             </a:r>
-            <a:endParaRPr lang="en-US" sz="1050" dirty="0"/>
-          </a:p>
-        </p:txBody>
-      </p:sp>
-      <p:sp>
-        <p:nvSpPr>
-          <p:cNvPr id="13" name="Shape 11"/>
+            <a:endParaRPr lang="en-US" sz="950" dirty="0"/>
+          </a:p>
+        </p:txBody>
+      </p:sp>
+      <p:sp>
+        <p:nvSpPr>
+          <p:cNvPr id="26" name="Shape 24"/>
           <p:cNvSpPr/>
           <p:nvPr/>
         </p:nvSpPr>
         <p:spPr>
           <a:xfrm>
-            <a:off x="457200" y="5522976"/>
-            <a:ext cx="274320" cy="274320"/>
-          </a:xfrm>
-          <a:prstGeom prst="ellipse">
-            <a:avLst/>
-          </a:prstGeom>
-          <a:solidFill>
-            <a:srgbClr val="FF002B"/>
-          </a:solidFill>
-          <a:ln/>
-        </p:spPr>
-      </p:sp>
-      <p:sp>
-        <p:nvSpPr>
-          <p:cNvPr id="14" name="Text 12"/>
-          <p:cNvSpPr txBox="1"/>
-          <p:nvPr/>
-        </p:nvSpPr>
-        <p:spPr>
-          <a:xfrm>
-            <a:off x="914400" y="5449824"/>
-            <a:ext cx="5120640" cy="320040"/>
+            <a:off x="457200" y="5586984"/>
+            <a:ext cx="5120640" cy="0"/>
+          </a:xfrm>
+          <a:prstGeom prst="line">
+            <a:avLst/>
+          </a:prstGeom>
+          <a:noFill/>
+          <a:ln w="12700">
+            <a:solidFill>
+              <a:srgbClr val="1C1D21"/>
+            </a:solidFill>
+            <a:prstDash val="solid"/>
+          </a:ln>
+        </p:spPr>
+      </p:sp>
+      <p:sp>
+        <p:nvSpPr>
+          <p:cNvPr id="27" name="Text 25"/>
+          <p:cNvSpPr txBox="1"/>
+          <p:nvPr/>
+        </p:nvSpPr>
+        <p:spPr>
+          <a:xfrm>
+            <a:off x="457200" y="5678424"/>
+            <a:ext cx="5120640" cy="274320"/>
           </a:xfrm>
           <a:prstGeom prst="rect">
             <a:avLst/>
@@ -5390,7 +6580,7 @@
               <a:buNone/>
             </a:pPr>
             <a:r>
-              <a:rPr lang="en-US" sz="1150" b="1" spc="50" kern="0" dirty="0">
+              <a:rPr lang="en-US" sz="1050" b="1" spc="50" kern="0" dirty="0">
                 <a:solidFill>
                   <a:srgbClr val="FFFFFF"/>
                 </a:solidFill>
@@ -5400,20 +6590,20 @@
               </a:rPr>
               <a:t>DOI-OWNED, NO VENDOR LOCK-IN</a:t>
             </a:r>
-            <a:endParaRPr lang="en-US" sz="1150" dirty="0"/>
-          </a:p>
-        </p:txBody>
-      </p:sp>
-      <p:sp>
-        <p:nvSpPr>
-          <p:cNvPr id="15" name="Text 13"/>
-          <p:cNvSpPr txBox="1"/>
-          <p:nvPr/>
-        </p:nvSpPr>
-        <p:spPr>
-          <a:xfrm>
-            <a:off x="914400" y="5751576"/>
-            <a:ext cx="5120640" cy="594360"/>
+            <a:endParaRPr lang="en-US" sz="1050" dirty="0"/>
+          </a:p>
+        </p:txBody>
+      </p:sp>
+      <p:sp>
+        <p:nvSpPr>
+          <p:cNvPr id="28" name="Text 26"/>
+          <p:cNvSpPr txBox="1"/>
+          <p:nvPr/>
+        </p:nvSpPr>
+        <p:spPr>
+          <a:xfrm>
+            <a:off x="457200" y="5934456"/>
+            <a:ext cx="5120640" cy="411480"/>
           </a:xfrm>
           <a:prstGeom prst="rect">
             <a:avLst/>
@@ -5427,12 +6617,12 @@
           <a:p>
             <a:pPr indent="0" marL="0">
               <a:lnSpc>
-                <a:spcPct val="115000"/>
+                <a:spcPct val="110000"/>
               </a:lnSpc>
               <a:buNone/>
             </a:pPr>
             <a:r>
-              <a:rPr lang="en-US" sz="1050" dirty="0">
+              <a:rPr lang="en-US" sz="950" dirty="0">
                 <a:solidFill>
                   <a:srgbClr val="D8D9DB"/>
                 </a:solidFill>
@@ -5440,187 +6630,21 @@
                 <a:ea typeface="Calibri" pitchFamily="34" charset="-122"/>
                 <a:cs typeface="Calibri" pitchFamily="34" charset="-120"/>
               </a:rPr>
-              <a:t>Government-owned courseware that OLES can sustain independent of a single contractor-hosted platform.</a:t>
-            </a:r>
-            <a:endParaRPr lang="en-US" sz="1050" dirty="0"/>
-          </a:p>
-        </p:txBody>
-      </p:sp>
-      <p:sp>
-        <p:nvSpPr>
-          <p:cNvPr id="16" name="Shape 14"/>
-          <p:cNvSpPr/>
-          <p:nvPr/>
-        </p:nvSpPr>
-        <p:spPr>
-          <a:xfrm>
-            <a:off x="6400800" y="1783080"/>
-            <a:ext cx="5330952" cy="4434840"/>
-          </a:xfrm>
-          <a:prstGeom prst="rect">
-            <a:avLst/>
-          </a:prstGeom>
-          <a:solidFill>
-            <a:srgbClr val="1C1D21"/>
-          </a:solidFill>
-          <a:ln w="12700">
-            <a:solidFill>
-              <a:srgbClr val="FF002B"/>
-            </a:solidFill>
-            <a:prstDash val="dash"/>
-          </a:ln>
-        </p:spPr>
-      </p:sp>
-      <p:sp>
-        <p:nvSpPr>
-          <p:cNvPr id="17" name="Shape 15"/>
-          <p:cNvSpPr/>
-          <p:nvPr/>
-        </p:nvSpPr>
-        <p:spPr>
-          <a:xfrm>
-            <a:off x="8289036" y="3223260"/>
-            <a:ext cx="274320" cy="274320"/>
-          </a:xfrm>
-          <a:prstGeom prst="ellipse">
-            <a:avLst/>
-          </a:prstGeom>
-          <a:solidFill>
-            <a:srgbClr val="FF002B"/>
-          </a:solidFill>
-          <a:ln/>
-        </p:spPr>
-      </p:sp>
-      <p:sp>
-        <p:nvSpPr>
-          <p:cNvPr id="18" name="Shape 16"/>
-          <p:cNvSpPr/>
-          <p:nvPr/>
-        </p:nvSpPr>
-        <p:spPr>
-          <a:xfrm>
-            <a:off x="8380476" y="3543300"/>
-            <a:ext cx="1005840" cy="685800"/>
-          </a:xfrm>
-          <a:prstGeom prst="triangle">
-            <a:avLst/>
-          </a:prstGeom>
-          <a:solidFill>
-            <a:srgbClr val="D8D9DB"/>
-          </a:solidFill>
-          <a:ln/>
-        </p:spPr>
-      </p:sp>
-      <p:sp>
-        <p:nvSpPr>
-          <p:cNvPr id="19" name="Shape 17"/>
-          <p:cNvSpPr/>
-          <p:nvPr/>
-        </p:nvSpPr>
-        <p:spPr>
-          <a:xfrm>
-            <a:off x="8929116" y="3360420"/>
-            <a:ext cx="868680" cy="868680"/>
-          </a:xfrm>
-          <a:prstGeom prst="triangle">
-            <a:avLst/>
-          </a:prstGeom>
-          <a:solidFill>
-            <a:srgbClr val="D8D9DB"/>
-          </a:solidFill>
-          <a:ln/>
-        </p:spPr>
-      </p:sp>
-      <p:sp>
-        <p:nvSpPr>
-          <p:cNvPr id="20" name="Text 18"/>
-          <p:cNvSpPr txBox="1"/>
-          <p:nvPr/>
-        </p:nvSpPr>
-        <p:spPr>
-          <a:xfrm>
-            <a:off x="6583680" y="4183380"/>
-            <a:ext cx="4965192" cy="274320"/>
-          </a:xfrm>
-          <a:prstGeom prst="rect">
-            <a:avLst/>
-          </a:prstGeom>
-          <a:noFill/>
-          <a:ln/>
-        </p:spPr>
-        <p:txBody>
-          <a:bodyPr wrap="square" lIns="0" tIns="0" rIns="0" bIns="0" rtlCol="0" anchor="ctr"/>
-          <a:lstStyle/>
-          <a:p>
-            <a:pPr algn="ctr" indent="0" marL="0">
-              <a:buNone/>
-            </a:pPr>
-            <a:r>
-              <a:rPr lang="en-US" sz="1000" b="1" spc="100" kern="0" dirty="0">
-                <a:solidFill>
-                  <a:srgbClr val="FF002B"/>
-                </a:solidFill>
-                <a:latin typeface="Arial" pitchFamily="34" charset="0"/>
-                <a:ea typeface="Arial" pitchFamily="34" charset="-122"/>
-                <a:cs typeface="Arial" pitchFamily="34" charset="-120"/>
-              </a:rPr>
-              <a:t>PLACEHOLDER IMAGE</a:t>
-            </a:r>
-            <a:endParaRPr lang="en-US" sz="1000" dirty="0"/>
-          </a:p>
-        </p:txBody>
-      </p:sp>
-      <p:sp>
-        <p:nvSpPr>
-          <p:cNvPr id="21" name="Text 19"/>
-          <p:cNvSpPr txBox="1"/>
-          <p:nvPr/>
-        </p:nvSpPr>
-        <p:spPr>
-          <a:xfrm>
-            <a:off x="6675120" y="4475988"/>
-            <a:ext cx="4782312" cy="548640"/>
-          </a:xfrm>
-          <a:prstGeom prst="rect">
-            <a:avLst/>
-          </a:prstGeom>
-          <a:noFill/>
-          <a:ln/>
-        </p:spPr>
-        <p:txBody>
-          <a:bodyPr wrap="square" lIns="0" tIns="0" rIns="0" bIns="0" rtlCol="0" anchor="ctr"/>
-          <a:lstStyle/>
-          <a:p>
-            <a:pPr algn="ctr" indent="0" marL="0">
-              <a:lnSpc>
-                <a:spcPct val="110000"/>
-              </a:lnSpc>
-              <a:buNone/>
-            </a:pPr>
-            <a:r>
-              <a:rPr lang="en-US" sz="1000" i="1" dirty="0">
-                <a:solidFill>
-                  <a:srgbClr val="D8D9DB"/>
-                </a:solidFill>
-                <a:latin typeface="Calibri" pitchFamily="34" charset="0"/>
-                <a:ea typeface="Calibri" pitchFamily="34" charset="-122"/>
-                <a:cs typeface="Calibri" pitchFamily="34" charset="-120"/>
-              </a:rPr>
-              <a:t>Mission Protect LMS / product screenshot — provided by Valletta</a:t>
-            </a:r>
-            <a:endParaRPr lang="en-US" sz="1000" dirty="0"/>
-          </a:p>
-        </p:txBody>
-      </p:sp>
-      <p:sp>
-        <p:nvSpPr>
-          <p:cNvPr id="22" name="Text 20"/>
-          <p:cNvSpPr txBox="1"/>
-          <p:nvPr/>
-        </p:nvSpPr>
-        <p:spPr>
-          <a:xfrm>
-            <a:off x="457200" y="6473952"/>
+              <a:t>Government-owned courseware OLES can sustain independent of a single contractor-hosted platform.</a:t>
+            </a:r>
+            <a:endParaRPr lang="en-US" sz="950" dirty="0"/>
+          </a:p>
+        </p:txBody>
+      </p:sp>
+      <p:sp>
+        <p:nvSpPr>
+          <p:cNvPr id="29" name="Text 27"/>
+          <p:cNvSpPr txBox="1"/>
+          <p:nvPr/>
+        </p:nvSpPr>
+        <p:spPr>
+          <a:xfrm>
+            <a:off x="457200" y="6492240"/>
             <a:ext cx="7772400" cy="274320"/>
           </a:xfrm>
           <a:prstGeom prst="rect">
@@ -5691,31 +6715,188 @@
         </p:nvSpPr>
         <p:spPr>
           <a:xfrm>
-            <a:off x="457200" y="457200"/>
-            <a:ext cx="5486400" cy="320040"/>
-          </a:xfrm>
-          <a:prstGeom prst="rect">
-            <a:avLst/>
-          </a:prstGeom>
-          <a:noFill/>
-          <a:ln/>
-        </p:spPr>
-        <p:txBody>
-          <a:bodyPr wrap="square" lIns="0" tIns="0" rIns="0" bIns="0" rtlCol="0" anchor="ctr"/>
-          <a:lstStyle/>
-          <a:p>
-            <a:pPr algn="l" indent="0" marL="0">
-              <a:buNone/>
-            </a:pPr>
-            <a:r>
-              <a:rPr lang="en-US" sz="1100" b="1" spc="150" kern="0" dirty="0">
-                <a:solidFill>
-                  <a:srgbClr val="FF002B"/>
+            <a:off x="6949440" y="0"/>
+            <a:ext cx="5486400" cy="6858000"/>
+          </a:xfrm>
+          <a:prstGeom prst="rect">
+            <a:avLst/>
+          </a:prstGeom>
+          <a:noFill/>
+          <a:ln/>
+        </p:spPr>
+        <p:txBody>
+          <a:bodyPr wrap="square" lIns="0" tIns="0" rIns="0" bIns="0" rtlCol="0" anchor="t"/>
+          <a:lstStyle/>
+          <a:p>
+            <a:pPr algn="r" indent="0" marL="0">
+              <a:buNone/>
+            </a:pPr>
+            <a:r>
+              <a:rPr lang="en-US" sz="36000" b="1" dirty="0">
+                <a:solidFill>
+                  <a:srgbClr val="141414"/>
+                </a:solidFill>
+                <a:latin typeface="Bookman Old Style" pitchFamily="34" charset="0"/>
+                <a:ea typeface="Bookman Old Style" pitchFamily="34" charset="-122"/>
+                <a:cs typeface="Bookman Old Style" pitchFamily="34" charset="-120"/>
+              </a:rPr>
+              <a:t>06</a:t>
+            </a:r>
+            <a:endParaRPr lang="en-US" sz="36000" dirty="0"/>
+          </a:p>
+        </p:txBody>
+      </p:sp>
+      <p:sp>
+        <p:nvSpPr>
+          <p:cNvPr id="3" name="Shape 1"/>
+          <p:cNvSpPr/>
+          <p:nvPr/>
+        </p:nvSpPr>
+        <p:spPr>
+          <a:xfrm>
+            <a:off x="457200" y="384048"/>
+            <a:ext cx="310896" cy="29261"/>
+          </a:xfrm>
+          <a:prstGeom prst="rect">
+            <a:avLst/>
+          </a:prstGeom>
+          <a:solidFill>
+            <a:srgbClr val="FF002B"/>
+          </a:solidFill>
+          <a:ln/>
+        </p:spPr>
+      </p:sp>
+      <p:sp>
+        <p:nvSpPr>
+          <p:cNvPr id="4" name="Shape 2"/>
+          <p:cNvSpPr/>
+          <p:nvPr/>
+        </p:nvSpPr>
+        <p:spPr>
+          <a:xfrm>
+            <a:off x="457200" y="384048"/>
+            <a:ext cx="29261" cy="310896"/>
+          </a:xfrm>
+          <a:prstGeom prst="rect">
+            <a:avLst/>
+          </a:prstGeom>
+          <a:solidFill>
+            <a:srgbClr val="FF002B"/>
+          </a:solidFill>
+          <a:ln/>
+        </p:spPr>
+      </p:sp>
+      <p:sp>
+        <p:nvSpPr>
+          <p:cNvPr id="5" name="Text 3"/>
+          <p:cNvSpPr txBox="1"/>
+          <p:nvPr/>
+        </p:nvSpPr>
+        <p:spPr>
+          <a:xfrm>
+            <a:off x="896112" y="329184"/>
+            <a:ext cx="2926080" cy="292608"/>
+          </a:xfrm>
+          <a:prstGeom prst="rect">
+            <a:avLst/>
+          </a:prstGeom>
+          <a:noFill/>
+          <a:ln/>
+        </p:spPr>
+        <p:txBody>
+          <a:bodyPr wrap="square" lIns="0" tIns="0" rIns="0" bIns="0" rtlCol="0" anchor="ctr"/>
+          <a:lstStyle/>
+          <a:p>
+            <a:pPr indent="0" marL="0">
+              <a:buNone/>
+            </a:pPr>
+            <a:r>
+              <a:rPr lang="en-US" sz="1500" b="1" spc="200" kern="0" dirty="0">
+                <a:solidFill>
+                  <a:srgbClr val="FFFFFF"/>
                 </a:solidFill>
                 <a:latin typeface="Arial" pitchFamily="34" charset="0"/>
                 <a:ea typeface="Arial" pitchFamily="34" charset="-122"/>
                 <a:cs typeface="Arial" pitchFamily="34" charset="-120"/>
               </a:rPr>
+              <a:t>VALLETTA</a:t>
+            </a:r>
+            <a:endParaRPr lang="en-US" sz="1500" dirty="0"/>
+          </a:p>
+        </p:txBody>
+      </p:sp>
+      <p:sp>
+        <p:nvSpPr>
+          <p:cNvPr id="6" name="Text 4"/>
+          <p:cNvSpPr txBox="1"/>
+          <p:nvPr/>
+        </p:nvSpPr>
+        <p:spPr>
+          <a:xfrm>
+            <a:off x="896112" y="603504"/>
+            <a:ext cx="2926080" cy="219456"/>
+          </a:xfrm>
+          <a:prstGeom prst="rect">
+            <a:avLst/>
+          </a:prstGeom>
+          <a:noFill/>
+          <a:ln/>
+        </p:spPr>
+        <p:txBody>
+          <a:bodyPr wrap="square" lIns="0" tIns="0" rIns="0" bIns="0" rtlCol="0" anchor="ctr"/>
+          <a:lstStyle/>
+          <a:p>
+            <a:pPr indent="0" marL="0">
+              <a:buNone/>
+            </a:pPr>
+            <a:r>
+              <a:rPr lang="en-US" sz="750" b="1" spc="200" kern="0" dirty="0">
+                <a:solidFill>
+                  <a:srgbClr val="5B5F66"/>
+                </a:solidFill>
+                <a:latin typeface="Arial" pitchFamily="34" charset="0"/>
+                <a:ea typeface="Arial" pitchFamily="34" charset="-122"/>
+                <a:cs typeface="Arial" pitchFamily="34" charset="-120"/>
+              </a:rPr>
+              <a:t>INDUSTRIES, INC.</a:t>
+            </a:r>
+            <a:endParaRPr lang="en-US" sz="750" dirty="0"/>
+          </a:p>
+        </p:txBody>
+      </p:sp>
+      <p:sp>
+        <p:nvSpPr>
+          <p:cNvPr id="7" name="Text 5"/>
+          <p:cNvSpPr txBox="1"/>
+          <p:nvPr/>
+        </p:nvSpPr>
+        <p:spPr>
+          <a:xfrm>
+            <a:off x="457200" y="777240"/>
+            <a:ext cx="5486400" cy="320040"/>
+          </a:xfrm>
+          <a:prstGeom prst="rect">
+            <a:avLst/>
+          </a:prstGeom>
+          <a:noFill/>
+          <a:ln/>
+        </p:spPr>
+        <p:txBody>
+          <a:bodyPr wrap="square" lIns="0" tIns="0" rIns="0" bIns="0" rtlCol="0" anchor="ctr"/>
+          <a:lstStyle/>
+          <a:p>
+            <a:pPr algn="l" indent="0" marL="0">
+              <a:buNone/>
+            </a:pPr>
+            <a:r>
+              <a:rPr lang="en-US" sz="1100" b="1" spc="150" kern="0" dirty="0">
+                <a:solidFill>
+                  <a:srgbClr val="FF002B"/>
+                </a:solidFill>
+                <a:latin typeface="Arial" pitchFamily="34" charset="0"/>
+                <a:ea typeface="Arial" pitchFamily="34" charset="-122"/>
+                <a:cs typeface="Arial" pitchFamily="34" charset="-120"/>
+              </a:rPr>
               <a:t>CLOSING</a:t>
             </a:r>
             <a:endParaRPr lang="en-US" sz="1100" dirty="0"/>
@@ -5724,14 +6905,14 @@
       </p:sp>
       <p:sp>
         <p:nvSpPr>
-          <p:cNvPr id="3" name="Text 1"/>
-          <p:cNvSpPr txBox="1"/>
-          <p:nvPr/>
-        </p:nvSpPr>
-        <p:spPr>
-          <a:xfrm>
-            <a:off x="457200" y="777240"/>
-            <a:ext cx="11274552" cy="685800"/>
+          <p:cNvPr id="8" name="Text 6"/>
+          <p:cNvSpPr txBox="1"/>
+          <p:nvPr/>
+        </p:nvSpPr>
+        <p:spPr>
+          <a:xfrm>
+            <a:off x="457200" y="1097280"/>
+            <a:ext cx="6675120" cy="685800"/>
           </a:xfrm>
           <a:prstGeom prst="rect">
             <a:avLst/>
@@ -5747,7 +6928,7 @@
               <a:buNone/>
             </a:pPr>
             <a:r>
-              <a:rPr lang="en-US" sz="2800" b="1" dirty="0">
+              <a:rPr lang="en-US" sz="3400" b="1" dirty="0">
                 <a:solidFill>
                   <a:srgbClr val="FFFFFF"/>
                 </a:solidFill>
@@ -5755,24 +6936,63 @@
                 <a:ea typeface="Bookman Old Style" pitchFamily="34" charset="-122"/>
                 <a:cs typeface="Bookman Old Style" pitchFamily="34" charset="-120"/>
               </a:rPr>
-              <a:t>A Proven Partner to Stand Up DOI's Own OSSTP</a:t>
-            </a:r>
-            <a:endParaRPr lang="en-US" sz="2800" dirty="0"/>
-          </a:p>
-        </p:txBody>
-      </p:sp>
-      <p:sp>
-        <p:nvSpPr>
-          <p:cNvPr id="4" name="Shape 2"/>
+              <a:t>BUILT BY OPERATORS.</a:t>
+            </a:r>
+            <a:endParaRPr lang="en-US" sz="3400" dirty="0"/>
+          </a:p>
+        </p:txBody>
+      </p:sp>
+      <p:sp>
+        <p:nvSpPr>
+          <p:cNvPr id="9" name="Text 7"/>
+          <p:cNvSpPr txBox="1"/>
+          <p:nvPr/>
+        </p:nvSpPr>
+        <p:spPr>
+          <a:xfrm>
+            <a:off x="457200" y="1783080"/>
+            <a:ext cx="6675120" cy="457200"/>
+          </a:xfrm>
+          <a:prstGeom prst="rect">
+            <a:avLst/>
+          </a:prstGeom>
+          <a:noFill/>
+          <a:ln/>
+        </p:spPr>
+        <p:txBody>
+          <a:bodyPr wrap="square" lIns="0" tIns="0" rIns="0" bIns="0" rtlCol="0" anchor="ctr"/>
+          <a:lstStyle/>
+          <a:p>
+            <a:pPr indent="0" marL="0">
+              <a:buNone/>
+            </a:pPr>
+            <a:r>
+              <a:rPr lang="en-US" sz="1400" i="1" dirty="0">
+                <a:solidFill>
+                  <a:srgbClr val="D8D9DB"/>
+                </a:solidFill>
+                <a:latin typeface="Calibri" pitchFamily="34" charset="0"/>
+                <a:ea typeface="Calibri" pitchFamily="34" charset="-122"/>
+                <a:cs typeface="Calibri" pitchFamily="34" charset="-120"/>
+              </a:rPr>
+              <a:t>A proven partner to stand up DOI's own OSSTP.</a:t>
+            </a:r>
+            <a:endParaRPr lang="en-US" sz="1400" dirty="0"/>
+          </a:p>
+        </p:txBody>
+      </p:sp>
+      <p:sp>
+        <p:nvSpPr>
+          <p:cNvPr id="10" name="Shape 8"/>
           <p:cNvSpPr/>
           <p:nvPr/>
         </p:nvSpPr>
         <p:spPr>
           <a:xfrm>
-            <a:off x="457200" y="1783080"/>
-            <a:ext cx="457200" cy="457200"/>
-          </a:xfrm>
-          <a:prstGeom prst="ellipse">
+            <a:off x="457200" y="2606040"/>
+            <a:ext cx="256032" cy="32004"/>
+          </a:xfrm>
+          <a:prstGeom prst="rect">
             <a:avLst/>
           </a:prstGeom>
           <a:solidFill>
@@ -5783,30 +7003,50 @@
       </p:sp>
       <p:sp>
         <p:nvSpPr>
-          <p:cNvPr id="5" name="Text 3"/>
-          <p:cNvSpPr txBox="1"/>
-          <p:nvPr/>
-        </p:nvSpPr>
-        <p:spPr>
-          <a:xfrm>
-            <a:off x="457200" y="1783080"/>
-            <a:ext cx="457200" cy="457200"/>
-          </a:xfrm>
-          <a:prstGeom prst="rect">
-            <a:avLst/>
-          </a:prstGeom>
-          <a:noFill/>
-          <a:ln/>
-        </p:spPr>
-        <p:txBody>
-          <a:bodyPr wrap="square" lIns="0" tIns="0" rIns="0" bIns="0" rtlCol="0" anchor="ctr"/>
-          <a:lstStyle/>
-          <a:p>
-            <a:pPr algn="ctr" indent="0" marL="0">
-              <a:buNone/>
-            </a:pPr>
-            <a:r>
-              <a:rPr lang="en-US" sz="1800" b="1" dirty="0">
+          <p:cNvPr id="11" name="Shape 9"/>
+          <p:cNvSpPr/>
+          <p:nvPr/>
+        </p:nvSpPr>
+        <p:spPr>
+          <a:xfrm>
+            <a:off x="457200" y="2606040"/>
+            <a:ext cx="32004" cy="256032"/>
+          </a:xfrm>
+          <a:prstGeom prst="rect">
+            <a:avLst/>
+          </a:prstGeom>
+          <a:solidFill>
+            <a:srgbClr val="FF002B"/>
+          </a:solidFill>
+          <a:ln/>
+        </p:spPr>
+      </p:sp>
+      <p:sp>
+        <p:nvSpPr>
+          <p:cNvPr id="12" name="Text 10"/>
+          <p:cNvSpPr txBox="1"/>
+          <p:nvPr/>
+        </p:nvSpPr>
+        <p:spPr>
+          <a:xfrm>
+            <a:off x="868680" y="2569464"/>
+            <a:ext cx="5623560" cy="384048"/>
+          </a:xfrm>
+          <a:prstGeom prst="rect">
+            <a:avLst/>
+          </a:prstGeom>
+          <a:noFill/>
+          <a:ln/>
+        </p:spPr>
+        <p:txBody>
+          <a:bodyPr wrap="square" lIns="0" tIns="0" rIns="0" bIns="0" rtlCol="0" anchor="t"/>
+          <a:lstStyle/>
+          <a:p>
+            <a:pPr indent="0" marL="0">
+              <a:buNone/>
+            </a:pPr>
+            <a:r>
+              <a:rPr lang="en-US" sz="1200" b="1" spc="50" kern="0" dirty="0">
                 <a:solidFill>
                   <a:srgbClr val="FFFFFF"/>
                 </a:solidFill>
@@ -5814,61 +7054,22 @@
                 <a:ea typeface="Arial" pitchFamily="34" charset="-122"/>
                 <a:cs typeface="Arial" pitchFamily="34" charset="-120"/>
               </a:rPr>
-              <a:t>1</a:t>
-            </a:r>
-            <a:endParaRPr lang="en-US" sz="1800" dirty="0"/>
-          </a:p>
-        </p:txBody>
-      </p:sp>
-      <p:sp>
-        <p:nvSpPr>
-          <p:cNvPr id="6" name="Text 4"/>
-          <p:cNvSpPr txBox="1"/>
-          <p:nvPr/>
-        </p:nvSpPr>
-        <p:spPr>
-          <a:xfrm>
-            <a:off x="1143000" y="1737360"/>
-            <a:ext cx="5120640" cy="457200"/>
-          </a:xfrm>
-          <a:prstGeom prst="rect">
-            <a:avLst/>
-          </a:prstGeom>
-          <a:noFill/>
-          <a:ln/>
-        </p:spPr>
-        <p:txBody>
-          <a:bodyPr wrap="square" lIns="0" tIns="0" rIns="0" bIns="0" rtlCol="0" anchor="t"/>
-          <a:lstStyle/>
-          <a:p>
-            <a:pPr indent="0" marL="0">
-              <a:buNone/>
-            </a:pPr>
-            <a:r>
-              <a:rPr lang="en-US" sz="1300" b="1" spc="50" kern="0" dirty="0">
-                <a:solidFill>
-                  <a:srgbClr val="FFFFFF"/>
-                </a:solidFill>
-                <a:latin typeface="Arial" pitchFamily="34" charset="0"/>
-                <a:ea typeface="Arial" pitchFamily="34" charset="-122"/>
-                <a:cs typeface="Arial" pitchFamily="34" charset="-120"/>
-              </a:rPr>
               <a:t>CURRENT OPERATOR, NOT JUST AN INSTRUCTOR</a:t>
             </a:r>
-            <a:endParaRPr lang="en-US" sz="1300" dirty="0"/>
-          </a:p>
-        </p:txBody>
-      </p:sp>
-      <p:sp>
-        <p:nvSpPr>
-          <p:cNvPr id="7" name="Text 5"/>
-          <p:cNvSpPr txBox="1"/>
-          <p:nvPr/>
-        </p:nvSpPr>
-        <p:spPr>
-          <a:xfrm>
-            <a:off x="1143000" y="2167128"/>
-            <a:ext cx="5120640" cy="777240"/>
+            <a:endParaRPr lang="en-US" sz="1200" dirty="0"/>
+          </a:p>
+        </p:txBody>
+      </p:sp>
+      <p:sp>
+        <p:nvSpPr>
+          <p:cNvPr id="13" name="Text 11"/>
+          <p:cNvSpPr txBox="1"/>
+          <p:nvPr/>
+        </p:nvSpPr>
+        <p:spPr>
+          <a:xfrm>
+            <a:off x="868680" y="2935224"/>
+            <a:ext cx="5623560" cy="640080"/>
           </a:xfrm>
           <a:prstGeom prst="rect">
             <a:avLst/>
@@ -5887,7 +7088,7 @@
               <a:buNone/>
             </a:pPr>
             <a:r>
-              <a:rPr lang="en-US" sz="1200" dirty="0">
+              <a:rPr lang="en-US" sz="1050" dirty="0">
                 <a:solidFill>
                   <a:srgbClr val="D8D9DB"/>
                 </a:solidFill>
@@ -5897,22 +7098,22 @@
               </a:rPr>
               <a:t>Active protective-force operations reinforce every module Valletta designs and teaches.</a:t>
             </a:r>
-            <a:endParaRPr lang="en-US" sz="1200" dirty="0"/>
-          </a:p>
-        </p:txBody>
-      </p:sp>
-      <p:sp>
-        <p:nvSpPr>
-          <p:cNvPr id="8" name="Shape 6"/>
+            <a:endParaRPr lang="en-US" sz="1050" dirty="0"/>
+          </a:p>
+        </p:txBody>
+      </p:sp>
+      <p:sp>
+        <p:nvSpPr>
+          <p:cNvPr id="14" name="Shape 12"/>
           <p:cNvSpPr/>
           <p:nvPr/>
         </p:nvSpPr>
         <p:spPr>
           <a:xfrm>
-            <a:off x="457200" y="3108960"/>
-            <a:ext cx="457200" cy="457200"/>
-          </a:xfrm>
-          <a:prstGeom prst="ellipse">
+            <a:off x="457200" y="3685032"/>
+            <a:ext cx="256032" cy="32004"/>
+          </a:xfrm>
+          <a:prstGeom prst="rect">
             <a:avLst/>
           </a:prstGeom>
           <a:solidFill>
@@ -5923,30 +7124,50 @@
       </p:sp>
       <p:sp>
         <p:nvSpPr>
-          <p:cNvPr id="9" name="Text 7"/>
-          <p:cNvSpPr txBox="1"/>
-          <p:nvPr/>
-        </p:nvSpPr>
-        <p:spPr>
-          <a:xfrm>
-            <a:off x="457200" y="3108960"/>
-            <a:ext cx="457200" cy="457200"/>
-          </a:xfrm>
-          <a:prstGeom prst="rect">
-            <a:avLst/>
-          </a:prstGeom>
-          <a:noFill/>
-          <a:ln/>
-        </p:spPr>
-        <p:txBody>
-          <a:bodyPr wrap="square" lIns="0" tIns="0" rIns="0" bIns="0" rtlCol="0" anchor="ctr"/>
-          <a:lstStyle/>
-          <a:p>
-            <a:pPr algn="ctr" indent="0" marL="0">
-              <a:buNone/>
-            </a:pPr>
-            <a:r>
-              <a:rPr lang="en-US" sz="1800" b="1" dirty="0">
+          <p:cNvPr id="15" name="Shape 13"/>
+          <p:cNvSpPr/>
+          <p:nvPr/>
+        </p:nvSpPr>
+        <p:spPr>
+          <a:xfrm>
+            <a:off x="457200" y="3685032"/>
+            <a:ext cx="32004" cy="256032"/>
+          </a:xfrm>
+          <a:prstGeom prst="rect">
+            <a:avLst/>
+          </a:prstGeom>
+          <a:solidFill>
+            <a:srgbClr val="FF002B"/>
+          </a:solidFill>
+          <a:ln/>
+        </p:spPr>
+      </p:sp>
+      <p:sp>
+        <p:nvSpPr>
+          <p:cNvPr id="16" name="Text 14"/>
+          <p:cNvSpPr txBox="1"/>
+          <p:nvPr/>
+        </p:nvSpPr>
+        <p:spPr>
+          <a:xfrm>
+            <a:off x="868680" y="3648456"/>
+            <a:ext cx="5623560" cy="384048"/>
+          </a:xfrm>
+          <a:prstGeom prst="rect">
+            <a:avLst/>
+          </a:prstGeom>
+          <a:noFill/>
+          <a:ln/>
+        </p:spPr>
+        <p:txBody>
+          <a:bodyPr wrap="square" lIns="0" tIns="0" rIns="0" bIns="0" rtlCol="0" anchor="t"/>
+          <a:lstStyle/>
+          <a:p>
+            <a:pPr indent="0" marL="0">
+              <a:buNone/>
+            </a:pPr>
+            <a:r>
+              <a:rPr lang="en-US" sz="1200" b="1" spc="50" kern="0" dirty="0">
                 <a:solidFill>
                   <a:srgbClr val="FFFFFF"/>
                 </a:solidFill>
@@ -5954,61 +7175,22 @@
                 <a:ea typeface="Arial" pitchFamily="34" charset="-122"/>
                 <a:cs typeface="Arial" pitchFamily="34" charset="-120"/>
               </a:rPr>
-              <a:t>2</a:t>
-            </a:r>
-            <a:endParaRPr lang="en-US" sz="1800" dirty="0"/>
-          </a:p>
-        </p:txBody>
-      </p:sp>
-      <p:sp>
-        <p:nvSpPr>
-          <p:cNvPr id="10" name="Text 8"/>
-          <p:cNvSpPr txBox="1"/>
-          <p:nvPr/>
-        </p:nvSpPr>
-        <p:spPr>
-          <a:xfrm>
-            <a:off x="1143000" y="3063240"/>
-            <a:ext cx="5120640" cy="457200"/>
-          </a:xfrm>
-          <a:prstGeom prst="rect">
-            <a:avLst/>
-          </a:prstGeom>
-          <a:noFill/>
-          <a:ln/>
-        </p:spPr>
-        <p:txBody>
-          <a:bodyPr wrap="square" lIns="0" tIns="0" rIns="0" bIns="0" rtlCol="0" anchor="t"/>
-          <a:lstStyle/>
-          <a:p>
-            <a:pPr indent="0" marL="0">
-              <a:buNone/>
-            </a:pPr>
-            <a:r>
-              <a:rPr lang="en-US" sz="1300" b="1" spc="50" kern="0" dirty="0">
-                <a:solidFill>
-                  <a:srgbClr val="FFFFFF"/>
-                </a:solidFill>
-                <a:latin typeface="Arial" pitchFamily="34" charset="0"/>
-                <a:ea typeface="Arial" pitchFamily="34" charset="-122"/>
-                <a:cs typeface="Arial" pitchFamily="34" charset="-120"/>
-              </a:rPr>
               <a:t>MISSION PROTECT: A DOI-OWNED DIGITAL PATHWAY</a:t>
             </a:r>
-            <a:endParaRPr lang="en-US" sz="1300" dirty="0"/>
-          </a:p>
-        </p:txBody>
-      </p:sp>
-      <p:sp>
-        <p:nvSpPr>
-          <p:cNvPr id="11" name="Text 9"/>
-          <p:cNvSpPr txBox="1"/>
-          <p:nvPr/>
-        </p:nvSpPr>
-        <p:spPr>
-          <a:xfrm>
-            <a:off x="1143000" y="3493008"/>
-            <a:ext cx="5120640" cy="777240"/>
+            <a:endParaRPr lang="en-US" sz="1200" dirty="0"/>
+          </a:p>
+        </p:txBody>
+      </p:sp>
+      <p:sp>
+        <p:nvSpPr>
+          <p:cNvPr id="17" name="Text 15"/>
+          <p:cNvSpPr txBox="1"/>
+          <p:nvPr/>
+        </p:nvSpPr>
+        <p:spPr>
+          <a:xfrm>
+            <a:off x="868680" y="4014216"/>
+            <a:ext cx="5623560" cy="640080"/>
           </a:xfrm>
           <a:prstGeom prst="rect">
             <a:avLst/>
@@ -6027,7 +7209,7 @@
               <a:buNone/>
             </a:pPr>
             <a:r>
-              <a:rPr lang="en-US" sz="1200" dirty="0">
+              <a:rPr lang="en-US" sz="1050" dirty="0">
                 <a:solidFill>
                   <a:srgbClr val="D8D9DB"/>
                 </a:solidFill>
@@ -6037,22 +7219,22 @@
               </a:rPr>
               <a:t>SCORM / xAPI / AICC / IMS QTI-ready courseware with learner-performance analytics — no vendor lock-in.</a:t>
             </a:r>
-            <a:endParaRPr lang="en-US" sz="1200" dirty="0"/>
-          </a:p>
-        </p:txBody>
-      </p:sp>
-      <p:sp>
-        <p:nvSpPr>
-          <p:cNvPr id="12" name="Shape 10"/>
+            <a:endParaRPr lang="en-US" sz="1050" dirty="0"/>
+          </a:p>
+        </p:txBody>
+      </p:sp>
+      <p:sp>
+        <p:nvSpPr>
+          <p:cNvPr id="18" name="Shape 16"/>
           <p:cNvSpPr/>
           <p:nvPr/>
         </p:nvSpPr>
         <p:spPr>
           <a:xfrm>
-            <a:off x="457200" y="4434840"/>
-            <a:ext cx="457200" cy="457200"/>
-          </a:xfrm>
-          <a:prstGeom prst="ellipse">
+            <a:off x="457200" y="4764024"/>
+            <a:ext cx="256032" cy="32004"/>
+          </a:xfrm>
+          <a:prstGeom prst="rect">
             <a:avLst/>
           </a:prstGeom>
           <a:solidFill>
@@ -6063,30 +7245,50 @@
       </p:sp>
       <p:sp>
         <p:nvSpPr>
-          <p:cNvPr id="13" name="Text 11"/>
-          <p:cNvSpPr txBox="1"/>
-          <p:nvPr/>
-        </p:nvSpPr>
-        <p:spPr>
-          <a:xfrm>
-            <a:off x="457200" y="4434840"/>
-            <a:ext cx="457200" cy="457200"/>
-          </a:xfrm>
-          <a:prstGeom prst="rect">
-            <a:avLst/>
-          </a:prstGeom>
-          <a:noFill/>
-          <a:ln/>
-        </p:spPr>
-        <p:txBody>
-          <a:bodyPr wrap="square" lIns="0" tIns="0" rIns="0" bIns="0" rtlCol="0" anchor="ctr"/>
-          <a:lstStyle/>
-          <a:p>
-            <a:pPr algn="ctr" indent="0" marL="0">
-              <a:buNone/>
-            </a:pPr>
-            <a:r>
-              <a:rPr lang="en-US" sz="1800" b="1" dirty="0">
+          <p:cNvPr id="19" name="Shape 17"/>
+          <p:cNvSpPr/>
+          <p:nvPr/>
+        </p:nvSpPr>
+        <p:spPr>
+          <a:xfrm>
+            <a:off x="457200" y="4764024"/>
+            <a:ext cx="32004" cy="256032"/>
+          </a:xfrm>
+          <a:prstGeom prst="rect">
+            <a:avLst/>
+          </a:prstGeom>
+          <a:solidFill>
+            <a:srgbClr val="FF002B"/>
+          </a:solidFill>
+          <a:ln/>
+        </p:spPr>
+      </p:sp>
+      <p:sp>
+        <p:nvSpPr>
+          <p:cNvPr id="20" name="Text 18"/>
+          <p:cNvSpPr txBox="1"/>
+          <p:nvPr/>
+        </p:nvSpPr>
+        <p:spPr>
+          <a:xfrm>
+            <a:off x="868680" y="4727448"/>
+            <a:ext cx="5623560" cy="384048"/>
+          </a:xfrm>
+          <a:prstGeom prst="rect">
+            <a:avLst/>
+          </a:prstGeom>
+          <a:noFill/>
+          <a:ln/>
+        </p:spPr>
+        <p:txBody>
+          <a:bodyPr wrap="square" lIns="0" tIns="0" rIns="0" bIns="0" rtlCol="0" anchor="t"/>
+          <a:lstStyle/>
+          <a:p>
+            <a:pPr indent="0" marL="0">
+              <a:buNone/>
+            </a:pPr>
+            <a:r>
+              <a:rPr lang="en-US" sz="1200" b="1" spc="50" kern="0" dirty="0">
                 <a:solidFill>
                   <a:srgbClr val="FFFFFF"/>
                 </a:solidFill>
@@ -6094,61 +7296,22 @@
                 <a:ea typeface="Arial" pitchFamily="34" charset="-122"/>
                 <a:cs typeface="Arial" pitchFamily="34" charset="-120"/>
               </a:rPr>
-              <a:t>3</a:t>
-            </a:r>
-            <a:endParaRPr lang="en-US" sz="1800" dirty="0"/>
-          </a:p>
-        </p:txBody>
-      </p:sp>
-      <p:sp>
-        <p:nvSpPr>
-          <p:cNvPr id="14" name="Text 12"/>
-          <p:cNvSpPr txBox="1"/>
-          <p:nvPr/>
-        </p:nvSpPr>
-        <p:spPr>
-          <a:xfrm>
-            <a:off x="1143000" y="4389120"/>
-            <a:ext cx="5120640" cy="457200"/>
-          </a:xfrm>
-          <a:prstGeom prst="rect">
-            <a:avLst/>
-          </a:prstGeom>
-          <a:noFill/>
-          <a:ln/>
-        </p:spPr>
-        <p:txBody>
-          <a:bodyPr wrap="square" lIns="0" tIns="0" rIns="0" bIns="0" rtlCol="0" anchor="t"/>
-          <a:lstStyle/>
-          <a:p>
-            <a:pPr indent="0" marL="0">
-              <a:buNone/>
-            </a:pPr>
-            <a:r>
-              <a:rPr lang="en-US" sz="1300" b="1" spc="50" kern="0" dirty="0">
-                <a:solidFill>
-                  <a:srgbClr val="FFFFFF"/>
-                </a:solidFill>
-                <a:latin typeface="Arial" pitchFamily="34" charset="0"/>
-                <a:ea typeface="Arial" pitchFamily="34" charset="-122"/>
-                <a:cs typeface="Arial" pitchFamily="34" charset="-120"/>
-              </a:rPr>
               <a:t>NATIONWIDE, REDUNDANT DELIVERY</a:t>
             </a:r>
-            <a:endParaRPr lang="en-US" sz="1300" dirty="0"/>
-          </a:p>
-        </p:txBody>
-      </p:sp>
-      <p:sp>
-        <p:nvSpPr>
-          <p:cNvPr id="15" name="Text 13"/>
-          <p:cNvSpPr txBox="1"/>
-          <p:nvPr/>
-        </p:nvSpPr>
-        <p:spPr>
-          <a:xfrm>
-            <a:off x="1143000" y="4818888"/>
-            <a:ext cx="5120640" cy="777240"/>
+            <a:endParaRPr lang="en-US" sz="1200" dirty="0"/>
+          </a:p>
+        </p:txBody>
+      </p:sp>
+      <p:sp>
+        <p:nvSpPr>
+          <p:cNvPr id="21" name="Text 19"/>
+          <p:cNvSpPr txBox="1"/>
+          <p:nvPr/>
+        </p:nvSpPr>
+        <p:spPr>
+          <a:xfrm>
+            <a:off x="868680" y="5093208"/>
+            <a:ext cx="5623560" cy="640080"/>
           </a:xfrm>
           <a:prstGeom prst="rect">
             <a:avLst/>
@@ -6167,7 +7330,7 @@
               <a:buNone/>
             </a:pPr>
             <a:r>
-              <a:rPr lang="en-US" sz="1200" dirty="0">
+              <a:rPr lang="en-US" sz="1050" dirty="0">
                 <a:solidFill>
                   <a:srgbClr val="D8D9DB"/>
                 </a:solidFill>
@@ -6177,20 +7340,20 @@
               </a:rPr>
               <a:t>Mobile training teams, instructor redundancy, and controlled courseware across CONUS/OCONUS sites.</a:t>
             </a:r>
-            <a:endParaRPr lang="en-US" sz="1200" dirty="0"/>
-          </a:p>
-        </p:txBody>
-      </p:sp>
-      <p:sp>
-        <p:nvSpPr>
-          <p:cNvPr id="16" name="Shape 14"/>
+            <a:endParaRPr lang="en-US" sz="1050" dirty="0"/>
+          </a:p>
+        </p:txBody>
+      </p:sp>
+      <p:sp>
+        <p:nvSpPr>
+          <p:cNvPr id="22" name="Shape 20"/>
           <p:cNvSpPr/>
           <p:nvPr/>
         </p:nvSpPr>
         <p:spPr>
           <a:xfrm>
-            <a:off x="6720840" y="1783080"/>
-            <a:ext cx="5010912" cy="4160520"/>
+            <a:off x="6720840" y="777240"/>
+            <a:ext cx="5010912" cy="5166360"/>
           </a:xfrm>
           <a:prstGeom prst="rect">
             <a:avLst/>
@@ -6203,14 +7366,14 @@
       </p:sp>
       <p:sp>
         <p:nvSpPr>
-          <p:cNvPr id="17" name="Shape 15"/>
+          <p:cNvPr id="23" name="Shape 21"/>
           <p:cNvSpPr/>
           <p:nvPr/>
         </p:nvSpPr>
         <p:spPr>
           <a:xfrm>
-            <a:off x="6720840" y="1783080"/>
-            <a:ext cx="292608" cy="25603"/>
+            <a:off x="6720840" y="777240"/>
+            <a:ext cx="384048" cy="41148"/>
           </a:xfrm>
           <a:prstGeom prst="rect">
             <a:avLst/>
@@ -6223,14 +7386,14 @@
       </p:sp>
       <p:sp>
         <p:nvSpPr>
-          <p:cNvPr id="18" name="Shape 16"/>
+          <p:cNvPr id="24" name="Shape 22"/>
           <p:cNvSpPr/>
           <p:nvPr/>
         </p:nvSpPr>
         <p:spPr>
           <a:xfrm>
-            <a:off x="6720840" y="1783080"/>
-            <a:ext cx="25603" cy="292608"/>
+            <a:off x="6720840" y="777240"/>
+            <a:ext cx="41148" cy="384048"/>
           </a:xfrm>
           <a:prstGeom prst="rect">
             <a:avLst/>
@@ -6243,14 +7406,14 @@
       </p:sp>
       <p:sp>
         <p:nvSpPr>
-          <p:cNvPr id="19" name="Text 17"/>
-          <p:cNvSpPr txBox="1"/>
-          <p:nvPr/>
-        </p:nvSpPr>
-        <p:spPr>
-          <a:xfrm>
-            <a:off x="6995160" y="2039112"/>
-            <a:ext cx="4462272" cy="274320"/>
+          <p:cNvPr id="25" name="Text 23"/>
+          <p:cNvSpPr txBox="1"/>
+          <p:nvPr/>
+        </p:nvSpPr>
+        <p:spPr>
+          <a:xfrm>
+            <a:off x="7040880" y="1097280"/>
+            <a:ext cx="4370832" cy="274320"/>
           </a:xfrm>
           <a:prstGeom prst="rect">
             <a:avLst/>
@@ -6282,14 +7445,14 @@
       </p:sp>
       <p:sp>
         <p:nvSpPr>
-          <p:cNvPr id="20" name="Text 18"/>
-          <p:cNvSpPr txBox="1"/>
-          <p:nvPr/>
-        </p:nvSpPr>
-        <p:spPr>
-          <a:xfrm>
-            <a:off x="6995160" y="2331720"/>
-            <a:ext cx="4462272" cy="777240"/>
+          <p:cNvPr id="26" name="Text 24"/>
+          <p:cNvSpPr txBox="1"/>
+          <p:nvPr/>
+        </p:nvSpPr>
+        <p:spPr>
+          <a:xfrm>
+            <a:off x="7040880" y="1399032"/>
+            <a:ext cx="4370832" cy="777240"/>
           </a:xfrm>
           <a:prstGeom prst="rect">
             <a:avLst/>
@@ -6364,14 +7527,14 @@
       </p:sp>
       <p:sp>
         <p:nvSpPr>
-          <p:cNvPr id="21" name="Text 19"/>
-          <p:cNvSpPr txBox="1"/>
-          <p:nvPr/>
-        </p:nvSpPr>
-        <p:spPr>
-          <a:xfrm>
-            <a:off x="6995160" y="3200400"/>
-            <a:ext cx="4462272" cy="274320"/>
+          <p:cNvPr id="27" name="Text 25"/>
+          <p:cNvSpPr txBox="1"/>
+          <p:nvPr/>
+        </p:nvSpPr>
+        <p:spPr>
+          <a:xfrm>
+            <a:off x="7040880" y="2286000"/>
+            <a:ext cx="4370832" cy="274320"/>
           </a:xfrm>
           <a:prstGeom prst="rect">
             <a:avLst/>
@@ -6403,14 +7566,14 @@
       </p:sp>
       <p:sp>
         <p:nvSpPr>
-          <p:cNvPr id="22" name="Text 20"/>
-          <p:cNvSpPr txBox="1"/>
-          <p:nvPr/>
-        </p:nvSpPr>
-        <p:spPr>
-          <a:xfrm>
-            <a:off x="6995160" y="3493008"/>
-            <a:ext cx="4462272" cy="1188720"/>
+          <p:cNvPr id="28" name="Text 26"/>
+          <p:cNvSpPr txBox="1"/>
+          <p:nvPr/>
+        </p:nvSpPr>
+        <p:spPr>
+          <a:xfrm>
+            <a:off x="7040880" y="2578608"/>
+            <a:ext cx="4370832" cy="1188720"/>
           </a:xfrm>
           <a:prstGeom prst="rect">
             <a:avLst/>
@@ -6505,14 +7668,37 @@
       </p:sp>
       <p:sp>
         <p:nvSpPr>
-          <p:cNvPr id="23" name="Text 21"/>
-          <p:cNvSpPr txBox="1"/>
-          <p:nvPr/>
-        </p:nvSpPr>
-        <p:spPr>
-          <a:xfrm>
-            <a:off x="6995160" y="4846320"/>
-            <a:ext cx="4462272" cy="914400"/>
+          <p:cNvPr id="29" name="Shape 27"/>
+          <p:cNvSpPr/>
+          <p:nvPr/>
+        </p:nvSpPr>
+        <p:spPr>
+          <a:xfrm>
+            <a:off x="7040880" y="4023360"/>
+            <a:ext cx="4370832" cy="0"/>
+          </a:xfrm>
+          <a:prstGeom prst="line">
+            <a:avLst/>
+          </a:prstGeom>
+          <a:noFill/>
+          <a:ln w="12700">
+            <a:solidFill>
+              <a:srgbClr val="2A2B30"/>
+            </a:solidFill>
+            <a:prstDash val="solid"/>
+          </a:ln>
+        </p:spPr>
+      </p:sp>
+      <p:sp>
+        <p:nvSpPr>
+          <p:cNvPr id="30" name="Text 28"/>
+          <p:cNvSpPr txBox="1"/>
+          <p:nvPr/>
+        </p:nvSpPr>
+        <p:spPr>
+          <a:xfrm>
+            <a:off x="7040880" y="4206240"/>
+            <a:ext cx="4370832" cy="1554480"/>
           </a:xfrm>
           <a:prstGeom prst="rect">
             <a:avLst/>
@@ -6526,12 +7712,12 @@
           <a:p>
             <a:pPr indent="0" marL="0">
               <a:lnSpc>
-                <a:spcPct val="120000"/>
+                <a:spcPct val="125000"/>
               </a:lnSpc>
               <a:buNone/>
             </a:pPr>
             <a:r>
-              <a:rPr lang="en-US" sz="1150" i="1" dirty="0">
+              <a:rPr lang="en-US" sz="1200" i="1" dirty="0">
                 <a:solidFill>
                   <a:srgbClr val="D8D9DB"/>
                 </a:solidFill>
@@ -6541,7 +7727,7 @@
               </a:rPr>
               <a:t>Valletta welcomes continued engagement with OLES and the Interior Business Center as this requirement is refined.</a:t>
             </a:r>
-            <a:endParaRPr lang="en-US" sz="1150" dirty="0"/>
+            <a:endParaRPr lang="en-US" sz="1200" dirty="0"/>
           </a:p>
         </p:txBody>
       </p:sp>

--- a/decks/Valletta_DOI_OSSTP_Capability_Overview.pptx
+++ b/decks/Valletta_DOI_OSSTP_Capability_Overview.pptx
@@ -1349,9 +1349,9 @@
                 <a:solidFill>
                   <a:srgbClr val="141414"/>
                 </a:solidFill>
-                <a:latin typeface="Bookman Old Style" pitchFamily="34" charset="0"/>
-                <a:ea typeface="Bookman Old Style" pitchFamily="34" charset="-122"/>
-                <a:cs typeface="Bookman Old Style" pitchFamily="34" charset="-120"/>
+                <a:latin typeface="Cambria" pitchFamily="34" charset="0"/>
+                <a:ea typeface="Cambria" pitchFamily="34" charset="-122"/>
+                <a:cs typeface="Cambria" pitchFamily="34" charset="-120"/>
               </a:rPr>
               <a:t>01</a:t>
             </a:r>
@@ -1359,16 +1359,118 @@
           </a:p>
         </p:txBody>
       </p:sp>
-      <p:sp>
-        <p:nvSpPr>
-          <p:cNvPr id="3" name="Shape 1"/>
+      <p:pic>
+        <p:nvPicPr>
+          <p:cNvPr id="3" name="Image 0" descr="/home/user/valletta-design-system/assets/logo/valletta-mark.png">    </p:cNvPr>
+          <p:cNvPicPr>
+            <a:picLocks noChangeAspect="1"/>
+          </p:cNvPicPr>
+          <p:nvPr/>
+        </p:nvPicPr>
+        <p:blipFill>
+          <a:blip r:embed="rId1"/>
+          <a:stretch>
+            <a:fillRect/>
+          </a:stretch>
+        </p:blipFill>
+        <p:spPr>
+          <a:xfrm>
+            <a:off x="457200" y="365760"/>
+            <a:ext cx="365760" cy="389284"/>
+          </a:xfrm>
+          <a:prstGeom prst="rect">
+            <a:avLst/>
+          </a:prstGeom>
+        </p:spPr>
+      </p:pic>
+      <p:sp>
+        <p:nvSpPr>
+          <p:cNvPr id="4" name="Text 1"/>
+          <p:cNvSpPr txBox="1"/>
+          <p:nvPr/>
+        </p:nvSpPr>
+        <p:spPr>
+          <a:xfrm>
+            <a:off x="932688" y="329184"/>
+            <a:ext cx="2926080" cy="274320"/>
+          </a:xfrm>
+          <a:prstGeom prst="rect">
+            <a:avLst/>
+          </a:prstGeom>
+          <a:noFill/>
+          <a:ln/>
+        </p:spPr>
+        <p:txBody>
+          <a:bodyPr wrap="square" lIns="0" tIns="0" rIns="0" bIns="0" rtlCol="0" anchor="ctr"/>
+          <a:lstStyle/>
+          <a:p>
+            <a:pPr indent="0" marL="0">
+              <a:buNone/>
+            </a:pPr>
+            <a:r>
+              <a:rPr lang="en-US" sz="1500" spc="200" kern="0" dirty="0">
+                <a:solidFill>
+                  <a:srgbClr val="FFFFFF"/>
+                </a:solidFill>
+                <a:latin typeface="Cambria" pitchFamily="34" charset="0"/>
+                <a:ea typeface="Cambria" pitchFamily="34" charset="-122"/>
+                <a:cs typeface="Cambria" pitchFamily="34" charset="-120"/>
+              </a:rPr>
+              <a:t>VALLETTA</a:t>
+            </a:r>
+            <a:endParaRPr lang="en-US" sz="1500" dirty="0"/>
+          </a:p>
+        </p:txBody>
+      </p:sp>
+      <p:sp>
+        <p:nvSpPr>
+          <p:cNvPr id="5" name="Text 2"/>
+          <p:cNvSpPr txBox="1"/>
+          <p:nvPr/>
+        </p:nvSpPr>
+        <p:spPr>
+          <a:xfrm>
+            <a:off x="932688" y="594360"/>
+            <a:ext cx="2926080" cy="219456"/>
+          </a:xfrm>
+          <a:prstGeom prst="rect">
+            <a:avLst/>
+          </a:prstGeom>
+          <a:noFill/>
+          <a:ln/>
+        </p:spPr>
+        <p:txBody>
+          <a:bodyPr wrap="square" lIns="0" tIns="0" rIns="0" bIns="0" rtlCol="0" anchor="ctr"/>
+          <a:lstStyle/>
+          <a:p>
+            <a:pPr indent="0" marL="0">
+              <a:buNone/>
+            </a:pPr>
+            <a:r>
+              <a:rPr lang="en-US" sz="750" b="1" spc="200" kern="0" dirty="0">
+                <a:solidFill>
+                  <a:srgbClr val="5B5F66"/>
+                </a:solidFill>
+                <a:latin typeface="Arial" pitchFamily="34" charset="0"/>
+                <a:ea typeface="Arial" pitchFamily="34" charset="-122"/>
+                <a:cs typeface="Arial" pitchFamily="34" charset="-120"/>
+              </a:rPr>
+              <a:t>INDUSTRIES, INC.</a:t>
+            </a:r>
+            <a:endParaRPr lang="en-US" sz="750" dirty="0"/>
+          </a:p>
+        </p:txBody>
+      </p:sp>
+      <p:sp>
+        <p:nvSpPr>
+          <p:cNvPr id="6" name="Shape 3"/>
           <p:cNvSpPr/>
           <p:nvPr/>
         </p:nvSpPr>
         <p:spPr>
           <a:xfrm>
-            <a:off x="457200" y="384048"/>
-            <a:ext cx="310896" cy="29261"/>
+            <a:off x="457200" y="1371600"/>
+            <a:ext cx="502920" cy="45720"/>
           </a:xfrm>
           <a:prstGeom prst="rect">
             <a:avLst/>
@@ -1381,14 +1483,14 @@
       </p:sp>
       <p:sp>
         <p:nvSpPr>
-          <p:cNvPr id="4" name="Shape 2"/>
+          <p:cNvPr id="7" name="Shape 4"/>
           <p:cNvSpPr/>
           <p:nvPr/>
         </p:nvSpPr>
         <p:spPr>
           <a:xfrm>
-            <a:off x="457200" y="384048"/>
-            <a:ext cx="29261" cy="310896"/>
+            <a:off x="457200" y="1371600"/>
+            <a:ext cx="45720" cy="502920"/>
           </a:xfrm>
           <a:prstGeom prst="rect">
             <a:avLst/>
@@ -1401,155 +1503,37 @@
       </p:sp>
       <p:sp>
         <p:nvSpPr>
-          <p:cNvPr id="5" name="Text 3"/>
-          <p:cNvSpPr txBox="1"/>
-          <p:nvPr/>
-        </p:nvSpPr>
-        <p:spPr>
-          <a:xfrm>
-            <a:off x="896112" y="329184"/>
-            <a:ext cx="2926080" cy="292608"/>
-          </a:xfrm>
-          <a:prstGeom prst="rect">
-            <a:avLst/>
-          </a:prstGeom>
-          <a:noFill/>
-          <a:ln/>
-        </p:spPr>
-        <p:txBody>
-          <a:bodyPr wrap="square" lIns="0" tIns="0" rIns="0" bIns="0" rtlCol="0" anchor="ctr"/>
-          <a:lstStyle/>
-          <a:p>
-            <a:pPr indent="0" marL="0">
-              <a:buNone/>
-            </a:pPr>
-            <a:r>
-              <a:rPr lang="en-US" sz="1500" b="1" spc="200" kern="0" dirty="0">
-                <a:solidFill>
-                  <a:srgbClr val="FFFFFF"/>
+          <p:cNvPr id="8" name="Text 5"/>
+          <p:cNvSpPr txBox="1"/>
+          <p:nvPr/>
+        </p:nvSpPr>
+        <p:spPr>
+          <a:xfrm>
+            <a:off x="777240" y="1481328"/>
+            <a:ext cx="10058400" cy="320040"/>
+          </a:xfrm>
+          <a:prstGeom prst="rect">
+            <a:avLst/>
+          </a:prstGeom>
+          <a:noFill/>
+          <a:ln/>
+        </p:spPr>
+        <p:txBody>
+          <a:bodyPr wrap="square" lIns="0" tIns="0" rIns="0" bIns="0" rtlCol="0" anchor="ctr"/>
+          <a:lstStyle/>
+          <a:p>
+            <a:pPr algn="l" indent="0" marL="0">
+              <a:buNone/>
+            </a:pPr>
+            <a:r>
+              <a:rPr lang="en-US" sz="1100" b="1" spc="150" kern="0" dirty="0">
+                <a:solidFill>
+                  <a:srgbClr val="D8D9DB"/>
                 </a:solidFill>
                 <a:latin typeface="Arial" pitchFamily="34" charset="0"/>
                 <a:ea typeface="Arial" pitchFamily="34" charset="-122"/>
                 <a:cs typeface="Arial" pitchFamily="34" charset="-120"/>
               </a:rPr>
-              <a:t>VALLETTA</a:t>
-            </a:r>
-            <a:endParaRPr lang="en-US" sz="1500" dirty="0"/>
-          </a:p>
-        </p:txBody>
-      </p:sp>
-      <p:sp>
-        <p:nvSpPr>
-          <p:cNvPr id="6" name="Text 4"/>
-          <p:cNvSpPr txBox="1"/>
-          <p:nvPr/>
-        </p:nvSpPr>
-        <p:spPr>
-          <a:xfrm>
-            <a:off x="896112" y="603504"/>
-            <a:ext cx="2926080" cy="219456"/>
-          </a:xfrm>
-          <a:prstGeom prst="rect">
-            <a:avLst/>
-          </a:prstGeom>
-          <a:noFill/>
-          <a:ln/>
-        </p:spPr>
-        <p:txBody>
-          <a:bodyPr wrap="square" lIns="0" tIns="0" rIns="0" bIns="0" rtlCol="0" anchor="ctr"/>
-          <a:lstStyle/>
-          <a:p>
-            <a:pPr indent="0" marL="0">
-              <a:buNone/>
-            </a:pPr>
-            <a:r>
-              <a:rPr lang="en-US" sz="750" b="1" spc="200" kern="0" dirty="0">
-                <a:solidFill>
-                  <a:srgbClr val="5B5F66"/>
-                </a:solidFill>
-                <a:latin typeface="Arial" pitchFamily="34" charset="0"/>
-                <a:ea typeface="Arial" pitchFamily="34" charset="-122"/>
-                <a:cs typeface="Arial" pitchFamily="34" charset="-120"/>
-              </a:rPr>
-              <a:t>INDUSTRIES, INC.</a:t>
-            </a:r>
-            <a:endParaRPr lang="en-US" sz="750" dirty="0"/>
-          </a:p>
-        </p:txBody>
-      </p:sp>
-      <p:sp>
-        <p:nvSpPr>
-          <p:cNvPr id="7" name="Shape 5"/>
-          <p:cNvSpPr/>
-          <p:nvPr/>
-        </p:nvSpPr>
-        <p:spPr>
-          <a:xfrm>
-            <a:off x="457200" y="1371600"/>
-            <a:ext cx="502920" cy="45720"/>
-          </a:xfrm>
-          <a:prstGeom prst="rect">
-            <a:avLst/>
-          </a:prstGeom>
-          <a:solidFill>
-            <a:srgbClr val="FF002B"/>
-          </a:solidFill>
-          <a:ln/>
-        </p:spPr>
-      </p:sp>
-      <p:sp>
-        <p:nvSpPr>
-          <p:cNvPr id="8" name="Shape 6"/>
-          <p:cNvSpPr/>
-          <p:nvPr/>
-        </p:nvSpPr>
-        <p:spPr>
-          <a:xfrm>
-            <a:off x="457200" y="1371600"/>
-            <a:ext cx="45720" cy="502920"/>
-          </a:xfrm>
-          <a:prstGeom prst="rect">
-            <a:avLst/>
-          </a:prstGeom>
-          <a:solidFill>
-            <a:srgbClr val="FF002B"/>
-          </a:solidFill>
-          <a:ln/>
-        </p:spPr>
-      </p:sp>
-      <p:sp>
-        <p:nvSpPr>
-          <p:cNvPr id="9" name="Text 7"/>
-          <p:cNvSpPr txBox="1"/>
-          <p:nvPr/>
-        </p:nvSpPr>
-        <p:spPr>
-          <a:xfrm>
-            <a:off x="777240" y="1481328"/>
-            <a:ext cx="10058400" cy="320040"/>
-          </a:xfrm>
-          <a:prstGeom prst="rect">
-            <a:avLst/>
-          </a:prstGeom>
-          <a:noFill/>
-          <a:ln/>
-        </p:spPr>
-        <p:txBody>
-          <a:bodyPr wrap="square" lIns="0" tIns="0" rIns="0" bIns="0" rtlCol="0" anchor="ctr"/>
-          <a:lstStyle/>
-          <a:p>
-            <a:pPr algn="l" indent="0" marL="0">
-              <a:buNone/>
-            </a:pPr>
-            <a:r>
-              <a:rPr lang="en-US" sz="1100" b="1" spc="150" kern="0" dirty="0">
-                <a:solidFill>
-                  <a:srgbClr val="D8D9DB"/>
-                </a:solidFill>
-                <a:latin typeface="Arial" pitchFamily="34" charset="0"/>
-                <a:ea typeface="Arial" pitchFamily="34" charset="-122"/>
-                <a:cs typeface="Arial" pitchFamily="34" charset="-120"/>
-              </a:rPr>
               <a:t>CAPABILITY &amp; SOLUTION OVERVIEW  —  CLIENT BRIEFING</a:t>
             </a:r>
             <a:endParaRPr lang="en-US" sz="1100" dirty="0"/>
@@ -1558,7 +1542,7 @@
       </p:sp>
       <p:sp>
         <p:nvSpPr>
-          <p:cNvPr id="10" name="Text 8"/>
+          <p:cNvPr id="9" name="Text 6"/>
           <p:cNvSpPr txBox="1"/>
           <p:nvPr/>
         </p:nvSpPr>
@@ -1588,9 +1572,9 @@
                 <a:solidFill>
                   <a:srgbClr val="FFFFFF"/>
                 </a:solidFill>
-                <a:latin typeface="Bookman Old Style" pitchFamily="34" charset="0"/>
-                <a:ea typeface="Bookman Old Style" pitchFamily="34" charset="-122"/>
-                <a:cs typeface="Bookman Old Style" pitchFamily="34" charset="-120"/>
+                <a:latin typeface="Cambria" pitchFamily="34" charset="0"/>
+                <a:ea typeface="Cambria" pitchFamily="34" charset="-122"/>
+                <a:cs typeface="Cambria" pitchFamily="34" charset="-120"/>
               </a:rPr>
               <a:t>OFFICER SAFETY AND SURVIVAL</a:t>
             </a:r>
@@ -1608,9 +1592,9 @@
                 <a:solidFill>
                   <a:srgbClr val="FFFFFF"/>
                 </a:solidFill>
-                <a:latin typeface="Bookman Old Style" pitchFamily="34" charset="0"/>
-                <a:ea typeface="Bookman Old Style" pitchFamily="34" charset="-122"/>
-                <a:cs typeface="Bookman Old Style" pitchFamily="34" charset="-120"/>
+                <a:latin typeface="Cambria" pitchFamily="34" charset="0"/>
+                <a:ea typeface="Cambria" pitchFamily="34" charset="-122"/>
+                <a:cs typeface="Cambria" pitchFamily="34" charset="-120"/>
               </a:rPr>
               <a:t>TRAINING PROGRAM (OSSTP)</a:t>
             </a:r>
@@ -1620,7 +1604,7 @@
       </p:sp>
       <p:sp>
         <p:nvSpPr>
-          <p:cNvPr id="11" name="Text 9"/>
+          <p:cNvPr id="10" name="Text 7"/>
           <p:cNvSpPr txBox="1"/>
           <p:nvPr/>
         </p:nvSpPr>
@@ -1659,7 +1643,7 @@
       </p:sp>
       <p:sp>
         <p:nvSpPr>
-          <p:cNvPr id="12" name="Text 10"/>
+          <p:cNvPr id="11" name="Text 8"/>
           <p:cNvSpPr txBox="1"/>
           <p:nvPr/>
         </p:nvSpPr>
@@ -1686,9 +1670,9 @@
                 <a:solidFill>
                   <a:srgbClr val="FFFFFF"/>
                 </a:solidFill>
-                <a:latin typeface="Bookman Old Style" pitchFamily="34" charset="0"/>
-                <a:ea typeface="Bookman Old Style" pitchFamily="34" charset="-122"/>
-                <a:cs typeface="Bookman Old Style" pitchFamily="34" charset="-120"/>
+                <a:latin typeface="Cambria" pitchFamily="34" charset="0"/>
+                <a:ea typeface="Cambria" pitchFamily="34" charset="-122"/>
+                <a:cs typeface="Cambria" pitchFamily="34" charset="-120"/>
               </a:rPr>
               <a:t>BUILT BY OPERATORS.</a:t>
             </a:r>
@@ -1698,7 +1682,7 @@
       </p:sp>
       <p:sp>
         <p:nvSpPr>
-          <p:cNvPr id="13" name="Text 11"/>
+          <p:cNvPr id="12" name="Text 9"/>
           <p:cNvSpPr txBox="1"/>
           <p:nvPr/>
         </p:nvSpPr>
@@ -1740,7 +1724,7 @@
       </p:sp>
       <p:sp>
         <p:nvSpPr>
-          <p:cNvPr id="14" name="Shape 12"/>
+          <p:cNvPr id="13" name="Shape 10"/>
           <p:cNvSpPr/>
           <p:nvPr/>
         </p:nvSpPr>
@@ -1763,7 +1747,7 @@
       </p:sp>
       <p:sp>
         <p:nvSpPr>
-          <p:cNvPr id="15" name="Text 13"/>
+          <p:cNvPr id="14" name="Text 11"/>
           <p:cNvSpPr txBox="1"/>
           <p:nvPr/>
         </p:nvSpPr>
@@ -1802,7 +1786,7 @@
       </p:sp>
       <p:sp>
         <p:nvSpPr>
-          <p:cNvPr id="16" name="Text 14"/>
+          <p:cNvPr id="15" name="Text 12"/>
           <p:cNvSpPr txBox="1"/>
           <p:nvPr/>
         </p:nvSpPr>
@@ -1884,7 +1868,7 @@
       </p:sp>
       <p:sp>
         <p:nvSpPr>
-          <p:cNvPr id="17" name="Text 15"/>
+          <p:cNvPr id="16" name="Text 13"/>
           <p:cNvSpPr txBox="1"/>
           <p:nvPr/>
         </p:nvSpPr>
@@ -1923,7 +1907,7 @@
       </p:sp>
       <p:sp>
         <p:nvSpPr>
-          <p:cNvPr id="18" name="Text 16"/>
+          <p:cNvPr id="17" name="Text 14"/>
           <p:cNvSpPr txBox="1"/>
           <p:nvPr/>
         </p:nvSpPr>
@@ -2196,196 +2180,102 @@
           </a:p>
         </p:txBody>
       </p:sp>
-      <p:sp>
-        <p:nvSpPr>
-          <p:cNvPr id="8" name="Shape 6"/>
-          <p:cNvSpPr/>
-          <p:nvPr/>
-        </p:nvSpPr>
-        <p:spPr>
-          <a:xfrm>
-            <a:off x="457200" y="384048"/>
-            <a:ext cx="310896" cy="29261"/>
-          </a:xfrm>
-          <a:prstGeom prst="rect">
-            <a:avLst/>
-          </a:prstGeom>
-          <a:solidFill>
-            <a:srgbClr val="FF002B"/>
-          </a:solidFill>
-          <a:ln/>
-        </p:spPr>
-      </p:sp>
-      <p:sp>
-        <p:nvSpPr>
-          <p:cNvPr id="9" name="Shape 7"/>
-          <p:cNvSpPr/>
-          <p:nvPr/>
-        </p:nvSpPr>
-        <p:spPr>
-          <a:xfrm>
-            <a:off x="457200" y="384048"/>
-            <a:ext cx="29261" cy="310896"/>
-          </a:xfrm>
-          <a:prstGeom prst="rect">
-            <a:avLst/>
-          </a:prstGeom>
-          <a:solidFill>
-            <a:srgbClr val="FF002B"/>
-          </a:solidFill>
-          <a:ln/>
-        </p:spPr>
-      </p:sp>
-      <p:sp>
-        <p:nvSpPr>
-          <p:cNvPr id="10" name="Text 8"/>
-          <p:cNvSpPr txBox="1"/>
-          <p:nvPr/>
-        </p:nvSpPr>
-        <p:spPr>
-          <a:xfrm>
-            <a:off x="896112" y="329184"/>
-            <a:ext cx="2926080" cy="292608"/>
-          </a:xfrm>
-          <a:prstGeom prst="rect">
-            <a:avLst/>
-          </a:prstGeom>
-          <a:noFill/>
-          <a:ln/>
-        </p:spPr>
-        <p:txBody>
-          <a:bodyPr wrap="square" lIns="0" tIns="0" rIns="0" bIns="0" rtlCol="0" anchor="ctr"/>
-          <a:lstStyle/>
-          <a:p>
-            <a:pPr indent="0" marL="0">
-              <a:buNone/>
-            </a:pPr>
-            <a:r>
-              <a:rPr lang="en-US" sz="1500" b="1" spc="200" kern="0" dirty="0">
-                <a:solidFill>
-                  <a:srgbClr val="0A0A0A"/>
+      <p:pic>
+        <p:nvPicPr>
+          <p:cNvPr id="8" name="Image 0" descr="/home/user/valletta-design-system/assets/logo/valletta-lockup.png">    </p:cNvPr>
+          <p:cNvPicPr>
+            <a:picLocks noChangeAspect="1"/>
+          </p:cNvPicPr>
+          <p:nvPr/>
+        </p:nvPicPr>
+        <p:blipFill>
+          <a:blip r:embed="rId1"/>
+          <a:stretch>
+            <a:fillRect/>
+          </a:stretch>
+        </p:blipFill>
+        <p:spPr>
+          <a:xfrm>
+            <a:off x="457200" y="365760"/>
+            <a:ext cx="1828800" cy="384048"/>
+          </a:xfrm>
+          <a:prstGeom prst="rect">
+            <a:avLst/>
+          </a:prstGeom>
+        </p:spPr>
+      </p:pic>
+      <p:sp>
+        <p:nvSpPr>
+          <p:cNvPr id="9" name="Text 6"/>
+          <p:cNvSpPr txBox="1"/>
+          <p:nvPr/>
+        </p:nvSpPr>
+        <p:spPr>
+          <a:xfrm>
+            <a:off x="6949440" y="0"/>
+            <a:ext cx="5486400" cy="6858000"/>
+          </a:xfrm>
+          <a:prstGeom prst="rect">
+            <a:avLst/>
+          </a:prstGeom>
+          <a:noFill/>
+          <a:ln/>
+        </p:spPr>
+        <p:txBody>
+          <a:bodyPr wrap="square" lIns="0" tIns="0" rIns="0" bIns="0" rtlCol="0" anchor="t"/>
+          <a:lstStyle/>
+          <a:p>
+            <a:pPr algn="r" indent="0" marL="0">
+              <a:buNone/>
+            </a:pPr>
+            <a:r>
+              <a:rPr lang="en-US" sz="36000" b="1" dirty="0">
+                <a:solidFill>
+                  <a:srgbClr val="EBEBE9"/>
+                </a:solidFill>
+                <a:latin typeface="Cambria" pitchFamily="34" charset="0"/>
+                <a:ea typeface="Cambria" pitchFamily="34" charset="-122"/>
+                <a:cs typeface="Cambria" pitchFamily="34" charset="-120"/>
+              </a:rPr>
+              <a:t>02</a:t>
+            </a:r>
+            <a:endParaRPr lang="en-US" sz="36000" dirty="0"/>
+          </a:p>
+        </p:txBody>
+      </p:sp>
+      <p:sp>
+        <p:nvSpPr>
+          <p:cNvPr id="10" name="Text 7"/>
+          <p:cNvSpPr txBox="1"/>
+          <p:nvPr/>
+        </p:nvSpPr>
+        <p:spPr>
+          <a:xfrm>
+            <a:off x="5074920" y="777240"/>
+            <a:ext cx="7315200" cy="320040"/>
+          </a:xfrm>
+          <a:prstGeom prst="rect">
+            <a:avLst/>
+          </a:prstGeom>
+          <a:noFill/>
+          <a:ln/>
+        </p:spPr>
+        <p:txBody>
+          <a:bodyPr wrap="square" lIns="0" tIns="0" rIns="0" bIns="0" rtlCol="0" anchor="ctr"/>
+          <a:lstStyle/>
+          <a:p>
+            <a:pPr algn="l" indent="0" marL="0">
+              <a:buNone/>
+            </a:pPr>
+            <a:r>
+              <a:rPr lang="en-US" sz="1100" b="1" spc="150" kern="0" dirty="0">
+                <a:solidFill>
+                  <a:srgbClr val="FF002B"/>
                 </a:solidFill>
                 <a:latin typeface="Arial" pitchFamily="34" charset="0"/>
                 <a:ea typeface="Arial" pitchFamily="34" charset="-122"/>
                 <a:cs typeface="Arial" pitchFamily="34" charset="-120"/>
               </a:rPr>
-              <a:t>VALLETTA</a:t>
-            </a:r>
-            <a:endParaRPr lang="en-US" sz="1500" dirty="0"/>
-          </a:p>
-        </p:txBody>
-      </p:sp>
-      <p:sp>
-        <p:nvSpPr>
-          <p:cNvPr id="11" name="Text 9"/>
-          <p:cNvSpPr txBox="1"/>
-          <p:nvPr/>
-        </p:nvSpPr>
-        <p:spPr>
-          <a:xfrm>
-            <a:off x="896112" y="603504"/>
-            <a:ext cx="2926080" cy="219456"/>
-          </a:xfrm>
-          <a:prstGeom prst="rect">
-            <a:avLst/>
-          </a:prstGeom>
-          <a:noFill/>
-          <a:ln/>
-        </p:spPr>
-        <p:txBody>
-          <a:bodyPr wrap="square" lIns="0" tIns="0" rIns="0" bIns="0" rtlCol="0" anchor="ctr"/>
-          <a:lstStyle/>
-          <a:p>
-            <a:pPr indent="0" marL="0">
-              <a:buNone/>
-            </a:pPr>
-            <a:r>
-              <a:rPr lang="en-US" sz="750" b="1" spc="200" kern="0" dirty="0">
-                <a:solidFill>
-                  <a:srgbClr val="5B5F66"/>
-                </a:solidFill>
-                <a:latin typeface="Arial" pitchFamily="34" charset="0"/>
-                <a:ea typeface="Arial" pitchFamily="34" charset="-122"/>
-                <a:cs typeface="Arial" pitchFamily="34" charset="-120"/>
-              </a:rPr>
-              <a:t>INDUSTRIES, INC.</a:t>
-            </a:r>
-            <a:endParaRPr lang="en-US" sz="750" dirty="0"/>
-          </a:p>
-        </p:txBody>
-      </p:sp>
-      <p:sp>
-        <p:nvSpPr>
-          <p:cNvPr id="12" name="Text 10"/>
-          <p:cNvSpPr txBox="1"/>
-          <p:nvPr/>
-        </p:nvSpPr>
-        <p:spPr>
-          <a:xfrm>
-            <a:off x="6949440" y="0"/>
-            <a:ext cx="5486400" cy="6858000"/>
-          </a:xfrm>
-          <a:prstGeom prst="rect">
-            <a:avLst/>
-          </a:prstGeom>
-          <a:noFill/>
-          <a:ln/>
-        </p:spPr>
-        <p:txBody>
-          <a:bodyPr wrap="square" lIns="0" tIns="0" rIns="0" bIns="0" rtlCol="0" anchor="t"/>
-          <a:lstStyle/>
-          <a:p>
-            <a:pPr algn="r" indent="0" marL="0">
-              <a:buNone/>
-            </a:pPr>
-            <a:r>
-              <a:rPr lang="en-US" sz="36000" b="1" dirty="0">
-                <a:solidFill>
-                  <a:srgbClr val="EBEBE9"/>
-                </a:solidFill>
-                <a:latin typeface="Bookman Old Style" pitchFamily="34" charset="0"/>
-                <a:ea typeface="Bookman Old Style" pitchFamily="34" charset="-122"/>
-                <a:cs typeface="Bookman Old Style" pitchFamily="34" charset="-120"/>
-              </a:rPr>
-              <a:t>02</a:t>
-            </a:r>
-            <a:endParaRPr lang="en-US" sz="36000" dirty="0"/>
-          </a:p>
-        </p:txBody>
-      </p:sp>
-      <p:sp>
-        <p:nvSpPr>
-          <p:cNvPr id="13" name="Text 11"/>
-          <p:cNvSpPr txBox="1"/>
-          <p:nvPr/>
-        </p:nvSpPr>
-        <p:spPr>
-          <a:xfrm>
-            <a:off x="5074920" y="777240"/>
-            <a:ext cx="7315200" cy="320040"/>
-          </a:xfrm>
-          <a:prstGeom prst="rect">
-            <a:avLst/>
-          </a:prstGeom>
-          <a:noFill/>
-          <a:ln/>
-        </p:spPr>
-        <p:txBody>
-          <a:bodyPr wrap="square" lIns="0" tIns="0" rIns="0" bIns="0" rtlCol="0" anchor="ctr"/>
-          <a:lstStyle/>
-          <a:p>
-            <a:pPr algn="l" indent="0" marL="0">
-              <a:buNone/>
-            </a:pPr>
-            <a:r>
-              <a:rPr lang="en-US" sz="1100" b="1" spc="150" kern="0" dirty="0">
-                <a:solidFill>
-                  <a:srgbClr val="FF002B"/>
-                </a:solidFill>
-                <a:latin typeface="Arial" pitchFamily="34" charset="0"/>
-                <a:ea typeface="Arial" pitchFamily="34" charset="-122"/>
-                <a:cs typeface="Arial" pitchFamily="34" charset="-120"/>
-              </a:rPr>
               <a:t>COMPANY OVERVIEW</a:t>
             </a:r>
             <a:endParaRPr lang="en-US" sz="1100" dirty="0"/>
@@ -2394,7 +2284,7 @@
       </p:sp>
       <p:sp>
         <p:nvSpPr>
-          <p:cNvPr id="14" name="Text 12"/>
+          <p:cNvPr id="11" name="Text 8"/>
           <p:cNvSpPr txBox="1"/>
           <p:nvPr/>
         </p:nvSpPr>
@@ -2424,9 +2314,9 @@
                 <a:solidFill>
                   <a:srgbClr val="0A0A0A"/>
                 </a:solidFill>
-                <a:latin typeface="Bookman Old Style" pitchFamily="34" charset="0"/>
-                <a:ea typeface="Bookman Old Style" pitchFamily="34" charset="-122"/>
-                <a:cs typeface="Bookman Old Style" pitchFamily="34" charset="-120"/>
+                <a:latin typeface="Cambria" pitchFamily="34" charset="0"/>
+                <a:ea typeface="Cambria" pitchFamily="34" charset="-122"/>
+                <a:cs typeface="Cambria" pitchFamily="34" charset="-120"/>
               </a:rPr>
               <a:t>Federal Law-Enforcement Training, Built by Current Operators</a:t>
             </a:r>
@@ -2436,7 +2326,7 @@
       </p:sp>
       <p:sp>
         <p:nvSpPr>
-          <p:cNvPr id="15" name="Text 13"/>
+          <p:cNvPr id="12" name="Text 9"/>
           <p:cNvSpPr txBox="1"/>
           <p:nvPr/>
         </p:nvSpPr>
@@ -2478,7 +2368,7 @@
       </p:sp>
       <p:sp>
         <p:nvSpPr>
-          <p:cNvPr id="16" name="Text 14"/>
+          <p:cNvPr id="13" name="Text 10"/>
           <p:cNvSpPr txBox="1"/>
           <p:nvPr/>
         </p:nvSpPr>
@@ -2505,9 +2395,9 @@
                 <a:solidFill>
                   <a:srgbClr val="FF002B"/>
                 </a:solidFill>
-                <a:latin typeface="Bookman Old Style" pitchFamily="34" charset="0"/>
-                <a:ea typeface="Bookman Old Style" pitchFamily="34" charset="-122"/>
-                <a:cs typeface="Bookman Old Style" pitchFamily="34" charset="-120"/>
+                <a:latin typeface="Cambria" pitchFamily="34" charset="0"/>
+                <a:ea typeface="Cambria" pitchFamily="34" charset="-122"/>
+                <a:cs typeface="Cambria" pitchFamily="34" charset="-120"/>
               </a:rPr>
               <a:t>01</a:t>
             </a:r>
@@ -2517,7 +2407,7 @@
       </p:sp>
       <p:sp>
         <p:nvSpPr>
-          <p:cNvPr id="17" name="Text 15"/>
+          <p:cNvPr id="14" name="Text 11"/>
           <p:cNvSpPr txBox="1"/>
           <p:nvPr/>
         </p:nvSpPr>
@@ -2556,7 +2446,7 @@
       </p:sp>
       <p:sp>
         <p:nvSpPr>
-          <p:cNvPr id="18" name="Text 16"/>
+          <p:cNvPr id="15" name="Text 12"/>
           <p:cNvSpPr txBox="1"/>
           <p:nvPr/>
         </p:nvSpPr>
@@ -2598,7 +2488,7 @@
       </p:sp>
       <p:sp>
         <p:nvSpPr>
-          <p:cNvPr id="19" name="Shape 17"/>
+          <p:cNvPr id="16" name="Shape 13"/>
           <p:cNvSpPr/>
           <p:nvPr/>
         </p:nvSpPr>
@@ -2621,7 +2511,7 @@
       </p:sp>
       <p:sp>
         <p:nvSpPr>
-          <p:cNvPr id="20" name="Text 18"/>
+          <p:cNvPr id="17" name="Text 14"/>
           <p:cNvSpPr txBox="1"/>
           <p:nvPr/>
         </p:nvSpPr>
@@ -2648,9 +2538,9 @@
                 <a:solidFill>
                   <a:srgbClr val="FF002B"/>
                 </a:solidFill>
-                <a:latin typeface="Bookman Old Style" pitchFamily="34" charset="0"/>
-                <a:ea typeface="Bookman Old Style" pitchFamily="34" charset="-122"/>
-                <a:cs typeface="Bookman Old Style" pitchFamily="34" charset="-120"/>
+                <a:latin typeface="Cambria" pitchFamily="34" charset="0"/>
+                <a:ea typeface="Cambria" pitchFamily="34" charset="-122"/>
+                <a:cs typeface="Cambria" pitchFamily="34" charset="-120"/>
               </a:rPr>
               <a:t>02</a:t>
             </a:r>
@@ -2660,7 +2550,7 @@
       </p:sp>
       <p:sp>
         <p:nvSpPr>
-          <p:cNvPr id="21" name="Text 19"/>
+          <p:cNvPr id="18" name="Text 15"/>
           <p:cNvSpPr txBox="1"/>
           <p:nvPr/>
         </p:nvSpPr>
@@ -2699,7 +2589,7 @@
       </p:sp>
       <p:sp>
         <p:nvSpPr>
-          <p:cNvPr id="22" name="Text 20"/>
+          <p:cNvPr id="19" name="Text 16"/>
           <p:cNvSpPr txBox="1"/>
           <p:nvPr/>
         </p:nvSpPr>
@@ -2741,7 +2631,7 @@
       </p:sp>
       <p:sp>
         <p:nvSpPr>
-          <p:cNvPr id="23" name="Shape 21"/>
+          <p:cNvPr id="20" name="Shape 17"/>
           <p:cNvSpPr/>
           <p:nvPr/>
         </p:nvSpPr>
@@ -2764,7 +2654,7 @@
       </p:sp>
       <p:sp>
         <p:nvSpPr>
-          <p:cNvPr id="24" name="Text 22"/>
+          <p:cNvPr id="21" name="Text 18"/>
           <p:cNvSpPr txBox="1"/>
           <p:nvPr/>
         </p:nvSpPr>
@@ -2791,9 +2681,9 @@
                 <a:solidFill>
                   <a:srgbClr val="FF002B"/>
                 </a:solidFill>
-                <a:latin typeface="Bookman Old Style" pitchFamily="34" charset="0"/>
-                <a:ea typeface="Bookman Old Style" pitchFamily="34" charset="-122"/>
-                <a:cs typeface="Bookman Old Style" pitchFamily="34" charset="-120"/>
+                <a:latin typeface="Cambria" pitchFamily="34" charset="0"/>
+                <a:ea typeface="Cambria" pitchFamily="34" charset="-122"/>
+                <a:cs typeface="Cambria" pitchFamily="34" charset="-120"/>
               </a:rPr>
               <a:t>03</a:t>
             </a:r>
@@ -2803,7 +2693,7 @@
       </p:sp>
       <p:sp>
         <p:nvSpPr>
-          <p:cNvPr id="25" name="Text 23"/>
+          <p:cNvPr id="22" name="Text 19"/>
           <p:cNvSpPr txBox="1"/>
           <p:nvPr/>
         </p:nvSpPr>
@@ -2842,7 +2732,7 @@
       </p:sp>
       <p:sp>
         <p:nvSpPr>
-          <p:cNvPr id="26" name="Text 24"/>
+          <p:cNvPr id="23" name="Text 20"/>
           <p:cNvSpPr txBox="1"/>
           <p:nvPr/>
         </p:nvSpPr>
@@ -2884,7 +2774,7 @@
       </p:sp>
       <p:sp>
         <p:nvSpPr>
-          <p:cNvPr id="27" name="Text 25"/>
+          <p:cNvPr id="24" name="Text 21"/>
           <p:cNvSpPr txBox="1"/>
           <p:nvPr/>
         </p:nvSpPr>
@@ -2923,7 +2813,7 @@
       </p:sp>
       <p:sp>
         <p:nvSpPr>
-          <p:cNvPr id="28" name="Shape 26"/>
+          <p:cNvPr id="25" name="Shape 22"/>
           <p:cNvSpPr/>
           <p:nvPr/>
         </p:nvSpPr>
@@ -2947,7 +2837,7 @@
       </p:sp>
       <p:sp>
         <p:nvSpPr>
-          <p:cNvPr id="29" name="Text 27"/>
+          <p:cNvPr id="26" name="Text 23"/>
           <p:cNvSpPr txBox="1"/>
           <p:nvPr/>
         </p:nvSpPr>
@@ -3000,7 +2890,7 @@
       </p:sp>
       <p:sp>
         <p:nvSpPr>
-          <p:cNvPr id="30" name="Text 28"/>
+          <p:cNvPr id="27" name="Text 24"/>
           <p:cNvSpPr txBox="1"/>
           <p:nvPr/>
         </p:nvSpPr>
@@ -3098,9 +2988,9 @@
                 <a:solidFill>
                   <a:srgbClr val="EBEBE9"/>
                 </a:solidFill>
-                <a:latin typeface="Bookman Old Style" pitchFamily="34" charset="0"/>
-                <a:ea typeface="Bookman Old Style" pitchFamily="34" charset="-122"/>
-                <a:cs typeface="Bookman Old Style" pitchFamily="34" charset="-120"/>
+                <a:latin typeface="Cambria" pitchFamily="34" charset="0"/>
+                <a:ea typeface="Cambria" pitchFamily="34" charset="-122"/>
+                <a:cs typeface="Cambria" pitchFamily="34" charset="-120"/>
               </a:rPr>
               <a:t>03</a:t>
             </a:r>
@@ -3108,157 +2998,63 @@
           </a:p>
         </p:txBody>
       </p:sp>
-      <p:sp>
-        <p:nvSpPr>
-          <p:cNvPr id="3" name="Shape 1"/>
-          <p:cNvSpPr/>
-          <p:nvPr/>
-        </p:nvSpPr>
-        <p:spPr>
-          <a:xfrm>
-            <a:off x="457200" y="384048"/>
-            <a:ext cx="310896" cy="29261"/>
-          </a:xfrm>
-          <a:prstGeom prst="rect">
-            <a:avLst/>
-          </a:prstGeom>
-          <a:solidFill>
-            <a:srgbClr val="FF002B"/>
-          </a:solidFill>
-          <a:ln/>
-        </p:spPr>
-      </p:sp>
-      <p:sp>
-        <p:nvSpPr>
-          <p:cNvPr id="4" name="Shape 2"/>
-          <p:cNvSpPr/>
-          <p:nvPr/>
-        </p:nvSpPr>
-        <p:spPr>
-          <a:xfrm>
-            <a:off x="457200" y="384048"/>
-            <a:ext cx="29261" cy="310896"/>
-          </a:xfrm>
-          <a:prstGeom prst="rect">
-            <a:avLst/>
-          </a:prstGeom>
-          <a:solidFill>
-            <a:srgbClr val="FF002B"/>
-          </a:solidFill>
-          <a:ln/>
-        </p:spPr>
-      </p:sp>
-      <p:sp>
-        <p:nvSpPr>
-          <p:cNvPr id="5" name="Text 3"/>
-          <p:cNvSpPr txBox="1"/>
-          <p:nvPr/>
-        </p:nvSpPr>
-        <p:spPr>
-          <a:xfrm>
-            <a:off x="896112" y="329184"/>
-            <a:ext cx="2926080" cy="292608"/>
-          </a:xfrm>
-          <a:prstGeom prst="rect">
-            <a:avLst/>
-          </a:prstGeom>
-          <a:noFill/>
-          <a:ln/>
-        </p:spPr>
-        <p:txBody>
-          <a:bodyPr wrap="square" lIns="0" tIns="0" rIns="0" bIns="0" rtlCol="0" anchor="ctr"/>
-          <a:lstStyle/>
-          <a:p>
-            <a:pPr indent="0" marL="0">
-              <a:buNone/>
-            </a:pPr>
-            <a:r>
-              <a:rPr lang="en-US" sz="1500" b="1" spc="200" kern="0" dirty="0">
-                <a:solidFill>
-                  <a:srgbClr val="0A0A0A"/>
+      <p:pic>
+        <p:nvPicPr>
+          <p:cNvPr id="3" name="Image 0" descr="/home/user/valletta-design-system/assets/logo/valletta-lockup.png">    </p:cNvPr>
+          <p:cNvPicPr>
+            <a:picLocks noChangeAspect="1"/>
+          </p:cNvPicPr>
+          <p:nvPr/>
+        </p:nvPicPr>
+        <p:blipFill>
+          <a:blip r:embed="rId1"/>
+          <a:stretch>
+            <a:fillRect/>
+          </a:stretch>
+        </p:blipFill>
+        <p:spPr>
+          <a:xfrm>
+            <a:off x="457200" y="365760"/>
+            <a:ext cx="1828800" cy="384048"/>
+          </a:xfrm>
+          <a:prstGeom prst="rect">
+            <a:avLst/>
+          </a:prstGeom>
+        </p:spPr>
+      </p:pic>
+      <p:sp>
+        <p:nvSpPr>
+          <p:cNvPr id="4" name="Text 1"/>
+          <p:cNvSpPr txBox="1"/>
+          <p:nvPr/>
+        </p:nvSpPr>
+        <p:spPr>
+          <a:xfrm>
+            <a:off x="457200" y="777240"/>
+            <a:ext cx="9144000" cy="320040"/>
+          </a:xfrm>
+          <a:prstGeom prst="rect">
+            <a:avLst/>
+          </a:prstGeom>
+          <a:noFill/>
+          <a:ln/>
+        </p:spPr>
+        <p:txBody>
+          <a:bodyPr wrap="square" lIns="0" tIns="0" rIns="0" bIns="0" rtlCol="0" anchor="ctr"/>
+          <a:lstStyle/>
+          <a:p>
+            <a:pPr algn="l" indent="0" marL="0">
+              <a:buNone/>
+            </a:pPr>
+            <a:r>
+              <a:rPr lang="en-US" sz="1100" b="1" spc="150" kern="0" dirty="0">
+                <a:solidFill>
+                  <a:srgbClr val="FF002B"/>
                 </a:solidFill>
                 <a:latin typeface="Arial" pitchFamily="34" charset="0"/>
                 <a:ea typeface="Arial" pitchFamily="34" charset="-122"/>
                 <a:cs typeface="Arial" pitchFamily="34" charset="-120"/>
               </a:rPr>
-              <a:t>VALLETTA</a:t>
-            </a:r>
-            <a:endParaRPr lang="en-US" sz="1500" dirty="0"/>
-          </a:p>
-        </p:txBody>
-      </p:sp>
-      <p:sp>
-        <p:nvSpPr>
-          <p:cNvPr id="6" name="Text 4"/>
-          <p:cNvSpPr txBox="1"/>
-          <p:nvPr/>
-        </p:nvSpPr>
-        <p:spPr>
-          <a:xfrm>
-            <a:off x="896112" y="603504"/>
-            <a:ext cx="2926080" cy="219456"/>
-          </a:xfrm>
-          <a:prstGeom prst="rect">
-            <a:avLst/>
-          </a:prstGeom>
-          <a:noFill/>
-          <a:ln/>
-        </p:spPr>
-        <p:txBody>
-          <a:bodyPr wrap="square" lIns="0" tIns="0" rIns="0" bIns="0" rtlCol="0" anchor="ctr"/>
-          <a:lstStyle/>
-          <a:p>
-            <a:pPr indent="0" marL="0">
-              <a:buNone/>
-            </a:pPr>
-            <a:r>
-              <a:rPr lang="en-US" sz="750" b="1" spc="200" kern="0" dirty="0">
-                <a:solidFill>
-                  <a:srgbClr val="5B5F66"/>
-                </a:solidFill>
-                <a:latin typeface="Arial" pitchFamily="34" charset="0"/>
-                <a:ea typeface="Arial" pitchFamily="34" charset="-122"/>
-                <a:cs typeface="Arial" pitchFamily="34" charset="-120"/>
-              </a:rPr>
-              <a:t>INDUSTRIES, INC.</a:t>
-            </a:r>
-            <a:endParaRPr lang="en-US" sz="750" dirty="0"/>
-          </a:p>
-        </p:txBody>
-      </p:sp>
-      <p:sp>
-        <p:nvSpPr>
-          <p:cNvPr id="7" name="Text 5"/>
-          <p:cNvSpPr txBox="1"/>
-          <p:nvPr/>
-        </p:nvSpPr>
-        <p:spPr>
-          <a:xfrm>
-            <a:off x="457200" y="777240"/>
-            <a:ext cx="9144000" cy="320040"/>
-          </a:xfrm>
-          <a:prstGeom prst="rect">
-            <a:avLst/>
-          </a:prstGeom>
-          <a:noFill/>
-          <a:ln/>
-        </p:spPr>
-        <p:txBody>
-          <a:bodyPr wrap="square" lIns="0" tIns="0" rIns="0" bIns="0" rtlCol="0" anchor="ctr"/>
-          <a:lstStyle/>
-          <a:p>
-            <a:pPr algn="l" indent="0" marL="0">
-              <a:buNone/>
-            </a:pPr>
-            <a:r>
-              <a:rPr lang="en-US" sz="1100" b="1" spc="150" kern="0" dirty="0">
-                <a:solidFill>
-                  <a:srgbClr val="FF002B"/>
-                </a:solidFill>
-                <a:latin typeface="Arial" pitchFamily="34" charset="0"/>
-                <a:ea typeface="Arial" pitchFamily="34" charset="-122"/>
-                <a:cs typeface="Arial" pitchFamily="34" charset="-120"/>
-              </a:rPr>
               <a:t>PERFORMANCE WORK STATEMENT ALIGNMENT</a:t>
             </a:r>
             <a:endParaRPr lang="en-US" sz="1100" dirty="0"/>
@@ -3267,7 +3063,7 @@
       </p:sp>
       <p:sp>
         <p:nvSpPr>
-          <p:cNvPr id="8" name="Text 6"/>
+          <p:cNvPr id="5" name="Text 2"/>
           <p:cNvSpPr txBox="1"/>
           <p:nvPr/>
         </p:nvSpPr>
@@ -3294,9 +3090,9 @@
                 <a:solidFill>
                   <a:srgbClr val="0A0A0A"/>
                 </a:solidFill>
-                <a:latin typeface="Bookman Old Style" pitchFamily="34" charset="0"/>
-                <a:ea typeface="Bookman Old Style" pitchFamily="34" charset="-122"/>
-                <a:cs typeface="Bookman Old Style" pitchFamily="34" charset="-120"/>
+                <a:latin typeface="Cambria" pitchFamily="34" charset="0"/>
+                <a:ea typeface="Cambria" pitchFamily="34" charset="-122"/>
+                <a:cs typeface="Cambria" pitchFamily="34" charset="-120"/>
               </a:rPr>
               <a:t>Full-Lifecycle Alignment With the Draft PWS Scope</a:t>
             </a:r>
@@ -4080,7 +3876,7 @@
       </p:graphicFrame>
       <p:sp>
         <p:nvSpPr>
-          <p:cNvPr id="10" name="Shape 7"/>
+          <p:cNvPr id="7" name="Shape 3"/>
           <p:cNvSpPr/>
           <p:nvPr/>
         </p:nvSpPr>
@@ -4112,7 +3908,7 @@
       </p:sp>
       <p:sp>
         <p:nvSpPr>
-          <p:cNvPr id="11" name="Shape 8"/>
+          <p:cNvPr id="8" name="Shape 4"/>
           <p:cNvSpPr/>
           <p:nvPr/>
         </p:nvSpPr>
@@ -4132,7 +3928,7 @@
       </p:sp>
       <p:sp>
         <p:nvSpPr>
-          <p:cNvPr id="12" name="Shape 9"/>
+          <p:cNvPr id="9" name="Shape 5"/>
           <p:cNvSpPr/>
           <p:nvPr/>
         </p:nvSpPr>
@@ -4152,7 +3948,7 @@
       </p:sp>
       <p:sp>
         <p:nvSpPr>
-          <p:cNvPr id="13" name="Shape 10"/>
+          <p:cNvPr id="10" name="Shape 6"/>
           <p:cNvSpPr/>
           <p:nvPr/>
         </p:nvSpPr>
@@ -4172,7 +3968,7 @@
       </p:sp>
       <p:sp>
         <p:nvSpPr>
-          <p:cNvPr id="14" name="Text 11"/>
+          <p:cNvPr id="11" name="Text 7"/>
           <p:cNvSpPr txBox="1"/>
           <p:nvPr/>
         </p:nvSpPr>
@@ -4211,7 +4007,7 @@
       </p:sp>
       <p:sp>
         <p:nvSpPr>
-          <p:cNvPr id="15" name="Text 12"/>
+          <p:cNvPr id="12" name="Text 8"/>
           <p:cNvSpPr txBox="1"/>
           <p:nvPr/>
         </p:nvSpPr>
@@ -4433,7 +4229,7 @@
       </p:sp>
       <p:sp>
         <p:nvSpPr>
-          <p:cNvPr id="16" name="Text 13"/>
+          <p:cNvPr id="13" name="Text 9"/>
           <p:cNvSpPr txBox="1"/>
           <p:nvPr/>
         </p:nvSpPr>
@@ -4475,7 +4271,7 @@
       </p:sp>
       <p:sp>
         <p:nvSpPr>
-          <p:cNvPr id="17" name="Shape 14"/>
+          <p:cNvPr id="14" name="Shape 10"/>
           <p:cNvSpPr/>
           <p:nvPr/>
         </p:nvSpPr>
@@ -4499,7 +4295,7 @@
       </p:sp>
       <p:sp>
         <p:nvSpPr>
-          <p:cNvPr id="18" name="Text 15"/>
+          <p:cNvPr id="15" name="Text 11"/>
           <p:cNvSpPr txBox="1"/>
           <p:nvPr/>
         </p:nvSpPr>
@@ -4552,7 +4348,7 @@
       </p:sp>
       <p:sp>
         <p:nvSpPr>
-          <p:cNvPr id="19" name="Text 16"/>
+          <p:cNvPr id="16" name="Text 12"/>
           <p:cNvSpPr txBox="1"/>
           <p:nvPr/>
         </p:nvSpPr>
@@ -4650,9 +4446,9 @@
                 <a:solidFill>
                   <a:srgbClr val="141414"/>
                 </a:solidFill>
-                <a:latin typeface="Bookman Old Style" pitchFamily="34" charset="0"/>
-                <a:ea typeface="Bookman Old Style" pitchFamily="34" charset="-122"/>
-                <a:cs typeface="Bookman Old Style" pitchFamily="34" charset="-120"/>
+                <a:latin typeface="Cambria" pitchFamily="34" charset="0"/>
+                <a:ea typeface="Cambria" pitchFamily="34" charset="-122"/>
+                <a:cs typeface="Cambria" pitchFamily="34" charset="-120"/>
               </a:rPr>
               <a:t>04</a:t>
             </a:r>
@@ -4660,56 +4456,40 @@
           </a:p>
         </p:txBody>
       </p:sp>
-      <p:sp>
-        <p:nvSpPr>
-          <p:cNvPr id="3" name="Shape 1"/>
-          <p:cNvSpPr/>
-          <p:nvPr/>
-        </p:nvSpPr>
-        <p:spPr>
-          <a:xfrm>
-            <a:off x="457200" y="384048"/>
-            <a:ext cx="310896" cy="29261"/>
-          </a:xfrm>
-          <a:prstGeom prst="rect">
-            <a:avLst/>
-          </a:prstGeom>
-          <a:solidFill>
-            <a:srgbClr val="FF002B"/>
-          </a:solidFill>
-          <a:ln/>
-        </p:spPr>
-      </p:sp>
-      <p:sp>
-        <p:nvSpPr>
-          <p:cNvPr id="4" name="Shape 2"/>
-          <p:cNvSpPr/>
-          <p:nvPr/>
-        </p:nvSpPr>
-        <p:spPr>
-          <a:xfrm>
-            <a:off x="457200" y="384048"/>
-            <a:ext cx="29261" cy="310896"/>
-          </a:xfrm>
-          <a:prstGeom prst="rect">
-            <a:avLst/>
-          </a:prstGeom>
-          <a:solidFill>
-            <a:srgbClr val="FF002B"/>
-          </a:solidFill>
-          <a:ln/>
-        </p:spPr>
-      </p:sp>
-      <p:sp>
-        <p:nvSpPr>
-          <p:cNvPr id="5" name="Text 3"/>
-          <p:cNvSpPr txBox="1"/>
-          <p:nvPr/>
-        </p:nvSpPr>
-        <p:spPr>
-          <a:xfrm>
-            <a:off x="896112" y="329184"/>
-            <a:ext cx="2926080" cy="292608"/>
+      <p:pic>
+        <p:nvPicPr>
+          <p:cNvPr id="3" name="Image 0" descr="/home/user/valletta-design-system/assets/logo/valletta-mark.png">    </p:cNvPr>
+          <p:cNvPicPr>
+            <a:picLocks noChangeAspect="1"/>
+          </p:cNvPicPr>
+          <p:nvPr/>
+        </p:nvPicPr>
+        <p:blipFill>
+          <a:blip r:embed="rId1"/>
+          <a:stretch>
+            <a:fillRect/>
+          </a:stretch>
+        </p:blipFill>
+        <p:spPr>
+          <a:xfrm>
+            <a:off x="457200" y="365760"/>
+            <a:ext cx="365760" cy="389284"/>
+          </a:xfrm>
+          <a:prstGeom prst="rect">
+            <a:avLst/>
+          </a:prstGeom>
+        </p:spPr>
+      </p:pic>
+      <p:sp>
+        <p:nvSpPr>
+          <p:cNvPr id="4" name="Text 1"/>
+          <p:cNvSpPr txBox="1"/>
+          <p:nvPr/>
+        </p:nvSpPr>
+        <p:spPr>
+          <a:xfrm>
+            <a:off x="932688" y="329184"/>
+            <a:ext cx="2926080" cy="274320"/>
           </a:xfrm>
           <a:prstGeom prst="rect">
             <a:avLst/>
@@ -4725,92 +4505,92 @@
               <a:buNone/>
             </a:pPr>
             <a:r>
-              <a:rPr lang="en-US" sz="1500" b="1" spc="200" kern="0" dirty="0">
+              <a:rPr lang="en-US" sz="1500" spc="200" kern="0" dirty="0">
                 <a:solidFill>
                   <a:srgbClr val="FFFFFF"/>
+                </a:solidFill>
+                <a:latin typeface="Cambria" pitchFamily="34" charset="0"/>
+                <a:ea typeface="Cambria" pitchFamily="34" charset="-122"/>
+                <a:cs typeface="Cambria" pitchFamily="34" charset="-120"/>
+              </a:rPr>
+              <a:t>VALLETTA</a:t>
+            </a:r>
+            <a:endParaRPr lang="en-US" sz="1500" dirty="0"/>
+          </a:p>
+        </p:txBody>
+      </p:sp>
+      <p:sp>
+        <p:nvSpPr>
+          <p:cNvPr id="5" name="Text 2"/>
+          <p:cNvSpPr txBox="1"/>
+          <p:nvPr/>
+        </p:nvSpPr>
+        <p:spPr>
+          <a:xfrm>
+            <a:off x="932688" y="594360"/>
+            <a:ext cx="2926080" cy="219456"/>
+          </a:xfrm>
+          <a:prstGeom prst="rect">
+            <a:avLst/>
+          </a:prstGeom>
+          <a:noFill/>
+          <a:ln/>
+        </p:spPr>
+        <p:txBody>
+          <a:bodyPr wrap="square" lIns="0" tIns="0" rIns="0" bIns="0" rtlCol="0" anchor="ctr"/>
+          <a:lstStyle/>
+          <a:p>
+            <a:pPr indent="0" marL="0">
+              <a:buNone/>
+            </a:pPr>
+            <a:r>
+              <a:rPr lang="en-US" sz="750" b="1" spc="200" kern="0" dirty="0">
+                <a:solidFill>
+                  <a:srgbClr val="5B5F66"/>
                 </a:solidFill>
                 <a:latin typeface="Arial" pitchFamily="34" charset="0"/>
                 <a:ea typeface="Arial" pitchFamily="34" charset="-122"/>
                 <a:cs typeface="Arial" pitchFamily="34" charset="-120"/>
               </a:rPr>
-              <a:t>VALLETTA</a:t>
-            </a:r>
-            <a:endParaRPr lang="en-US" sz="1500" dirty="0"/>
-          </a:p>
-        </p:txBody>
-      </p:sp>
-      <p:sp>
-        <p:nvSpPr>
-          <p:cNvPr id="6" name="Text 4"/>
-          <p:cNvSpPr txBox="1"/>
-          <p:nvPr/>
-        </p:nvSpPr>
-        <p:spPr>
-          <a:xfrm>
-            <a:off x="896112" y="603504"/>
-            <a:ext cx="2926080" cy="219456"/>
-          </a:xfrm>
-          <a:prstGeom prst="rect">
-            <a:avLst/>
-          </a:prstGeom>
-          <a:noFill/>
-          <a:ln/>
-        </p:spPr>
-        <p:txBody>
-          <a:bodyPr wrap="square" lIns="0" tIns="0" rIns="0" bIns="0" rtlCol="0" anchor="ctr"/>
-          <a:lstStyle/>
-          <a:p>
-            <a:pPr indent="0" marL="0">
-              <a:buNone/>
-            </a:pPr>
-            <a:r>
-              <a:rPr lang="en-US" sz="750" b="1" spc="200" kern="0" dirty="0">
-                <a:solidFill>
-                  <a:srgbClr val="5B5F66"/>
+              <a:t>INDUSTRIES, INC.</a:t>
+            </a:r>
+            <a:endParaRPr lang="en-US" sz="750" dirty="0"/>
+          </a:p>
+        </p:txBody>
+      </p:sp>
+      <p:sp>
+        <p:nvSpPr>
+          <p:cNvPr id="6" name="Text 3"/>
+          <p:cNvSpPr txBox="1"/>
+          <p:nvPr/>
+        </p:nvSpPr>
+        <p:spPr>
+          <a:xfrm>
+            <a:off x="457200" y="777240"/>
+            <a:ext cx="9144000" cy="320040"/>
+          </a:xfrm>
+          <a:prstGeom prst="rect">
+            <a:avLst/>
+          </a:prstGeom>
+          <a:noFill/>
+          <a:ln/>
+        </p:spPr>
+        <p:txBody>
+          <a:bodyPr wrap="square" lIns="0" tIns="0" rIns="0" bIns="0" rtlCol="0" anchor="ctr"/>
+          <a:lstStyle/>
+          <a:p>
+            <a:pPr algn="l" indent="0" marL="0">
+              <a:buNone/>
+            </a:pPr>
+            <a:r>
+              <a:rPr lang="en-US" sz="1100" b="1" spc="150" kern="0" dirty="0">
+                <a:solidFill>
+                  <a:srgbClr val="FF002B"/>
                 </a:solidFill>
                 <a:latin typeface="Arial" pitchFamily="34" charset="0"/>
                 <a:ea typeface="Arial" pitchFamily="34" charset="-122"/>
                 <a:cs typeface="Arial" pitchFamily="34" charset="-120"/>
               </a:rPr>
-              <a:t>INDUSTRIES, INC.</a:t>
-            </a:r>
-            <a:endParaRPr lang="en-US" sz="750" dirty="0"/>
-          </a:p>
-        </p:txBody>
-      </p:sp>
-      <p:sp>
-        <p:nvSpPr>
-          <p:cNvPr id="7" name="Text 5"/>
-          <p:cNvSpPr txBox="1"/>
-          <p:nvPr/>
-        </p:nvSpPr>
-        <p:spPr>
-          <a:xfrm>
-            <a:off x="457200" y="777240"/>
-            <a:ext cx="9144000" cy="320040"/>
-          </a:xfrm>
-          <a:prstGeom prst="rect">
-            <a:avLst/>
-          </a:prstGeom>
-          <a:noFill/>
-          <a:ln/>
-        </p:spPr>
-        <p:txBody>
-          <a:bodyPr wrap="square" lIns="0" tIns="0" rIns="0" bIns="0" rtlCol="0" anchor="ctr"/>
-          <a:lstStyle/>
-          <a:p>
-            <a:pPr algn="l" indent="0" marL="0">
-              <a:buNone/>
-            </a:pPr>
-            <a:r>
-              <a:rPr lang="en-US" sz="1100" b="1" spc="150" kern="0" dirty="0">
-                <a:solidFill>
-                  <a:srgbClr val="FF002B"/>
-                </a:solidFill>
-                <a:latin typeface="Arial" pitchFamily="34" charset="0"/>
-                <a:ea typeface="Arial" pitchFamily="34" charset="-122"/>
-                <a:cs typeface="Arial" pitchFamily="34" charset="-120"/>
-              </a:rPr>
               <a:t>TRAINING DELIVERY CAPABILITY</a:t>
             </a:r>
             <a:endParaRPr lang="en-US" sz="1100" dirty="0"/>
@@ -4819,7 +4599,7 @@
       </p:sp>
       <p:sp>
         <p:nvSpPr>
-          <p:cNvPr id="8" name="Text 6"/>
+          <p:cNvPr id="7" name="Text 4"/>
           <p:cNvSpPr txBox="1"/>
           <p:nvPr/>
         </p:nvSpPr>
@@ -4849,9 +4629,9 @@
                 <a:solidFill>
                   <a:srgbClr val="FFFFFF"/>
                 </a:solidFill>
-                <a:latin typeface="Bookman Old Style" pitchFamily="34" charset="0"/>
-                <a:ea typeface="Bookman Old Style" pitchFamily="34" charset="-122"/>
-                <a:cs typeface="Bookman Old Style" pitchFamily="34" charset="-120"/>
+                <a:latin typeface="Cambria" pitchFamily="34" charset="0"/>
+                <a:ea typeface="Cambria" pitchFamily="34" charset="-122"/>
+                <a:cs typeface="Cambria" pitchFamily="34" charset="-120"/>
               </a:rPr>
               <a:t>Small-Arms, Law-Enforcement &amp; Survivability Training at Allied Ranges Nationwide</a:t>
             </a:r>
@@ -4861,7 +4641,7 @@
       </p:sp>
       <p:sp>
         <p:nvSpPr>
-          <p:cNvPr id="9" name="Text 7"/>
+          <p:cNvPr id="8" name="Text 5"/>
           <p:cNvSpPr txBox="1"/>
           <p:nvPr/>
         </p:nvSpPr>
@@ -4900,7 +4680,7 @@
       </p:sp>
       <p:sp>
         <p:nvSpPr>
-          <p:cNvPr id="10" name="Shape 8"/>
+          <p:cNvPr id="9" name="Shape 6"/>
           <p:cNvSpPr/>
           <p:nvPr/>
         </p:nvSpPr>
@@ -4920,7 +4700,7 @@
       </p:sp>
       <p:sp>
         <p:nvSpPr>
-          <p:cNvPr id="11" name="Shape 9"/>
+          <p:cNvPr id="10" name="Shape 7"/>
           <p:cNvSpPr/>
           <p:nvPr/>
         </p:nvSpPr>
@@ -4940,7 +4720,7 @@
       </p:sp>
       <p:sp>
         <p:nvSpPr>
-          <p:cNvPr id="12" name="Shape 10"/>
+          <p:cNvPr id="11" name="Shape 8"/>
           <p:cNvSpPr/>
           <p:nvPr/>
         </p:nvSpPr>
@@ -4960,7 +4740,7 @@
       </p:sp>
       <p:sp>
         <p:nvSpPr>
-          <p:cNvPr id="13" name="Shape 11"/>
+          <p:cNvPr id="12" name="Shape 9"/>
           <p:cNvSpPr/>
           <p:nvPr/>
         </p:nvSpPr>
@@ -4980,7 +4760,7 @@
       </p:sp>
       <p:sp>
         <p:nvSpPr>
-          <p:cNvPr id="14" name="Shape 12"/>
+          <p:cNvPr id="13" name="Shape 10"/>
           <p:cNvSpPr/>
           <p:nvPr/>
         </p:nvSpPr>
@@ -5000,7 +4780,7 @@
       </p:sp>
       <p:sp>
         <p:nvSpPr>
-          <p:cNvPr id="15" name="Shape 13"/>
+          <p:cNvPr id="14" name="Shape 11"/>
           <p:cNvSpPr/>
           <p:nvPr/>
         </p:nvSpPr>
@@ -5020,7 +4800,7 @@
       </p:sp>
       <p:sp>
         <p:nvSpPr>
-          <p:cNvPr id="16" name="Text 14"/>
+          <p:cNvPr id="15" name="Text 12"/>
           <p:cNvSpPr txBox="1"/>
           <p:nvPr/>
         </p:nvSpPr>
@@ -5059,7 +4839,7 @@
       </p:sp>
       <p:sp>
         <p:nvSpPr>
-          <p:cNvPr id="17" name="Text 15"/>
+          <p:cNvPr id="16" name="Text 13"/>
           <p:cNvSpPr txBox="1"/>
           <p:nvPr/>
         </p:nvSpPr>
@@ -5101,7 +4881,7 @@
       </p:sp>
       <p:sp>
         <p:nvSpPr>
-          <p:cNvPr id="18" name="Text 16"/>
+          <p:cNvPr id="17" name="Text 14"/>
           <p:cNvSpPr txBox="1"/>
           <p:nvPr/>
         </p:nvSpPr>
@@ -5140,7 +4920,7 @@
       </p:sp>
       <p:sp>
         <p:nvSpPr>
-          <p:cNvPr id="19" name="Shape 17"/>
+          <p:cNvPr id="18" name="Shape 15"/>
           <p:cNvSpPr/>
           <p:nvPr/>
         </p:nvSpPr>
@@ -5160,7 +4940,7 @@
       </p:sp>
       <p:sp>
         <p:nvSpPr>
-          <p:cNvPr id="20" name="Shape 18"/>
+          <p:cNvPr id="19" name="Shape 16"/>
           <p:cNvSpPr/>
           <p:nvPr/>
         </p:nvSpPr>
@@ -5180,7 +4960,7 @@
       </p:sp>
       <p:sp>
         <p:nvSpPr>
-          <p:cNvPr id="21" name="Shape 19"/>
+          <p:cNvPr id="20" name="Shape 17"/>
           <p:cNvSpPr/>
           <p:nvPr/>
         </p:nvSpPr>
@@ -5200,7 +4980,7 @@
       </p:sp>
       <p:sp>
         <p:nvSpPr>
-          <p:cNvPr id="22" name="Shape 20"/>
+          <p:cNvPr id="21" name="Shape 18"/>
           <p:cNvSpPr/>
           <p:nvPr/>
         </p:nvSpPr>
@@ -5220,7 +5000,7 @@
       </p:sp>
       <p:sp>
         <p:nvSpPr>
-          <p:cNvPr id="23" name="Shape 21"/>
+          <p:cNvPr id="22" name="Shape 19"/>
           <p:cNvSpPr/>
           <p:nvPr/>
         </p:nvSpPr>
@@ -5240,7 +5020,7 @@
       </p:sp>
       <p:sp>
         <p:nvSpPr>
-          <p:cNvPr id="24" name="Shape 22"/>
+          <p:cNvPr id="23" name="Shape 20"/>
           <p:cNvSpPr/>
           <p:nvPr/>
         </p:nvSpPr>
@@ -5260,7 +5040,7 @@
       </p:sp>
       <p:sp>
         <p:nvSpPr>
-          <p:cNvPr id="25" name="Text 23"/>
+          <p:cNvPr id="24" name="Text 21"/>
           <p:cNvSpPr txBox="1"/>
           <p:nvPr/>
         </p:nvSpPr>
@@ -5299,7 +5079,7 @@
       </p:sp>
       <p:sp>
         <p:nvSpPr>
-          <p:cNvPr id="26" name="Text 24"/>
+          <p:cNvPr id="25" name="Text 22"/>
           <p:cNvSpPr txBox="1"/>
           <p:nvPr/>
         </p:nvSpPr>
@@ -5341,7 +5121,7 @@
       </p:sp>
       <p:sp>
         <p:nvSpPr>
-          <p:cNvPr id="27" name="Text 25"/>
+          <p:cNvPr id="26" name="Text 23"/>
           <p:cNvSpPr txBox="1"/>
           <p:nvPr/>
         </p:nvSpPr>
@@ -5380,7 +5160,7 @@
       </p:sp>
       <p:sp>
         <p:nvSpPr>
-          <p:cNvPr id="28" name="Shape 26"/>
+          <p:cNvPr id="27" name="Shape 24"/>
           <p:cNvSpPr/>
           <p:nvPr/>
         </p:nvSpPr>
@@ -5400,7 +5180,7 @@
       </p:sp>
       <p:sp>
         <p:nvSpPr>
-          <p:cNvPr id="29" name="Shape 27"/>
+          <p:cNvPr id="28" name="Shape 25"/>
           <p:cNvSpPr/>
           <p:nvPr/>
         </p:nvSpPr>
@@ -5420,7 +5200,7 @@
       </p:sp>
       <p:sp>
         <p:nvSpPr>
-          <p:cNvPr id="30" name="Shape 28"/>
+          <p:cNvPr id="29" name="Shape 26"/>
           <p:cNvSpPr/>
           <p:nvPr/>
         </p:nvSpPr>
@@ -5440,7 +5220,7 @@
       </p:sp>
       <p:sp>
         <p:nvSpPr>
-          <p:cNvPr id="31" name="Shape 29"/>
+          <p:cNvPr id="30" name="Shape 27"/>
           <p:cNvSpPr/>
           <p:nvPr/>
         </p:nvSpPr>
@@ -5460,7 +5240,7 @@
       </p:sp>
       <p:sp>
         <p:nvSpPr>
-          <p:cNvPr id="32" name="Shape 30"/>
+          <p:cNvPr id="31" name="Shape 28"/>
           <p:cNvSpPr/>
           <p:nvPr/>
         </p:nvSpPr>
@@ -5480,7 +5260,7 @@
       </p:sp>
       <p:sp>
         <p:nvSpPr>
-          <p:cNvPr id="33" name="Shape 31"/>
+          <p:cNvPr id="32" name="Shape 29"/>
           <p:cNvSpPr/>
           <p:nvPr/>
         </p:nvSpPr>
@@ -5500,7 +5280,7 @@
       </p:sp>
       <p:sp>
         <p:nvSpPr>
-          <p:cNvPr id="34" name="Text 32"/>
+          <p:cNvPr id="33" name="Text 30"/>
           <p:cNvSpPr txBox="1"/>
           <p:nvPr/>
         </p:nvSpPr>
@@ -5539,7 +5319,7 @@
       </p:sp>
       <p:sp>
         <p:nvSpPr>
-          <p:cNvPr id="35" name="Text 33"/>
+          <p:cNvPr id="34" name="Text 31"/>
           <p:cNvSpPr txBox="1"/>
           <p:nvPr/>
         </p:nvSpPr>
@@ -5581,7 +5361,7 @@
       </p:sp>
       <p:sp>
         <p:nvSpPr>
-          <p:cNvPr id="36" name="Text 34"/>
+          <p:cNvPr id="35" name="Text 32"/>
           <p:cNvSpPr txBox="1"/>
           <p:nvPr/>
         </p:nvSpPr>
@@ -5620,7 +5400,7 @@
       </p:sp>
       <p:sp>
         <p:nvSpPr>
-          <p:cNvPr id="37" name="Shape 35"/>
+          <p:cNvPr id="36" name="Shape 33"/>
           <p:cNvSpPr/>
           <p:nvPr/>
         </p:nvSpPr>
@@ -5644,7 +5424,7 @@
       </p:sp>
       <p:sp>
         <p:nvSpPr>
-          <p:cNvPr id="38" name="Text 36"/>
+          <p:cNvPr id="37" name="Text 34"/>
           <p:cNvSpPr txBox="1"/>
           <p:nvPr/>
         </p:nvSpPr>
@@ -5697,7 +5477,7 @@
       </p:sp>
       <p:sp>
         <p:nvSpPr>
-          <p:cNvPr id="39" name="Text 37"/>
+          <p:cNvPr id="38" name="Text 35"/>
           <p:cNvSpPr txBox="1"/>
           <p:nvPr/>
         </p:nvSpPr>
@@ -5795,9 +5575,9 @@
                 <a:solidFill>
                   <a:srgbClr val="141414"/>
                 </a:solidFill>
-                <a:latin typeface="Bookman Old Style" pitchFamily="34" charset="0"/>
-                <a:ea typeface="Bookman Old Style" pitchFamily="34" charset="-122"/>
-                <a:cs typeface="Bookman Old Style" pitchFamily="34" charset="-120"/>
+                <a:latin typeface="Cambria" pitchFamily="34" charset="0"/>
+                <a:ea typeface="Cambria" pitchFamily="34" charset="-122"/>
+                <a:cs typeface="Cambria" pitchFamily="34" charset="-120"/>
               </a:rPr>
               <a:t>05</a:t>
             </a:r>
@@ -5805,56 +5585,40 @@
           </a:p>
         </p:txBody>
       </p:sp>
-      <p:sp>
-        <p:nvSpPr>
-          <p:cNvPr id="3" name="Shape 1"/>
-          <p:cNvSpPr/>
-          <p:nvPr/>
-        </p:nvSpPr>
-        <p:spPr>
-          <a:xfrm>
-            <a:off x="457200" y="384048"/>
-            <a:ext cx="310896" cy="29261"/>
-          </a:xfrm>
-          <a:prstGeom prst="rect">
-            <a:avLst/>
-          </a:prstGeom>
-          <a:solidFill>
-            <a:srgbClr val="FF002B"/>
-          </a:solidFill>
-          <a:ln/>
-        </p:spPr>
-      </p:sp>
-      <p:sp>
-        <p:nvSpPr>
-          <p:cNvPr id="4" name="Shape 2"/>
-          <p:cNvSpPr/>
-          <p:nvPr/>
-        </p:nvSpPr>
-        <p:spPr>
-          <a:xfrm>
-            <a:off x="457200" y="384048"/>
-            <a:ext cx="29261" cy="310896"/>
-          </a:xfrm>
-          <a:prstGeom prst="rect">
-            <a:avLst/>
-          </a:prstGeom>
-          <a:solidFill>
-            <a:srgbClr val="FF002B"/>
-          </a:solidFill>
-          <a:ln/>
-        </p:spPr>
-      </p:sp>
-      <p:sp>
-        <p:nvSpPr>
-          <p:cNvPr id="5" name="Text 3"/>
-          <p:cNvSpPr txBox="1"/>
-          <p:nvPr/>
-        </p:nvSpPr>
-        <p:spPr>
-          <a:xfrm>
-            <a:off x="896112" y="329184"/>
-            <a:ext cx="2926080" cy="292608"/>
+      <p:pic>
+        <p:nvPicPr>
+          <p:cNvPr id="3" name="Image 0" descr="/home/user/valletta-design-system/assets/logo/valletta-mark.png">    </p:cNvPr>
+          <p:cNvPicPr>
+            <a:picLocks noChangeAspect="1"/>
+          </p:cNvPicPr>
+          <p:nvPr/>
+        </p:nvPicPr>
+        <p:blipFill>
+          <a:blip r:embed="rId1"/>
+          <a:stretch>
+            <a:fillRect/>
+          </a:stretch>
+        </p:blipFill>
+        <p:spPr>
+          <a:xfrm>
+            <a:off x="457200" y="365760"/>
+            <a:ext cx="365760" cy="389284"/>
+          </a:xfrm>
+          <a:prstGeom prst="rect">
+            <a:avLst/>
+          </a:prstGeom>
+        </p:spPr>
+      </p:pic>
+      <p:sp>
+        <p:nvSpPr>
+          <p:cNvPr id="4" name="Text 1"/>
+          <p:cNvSpPr txBox="1"/>
+          <p:nvPr/>
+        </p:nvSpPr>
+        <p:spPr>
+          <a:xfrm>
+            <a:off x="932688" y="329184"/>
+            <a:ext cx="2926080" cy="274320"/>
           </a:xfrm>
           <a:prstGeom prst="rect">
             <a:avLst/>
@@ -5870,68 +5634,146 @@
               <a:buNone/>
             </a:pPr>
             <a:r>
-              <a:rPr lang="en-US" sz="1500" b="1" spc="200" kern="0" dirty="0">
+              <a:rPr lang="en-US" sz="1500" spc="200" kern="0" dirty="0">
                 <a:solidFill>
                   <a:srgbClr val="FFFFFF"/>
+                </a:solidFill>
+                <a:latin typeface="Cambria" pitchFamily="34" charset="0"/>
+                <a:ea typeface="Cambria" pitchFamily="34" charset="-122"/>
+                <a:cs typeface="Cambria" pitchFamily="34" charset="-120"/>
+              </a:rPr>
+              <a:t>VALLETTA</a:t>
+            </a:r>
+            <a:endParaRPr lang="en-US" sz="1500" dirty="0"/>
+          </a:p>
+        </p:txBody>
+      </p:sp>
+      <p:sp>
+        <p:nvSpPr>
+          <p:cNvPr id="5" name="Text 2"/>
+          <p:cNvSpPr txBox="1"/>
+          <p:nvPr/>
+        </p:nvSpPr>
+        <p:spPr>
+          <a:xfrm>
+            <a:off x="932688" y="594360"/>
+            <a:ext cx="2926080" cy="219456"/>
+          </a:xfrm>
+          <a:prstGeom prst="rect">
+            <a:avLst/>
+          </a:prstGeom>
+          <a:noFill/>
+          <a:ln/>
+        </p:spPr>
+        <p:txBody>
+          <a:bodyPr wrap="square" lIns="0" tIns="0" rIns="0" bIns="0" rtlCol="0" anchor="ctr"/>
+          <a:lstStyle/>
+          <a:p>
+            <a:pPr indent="0" marL="0">
+              <a:buNone/>
+            </a:pPr>
+            <a:r>
+              <a:rPr lang="en-US" sz="750" b="1" spc="200" kern="0" dirty="0">
+                <a:solidFill>
+                  <a:srgbClr val="5B5F66"/>
                 </a:solidFill>
                 <a:latin typeface="Arial" pitchFamily="34" charset="0"/>
                 <a:ea typeface="Arial" pitchFamily="34" charset="-122"/>
                 <a:cs typeface="Arial" pitchFamily="34" charset="-120"/>
               </a:rPr>
-              <a:t>VALLETTA</a:t>
-            </a:r>
-            <a:endParaRPr lang="en-US" sz="1500" dirty="0"/>
-          </a:p>
-        </p:txBody>
-      </p:sp>
-      <p:sp>
-        <p:nvSpPr>
-          <p:cNvPr id="6" name="Text 4"/>
-          <p:cNvSpPr txBox="1"/>
-          <p:nvPr/>
-        </p:nvSpPr>
-        <p:spPr>
-          <a:xfrm>
-            <a:off x="896112" y="603504"/>
-            <a:ext cx="2926080" cy="219456"/>
-          </a:xfrm>
-          <a:prstGeom prst="rect">
-            <a:avLst/>
-          </a:prstGeom>
-          <a:noFill/>
-          <a:ln/>
-        </p:spPr>
-        <p:txBody>
-          <a:bodyPr wrap="square" lIns="0" tIns="0" rIns="0" bIns="0" rtlCol="0" anchor="ctr"/>
-          <a:lstStyle/>
-          <a:p>
-            <a:pPr indent="0" marL="0">
-              <a:buNone/>
-            </a:pPr>
-            <a:r>
-              <a:rPr lang="en-US" sz="750" b="1" spc="200" kern="0" dirty="0">
-                <a:solidFill>
-                  <a:srgbClr val="5B5F66"/>
+              <a:t>INDUSTRIES, INC.</a:t>
+            </a:r>
+            <a:endParaRPr lang="en-US" sz="750" dirty="0"/>
+          </a:p>
+        </p:txBody>
+      </p:sp>
+      <p:sp>
+        <p:nvSpPr>
+          <p:cNvPr id="6" name="Text 3"/>
+          <p:cNvSpPr txBox="1"/>
+          <p:nvPr/>
+        </p:nvSpPr>
+        <p:spPr>
+          <a:xfrm>
+            <a:off x="457200" y="777240"/>
+            <a:ext cx="7315200" cy="320040"/>
+          </a:xfrm>
+          <a:prstGeom prst="rect">
+            <a:avLst/>
+          </a:prstGeom>
+          <a:noFill/>
+          <a:ln/>
+        </p:spPr>
+        <p:txBody>
+          <a:bodyPr wrap="square" lIns="0" tIns="0" rIns="0" bIns="0" rtlCol="0" anchor="ctr"/>
+          <a:lstStyle/>
+          <a:p>
+            <a:pPr algn="l" indent="0" marL="0">
+              <a:buNone/>
+            </a:pPr>
+            <a:r>
+              <a:rPr lang="en-US" sz="1100" b="1" spc="150" kern="0" dirty="0">
+                <a:solidFill>
+                  <a:srgbClr val="FF002B"/>
                 </a:solidFill>
                 <a:latin typeface="Arial" pitchFamily="34" charset="0"/>
                 <a:ea typeface="Arial" pitchFamily="34" charset="-122"/>
                 <a:cs typeface="Arial" pitchFamily="34" charset="-120"/>
               </a:rPr>
-              <a:t>INDUSTRIES, INC.</a:t>
-            </a:r>
-            <a:endParaRPr lang="en-US" sz="750" dirty="0"/>
-          </a:p>
-        </p:txBody>
-      </p:sp>
-      <p:sp>
-        <p:nvSpPr>
-          <p:cNvPr id="7" name="Text 5"/>
-          <p:cNvSpPr txBox="1"/>
-          <p:nvPr/>
-        </p:nvSpPr>
-        <p:spPr>
-          <a:xfrm>
-            <a:off x="457200" y="777240"/>
+              <a:t>FEATURED CAPABILITY</a:t>
+            </a:r>
+            <a:endParaRPr lang="en-US" sz="1100" dirty="0"/>
+          </a:p>
+        </p:txBody>
+      </p:sp>
+      <p:sp>
+        <p:nvSpPr>
+          <p:cNvPr id="7" name="Text 4"/>
+          <p:cNvSpPr txBox="1"/>
+          <p:nvPr/>
+        </p:nvSpPr>
+        <p:spPr>
+          <a:xfrm>
+            <a:off x="457200" y="1097280"/>
+            <a:ext cx="7315200" cy="731520"/>
+          </a:xfrm>
+          <a:prstGeom prst="rect">
+            <a:avLst/>
+          </a:prstGeom>
+          <a:noFill/>
+          <a:ln/>
+        </p:spPr>
+        <p:txBody>
+          <a:bodyPr wrap="square" lIns="0" tIns="0" rIns="0" bIns="0" rtlCol="0" anchor="ctr"/>
+          <a:lstStyle/>
+          <a:p>
+            <a:pPr indent="0" marL="0">
+              <a:buNone/>
+            </a:pPr>
+            <a:r>
+              <a:rPr lang="en-US" sz="3800" b="1" dirty="0">
+                <a:solidFill>
+                  <a:srgbClr val="FFFFFF"/>
+                </a:solidFill>
+                <a:latin typeface="Cambria" pitchFamily="34" charset="0"/>
+                <a:ea typeface="Cambria" pitchFamily="34" charset="-122"/>
+                <a:cs typeface="Cambria" pitchFamily="34" charset="-120"/>
+              </a:rPr>
+              <a:t>MISSION PROTECT</a:t>
+            </a:r>
+            <a:endParaRPr lang="en-US" sz="3800" dirty="0"/>
+          </a:p>
+        </p:txBody>
+      </p:sp>
+      <p:sp>
+        <p:nvSpPr>
+          <p:cNvPr id="8" name="Text 5"/>
+          <p:cNvSpPr txBox="1"/>
+          <p:nvPr/>
+        </p:nvSpPr>
+        <p:spPr>
+          <a:xfrm>
+            <a:off x="457200" y="1828800"/>
             <a:ext cx="7315200" cy="320040"/>
           </a:xfrm>
           <a:prstGeom prst="rect">
@@ -5944,11 +5786,11 @@
           <a:bodyPr wrap="square" lIns="0" tIns="0" rIns="0" bIns="0" rtlCol="0" anchor="ctr"/>
           <a:lstStyle/>
           <a:p>
-            <a:pPr algn="l" indent="0" marL="0">
-              <a:buNone/>
-            </a:pPr>
-            <a:r>
-              <a:rPr lang="en-US" sz="1100" b="1" spc="150" kern="0" dirty="0">
+            <a:pPr indent="0" marL="0">
+              <a:buNone/>
+            </a:pPr>
+            <a:r>
+              <a:rPr lang="en-US" sz="1300" b="1" spc="150" kern="0" dirty="0">
                 <a:solidFill>
                   <a:srgbClr val="FF002B"/>
                 </a:solidFill>
@@ -5956,77 +5798,91 @@
                 <a:ea typeface="Arial" pitchFamily="34" charset="-122"/>
                 <a:cs typeface="Arial" pitchFamily="34" charset="-120"/>
               </a:rPr>
-              <a:t>FEATURED CAPABILITY</a:t>
-            </a:r>
-            <a:endParaRPr lang="en-US" sz="1100" dirty="0"/>
-          </a:p>
-        </p:txBody>
-      </p:sp>
-      <p:sp>
-        <p:nvSpPr>
-          <p:cNvPr id="8" name="Text 6"/>
-          <p:cNvSpPr txBox="1"/>
-          <p:nvPr/>
-        </p:nvSpPr>
-        <p:spPr>
-          <a:xfrm>
-            <a:off x="457200" y="1097280"/>
-            <a:ext cx="7315200" cy="731520"/>
-          </a:xfrm>
-          <a:prstGeom prst="rect">
-            <a:avLst/>
-          </a:prstGeom>
-          <a:noFill/>
-          <a:ln/>
-        </p:spPr>
-        <p:txBody>
-          <a:bodyPr wrap="square" lIns="0" tIns="0" rIns="0" bIns="0" rtlCol="0" anchor="ctr"/>
-          <a:lstStyle/>
-          <a:p>
-            <a:pPr indent="0" marL="0">
-              <a:buNone/>
-            </a:pPr>
-            <a:r>
-              <a:rPr lang="en-US" sz="3800" b="1" dirty="0">
-                <a:solidFill>
-                  <a:srgbClr val="FFFFFF"/>
-                </a:solidFill>
-                <a:latin typeface="Bookman Old Style" pitchFamily="34" charset="0"/>
-                <a:ea typeface="Bookman Old Style" pitchFamily="34" charset="-122"/>
-                <a:cs typeface="Bookman Old Style" pitchFamily="34" charset="-120"/>
-              </a:rPr>
-              <a:t>MISSION PROTECT</a:t>
-            </a:r>
-            <a:endParaRPr lang="en-US" sz="3800" dirty="0"/>
-          </a:p>
-        </p:txBody>
-      </p:sp>
-      <p:sp>
-        <p:nvSpPr>
-          <p:cNvPr id="9" name="Text 7"/>
-          <p:cNvSpPr txBox="1"/>
-          <p:nvPr/>
-        </p:nvSpPr>
-        <p:spPr>
-          <a:xfrm>
-            <a:off x="457200" y="1828800"/>
-            <a:ext cx="7315200" cy="320040"/>
-          </a:xfrm>
-          <a:prstGeom prst="rect">
-            <a:avLst/>
-          </a:prstGeom>
-          <a:noFill/>
-          <a:ln/>
-        </p:spPr>
-        <p:txBody>
-          <a:bodyPr wrap="square" lIns="0" tIns="0" rIns="0" bIns="0" rtlCol="0" anchor="ctr"/>
-          <a:lstStyle/>
-          <a:p>
-            <a:pPr indent="0" marL="0">
-              <a:buNone/>
-            </a:pPr>
-            <a:r>
-              <a:rPr lang="en-US" sz="1300" b="1" spc="150" kern="0" dirty="0">
+              <a:t>A DOI-OWNED DIGITAL TRAINING PATHWAY</a:t>
+            </a:r>
+            <a:endParaRPr lang="en-US" sz="1300" dirty="0"/>
+          </a:p>
+        </p:txBody>
+      </p:sp>
+      <p:pic>
+        <p:nvPicPr>
+          <p:cNvPr id="9" name="Image 1" descr="/home/user/valletta-design-system/assets/mission-protect/mp-course-detail.png">    </p:cNvPr>
+          <p:cNvPicPr>
+            <a:picLocks noChangeAspect="1"/>
+          </p:cNvPicPr>
+          <p:nvPr/>
+        </p:nvPicPr>
+        <p:blipFill>
+          <a:blip r:embed="rId2"/>
+          <a:stretch>
+            <a:fillRect/>
+          </a:stretch>
+        </p:blipFill>
+        <p:spPr>
+          <a:xfrm>
+            <a:off x="7909560" y="1234440"/>
+            <a:ext cx="2862072" cy="4930330"/>
+          </a:xfrm>
+          <a:prstGeom prst="rect">
+            <a:avLst/>
+          </a:prstGeom>
+          <a:effectLst>
+            <a:outerShdw sx="100000" sy="100000" kx="0" ky="0" algn="bl" rotWithShape="0" blurRad="177800" dist="50800" dir="5400000">
+              <a:srgbClr val="000000">
+                <a:alpha val="45000"/>
+              </a:srgbClr>
+            </a:outerShdw>
+          </a:effectLst>
+        </p:spPr>
+      </p:pic>
+      <p:sp>
+        <p:nvSpPr>
+          <p:cNvPr id="10" name="Shape 6"/>
+          <p:cNvSpPr/>
+          <p:nvPr/>
+        </p:nvSpPr>
+        <p:spPr>
+          <a:xfrm>
+            <a:off x="7909560" y="1234440"/>
+            <a:ext cx="2862072" cy="4930330"/>
+          </a:xfrm>
+          <a:prstGeom prst="rect">
+            <a:avLst/>
+          </a:prstGeom>
+          <a:ln w="12700">
+            <a:solidFill>
+              <a:srgbClr val="1C1D21"/>
+            </a:solidFill>
+            <a:prstDash val="solid"/>
+          </a:ln>
+        </p:spPr>
+      </p:sp>
+      <p:sp>
+        <p:nvSpPr>
+          <p:cNvPr id="11" name="Text 7"/>
+          <p:cNvSpPr txBox="1"/>
+          <p:nvPr/>
+        </p:nvSpPr>
+        <p:spPr>
+          <a:xfrm>
+            <a:off x="6812280" y="941832"/>
+            <a:ext cx="3959352" cy="256032"/>
+          </a:xfrm>
+          <a:prstGeom prst="rect">
+            <a:avLst/>
+          </a:prstGeom>
+          <a:noFill/>
+          <a:ln/>
+        </p:spPr>
+        <p:txBody>
+          <a:bodyPr wrap="square" lIns="0" tIns="0" rIns="0" bIns="0" rtlCol="0" anchor="ctr"/>
+          <a:lstStyle/>
+          <a:p>
+            <a:pPr algn="r" indent="0" marL="0">
+              <a:buNone/>
+            </a:pPr>
+            <a:r>
+              <a:rPr lang="en-US" sz="900" b="1" spc="100" kern="0" dirty="0">
                 <a:solidFill>
                   <a:srgbClr val="FF002B"/>
                 </a:solidFill>
@@ -6034,222 +5890,21 @@
                 <a:ea typeface="Arial" pitchFamily="34" charset="-122"/>
                 <a:cs typeface="Arial" pitchFamily="34" charset="-120"/>
               </a:rPr>
-              <a:t>A DOI-OWNED DIGITAL TRAINING PATHWAY</a:t>
-            </a:r>
-            <a:endParaRPr lang="en-US" sz="1300" dirty="0"/>
-          </a:p>
-        </p:txBody>
-      </p:sp>
-      <p:sp>
-        <p:nvSpPr>
-          <p:cNvPr id="10" name="Shape 8"/>
+              <a:t>ACTUAL PRODUCT UI</a:t>
+            </a:r>
+            <a:endParaRPr lang="en-US" sz="900" dirty="0"/>
+          </a:p>
+        </p:txBody>
+      </p:sp>
+      <p:sp>
+        <p:nvSpPr>
+          <p:cNvPr id="12" name="Shape 8"/>
           <p:cNvSpPr/>
           <p:nvPr/>
         </p:nvSpPr>
         <p:spPr>
           <a:xfrm>
-            <a:off x="5989320" y="2331720"/>
-            <a:ext cx="5742432" cy="3749040"/>
-          </a:xfrm>
-          <a:prstGeom prst="rect">
-            <a:avLst/>
-          </a:prstGeom>
-          <a:solidFill>
-            <a:srgbClr val="1C1D21"/>
-          </a:solidFill>
-          <a:ln/>
-        </p:spPr>
-      </p:sp>
-      <p:sp>
-        <p:nvSpPr>
-          <p:cNvPr id="11" name="Shape 9"/>
-          <p:cNvSpPr/>
-          <p:nvPr/>
-        </p:nvSpPr>
-        <p:spPr>
-          <a:xfrm>
-            <a:off x="5989320" y="2331720"/>
-            <a:ext cx="502920" cy="41148"/>
-          </a:xfrm>
-          <a:prstGeom prst="rect">
-            <a:avLst/>
-          </a:prstGeom>
-          <a:solidFill>
-            <a:srgbClr val="FF002B"/>
-          </a:solidFill>
-          <a:ln/>
-        </p:spPr>
-      </p:sp>
-      <p:sp>
-        <p:nvSpPr>
-          <p:cNvPr id="12" name="Shape 10"/>
-          <p:cNvSpPr/>
-          <p:nvPr/>
-        </p:nvSpPr>
-        <p:spPr>
-          <a:xfrm>
-            <a:off x="5989320" y="2331720"/>
-            <a:ext cx="41148" cy="502920"/>
-          </a:xfrm>
-          <a:prstGeom prst="rect">
-            <a:avLst/>
-          </a:prstGeom>
-          <a:solidFill>
-            <a:srgbClr val="FF002B"/>
-          </a:solidFill>
-          <a:ln/>
-        </p:spPr>
-      </p:sp>
-      <p:sp>
-        <p:nvSpPr>
-          <p:cNvPr id="13" name="Shape 11"/>
-          <p:cNvSpPr/>
-          <p:nvPr/>
-        </p:nvSpPr>
-        <p:spPr>
-          <a:xfrm>
-            <a:off x="8083296" y="3429000"/>
-            <a:ext cx="274320" cy="274320"/>
-          </a:xfrm>
-          <a:prstGeom prst="ellipse">
-            <a:avLst/>
-          </a:prstGeom>
-          <a:solidFill>
-            <a:srgbClr val="FF002B"/>
-          </a:solidFill>
-          <a:ln/>
-        </p:spPr>
-      </p:sp>
-      <p:sp>
-        <p:nvSpPr>
-          <p:cNvPr id="14" name="Shape 12"/>
-          <p:cNvSpPr/>
-          <p:nvPr/>
-        </p:nvSpPr>
-        <p:spPr>
-          <a:xfrm>
-            <a:off x="8174736" y="3749040"/>
-            <a:ext cx="1005840" cy="685800"/>
-          </a:xfrm>
-          <a:prstGeom prst="triangle">
-            <a:avLst/>
-          </a:prstGeom>
-          <a:solidFill>
-            <a:srgbClr val="D8D9DB"/>
-          </a:solidFill>
-          <a:ln/>
-        </p:spPr>
-      </p:sp>
-      <p:sp>
-        <p:nvSpPr>
-          <p:cNvPr id="15" name="Shape 13"/>
-          <p:cNvSpPr/>
-          <p:nvPr/>
-        </p:nvSpPr>
-        <p:spPr>
-          <a:xfrm>
-            <a:off x="8723376" y="3566160"/>
-            <a:ext cx="868680" cy="868680"/>
-          </a:xfrm>
-          <a:prstGeom prst="triangle">
-            <a:avLst/>
-          </a:prstGeom>
-          <a:solidFill>
-            <a:srgbClr val="D8D9DB"/>
-          </a:solidFill>
-          <a:ln/>
-        </p:spPr>
-      </p:sp>
-      <p:sp>
-        <p:nvSpPr>
-          <p:cNvPr id="16" name="Text 14"/>
-          <p:cNvSpPr txBox="1"/>
-          <p:nvPr/>
-        </p:nvSpPr>
-        <p:spPr>
-          <a:xfrm>
-            <a:off x="6172200" y="4389120"/>
-            <a:ext cx="5376672" cy="274320"/>
-          </a:xfrm>
-          <a:prstGeom prst="rect">
-            <a:avLst/>
-          </a:prstGeom>
-          <a:noFill/>
-          <a:ln/>
-        </p:spPr>
-        <p:txBody>
-          <a:bodyPr wrap="square" lIns="0" tIns="0" rIns="0" bIns="0" rtlCol="0" anchor="ctr"/>
-          <a:lstStyle/>
-          <a:p>
-            <a:pPr algn="ctr" indent="0" marL="0">
-              <a:buNone/>
-            </a:pPr>
-            <a:r>
-              <a:rPr lang="en-US" sz="1000" b="1" spc="100" kern="0" dirty="0">
-                <a:solidFill>
-                  <a:srgbClr val="FF002B"/>
-                </a:solidFill>
-                <a:latin typeface="Arial" pitchFamily="34" charset="0"/>
-                <a:ea typeface="Arial" pitchFamily="34" charset="-122"/>
-                <a:cs typeface="Arial" pitchFamily="34" charset="-120"/>
-              </a:rPr>
-              <a:t>PLACEHOLDER IMAGE</a:t>
-            </a:r>
-            <a:endParaRPr lang="en-US" sz="1000" dirty="0"/>
-          </a:p>
-        </p:txBody>
-      </p:sp>
-      <p:sp>
-        <p:nvSpPr>
-          <p:cNvPr id="17" name="Text 15"/>
-          <p:cNvSpPr txBox="1"/>
-          <p:nvPr/>
-        </p:nvSpPr>
-        <p:spPr>
-          <a:xfrm>
-            <a:off x="6263640" y="4681728"/>
-            <a:ext cx="5193792" cy="548640"/>
-          </a:xfrm>
-          <a:prstGeom prst="rect">
-            <a:avLst/>
-          </a:prstGeom>
-          <a:noFill/>
-          <a:ln/>
-        </p:spPr>
-        <p:txBody>
-          <a:bodyPr wrap="square" lIns="0" tIns="0" rIns="0" bIns="0" rtlCol="0" anchor="ctr"/>
-          <a:lstStyle/>
-          <a:p>
-            <a:pPr algn="ctr" indent="0" marL="0">
-              <a:lnSpc>
-                <a:spcPct val="110000"/>
-              </a:lnSpc>
-              <a:buNone/>
-            </a:pPr>
-            <a:r>
-              <a:rPr lang="en-US" sz="1000" i="1" dirty="0">
-                <a:solidFill>
-                  <a:srgbClr val="D8D9DB"/>
-                </a:solidFill>
-                <a:latin typeface="Calibri" pitchFamily="34" charset="0"/>
-                <a:ea typeface="Calibri" pitchFamily="34" charset="-122"/>
-                <a:cs typeface="Calibri" pitchFamily="34" charset="-120"/>
-              </a:rPr>
-              <a:t>Mission Protect LMS / product screenshot — provided by Valletta</a:t>
-            </a:r>
-            <a:endParaRPr lang="en-US" sz="1000" dirty="0"/>
-          </a:p>
-        </p:txBody>
-      </p:sp>
-      <p:sp>
-        <p:nvSpPr>
-          <p:cNvPr id="18" name="Shape 16"/>
-          <p:cNvSpPr/>
-          <p:nvPr/>
-        </p:nvSpPr>
-        <p:spPr>
-          <a:xfrm>
-            <a:off x="5257800" y="3246120"/>
+            <a:off x="6720840" y="4747450"/>
             <a:ext cx="1417320" cy="1417320"/>
           </a:xfrm>
           <a:prstGeom prst="ellipse">
@@ -6268,13 +5923,13 @@
       </p:sp>
       <p:sp>
         <p:nvSpPr>
-          <p:cNvPr id="19" name="Text 17"/>
-          <p:cNvSpPr txBox="1"/>
-          <p:nvPr/>
-        </p:nvSpPr>
-        <p:spPr>
-          <a:xfrm>
-            <a:off x="5257800" y="3246120"/>
+          <p:cNvPr id="13" name="Text 9"/>
+          <p:cNvSpPr txBox="1"/>
+          <p:nvPr/>
+        </p:nvSpPr>
+        <p:spPr>
+          <a:xfrm>
+            <a:off x="6720840" y="4747450"/>
             <a:ext cx="1417320" cy="1417320"/>
           </a:xfrm>
           <a:prstGeom prst="rect">
@@ -6295,9 +5950,9 @@
                 <a:solidFill>
                   <a:srgbClr val="FFFFFF"/>
                 </a:solidFill>
-                <a:latin typeface="Bookman Old Style" pitchFamily="34" charset="0"/>
-                <a:ea typeface="Bookman Old Style" pitchFamily="34" charset="-122"/>
-                <a:cs typeface="Bookman Old Style" pitchFamily="34" charset="-120"/>
+                <a:latin typeface="Cambria" pitchFamily="34" charset="0"/>
+                <a:ea typeface="Cambria" pitchFamily="34" charset="-122"/>
+                <a:cs typeface="Cambria" pitchFamily="34" charset="-120"/>
               </a:rPr>
               <a:t>MP</a:t>
             </a:r>
@@ -6307,7 +5962,7 @@
       </p:sp>
       <p:sp>
         <p:nvSpPr>
-          <p:cNvPr id="20" name="Text 18"/>
+          <p:cNvPr id="14" name="Text 10"/>
           <p:cNvSpPr txBox="1"/>
           <p:nvPr/>
         </p:nvSpPr>
@@ -6349,7 +6004,7 @@
       </p:sp>
       <p:sp>
         <p:nvSpPr>
-          <p:cNvPr id="21" name="Text 19"/>
+          <p:cNvPr id="15" name="Text 11"/>
           <p:cNvSpPr txBox="1"/>
           <p:nvPr/>
         </p:nvSpPr>
@@ -6388,7 +6043,7 @@
       </p:sp>
       <p:sp>
         <p:nvSpPr>
-          <p:cNvPr id="22" name="Text 20"/>
+          <p:cNvPr id="16" name="Text 12"/>
           <p:cNvSpPr txBox="1"/>
           <p:nvPr/>
         </p:nvSpPr>
@@ -6430,7 +6085,7 @@
       </p:sp>
       <p:sp>
         <p:nvSpPr>
-          <p:cNvPr id="23" name="Shape 21"/>
+          <p:cNvPr id="17" name="Shape 13"/>
           <p:cNvSpPr/>
           <p:nvPr/>
         </p:nvSpPr>
@@ -6453,7 +6108,7 @@
       </p:sp>
       <p:sp>
         <p:nvSpPr>
-          <p:cNvPr id="24" name="Text 22"/>
+          <p:cNvPr id="18" name="Text 14"/>
           <p:cNvSpPr txBox="1"/>
           <p:nvPr/>
         </p:nvSpPr>
@@ -6492,7 +6147,7 @@
       </p:sp>
       <p:sp>
         <p:nvSpPr>
-          <p:cNvPr id="25" name="Text 23"/>
+          <p:cNvPr id="19" name="Text 15"/>
           <p:cNvSpPr txBox="1"/>
           <p:nvPr/>
         </p:nvSpPr>
@@ -6534,7 +6189,7 @@
       </p:sp>
       <p:sp>
         <p:nvSpPr>
-          <p:cNvPr id="26" name="Shape 24"/>
+          <p:cNvPr id="20" name="Shape 16"/>
           <p:cNvSpPr/>
           <p:nvPr/>
         </p:nvSpPr>
@@ -6557,7 +6212,7 @@
       </p:sp>
       <p:sp>
         <p:nvSpPr>
-          <p:cNvPr id="27" name="Text 25"/>
+          <p:cNvPr id="21" name="Text 17"/>
           <p:cNvSpPr txBox="1"/>
           <p:nvPr/>
         </p:nvSpPr>
@@ -6596,7 +6251,7 @@
       </p:sp>
       <p:sp>
         <p:nvSpPr>
-          <p:cNvPr id="28" name="Text 26"/>
+          <p:cNvPr id="22" name="Text 18"/>
           <p:cNvSpPr txBox="1"/>
           <p:nvPr/>
         </p:nvSpPr>
@@ -6638,7 +6293,7 @@
       </p:sp>
       <p:sp>
         <p:nvSpPr>
-          <p:cNvPr id="29" name="Text 27"/>
+          <p:cNvPr id="23" name="Text 19"/>
           <p:cNvSpPr txBox="1"/>
           <p:nvPr/>
         </p:nvSpPr>
@@ -6736,9 +6391,9 @@
                 <a:solidFill>
                   <a:srgbClr val="141414"/>
                 </a:solidFill>
-                <a:latin typeface="Bookman Old Style" pitchFamily="34" charset="0"/>
-                <a:ea typeface="Bookman Old Style" pitchFamily="34" charset="-122"/>
-                <a:cs typeface="Bookman Old Style" pitchFamily="34" charset="-120"/>
+                <a:latin typeface="Cambria" pitchFamily="34" charset="0"/>
+                <a:ea typeface="Cambria" pitchFamily="34" charset="-122"/>
+                <a:cs typeface="Cambria" pitchFamily="34" charset="-120"/>
               </a:rPr>
               <a:t>06</a:t>
             </a:r>
@@ -6746,16 +6401,235 @@
           </a:p>
         </p:txBody>
       </p:sp>
-      <p:sp>
-        <p:nvSpPr>
-          <p:cNvPr id="3" name="Shape 1"/>
+      <p:pic>
+        <p:nvPicPr>
+          <p:cNvPr id="3" name="Image 0" descr="/home/user/valletta-design-system/assets/logo/valletta-mark.png">    </p:cNvPr>
+          <p:cNvPicPr>
+            <a:picLocks noChangeAspect="1"/>
+          </p:cNvPicPr>
+          <p:nvPr/>
+        </p:nvPicPr>
+        <p:blipFill>
+          <a:blip r:embed="rId1"/>
+          <a:stretch>
+            <a:fillRect/>
+          </a:stretch>
+        </p:blipFill>
+        <p:spPr>
+          <a:xfrm>
+            <a:off x="457200" y="365760"/>
+            <a:ext cx="365760" cy="389284"/>
+          </a:xfrm>
+          <a:prstGeom prst="rect">
+            <a:avLst/>
+          </a:prstGeom>
+        </p:spPr>
+      </p:pic>
+      <p:sp>
+        <p:nvSpPr>
+          <p:cNvPr id="4" name="Text 1"/>
+          <p:cNvSpPr txBox="1"/>
+          <p:nvPr/>
+        </p:nvSpPr>
+        <p:spPr>
+          <a:xfrm>
+            <a:off x="932688" y="329184"/>
+            <a:ext cx="2926080" cy="274320"/>
+          </a:xfrm>
+          <a:prstGeom prst="rect">
+            <a:avLst/>
+          </a:prstGeom>
+          <a:noFill/>
+          <a:ln/>
+        </p:spPr>
+        <p:txBody>
+          <a:bodyPr wrap="square" lIns="0" tIns="0" rIns="0" bIns="0" rtlCol="0" anchor="ctr"/>
+          <a:lstStyle/>
+          <a:p>
+            <a:pPr indent="0" marL="0">
+              <a:buNone/>
+            </a:pPr>
+            <a:r>
+              <a:rPr lang="en-US" sz="1500" spc="200" kern="0" dirty="0">
+                <a:solidFill>
+                  <a:srgbClr val="FFFFFF"/>
+                </a:solidFill>
+                <a:latin typeface="Cambria" pitchFamily="34" charset="0"/>
+                <a:ea typeface="Cambria" pitchFamily="34" charset="-122"/>
+                <a:cs typeface="Cambria" pitchFamily="34" charset="-120"/>
+              </a:rPr>
+              <a:t>VALLETTA</a:t>
+            </a:r>
+            <a:endParaRPr lang="en-US" sz="1500" dirty="0"/>
+          </a:p>
+        </p:txBody>
+      </p:sp>
+      <p:sp>
+        <p:nvSpPr>
+          <p:cNvPr id="5" name="Text 2"/>
+          <p:cNvSpPr txBox="1"/>
+          <p:nvPr/>
+        </p:nvSpPr>
+        <p:spPr>
+          <a:xfrm>
+            <a:off x="932688" y="594360"/>
+            <a:ext cx="2926080" cy="219456"/>
+          </a:xfrm>
+          <a:prstGeom prst="rect">
+            <a:avLst/>
+          </a:prstGeom>
+          <a:noFill/>
+          <a:ln/>
+        </p:spPr>
+        <p:txBody>
+          <a:bodyPr wrap="square" lIns="0" tIns="0" rIns="0" bIns="0" rtlCol="0" anchor="ctr"/>
+          <a:lstStyle/>
+          <a:p>
+            <a:pPr indent="0" marL="0">
+              <a:buNone/>
+            </a:pPr>
+            <a:r>
+              <a:rPr lang="en-US" sz="750" b="1" spc="200" kern="0" dirty="0">
+                <a:solidFill>
+                  <a:srgbClr val="5B5F66"/>
+                </a:solidFill>
+                <a:latin typeface="Arial" pitchFamily="34" charset="0"/>
+                <a:ea typeface="Arial" pitchFamily="34" charset="-122"/>
+                <a:cs typeface="Arial" pitchFamily="34" charset="-120"/>
+              </a:rPr>
+              <a:t>INDUSTRIES, INC.</a:t>
+            </a:r>
+            <a:endParaRPr lang="en-US" sz="750" dirty="0"/>
+          </a:p>
+        </p:txBody>
+      </p:sp>
+      <p:sp>
+        <p:nvSpPr>
+          <p:cNvPr id="6" name="Text 3"/>
+          <p:cNvSpPr txBox="1"/>
+          <p:nvPr/>
+        </p:nvSpPr>
+        <p:spPr>
+          <a:xfrm>
+            <a:off x="457200" y="777240"/>
+            <a:ext cx="5486400" cy="320040"/>
+          </a:xfrm>
+          <a:prstGeom prst="rect">
+            <a:avLst/>
+          </a:prstGeom>
+          <a:noFill/>
+          <a:ln/>
+        </p:spPr>
+        <p:txBody>
+          <a:bodyPr wrap="square" lIns="0" tIns="0" rIns="0" bIns="0" rtlCol="0" anchor="ctr"/>
+          <a:lstStyle/>
+          <a:p>
+            <a:pPr algn="l" indent="0" marL="0">
+              <a:buNone/>
+            </a:pPr>
+            <a:r>
+              <a:rPr lang="en-US" sz="1100" b="1" spc="150" kern="0" dirty="0">
+                <a:solidFill>
+                  <a:srgbClr val="FF002B"/>
+                </a:solidFill>
+                <a:latin typeface="Arial" pitchFamily="34" charset="0"/>
+                <a:ea typeface="Arial" pitchFamily="34" charset="-122"/>
+                <a:cs typeface="Arial" pitchFamily="34" charset="-120"/>
+              </a:rPr>
+              <a:t>CLOSING</a:t>
+            </a:r>
+            <a:endParaRPr lang="en-US" sz="1100" dirty="0"/>
+          </a:p>
+        </p:txBody>
+      </p:sp>
+      <p:sp>
+        <p:nvSpPr>
+          <p:cNvPr id="7" name="Text 4"/>
+          <p:cNvSpPr txBox="1"/>
+          <p:nvPr/>
+        </p:nvSpPr>
+        <p:spPr>
+          <a:xfrm>
+            <a:off x="457200" y="1097280"/>
+            <a:ext cx="6675120" cy="685800"/>
+          </a:xfrm>
+          <a:prstGeom prst="rect">
+            <a:avLst/>
+          </a:prstGeom>
+          <a:noFill/>
+          <a:ln/>
+        </p:spPr>
+        <p:txBody>
+          <a:bodyPr wrap="square" lIns="0" tIns="0" rIns="0" bIns="0" rtlCol="0" anchor="ctr"/>
+          <a:lstStyle/>
+          <a:p>
+            <a:pPr indent="0" marL="0">
+              <a:buNone/>
+            </a:pPr>
+            <a:r>
+              <a:rPr lang="en-US" sz="3400" b="1" dirty="0">
+                <a:solidFill>
+                  <a:srgbClr val="FFFFFF"/>
+                </a:solidFill>
+                <a:latin typeface="Cambria" pitchFamily="34" charset="0"/>
+                <a:ea typeface="Cambria" pitchFamily="34" charset="-122"/>
+                <a:cs typeface="Cambria" pitchFamily="34" charset="-120"/>
+              </a:rPr>
+              <a:t>BUILT BY OPERATORS.</a:t>
+            </a:r>
+            <a:endParaRPr lang="en-US" sz="3400" dirty="0"/>
+          </a:p>
+        </p:txBody>
+      </p:sp>
+      <p:sp>
+        <p:nvSpPr>
+          <p:cNvPr id="8" name="Text 5"/>
+          <p:cNvSpPr txBox="1"/>
+          <p:nvPr/>
+        </p:nvSpPr>
+        <p:spPr>
+          <a:xfrm>
+            <a:off x="457200" y="1783080"/>
+            <a:ext cx="6675120" cy="457200"/>
+          </a:xfrm>
+          <a:prstGeom prst="rect">
+            <a:avLst/>
+          </a:prstGeom>
+          <a:noFill/>
+          <a:ln/>
+        </p:spPr>
+        <p:txBody>
+          <a:bodyPr wrap="square" lIns="0" tIns="0" rIns="0" bIns="0" rtlCol="0" anchor="ctr"/>
+          <a:lstStyle/>
+          <a:p>
+            <a:pPr indent="0" marL="0">
+              <a:buNone/>
+            </a:pPr>
+            <a:r>
+              <a:rPr lang="en-US" sz="1400" i="1" dirty="0">
+                <a:solidFill>
+                  <a:srgbClr val="D8D9DB"/>
+                </a:solidFill>
+                <a:latin typeface="Calibri" pitchFamily="34" charset="0"/>
+                <a:ea typeface="Calibri" pitchFamily="34" charset="-122"/>
+                <a:cs typeface="Calibri" pitchFamily="34" charset="-120"/>
+              </a:rPr>
+              <a:t>A proven partner to stand up DOI's own OSSTP.</a:t>
+            </a:r>
+            <a:endParaRPr lang="en-US" sz="1400" dirty="0"/>
+          </a:p>
+        </p:txBody>
+      </p:sp>
+      <p:sp>
+        <p:nvSpPr>
+          <p:cNvPr id="9" name="Shape 6"/>
           <p:cNvSpPr/>
           <p:nvPr/>
         </p:nvSpPr>
         <p:spPr>
           <a:xfrm>
-            <a:off x="457200" y="384048"/>
-            <a:ext cx="310896" cy="29261"/>
+            <a:off x="457200" y="2606040"/>
+            <a:ext cx="256032" cy="32004"/>
           </a:xfrm>
           <a:prstGeom prst="rect">
             <a:avLst/>
@@ -6768,14 +6642,14 @@
       </p:sp>
       <p:sp>
         <p:nvSpPr>
-          <p:cNvPr id="4" name="Shape 2"/>
+          <p:cNvPr id="10" name="Shape 7"/>
           <p:cNvSpPr/>
           <p:nvPr/>
         </p:nvSpPr>
         <p:spPr>
           <a:xfrm>
-            <a:off x="457200" y="384048"/>
-            <a:ext cx="29261" cy="310896"/>
+            <a:off x="457200" y="2606040"/>
+            <a:ext cx="32004" cy="256032"/>
           </a:xfrm>
           <a:prstGeom prst="rect">
             <a:avLst/>
@@ -6788,30 +6662,30 @@
       </p:sp>
       <p:sp>
         <p:nvSpPr>
-          <p:cNvPr id="5" name="Text 3"/>
-          <p:cNvSpPr txBox="1"/>
-          <p:nvPr/>
-        </p:nvSpPr>
-        <p:spPr>
-          <a:xfrm>
-            <a:off x="896112" y="329184"/>
-            <a:ext cx="2926080" cy="292608"/>
-          </a:xfrm>
-          <a:prstGeom prst="rect">
-            <a:avLst/>
-          </a:prstGeom>
-          <a:noFill/>
-          <a:ln/>
-        </p:spPr>
-        <p:txBody>
-          <a:bodyPr wrap="square" lIns="0" tIns="0" rIns="0" bIns="0" rtlCol="0" anchor="ctr"/>
+          <p:cNvPr id="11" name="Text 8"/>
+          <p:cNvSpPr txBox="1"/>
+          <p:nvPr/>
+        </p:nvSpPr>
+        <p:spPr>
+          <a:xfrm>
+            <a:off x="868680" y="2569464"/>
+            <a:ext cx="5623560" cy="384048"/>
+          </a:xfrm>
+          <a:prstGeom prst="rect">
+            <a:avLst/>
+          </a:prstGeom>
+          <a:noFill/>
+          <a:ln/>
+        </p:spPr>
+        <p:txBody>
+          <a:bodyPr wrap="square" lIns="0" tIns="0" rIns="0" bIns="0" rtlCol="0" anchor="t"/>
           <a:lstStyle/>
           <a:p>
             <a:pPr indent="0" marL="0">
               <a:buNone/>
             </a:pPr>
             <a:r>
-              <a:rPr lang="en-US" sz="1500" b="1" spc="200" kern="0" dirty="0">
+              <a:rPr lang="en-US" sz="1200" b="1" spc="50" kern="0" dirty="0">
                 <a:solidFill>
                   <a:srgbClr val="FFFFFF"/>
                 </a:solidFill>
@@ -6819,241 +6693,6 @@
                 <a:ea typeface="Arial" pitchFamily="34" charset="-122"/>
                 <a:cs typeface="Arial" pitchFamily="34" charset="-120"/>
               </a:rPr>
-              <a:t>VALLETTA</a:t>
-            </a:r>
-            <a:endParaRPr lang="en-US" sz="1500" dirty="0"/>
-          </a:p>
-        </p:txBody>
-      </p:sp>
-      <p:sp>
-        <p:nvSpPr>
-          <p:cNvPr id="6" name="Text 4"/>
-          <p:cNvSpPr txBox="1"/>
-          <p:nvPr/>
-        </p:nvSpPr>
-        <p:spPr>
-          <a:xfrm>
-            <a:off x="896112" y="603504"/>
-            <a:ext cx="2926080" cy="219456"/>
-          </a:xfrm>
-          <a:prstGeom prst="rect">
-            <a:avLst/>
-          </a:prstGeom>
-          <a:noFill/>
-          <a:ln/>
-        </p:spPr>
-        <p:txBody>
-          <a:bodyPr wrap="square" lIns="0" tIns="0" rIns="0" bIns="0" rtlCol="0" anchor="ctr"/>
-          <a:lstStyle/>
-          <a:p>
-            <a:pPr indent="0" marL="0">
-              <a:buNone/>
-            </a:pPr>
-            <a:r>
-              <a:rPr lang="en-US" sz="750" b="1" spc="200" kern="0" dirty="0">
-                <a:solidFill>
-                  <a:srgbClr val="5B5F66"/>
-                </a:solidFill>
-                <a:latin typeface="Arial" pitchFamily="34" charset="0"/>
-                <a:ea typeface="Arial" pitchFamily="34" charset="-122"/>
-                <a:cs typeface="Arial" pitchFamily="34" charset="-120"/>
-              </a:rPr>
-              <a:t>INDUSTRIES, INC.</a:t>
-            </a:r>
-            <a:endParaRPr lang="en-US" sz="750" dirty="0"/>
-          </a:p>
-        </p:txBody>
-      </p:sp>
-      <p:sp>
-        <p:nvSpPr>
-          <p:cNvPr id="7" name="Text 5"/>
-          <p:cNvSpPr txBox="1"/>
-          <p:nvPr/>
-        </p:nvSpPr>
-        <p:spPr>
-          <a:xfrm>
-            <a:off x="457200" y="777240"/>
-            <a:ext cx="5486400" cy="320040"/>
-          </a:xfrm>
-          <a:prstGeom prst="rect">
-            <a:avLst/>
-          </a:prstGeom>
-          <a:noFill/>
-          <a:ln/>
-        </p:spPr>
-        <p:txBody>
-          <a:bodyPr wrap="square" lIns="0" tIns="0" rIns="0" bIns="0" rtlCol="0" anchor="ctr"/>
-          <a:lstStyle/>
-          <a:p>
-            <a:pPr algn="l" indent="0" marL="0">
-              <a:buNone/>
-            </a:pPr>
-            <a:r>
-              <a:rPr lang="en-US" sz="1100" b="1" spc="150" kern="0" dirty="0">
-                <a:solidFill>
-                  <a:srgbClr val="FF002B"/>
-                </a:solidFill>
-                <a:latin typeface="Arial" pitchFamily="34" charset="0"/>
-                <a:ea typeface="Arial" pitchFamily="34" charset="-122"/>
-                <a:cs typeface="Arial" pitchFamily="34" charset="-120"/>
-              </a:rPr>
-              <a:t>CLOSING</a:t>
-            </a:r>
-            <a:endParaRPr lang="en-US" sz="1100" dirty="0"/>
-          </a:p>
-        </p:txBody>
-      </p:sp>
-      <p:sp>
-        <p:nvSpPr>
-          <p:cNvPr id="8" name="Text 6"/>
-          <p:cNvSpPr txBox="1"/>
-          <p:nvPr/>
-        </p:nvSpPr>
-        <p:spPr>
-          <a:xfrm>
-            <a:off x="457200" y="1097280"/>
-            <a:ext cx="6675120" cy="685800"/>
-          </a:xfrm>
-          <a:prstGeom prst="rect">
-            <a:avLst/>
-          </a:prstGeom>
-          <a:noFill/>
-          <a:ln/>
-        </p:spPr>
-        <p:txBody>
-          <a:bodyPr wrap="square" lIns="0" tIns="0" rIns="0" bIns="0" rtlCol="0" anchor="ctr"/>
-          <a:lstStyle/>
-          <a:p>
-            <a:pPr indent="0" marL="0">
-              <a:buNone/>
-            </a:pPr>
-            <a:r>
-              <a:rPr lang="en-US" sz="3400" b="1" dirty="0">
-                <a:solidFill>
-                  <a:srgbClr val="FFFFFF"/>
-                </a:solidFill>
-                <a:latin typeface="Bookman Old Style" pitchFamily="34" charset="0"/>
-                <a:ea typeface="Bookman Old Style" pitchFamily="34" charset="-122"/>
-                <a:cs typeface="Bookman Old Style" pitchFamily="34" charset="-120"/>
-              </a:rPr>
-              <a:t>BUILT BY OPERATORS.</a:t>
-            </a:r>
-            <a:endParaRPr lang="en-US" sz="3400" dirty="0"/>
-          </a:p>
-        </p:txBody>
-      </p:sp>
-      <p:sp>
-        <p:nvSpPr>
-          <p:cNvPr id="9" name="Text 7"/>
-          <p:cNvSpPr txBox="1"/>
-          <p:nvPr/>
-        </p:nvSpPr>
-        <p:spPr>
-          <a:xfrm>
-            <a:off x="457200" y="1783080"/>
-            <a:ext cx="6675120" cy="457200"/>
-          </a:xfrm>
-          <a:prstGeom prst="rect">
-            <a:avLst/>
-          </a:prstGeom>
-          <a:noFill/>
-          <a:ln/>
-        </p:spPr>
-        <p:txBody>
-          <a:bodyPr wrap="square" lIns="0" tIns="0" rIns="0" bIns="0" rtlCol="0" anchor="ctr"/>
-          <a:lstStyle/>
-          <a:p>
-            <a:pPr indent="0" marL="0">
-              <a:buNone/>
-            </a:pPr>
-            <a:r>
-              <a:rPr lang="en-US" sz="1400" i="1" dirty="0">
-                <a:solidFill>
-                  <a:srgbClr val="D8D9DB"/>
-                </a:solidFill>
-                <a:latin typeface="Calibri" pitchFamily="34" charset="0"/>
-                <a:ea typeface="Calibri" pitchFamily="34" charset="-122"/>
-                <a:cs typeface="Calibri" pitchFamily="34" charset="-120"/>
-              </a:rPr>
-              <a:t>A proven partner to stand up DOI's own OSSTP.</a:t>
-            </a:r>
-            <a:endParaRPr lang="en-US" sz="1400" dirty="0"/>
-          </a:p>
-        </p:txBody>
-      </p:sp>
-      <p:sp>
-        <p:nvSpPr>
-          <p:cNvPr id="10" name="Shape 8"/>
-          <p:cNvSpPr/>
-          <p:nvPr/>
-        </p:nvSpPr>
-        <p:spPr>
-          <a:xfrm>
-            <a:off x="457200" y="2606040"/>
-            <a:ext cx="256032" cy="32004"/>
-          </a:xfrm>
-          <a:prstGeom prst="rect">
-            <a:avLst/>
-          </a:prstGeom>
-          <a:solidFill>
-            <a:srgbClr val="FF002B"/>
-          </a:solidFill>
-          <a:ln/>
-        </p:spPr>
-      </p:sp>
-      <p:sp>
-        <p:nvSpPr>
-          <p:cNvPr id="11" name="Shape 9"/>
-          <p:cNvSpPr/>
-          <p:nvPr/>
-        </p:nvSpPr>
-        <p:spPr>
-          <a:xfrm>
-            <a:off x="457200" y="2606040"/>
-            <a:ext cx="32004" cy="256032"/>
-          </a:xfrm>
-          <a:prstGeom prst="rect">
-            <a:avLst/>
-          </a:prstGeom>
-          <a:solidFill>
-            <a:srgbClr val="FF002B"/>
-          </a:solidFill>
-          <a:ln/>
-        </p:spPr>
-      </p:sp>
-      <p:sp>
-        <p:nvSpPr>
-          <p:cNvPr id="12" name="Text 10"/>
-          <p:cNvSpPr txBox="1"/>
-          <p:nvPr/>
-        </p:nvSpPr>
-        <p:spPr>
-          <a:xfrm>
-            <a:off x="868680" y="2569464"/>
-            <a:ext cx="5623560" cy="384048"/>
-          </a:xfrm>
-          <a:prstGeom prst="rect">
-            <a:avLst/>
-          </a:prstGeom>
-          <a:noFill/>
-          <a:ln/>
-        </p:spPr>
-        <p:txBody>
-          <a:bodyPr wrap="square" lIns="0" tIns="0" rIns="0" bIns="0" rtlCol="0" anchor="t"/>
-          <a:lstStyle/>
-          <a:p>
-            <a:pPr indent="0" marL="0">
-              <a:buNone/>
-            </a:pPr>
-            <a:r>
-              <a:rPr lang="en-US" sz="1200" b="1" spc="50" kern="0" dirty="0">
-                <a:solidFill>
-                  <a:srgbClr val="FFFFFF"/>
-                </a:solidFill>
-                <a:latin typeface="Arial" pitchFamily="34" charset="0"/>
-                <a:ea typeface="Arial" pitchFamily="34" charset="-122"/>
-                <a:cs typeface="Arial" pitchFamily="34" charset="-120"/>
-              </a:rPr>
               <a:t>CURRENT OPERATOR, NOT JUST AN INSTRUCTOR</a:t>
             </a:r>
             <a:endParaRPr lang="en-US" sz="1200" dirty="0"/>
@@ -7062,7 +6701,7 @@
       </p:sp>
       <p:sp>
         <p:nvSpPr>
-          <p:cNvPr id="13" name="Text 11"/>
+          <p:cNvPr id="12" name="Text 9"/>
           <p:cNvSpPr txBox="1"/>
           <p:nvPr/>
         </p:nvSpPr>
@@ -7104,7 +6743,7 @@
       </p:sp>
       <p:sp>
         <p:nvSpPr>
-          <p:cNvPr id="14" name="Shape 12"/>
+          <p:cNvPr id="13" name="Shape 10"/>
           <p:cNvSpPr/>
           <p:nvPr/>
         </p:nvSpPr>
@@ -7124,7 +6763,7 @@
       </p:sp>
       <p:sp>
         <p:nvSpPr>
-          <p:cNvPr id="15" name="Shape 13"/>
+          <p:cNvPr id="14" name="Shape 11"/>
           <p:cNvSpPr/>
           <p:nvPr/>
         </p:nvSpPr>
@@ -7144,7 +6783,7 @@
       </p:sp>
       <p:sp>
         <p:nvSpPr>
-          <p:cNvPr id="16" name="Text 14"/>
+          <p:cNvPr id="15" name="Text 12"/>
           <p:cNvSpPr txBox="1"/>
           <p:nvPr/>
         </p:nvSpPr>
@@ -7183,7 +6822,7 @@
       </p:sp>
       <p:sp>
         <p:nvSpPr>
-          <p:cNvPr id="17" name="Text 15"/>
+          <p:cNvPr id="16" name="Text 13"/>
           <p:cNvSpPr txBox="1"/>
           <p:nvPr/>
         </p:nvSpPr>
@@ -7225,7 +6864,7 @@
       </p:sp>
       <p:sp>
         <p:nvSpPr>
-          <p:cNvPr id="18" name="Shape 16"/>
+          <p:cNvPr id="17" name="Shape 14"/>
           <p:cNvSpPr/>
           <p:nvPr/>
         </p:nvSpPr>
@@ -7245,7 +6884,7 @@
       </p:sp>
       <p:sp>
         <p:nvSpPr>
-          <p:cNvPr id="19" name="Shape 17"/>
+          <p:cNvPr id="18" name="Shape 15"/>
           <p:cNvSpPr/>
           <p:nvPr/>
         </p:nvSpPr>
@@ -7265,7 +6904,7 @@
       </p:sp>
       <p:sp>
         <p:nvSpPr>
-          <p:cNvPr id="20" name="Text 18"/>
+          <p:cNvPr id="19" name="Text 16"/>
           <p:cNvSpPr txBox="1"/>
           <p:nvPr/>
         </p:nvSpPr>
@@ -7304,7 +6943,7 @@
       </p:sp>
       <p:sp>
         <p:nvSpPr>
-          <p:cNvPr id="21" name="Text 19"/>
+          <p:cNvPr id="20" name="Text 17"/>
           <p:cNvSpPr txBox="1"/>
           <p:nvPr/>
         </p:nvSpPr>
@@ -7346,7 +6985,7 @@
       </p:sp>
       <p:sp>
         <p:nvSpPr>
-          <p:cNvPr id="22" name="Shape 20"/>
+          <p:cNvPr id="21" name="Shape 18"/>
           <p:cNvSpPr/>
           <p:nvPr/>
         </p:nvSpPr>
@@ -7366,7 +7005,7 @@
       </p:sp>
       <p:sp>
         <p:nvSpPr>
-          <p:cNvPr id="23" name="Shape 21"/>
+          <p:cNvPr id="22" name="Shape 19"/>
           <p:cNvSpPr/>
           <p:nvPr/>
         </p:nvSpPr>
@@ -7386,7 +7025,7 @@
       </p:sp>
       <p:sp>
         <p:nvSpPr>
-          <p:cNvPr id="24" name="Shape 22"/>
+          <p:cNvPr id="23" name="Shape 20"/>
           <p:cNvSpPr/>
           <p:nvPr/>
         </p:nvSpPr>
@@ -7406,7 +7045,7 @@
       </p:sp>
       <p:sp>
         <p:nvSpPr>
-          <p:cNvPr id="25" name="Text 23"/>
+          <p:cNvPr id="24" name="Text 21"/>
           <p:cNvSpPr txBox="1"/>
           <p:nvPr/>
         </p:nvSpPr>
@@ -7445,7 +7084,7 @@
       </p:sp>
       <p:sp>
         <p:nvSpPr>
-          <p:cNvPr id="26" name="Text 24"/>
+          <p:cNvPr id="25" name="Text 22"/>
           <p:cNvSpPr txBox="1"/>
           <p:nvPr/>
         </p:nvSpPr>
@@ -7527,7 +7166,7 @@
       </p:sp>
       <p:sp>
         <p:nvSpPr>
-          <p:cNvPr id="27" name="Text 25"/>
+          <p:cNvPr id="26" name="Text 23"/>
           <p:cNvSpPr txBox="1"/>
           <p:nvPr/>
         </p:nvSpPr>
@@ -7566,7 +7205,7 @@
       </p:sp>
       <p:sp>
         <p:nvSpPr>
-          <p:cNvPr id="28" name="Text 26"/>
+          <p:cNvPr id="27" name="Text 24"/>
           <p:cNvSpPr txBox="1"/>
           <p:nvPr/>
         </p:nvSpPr>
@@ -7668,7 +7307,7 @@
       </p:sp>
       <p:sp>
         <p:nvSpPr>
-          <p:cNvPr id="29" name="Shape 27"/>
+          <p:cNvPr id="28" name="Shape 25"/>
           <p:cNvSpPr/>
           <p:nvPr/>
         </p:nvSpPr>
@@ -7691,7 +7330,7 @@
       </p:sp>
       <p:sp>
         <p:nvSpPr>
-          <p:cNvPr id="30" name="Text 28"/>
+          <p:cNvPr id="29" name="Text 26"/>
           <p:cNvSpPr txBox="1"/>
           <p:nvPr/>
         </p:nvSpPr>

--- a/decks/Valletta_DOI_OSSTP_Capability_Overview.pptx
+++ b/decks/Valletta_DOI_OSSTP_Capability_Overview.pptx
@@ -1320,48 +1320,9 @@
           <a:chExt cx="0" cy="0"/>
         </a:xfrm>
       </p:grpSpPr>
-      <p:sp>
-        <p:nvSpPr>
-          <p:cNvPr id="2" name="Text 0"/>
-          <p:cNvSpPr txBox="1"/>
-          <p:nvPr/>
-        </p:nvSpPr>
-        <p:spPr>
-          <a:xfrm>
-            <a:off x="6949440" y="0"/>
-            <a:ext cx="5486400" cy="6858000"/>
-          </a:xfrm>
-          <a:prstGeom prst="rect">
-            <a:avLst/>
-          </a:prstGeom>
-          <a:noFill/>
-          <a:ln/>
-        </p:spPr>
-        <p:txBody>
-          <a:bodyPr wrap="square" lIns="0" tIns="0" rIns="0" bIns="0" rtlCol="0" anchor="t"/>
-          <a:lstStyle/>
-          <a:p>
-            <a:pPr algn="r" indent="0" marL="0">
-              <a:buNone/>
-            </a:pPr>
-            <a:r>
-              <a:rPr lang="en-US" sz="36000" b="1" dirty="0">
-                <a:solidFill>
-                  <a:srgbClr val="141414"/>
-                </a:solidFill>
-                <a:latin typeface="Cambria" pitchFamily="34" charset="0"/>
-                <a:ea typeface="Cambria" pitchFamily="34" charset="-122"/>
-                <a:cs typeface="Cambria" pitchFamily="34" charset="-120"/>
-              </a:rPr>
-              <a:t>01</a:t>
-            </a:r>
-            <a:endParaRPr lang="en-US" sz="36000" dirty="0"/>
-          </a:p>
-        </p:txBody>
-      </p:sp>
       <p:pic>
         <p:nvPicPr>
-          <p:cNvPr id="3" name="Image 0" descr="/home/user/valletta-design-system/assets/logo/valletta-mark.png">    </p:cNvPr>
+          <p:cNvPr id="2" name="Image 0" descr="/home/user/valletta-design-system/assets/logo/valletta-mark-ghost.png">    </p:cNvPr>
           <p:cNvPicPr>
             <a:picLocks noChangeAspect="1"/>
           </p:cNvPicPr>
@@ -1375,8 +1336,32 @@
         </p:blipFill>
         <p:spPr>
           <a:xfrm>
+            <a:off x="7891272" y="502920"/>
+            <a:ext cx="5486400" cy="5839260"/>
+          </a:xfrm>
+          <a:prstGeom prst="rect">
+            <a:avLst/>
+          </a:prstGeom>
+        </p:spPr>
+      </p:pic>
+      <p:pic>
+        <p:nvPicPr>
+          <p:cNvPr id="3" name="Image 1" descr="/home/user/valletta-design-system/assets/logo/valletta-mark.png">    </p:cNvPr>
+          <p:cNvPicPr>
+            <a:picLocks noChangeAspect="1"/>
+          </p:cNvPicPr>
+          <p:nvPr/>
+        </p:nvPicPr>
+        <p:blipFill>
+          <a:blip r:embed="rId2"/>
+          <a:stretch>
+            <a:fillRect/>
+          </a:stretch>
+        </p:blipFill>
+        <p:spPr>
+          <a:xfrm>
             <a:off x="457200" y="365760"/>
-            <a:ext cx="365760" cy="389284"/>
+            <a:ext cx="548640" cy="583926"/>
           </a:xfrm>
           <a:prstGeom prst="rect">
             <a:avLst/>
@@ -1385,14 +1370,14 @@
       </p:pic>
       <p:sp>
         <p:nvSpPr>
-          <p:cNvPr id="4" name="Text 1"/>
-          <p:cNvSpPr txBox="1"/>
-          <p:nvPr/>
-        </p:nvSpPr>
-        <p:spPr>
-          <a:xfrm>
-            <a:off x="932688" y="329184"/>
-            <a:ext cx="2926080" cy="274320"/>
+          <p:cNvPr id="4" name="Text 0"/>
+          <p:cNvSpPr txBox="1"/>
+          <p:nvPr/>
+        </p:nvSpPr>
+        <p:spPr>
+          <a:xfrm>
+            <a:off x="1170432" y="347472"/>
+            <a:ext cx="3291840" cy="402336"/>
           </a:xfrm>
           <a:prstGeom prst="rect">
             <a:avLst/>
@@ -1408,7 +1393,7 @@
               <a:buNone/>
             </a:pPr>
             <a:r>
-              <a:rPr lang="en-US" sz="1500" spc="200" kern="0" dirty="0">
+              <a:rPr lang="en-US" sz="2200" spc="200" kern="0" dirty="0">
                 <a:solidFill>
                   <a:srgbClr val="FFFFFF"/>
                 </a:solidFill>
@@ -1418,20 +1403,20 @@
               </a:rPr>
               <a:t>VALLETTA</a:t>
             </a:r>
-            <a:endParaRPr lang="en-US" sz="1500" dirty="0"/>
-          </a:p>
-        </p:txBody>
-      </p:sp>
-      <p:sp>
-        <p:nvSpPr>
-          <p:cNvPr id="5" name="Text 2"/>
-          <p:cNvSpPr txBox="1"/>
-          <p:nvPr/>
-        </p:nvSpPr>
-        <p:spPr>
-          <a:xfrm>
-            <a:off x="932688" y="594360"/>
-            <a:ext cx="2926080" cy="219456"/>
+            <a:endParaRPr lang="en-US" sz="2200" dirty="0"/>
+          </a:p>
+        </p:txBody>
+      </p:sp>
+      <p:sp>
+        <p:nvSpPr>
+          <p:cNvPr id="5" name="Text 1"/>
+          <p:cNvSpPr txBox="1"/>
+          <p:nvPr/>
+        </p:nvSpPr>
+        <p:spPr>
+          <a:xfrm>
+            <a:off x="1170432" y="731520"/>
+            <a:ext cx="3291840" cy="274320"/>
           </a:xfrm>
           <a:prstGeom prst="rect">
             <a:avLst/>
@@ -1447,7 +1432,7 @@
               <a:buNone/>
             </a:pPr>
             <a:r>
-              <a:rPr lang="en-US" sz="750" b="1" spc="200" kern="0" dirty="0">
+              <a:rPr lang="en-US" sz="1100" b="1" spc="200" kern="0" dirty="0">
                 <a:solidFill>
                   <a:srgbClr val="5B5F66"/>
                 </a:solidFill>
@@ -1457,13 +1442,13 @@
               </a:rPr>
               <a:t>INDUSTRIES, INC.</a:t>
             </a:r>
-            <a:endParaRPr lang="en-US" sz="750" dirty="0"/>
-          </a:p>
-        </p:txBody>
-      </p:sp>
-      <p:sp>
-        <p:nvSpPr>
-          <p:cNvPr id="6" name="Shape 3"/>
+            <a:endParaRPr lang="en-US" sz="1100" dirty="0"/>
+          </a:p>
+        </p:txBody>
+      </p:sp>
+      <p:sp>
+        <p:nvSpPr>
+          <p:cNvPr id="6" name="Shape 2"/>
           <p:cNvSpPr/>
           <p:nvPr/>
         </p:nvSpPr>
@@ -1483,7 +1468,7 @@
       </p:sp>
       <p:sp>
         <p:nvSpPr>
-          <p:cNvPr id="7" name="Shape 4"/>
+          <p:cNvPr id="7" name="Shape 3"/>
           <p:cNvSpPr/>
           <p:nvPr/>
         </p:nvSpPr>
@@ -1503,7 +1488,7 @@
       </p:sp>
       <p:sp>
         <p:nvSpPr>
-          <p:cNvPr id="8" name="Text 5"/>
+          <p:cNvPr id="8" name="Text 4"/>
           <p:cNvSpPr txBox="1"/>
           <p:nvPr/>
         </p:nvSpPr>
@@ -1542,7 +1527,7 @@
       </p:sp>
       <p:sp>
         <p:nvSpPr>
-          <p:cNvPr id="9" name="Text 6"/>
+          <p:cNvPr id="9" name="Text 5"/>
           <p:cNvSpPr txBox="1"/>
           <p:nvPr/>
         </p:nvSpPr>
@@ -1604,7 +1589,7 @@
       </p:sp>
       <p:sp>
         <p:nvSpPr>
-          <p:cNvPr id="10" name="Text 7"/>
+          <p:cNvPr id="10" name="Text 6"/>
           <p:cNvSpPr txBox="1"/>
           <p:nvPr/>
         </p:nvSpPr>
@@ -1643,7 +1628,7 @@
       </p:sp>
       <p:sp>
         <p:nvSpPr>
-          <p:cNvPr id="11" name="Text 8"/>
+          <p:cNvPr id="11" name="Text 7"/>
           <p:cNvSpPr txBox="1"/>
           <p:nvPr/>
         </p:nvSpPr>
@@ -1682,7 +1667,7 @@
       </p:sp>
       <p:sp>
         <p:nvSpPr>
-          <p:cNvPr id="12" name="Text 9"/>
+          <p:cNvPr id="12" name="Text 8"/>
           <p:cNvSpPr txBox="1"/>
           <p:nvPr/>
         </p:nvSpPr>
@@ -1724,7 +1709,7 @@
       </p:sp>
       <p:sp>
         <p:nvSpPr>
-          <p:cNvPr id="13" name="Shape 10"/>
+          <p:cNvPr id="13" name="Shape 9"/>
           <p:cNvSpPr/>
           <p:nvPr/>
         </p:nvSpPr>
@@ -1747,7 +1732,7 @@
       </p:sp>
       <p:sp>
         <p:nvSpPr>
-          <p:cNvPr id="14" name="Text 11"/>
+          <p:cNvPr id="14" name="Text 10"/>
           <p:cNvSpPr txBox="1"/>
           <p:nvPr/>
         </p:nvSpPr>
@@ -1786,7 +1771,7 @@
       </p:sp>
       <p:sp>
         <p:nvSpPr>
-          <p:cNvPr id="15" name="Text 12"/>
+          <p:cNvPr id="15" name="Text 11"/>
           <p:cNvSpPr txBox="1"/>
           <p:nvPr/>
         </p:nvSpPr>
@@ -1868,7 +1853,7 @@
       </p:sp>
       <p:sp>
         <p:nvSpPr>
-          <p:cNvPr id="16" name="Text 13"/>
+          <p:cNvPr id="16" name="Text 12"/>
           <p:cNvSpPr txBox="1"/>
           <p:nvPr/>
         </p:nvSpPr>
@@ -1907,7 +1892,7 @@
       </p:sp>
       <p:sp>
         <p:nvSpPr>
-          <p:cNvPr id="17" name="Text 14"/>
+          <p:cNvPr id="17" name="Text 13"/>
           <p:cNvSpPr txBox="1"/>
           <p:nvPr/>
         </p:nvSpPr>
@@ -2197,55 +2182,40 @@
         <p:spPr>
           <a:xfrm>
             <a:off x="457200" y="365760"/>
-            <a:ext cx="1828800" cy="384048"/>
+            <a:ext cx="2743200" cy="576072"/>
           </a:xfrm>
           <a:prstGeom prst="rect">
             <a:avLst/>
           </a:prstGeom>
         </p:spPr>
       </p:pic>
-      <p:sp>
-        <p:nvSpPr>
-          <p:cNvPr id="9" name="Text 6"/>
-          <p:cNvSpPr txBox="1"/>
-          <p:nvPr/>
-        </p:nvSpPr>
-        <p:spPr>
-          <a:xfrm>
-            <a:off x="6949440" y="0"/>
-            <a:ext cx="5486400" cy="6858000"/>
-          </a:xfrm>
-          <a:prstGeom prst="rect">
-            <a:avLst/>
-          </a:prstGeom>
-          <a:noFill/>
-          <a:ln/>
-        </p:spPr>
-        <p:txBody>
-          <a:bodyPr wrap="square" lIns="0" tIns="0" rIns="0" bIns="0" rtlCol="0" anchor="t"/>
-          <a:lstStyle/>
-          <a:p>
-            <a:pPr algn="r" indent="0" marL="0">
-              <a:buNone/>
-            </a:pPr>
-            <a:r>
-              <a:rPr lang="en-US" sz="36000" b="1" dirty="0">
-                <a:solidFill>
-                  <a:srgbClr val="EBEBE9"/>
-                </a:solidFill>
-                <a:latin typeface="Cambria" pitchFamily="34" charset="0"/>
-                <a:ea typeface="Cambria" pitchFamily="34" charset="-122"/>
-                <a:cs typeface="Cambria" pitchFamily="34" charset="-120"/>
-              </a:rPr>
-              <a:t>02</a:t>
-            </a:r>
-            <a:endParaRPr lang="en-US" sz="36000" dirty="0"/>
-          </a:p>
-        </p:txBody>
-      </p:sp>
-      <p:sp>
-        <p:nvSpPr>
-          <p:cNvPr id="10" name="Text 7"/>
+      <p:pic>
+        <p:nvPicPr>
+          <p:cNvPr id="9" name="Image 1" descr="/home/user/valletta-design-system/assets/logo/valletta-mark-ghost.png">    </p:cNvPr>
+          <p:cNvPicPr>
+            <a:picLocks noChangeAspect="1"/>
+          </p:cNvPicPr>
+          <p:nvPr/>
+        </p:nvPicPr>
+        <p:blipFill>
+          <a:blip r:embed="rId2"/>
+          <a:stretch>
+            <a:fillRect/>
+          </a:stretch>
+        </p:blipFill>
+        <p:spPr>
+          <a:xfrm>
+            <a:off x="7891272" y="502920"/>
+            <a:ext cx="5486400" cy="5839260"/>
+          </a:xfrm>
+          <a:prstGeom prst="rect">
+            <a:avLst/>
+          </a:prstGeom>
+        </p:spPr>
+      </p:pic>
+      <p:sp>
+        <p:nvSpPr>
+          <p:cNvPr id="10" name="Text 6"/>
           <p:cNvSpPr txBox="1"/>
           <p:nvPr/>
         </p:nvSpPr>
@@ -2284,7 +2254,7 @@
       </p:sp>
       <p:sp>
         <p:nvSpPr>
-          <p:cNvPr id="11" name="Text 8"/>
+          <p:cNvPr id="11" name="Text 7"/>
           <p:cNvSpPr txBox="1"/>
           <p:nvPr/>
         </p:nvSpPr>
@@ -2326,7 +2296,7 @@
       </p:sp>
       <p:sp>
         <p:nvSpPr>
-          <p:cNvPr id="12" name="Text 9"/>
+          <p:cNvPr id="12" name="Text 8"/>
           <p:cNvSpPr txBox="1"/>
           <p:nvPr/>
         </p:nvSpPr>
@@ -2368,7 +2338,7 @@
       </p:sp>
       <p:sp>
         <p:nvSpPr>
-          <p:cNvPr id="13" name="Text 10"/>
+          <p:cNvPr id="13" name="Text 9"/>
           <p:cNvSpPr txBox="1"/>
           <p:nvPr/>
         </p:nvSpPr>
@@ -2407,7 +2377,7 @@
       </p:sp>
       <p:sp>
         <p:nvSpPr>
-          <p:cNvPr id="14" name="Text 11"/>
+          <p:cNvPr id="14" name="Text 10"/>
           <p:cNvSpPr txBox="1"/>
           <p:nvPr/>
         </p:nvSpPr>
@@ -2446,7 +2416,7 @@
       </p:sp>
       <p:sp>
         <p:nvSpPr>
-          <p:cNvPr id="15" name="Text 12"/>
+          <p:cNvPr id="15" name="Text 11"/>
           <p:cNvSpPr txBox="1"/>
           <p:nvPr/>
         </p:nvSpPr>
@@ -2488,7 +2458,7 @@
       </p:sp>
       <p:sp>
         <p:nvSpPr>
-          <p:cNvPr id="16" name="Shape 13"/>
+          <p:cNvPr id="16" name="Shape 12"/>
           <p:cNvSpPr/>
           <p:nvPr/>
         </p:nvSpPr>
@@ -2511,7 +2481,7 @@
       </p:sp>
       <p:sp>
         <p:nvSpPr>
-          <p:cNvPr id="17" name="Text 14"/>
+          <p:cNvPr id="17" name="Text 13"/>
           <p:cNvSpPr txBox="1"/>
           <p:nvPr/>
         </p:nvSpPr>
@@ -2550,7 +2520,7 @@
       </p:sp>
       <p:sp>
         <p:nvSpPr>
-          <p:cNvPr id="18" name="Text 15"/>
+          <p:cNvPr id="18" name="Text 14"/>
           <p:cNvSpPr txBox="1"/>
           <p:nvPr/>
         </p:nvSpPr>
@@ -2589,7 +2559,7 @@
       </p:sp>
       <p:sp>
         <p:nvSpPr>
-          <p:cNvPr id="19" name="Text 16"/>
+          <p:cNvPr id="19" name="Text 15"/>
           <p:cNvSpPr txBox="1"/>
           <p:nvPr/>
         </p:nvSpPr>
@@ -2631,7 +2601,7 @@
       </p:sp>
       <p:sp>
         <p:nvSpPr>
-          <p:cNvPr id="20" name="Shape 17"/>
+          <p:cNvPr id="20" name="Shape 16"/>
           <p:cNvSpPr/>
           <p:nvPr/>
         </p:nvSpPr>
@@ -2654,7 +2624,7 @@
       </p:sp>
       <p:sp>
         <p:nvSpPr>
-          <p:cNvPr id="21" name="Text 18"/>
+          <p:cNvPr id="21" name="Text 17"/>
           <p:cNvSpPr txBox="1"/>
           <p:nvPr/>
         </p:nvSpPr>
@@ -2693,7 +2663,7 @@
       </p:sp>
       <p:sp>
         <p:nvSpPr>
-          <p:cNvPr id="22" name="Text 19"/>
+          <p:cNvPr id="22" name="Text 18"/>
           <p:cNvSpPr txBox="1"/>
           <p:nvPr/>
         </p:nvSpPr>
@@ -2732,7 +2702,7 @@
       </p:sp>
       <p:sp>
         <p:nvSpPr>
-          <p:cNvPr id="23" name="Text 20"/>
+          <p:cNvPr id="23" name="Text 19"/>
           <p:cNvSpPr txBox="1"/>
           <p:nvPr/>
         </p:nvSpPr>
@@ -2774,7 +2744,7 @@
       </p:sp>
       <p:sp>
         <p:nvSpPr>
-          <p:cNvPr id="24" name="Text 21"/>
+          <p:cNvPr id="24" name="Text 20"/>
           <p:cNvSpPr txBox="1"/>
           <p:nvPr/>
         </p:nvSpPr>
@@ -2813,7 +2783,7 @@
       </p:sp>
       <p:sp>
         <p:nvSpPr>
-          <p:cNvPr id="25" name="Shape 22"/>
+          <p:cNvPr id="25" name="Shape 21"/>
           <p:cNvSpPr/>
           <p:nvPr/>
         </p:nvSpPr>
@@ -2837,7 +2807,7 @@
       </p:sp>
       <p:sp>
         <p:nvSpPr>
-          <p:cNvPr id="26" name="Text 23"/>
+          <p:cNvPr id="26" name="Text 22"/>
           <p:cNvSpPr txBox="1"/>
           <p:nvPr/>
         </p:nvSpPr>
@@ -2890,7 +2860,7 @@
       </p:sp>
       <p:sp>
         <p:nvSpPr>
-          <p:cNvPr id="27" name="Text 24"/>
+          <p:cNvPr id="27" name="Text 23"/>
           <p:cNvSpPr txBox="1"/>
           <p:nvPr/>
         </p:nvSpPr>
@@ -2959,48 +2929,9 @@
           <a:chExt cx="0" cy="0"/>
         </a:xfrm>
       </p:grpSpPr>
-      <p:sp>
-        <p:nvSpPr>
-          <p:cNvPr id="2" name="Text 0"/>
-          <p:cNvSpPr txBox="1"/>
-          <p:nvPr/>
-        </p:nvSpPr>
-        <p:spPr>
-          <a:xfrm>
-            <a:off x="6949440" y="0"/>
-            <a:ext cx="5486400" cy="6858000"/>
-          </a:xfrm>
-          <a:prstGeom prst="rect">
-            <a:avLst/>
-          </a:prstGeom>
-          <a:noFill/>
-          <a:ln/>
-        </p:spPr>
-        <p:txBody>
-          <a:bodyPr wrap="square" lIns="0" tIns="0" rIns="0" bIns="0" rtlCol="0" anchor="t"/>
-          <a:lstStyle/>
-          <a:p>
-            <a:pPr algn="r" indent="0" marL="0">
-              <a:buNone/>
-            </a:pPr>
-            <a:r>
-              <a:rPr lang="en-US" sz="36000" b="1" dirty="0">
-                <a:solidFill>
-                  <a:srgbClr val="EBEBE9"/>
-                </a:solidFill>
-                <a:latin typeface="Cambria" pitchFamily="34" charset="0"/>
-                <a:ea typeface="Cambria" pitchFamily="34" charset="-122"/>
-                <a:cs typeface="Cambria" pitchFamily="34" charset="-120"/>
-              </a:rPr>
-              <a:t>03</a:t>
-            </a:r>
-            <a:endParaRPr lang="en-US" sz="36000" dirty="0"/>
-          </a:p>
-        </p:txBody>
-      </p:sp>
       <p:pic>
         <p:nvPicPr>
-          <p:cNvPr id="3" name="Image 0" descr="/home/user/valletta-design-system/assets/logo/valletta-lockup.png">    </p:cNvPr>
+          <p:cNvPr id="2" name="Image 0" descr="/home/user/valletta-design-system/assets/logo/valletta-mark-ghost.png">    </p:cNvPr>
           <p:cNvPicPr>
             <a:picLocks noChangeAspect="1"/>
           </p:cNvPicPr>
@@ -3014,8 +2945,32 @@
         </p:blipFill>
         <p:spPr>
           <a:xfrm>
+            <a:off x="7891272" y="502920"/>
+            <a:ext cx="5486400" cy="5839260"/>
+          </a:xfrm>
+          <a:prstGeom prst="rect">
+            <a:avLst/>
+          </a:prstGeom>
+        </p:spPr>
+      </p:pic>
+      <p:pic>
+        <p:nvPicPr>
+          <p:cNvPr id="3" name="Image 1" descr="/home/user/valletta-design-system/assets/logo/valletta-lockup.png">    </p:cNvPr>
+          <p:cNvPicPr>
+            <a:picLocks noChangeAspect="1"/>
+          </p:cNvPicPr>
+          <p:nvPr/>
+        </p:nvPicPr>
+        <p:blipFill>
+          <a:blip r:embed="rId2"/>
+          <a:stretch>
+            <a:fillRect/>
+          </a:stretch>
+        </p:blipFill>
+        <p:spPr>
+          <a:xfrm>
             <a:off x="457200" y="365760"/>
-            <a:ext cx="1828800" cy="384048"/>
+            <a:ext cx="2743200" cy="576072"/>
           </a:xfrm>
           <a:prstGeom prst="rect">
             <a:avLst/>
@@ -3024,13 +2979,13 @@
       </p:pic>
       <p:sp>
         <p:nvSpPr>
-          <p:cNvPr id="4" name="Text 1"/>
-          <p:cNvSpPr txBox="1"/>
-          <p:nvPr/>
-        </p:nvSpPr>
-        <p:spPr>
-          <a:xfrm>
-            <a:off x="457200" y="777240"/>
+          <p:cNvPr id="4" name="Text 0"/>
+          <p:cNvSpPr txBox="1"/>
+          <p:nvPr/>
+        </p:nvSpPr>
+        <p:spPr>
+          <a:xfrm>
+            <a:off x="457200" y="1005840"/>
             <a:ext cx="9144000" cy="320040"/>
           </a:xfrm>
           <a:prstGeom prst="rect">
@@ -3063,13 +3018,13 @@
       </p:sp>
       <p:sp>
         <p:nvSpPr>
-          <p:cNvPr id="5" name="Text 2"/>
-          <p:cNvSpPr txBox="1"/>
-          <p:nvPr/>
-        </p:nvSpPr>
-        <p:spPr>
-          <a:xfrm>
-            <a:off x="457200" y="1097280"/>
+          <p:cNvPr id="5" name="Text 1"/>
+          <p:cNvSpPr txBox="1"/>
+          <p:nvPr/>
+        </p:nvSpPr>
+        <p:spPr>
+          <a:xfrm>
+            <a:off x="457200" y="1325880"/>
             <a:ext cx="11274552" cy="685800"/>
           </a:xfrm>
           <a:prstGeom prst="rect">
@@ -3115,8 +3070,8 @@
           </p:nvPr>
         </p:nvGraphicFramePr>
         <p:xfrm>
-          <a:off x="457200" y="1920240"/>
-          <a:ext cx="7040880" cy="4251960"/>
+          <a:off x="457200" y="2148840"/>
+          <a:ext cx="7040880" cy="4023360"/>
         </p:xfrm>
         <a:graphic>
           <a:graphicData uri="http://schemas.openxmlformats.org/drawingml/2006/table">
@@ -3126,7 +3081,7 @@
                 <a:gridCol w="3246120"/>
                 <a:gridCol w="3794760"/>
               </a:tblGrid>
-              <a:tr h="708660">
+              <a:tr h="670560">
                 <a:tc>
                   <a:txBody>
                     <a:bodyPr/>
@@ -3250,7 +3205,7 @@
                   </a:tcPr>
                 </a:tc>
               </a:tr>
-              <a:tr h="708660">
+              <a:tr h="670560">
                 <a:tc>
                   <a:txBody>
                     <a:bodyPr/>
@@ -3374,7 +3329,7 @@
                   </a:tcPr>
                 </a:tc>
               </a:tr>
-              <a:tr h="708660">
+              <a:tr h="670560">
                 <a:tc>
                   <a:txBody>
                     <a:bodyPr/>
@@ -3498,7 +3453,7 @@
                   </a:tcPr>
                 </a:tc>
               </a:tr>
-              <a:tr h="708660">
+              <a:tr h="670560">
                 <a:tc>
                   <a:txBody>
                     <a:bodyPr/>
@@ -3622,7 +3577,7 @@
                   </a:tcPr>
                 </a:tc>
               </a:tr>
-              <a:tr h="708660">
+              <a:tr h="670560">
                 <a:tc>
                   <a:txBody>
                     <a:bodyPr/>
@@ -3746,7 +3701,7 @@
                   </a:tcPr>
                 </a:tc>
               </a:tr>
-              <a:tr h="708660">
+              <a:tr h="670560">
                 <a:tc>
                   <a:txBody>
                     <a:bodyPr/>
@@ -3876,14 +3831,14 @@
       </p:graphicFrame>
       <p:sp>
         <p:nvSpPr>
-          <p:cNvPr id="7" name="Shape 3"/>
+          <p:cNvPr id="7" name="Shape 2"/>
           <p:cNvSpPr/>
           <p:nvPr/>
         </p:nvSpPr>
         <p:spPr>
           <a:xfrm>
-            <a:off x="7726680" y="1920240"/>
-            <a:ext cx="4005072" cy="4251960"/>
+            <a:off x="7726680" y="2148840"/>
+            <a:ext cx="4005072" cy="4023360"/>
           </a:xfrm>
           <a:prstGeom prst="rect">
             <a:avLst/>
@@ -3908,13 +3863,13 @@
       </p:sp>
       <p:sp>
         <p:nvSpPr>
-          <p:cNvPr id="8" name="Shape 4"/>
+          <p:cNvPr id="8" name="Shape 3"/>
           <p:cNvSpPr/>
           <p:nvPr/>
         </p:nvSpPr>
         <p:spPr>
           <a:xfrm>
-            <a:off x="7726680" y="1920240"/>
+            <a:off x="7726680" y="2148840"/>
             <a:ext cx="365760" cy="36576"/>
           </a:xfrm>
           <a:prstGeom prst="rect">
@@ -3928,13 +3883,13 @@
       </p:sp>
       <p:sp>
         <p:nvSpPr>
-          <p:cNvPr id="9" name="Shape 5"/>
+          <p:cNvPr id="9" name="Shape 4"/>
           <p:cNvSpPr/>
           <p:nvPr/>
         </p:nvSpPr>
         <p:spPr>
           <a:xfrm>
-            <a:off x="7726680" y="1920240"/>
+            <a:off x="7726680" y="2148840"/>
             <a:ext cx="36576" cy="365760"/>
           </a:xfrm>
           <a:prstGeom prst="rect">
@@ -3948,13 +3903,13 @@
       </p:sp>
       <p:sp>
         <p:nvSpPr>
-          <p:cNvPr id="10" name="Shape 6"/>
+          <p:cNvPr id="10" name="Shape 5"/>
           <p:cNvSpPr/>
           <p:nvPr/>
         </p:nvSpPr>
         <p:spPr>
           <a:xfrm>
-            <a:off x="7726680" y="1920240"/>
+            <a:off x="7726680" y="2148840"/>
             <a:ext cx="4005072" cy="384048"/>
           </a:xfrm>
           <a:prstGeom prst="rect">
@@ -3968,13 +3923,13 @@
       </p:sp>
       <p:sp>
         <p:nvSpPr>
-          <p:cNvPr id="11" name="Text 7"/>
-          <p:cNvSpPr txBox="1"/>
-          <p:nvPr/>
-        </p:nvSpPr>
-        <p:spPr>
-          <a:xfrm>
-            <a:off x="7863840" y="1920240"/>
+          <p:cNvPr id="11" name="Text 6"/>
+          <p:cNvSpPr txBox="1"/>
+          <p:nvPr/>
+        </p:nvSpPr>
+        <p:spPr>
+          <a:xfrm>
+            <a:off x="7863840" y="2148840"/>
             <a:ext cx="3730752" cy="384048"/>
           </a:xfrm>
           <a:prstGeom prst="rect">
@@ -4007,14 +3962,14 @@
       </p:sp>
       <p:sp>
         <p:nvSpPr>
-          <p:cNvPr id="12" name="Text 8"/>
-          <p:cNvSpPr txBox="1"/>
-          <p:nvPr/>
-        </p:nvSpPr>
-        <p:spPr>
-          <a:xfrm>
-            <a:off x="7955280" y="2468880"/>
-            <a:ext cx="3547872" cy="3063240"/>
+          <p:cNvPr id="12" name="Text 7"/>
+          <p:cNvSpPr txBox="1"/>
+          <p:nvPr/>
+        </p:nvSpPr>
+        <p:spPr>
+          <a:xfrm>
+            <a:off x="7955280" y="2697480"/>
+            <a:ext cx="3547872" cy="2834640"/>
           </a:xfrm>
           <a:prstGeom prst="rect">
             <a:avLst/>
@@ -4229,7 +4184,7 @@
       </p:sp>
       <p:sp>
         <p:nvSpPr>
-          <p:cNvPr id="13" name="Text 9"/>
+          <p:cNvPr id="13" name="Text 8"/>
           <p:cNvSpPr txBox="1"/>
           <p:nvPr/>
         </p:nvSpPr>
@@ -4271,7 +4226,7 @@
       </p:sp>
       <p:sp>
         <p:nvSpPr>
-          <p:cNvPr id="14" name="Shape 10"/>
+          <p:cNvPr id="14" name="Shape 9"/>
           <p:cNvSpPr/>
           <p:nvPr/>
         </p:nvSpPr>
@@ -4295,7 +4250,7 @@
       </p:sp>
       <p:sp>
         <p:nvSpPr>
-          <p:cNvPr id="15" name="Text 11"/>
+          <p:cNvPr id="15" name="Text 10"/>
           <p:cNvSpPr txBox="1"/>
           <p:nvPr/>
         </p:nvSpPr>
@@ -4348,7 +4303,7 @@
       </p:sp>
       <p:sp>
         <p:nvSpPr>
-          <p:cNvPr id="16" name="Text 12"/>
+          <p:cNvPr id="16" name="Text 11"/>
           <p:cNvSpPr txBox="1"/>
           <p:nvPr/>
         </p:nvSpPr>
@@ -4417,48 +4372,9 @@
           <a:chExt cx="0" cy="0"/>
         </a:xfrm>
       </p:grpSpPr>
-      <p:sp>
-        <p:nvSpPr>
-          <p:cNvPr id="2" name="Text 0"/>
-          <p:cNvSpPr txBox="1"/>
-          <p:nvPr/>
-        </p:nvSpPr>
-        <p:spPr>
-          <a:xfrm>
-            <a:off x="6949440" y="0"/>
-            <a:ext cx="5486400" cy="6858000"/>
-          </a:xfrm>
-          <a:prstGeom prst="rect">
-            <a:avLst/>
-          </a:prstGeom>
-          <a:noFill/>
-          <a:ln/>
-        </p:spPr>
-        <p:txBody>
-          <a:bodyPr wrap="square" lIns="0" tIns="0" rIns="0" bIns="0" rtlCol="0" anchor="t"/>
-          <a:lstStyle/>
-          <a:p>
-            <a:pPr algn="r" indent="0" marL="0">
-              <a:buNone/>
-            </a:pPr>
-            <a:r>
-              <a:rPr lang="en-US" sz="36000" b="1" dirty="0">
-                <a:solidFill>
-                  <a:srgbClr val="141414"/>
-                </a:solidFill>
-                <a:latin typeface="Cambria" pitchFamily="34" charset="0"/>
-                <a:ea typeface="Cambria" pitchFamily="34" charset="-122"/>
-                <a:cs typeface="Cambria" pitchFamily="34" charset="-120"/>
-              </a:rPr>
-              <a:t>04</a:t>
-            </a:r>
-            <a:endParaRPr lang="en-US" sz="36000" dirty="0"/>
-          </a:p>
-        </p:txBody>
-      </p:sp>
       <p:pic>
         <p:nvPicPr>
-          <p:cNvPr id="3" name="Image 0" descr="/home/user/valletta-design-system/assets/logo/valletta-mark.png">    </p:cNvPr>
+          <p:cNvPr id="2" name="Image 0" descr="/home/user/valletta-design-system/assets/logo/valletta-mark-ghost.png">    </p:cNvPr>
           <p:cNvPicPr>
             <a:picLocks noChangeAspect="1"/>
           </p:cNvPicPr>
@@ -4472,8 +4388,32 @@
         </p:blipFill>
         <p:spPr>
           <a:xfrm>
+            <a:off x="7891272" y="502920"/>
+            <a:ext cx="5486400" cy="5839260"/>
+          </a:xfrm>
+          <a:prstGeom prst="rect">
+            <a:avLst/>
+          </a:prstGeom>
+        </p:spPr>
+      </p:pic>
+      <p:pic>
+        <p:nvPicPr>
+          <p:cNvPr id="3" name="Image 1" descr="/home/user/valletta-design-system/assets/logo/valletta-mark.png">    </p:cNvPr>
+          <p:cNvPicPr>
+            <a:picLocks noChangeAspect="1"/>
+          </p:cNvPicPr>
+          <p:nvPr/>
+        </p:nvPicPr>
+        <p:blipFill>
+          <a:blip r:embed="rId2"/>
+          <a:stretch>
+            <a:fillRect/>
+          </a:stretch>
+        </p:blipFill>
+        <p:spPr>
+          <a:xfrm>
             <a:off x="457200" y="365760"/>
-            <a:ext cx="365760" cy="389284"/>
+            <a:ext cx="548640" cy="583926"/>
           </a:xfrm>
           <a:prstGeom prst="rect">
             <a:avLst/>
@@ -4482,14 +4422,14 @@
       </p:pic>
       <p:sp>
         <p:nvSpPr>
-          <p:cNvPr id="4" name="Text 1"/>
-          <p:cNvSpPr txBox="1"/>
-          <p:nvPr/>
-        </p:nvSpPr>
-        <p:spPr>
-          <a:xfrm>
-            <a:off x="932688" y="329184"/>
-            <a:ext cx="2926080" cy="274320"/>
+          <p:cNvPr id="4" name="Text 0"/>
+          <p:cNvSpPr txBox="1"/>
+          <p:nvPr/>
+        </p:nvSpPr>
+        <p:spPr>
+          <a:xfrm>
+            <a:off x="1170432" y="347472"/>
+            <a:ext cx="3291840" cy="402336"/>
           </a:xfrm>
           <a:prstGeom prst="rect">
             <a:avLst/>
@@ -4505,7 +4445,7 @@
               <a:buNone/>
             </a:pPr>
             <a:r>
-              <a:rPr lang="en-US" sz="1500" spc="200" kern="0" dirty="0">
+              <a:rPr lang="en-US" sz="2200" spc="200" kern="0" dirty="0">
                 <a:solidFill>
                   <a:srgbClr val="FFFFFF"/>
                 </a:solidFill>
@@ -4515,20 +4455,20 @@
               </a:rPr>
               <a:t>VALLETTA</a:t>
             </a:r>
-            <a:endParaRPr lang="en-US" sz="1500" dirty="0"/>
-          </a:p>
-        </p:txBody>
-      </p:sp>
-      <p:sp>
-        <p:nvSpPr>
-          <p:cNvPr id="5" name="Text 2"/>
-          <p:cNvSpPr txBox="1"/>
-          <p:nvPr/>
-        </p:nvSpPr>
-        <p:spPr>
-          <a:xfrm>
-            <a:off x="932688" y="594360"/>
-            <a:ext cx="2926080" cy="219456"/>
+            <a:endParaRPr lang="en-US" sz="2200" dirty="0"/>
+          </a:p>
+        </p:txBody>
+      </p:sp>
+      <p:sp>
+        <p:nvSpPr>
+          <p:cNvPr id="5" name="Text 1"/>
+          <p:cNvSpPr txBox="1"/>
+          <p:nvPr/>
+        </p:nvSpPr>
+        <p:spPr>
+          <a:xfrm>
+            <a:off x="1170432" y="731520"/>
+            <a:ext cx="3291840" cy="274320"/>
           </a:xfrm>
           <a:prstGeom prst="rect">
             <a:avLst/>
@@ -4544,7 +4484,7 @@
               <a:buNone/>
             </a:pPr>
             <a:r>
-              <a:rPr lang="en-US" sz="750" b="1" spc="200" kern="0" dirty="0">
+              <a:rPr lang="en-US" sz="1100" b="1" spc="200" kern="0" dirty="0">
                 <a:solidFill>
                   <a:srgbClr val="5B5F66"/>
                 </a:solidFill>
@@ -4554,19 +4494,19 @@
               </a:rPr>
               <a:t>INDUSTRIES, INC.</a:t>
             </a:r>
-            <a:endParaRPr lang="en-US" sz="750" dirty="0"/>
-          </a:p>
-        </p:txBody>
-      </p:sp>
-      <p:sp>
-        <p:nvSpPr>
-          <p:cNvPr id="6" name="Text 3"/>
-          <p:cNvSpPr txBox="1"/>
-          <p:nvPr/>
-        </p:nvSpPr>
-        <p:spPr>
-          <a:xfrm>
-            <a:off x="457200" y="777240"/>
+            <a:endParaRPr lang="en-US" sz="1100" dirty="0"/>
+          </a:p>
+        </p:txBody>
+      </p:sp>
+      <p:sp>
+        <p:nvSpPr>
+          <p:cNvPr id="6" name="Text 2"/>
+          <p:cNvSpPr txBox="1"/>
+          <p:nvPr/>
+        </p:nvSpPr>
+        <p:spPr>
+          <a:xfrm>
+            <a:off x="457200" y="1005840"/>
             <a:ext cx="9144000" cy="320040"/>
           </a:xfrm>
           <a:prstGeom prst="rect">
@@ -4599,13 +4539,13 @@
       </p:sp>
       <p:sp>
         <p:nvSpPr>
-          <p:cNvPr id="7" name="Text 4"/>
-          <p:cNvSpPr txBox="1"/>
-          <p:nvPr/>
-        </p:nvSpPr>
-        <p:spPr>
-          <a:xfrm>
-            <a:off x="457200" y="1097280"/>
+          <p:cNvPr id="7" name="Text 3"/>
+          <p:cNvSpPr txBox="1"/>
+          <p:nvPr/>
+        </p:nvSpPr>
+        <p:spPr>
+          <a:xfrm>
+            <a:off x="457200" y="1325880"/>
             <a:ext cx="11274552" cy="914400"/>
           </a:xfrm>
           <a:prstGeom prst="rect">
@@ -4641,13 +4581,13 @@
       </p:sp>
       <p:sp>
         <p:nvSpPr>
-          <p:cNvPr id="8" name="Text 5"/>
-          <p:cNvSpPr txBox="1"/>
-          <p:nvPr/>
-        </p:nvSpPr>
-        <p:spPr>
-          <a:xfrm>
-            <a:off x="457200" y="1956816"/>
+          <p:cNvPr id="8" name="Text 4"/>
+          <p:cNvSpPr txBox="1"/>
+          <p:nvPr/>
+        </p:nvSpPr>
+        <p:spPr>
+          <a:xfrm>
+            <a:off x="457200" y="2231136"/>
             <a:ext cx="4937760" cy="274320"/>
           </a:xfrm>
           <a:prstGeom prst="rect">
@@ -4680,14 +4620,14 @@
       </p:sp>
       <p:sp>
         <p:nvSpPr>
-          <p:cNvPr id="9" name="Shape 6"/>
+          <p:cNvPr id="9" name="Shape 5"/>
           <p:cNvSpPr/>
           <p:nvPr/>
         </p:nvSpPr>
         <p:spPr>
           <a:xfrm>
-            <a:off x="457200" y="2286000"/>
-            <a:ext cx="4937760" cy="3063240"/>
+            <a:off x="457200" y="2560320"/>
+            <a:ext cx="4937760" cy="2788920"/>
           </a:xfrm>
           <a:prstGeom prst="rect">
             <a:avLst/>
@@ -4700,14 +4640,14 @@
       </p:sp>
       <p:sp>
         <p:nvSpPr>
-          <p:cNvPr id="10" name="Shape 7"/>
+          <p:cNvPr id="10" name="Shape 6"/>
           <p:cNvSpPr/>
           <p:nvPr/>
         </p:nvSpPr>
         <p:spPr>
           <a:xfrm>
-            <a:off x="457200" y="2286000"/>
-            <a:ext cx="490118" cy="41148"/>
+            <a:off x="457200" y="2560320"/>
+            <a:ext cx="446227" cy="41148"/>
           </a:xfrm>
           <a:prstGeom prst="rect">
             <a:avLst/>
@@ -4720,14 +4660,14 @@
       </p:sp>
       <p:sp>
         <p:nvSpPr>
-          <p:cNvPr id="11" name="Shape 8"/>
+          <p:cNvPr id="11" name="Shape 7"/>
           <p:cNvSpPr/>
           <p:nvPr/>
         </p:nvSpPr>
         <p:spPr>
           <a:xfrm>
-            <a:off x="457200" y="2286000"/>
-            <a:ext cx="41148" cy="490118"/>
+            <a:off x="457200" y="2560320"/>
+            <a:ext cx="41148" cy="446227"/>
           </a:xfrm>
           <a:prstGeom prst="rect">
             <a:avLst/>
@@ -4740,13 +4680,13 @@
       </p:sp>
       <p:sp>
         <p:nvSpPr>
-          <p:cNvPr id="12" name="Shape 9"/>
+          <p:cNvPr id="12" name="Shape 8"/>
           <p:cNvSpPr/>
           <p:nvPr/>
         </p:nvSpPr>
         <p:spPr>
           <a:xfrm>
-            <a:off x="2148840" y="3040380"/>
+            <a:off x="2148840" y="3177540"/>
             <a:ext cx="274320" cy="274320"/>
           </a:xfrm>
           <a:prstGeom prst="ellipse">
@@ -4760,13 +4700,13 @@
       </p:sp>
       <p:sp>
         <p:nvSpPr>
-          <p:cNvPr id="13" name="Shape 10"/>
+          <p:cNvPr id="13" name="Shape 9"/>
           <p:cNvSpPr/>
           <p:nvPr/>
         </p:nvSpPr>
         <p:spPr>
           <a:xfrm>
-            <a:off x="2240280" y="3360420"/>
+            <a:off x="2240280" y="3497580"/>
             <a:ext cx="1005840" cy="685800"/>
           </a:xfrm>
           <a:prstGeom prst="triangle">
@@ -4780,13 +4720,13 @@
       </p:sp>
       <p:sp>
         <p:nvSpPr>
-          <p:cNvPr id="14" name="Shape 11"/>
+          <p:cNvPr id="14" name="Shape 10"/>
           <p:cNvSpPr/>
           <p:nvPr/>
         </p:nvSpPr>
         <p:spPr>
           <a:xfrm>
-            <a:off x="2788920" y="3177540"/>
+            <a:off x="2788920" y="3314700"/>
             <a:ext cx="868680" cy="868680"/>
           </a:xfrm>
           <a:prstGeom prst="triangle">
@@ -4800,13 +4740,13 @@
       </p:sp>
       <p:sp>
         <p:nvSpPr>
-          <p:cNvPr id="15" name="Text 12"/>
-          <p:cNvSpPr txBox="1"/>
-          <p:nvPr/>
-        </p:nvSpPr>
-        <p:spPr>
-          <a:xfrm>
-            <a:off x="640080" y="4000500"/>
+          <p:cNvPr id="15" name="Text 11"/>
+          <p:cNvSpPr txBox="1"/>
+          <p:nvPr/>
+        </p:nvSpPr>
+        <p:spPr>
+          <a:xfrm>
+            <a:off x="640080" y="4137660"/>
             <a:ext cx="4572000" cy="274320"/>
           </a:xfrm>
           <a:prstGeom prst="rect">
@@ -4839,13 +4779,13 @@
       </p:sp>
       <p:sp>
         <p:nvSpPr>
-          <p:cNvPr id="16" name="Text 13"/>
-          <p:cNvSpPr txBox="1"/>
-          <p:nvPr/>
-        </p:nvSpPr>
-        <p:spPr>
-          <a:xfrm>
-            <a:off x="731520" y="4293108"/>
+          <p:cNvPr id="16" name="Text 12"/>
+          <p:cNvSpPr txBox="1"/>
+          <p:nvPr/>
+        </p:nvSpPr>
+        <p:spPr>
+          <a:xfrm>
+            <a:off x="731520" y="4430268"/>
             <a:ext cx="4389120" cy="548640"/>
           </a:xfrm>
           <a:prstGeom prst="rect">
@@ -4881,13 +4821,13 @@
       </p:sp>
       <p:sp>
         <p:nvSpPr>
-          <p:cNvPr id="17" name="Text 14"/>
-          <p:cNvSpPr txBox="1"/>
-          <p:nvPr/>
-        </p:nvSpPr>
-        <p:spPr>
-          <a:xfrm>
-            <a:off x="5559552" y="1956816"/>
+          <p:cNvPr id="17" name="Text 13"/>
+          <p:cNvSpPr txBox="1"/>
+          <p:nvPr/>
+        </p:nvSpPr>
+        <p:spPr>
+          <a:xfrm>
+            <a:off x="5559552" y="2231136"/>
             <a:ext cx="3003804" cy="274320"/>
           </a:xfrm>
           <a:prstGeom prst="rect">
@@ -4920,14 +4860,14 @@
       </p:sp>
       <p:sp>
         <p:nvSpPr>
-          <p:cNvPr id="18" name="Shape 15"/>
+          <p:cNvPr id="18" name="Shape 14"/>
           <p:cNvSpPr/>
           <p:nvPr/>
         </p:nvSpPr>
         <p:spPr>
           <a:xfrm>
-            <a:off x="5559552" y="2286000"/>
-            <a:ext cx="3003804" cy="3063240"/>
+            <a:off x="5559552" y="2560320"/>
+            <a:ext cx="3003804" cy="2788920"/>
           </a:xfrm>
           <a:prstGeom prst="rect">
             <a:avLst/>
@@ -4940,14 +4880,14 @@
       </p:sp>
       <p:sp>
         <p:nvSpPr>
-          <p:cNvPr id="19" name="Shape 16"/>
+          <p:cNvPr id="19" name="Shape 15"/>
           <p:cNvSpPr/>
           <p:nvPr/>
         </p:nvSpPr>
         <p:spPr>
           <a:xfrm>
-            <a:off x="5559552" y="2286000"/>
-            <a:ext cx="480609" cy="41148"/>
+            <a:off x="5559552" y="2560320"/>
+            <a:ext cx="446227" cy="41148"/>
           </a:xfrm>
           <a:prstGeom prst="rect">
             <a:avLst/>
@@ -4960,14 +4900,14 @@
       </p:sp>
       <p:sp>
         <p:nvSpPr>
-          <p:cNvPr id="20" name="Shape 17"/>
+          <p:cNvPr id="20" name="Shape 16"/>
           <p:cNvSpPr/>
           <p:nvPr/>
         </p:nvSpPr>
         <p:spPr>
           <a:xfrm>
-            <a:off x="5559552" y="2286000"/>
-            <a:ext cx="41148" cy="480609"/>
+            <a:off x="5559552" y="2560320"/>
+            <a:ext cx="41148" cy="446227"/>
           </a:xfrm>
           <a:prstGeom prst="rect">
             <a:avLst/>
@@ -4980,13 +4920,13 @@
       </p:sp>
       <p:sp>
         <p:nvSpPr>
-          <p:cNvPr id="21" name="Shape 18"/>
+          <p:cNvPr id="21" name="Shape 17"/>
           <p:cNvSpPr/>
           <p:nvPr/>
         </p:nvSpPr>
         <p:spPr>
           <a:xfrm>
-            <a:off x="6284214" y="3040380"/>
+            <a:off x="6284214" y="3177540"/>
             <a:ext cx="274320" cy="274320"/>
           </a:xfrm>
           <a:prstGeom prst="ellipse">
@@ -5000,13 +4940,13 @@
       </p:sp>
       <p:sp>
         <p:nvSpPr>
-          <p:cNvPr id="22" name="Shape 19"/>
+          <p:cNvPr id="22" name="Shape 18"/>
           <p:cNvSpPr/>
           <p:nvPr/>
         </p:nvSpPr>
         <p:spPr>
           <a:xfrm>
-            <a:off x="6375654" y="3360420"/>
+            <a:off x="6375654" y="3497580"/>
             <a:ext cx="1005840" cy="685800"/>
           </a:xfrm>
           <a:prstGeom prst="triangle">
@@ -5020,13 +4960,13 @@
       </p:sp>
       <p:sp>
         <p:nvSpPr>
-          <p:cNvPr id="23" name="Shape 20"/>
+          <p:cNvPr id="23" name="Shape 19"/>
           <p:cNvSpPr/>
           <p:nvPr/>
         </p:nvSpPr>
         <p:spPr>
           <a:xfrm>
-            <a:off x="6924294" y="3177540"/>
+            <a:off x="6924294" y="3314700"/>
             <a:ext cx="868680" cy="868680"/>
           </a:xfrm>
           <a:prstGeom prst="triangle">
@@ -5040,13 +4980,13 @@
       </p:sp>
       <p:sp>
         <p:nvSpPr>
-          <p:cNvPr id="24" name="Text 21"/>
-          <p:cNvSpPr txBox="1"/>
-          <p:nvPr/>
-        </p:nvSpPr>
-        <p:spPr>
-          <a:xfrm>
-            <a:off x="5742432" y="4000500"/>
+          <p:cNvPr id="24" name="Text 20"/>
+          <p:cNvSpPr txBox="1"/>
+          <p:nvPr/>
+        </p:nvSpPr>
+        <p:spPr>
+          <a:xfrm>
+            <a:off x="5742432" y="4137660"/>
             <a:ext cx="2638044" cy="274320"/>
           </a:xfrm>
           <a:prstGeom prst="rect">
@@ -5079,13 +5019,13 @@
       </p:sp>
       <p:sp>
         <p:nvSpPr>
-          <p:cNvPr id="25" name="Text 22"/>
-          <p:cNvSpPr txBox="1"/>
-          <p:nvPr/>
-        </p:nvSpPr>
-        <p:spPr>
-          <a:xfrm>
-            <a:off x="5833872" y="4293108"/>
+          <p:cNvPr id="25" name="Text 21"/>
+          <p:cNvSpPr txBox="1"/>
+          <p:nvPr/>
+        </p:nvSpPr>
+        <p:spPr>
+          <a:xfrm>
+            <a:off x="5833872" y="4430268"/>
             <a:ext cx="2455164" cy="548640"/>
           </a:xfrm>
           <a:prstGeom prst="rect">
@@ -5121,13 +5061,13 @@
       </p:sp>
       <p:sp>
         <p:nvSpPr>
-          <p:cNvPr id="26" name="Text 23"/>
-          <p:cNvSpPr txBox="1"/>
-          <p:nvPr/>
-        </p:nvSpPr>
-        <p:spPr>
-          <a:xfrm>
-            <a:off x="8727948" y="1956816"/>
+          <p:cNvPr id="26" name="Text 22"/>
+          <p:cNvSpPr txBox="1"/>
+          <p:nvPr/>
+        </p:nvSpPr>
+        <p:spPr>
+          <a:xfrm>
+            <a:off x="8727948" y="2231136"/>
             <a:ext cx="3003804" cy="274320"/>
           </a:xfrm>
           <a:prstGeom prst="rect">
@@ -5160,14 +5100,14 @@
       </p:sp>
       <p:sp>
         <p:nvSpPr>
-          <p:cNvPr id="27" name="Shape 24"/>
+          <p:cNvPr id="27" name="Shape 23"/>
           <p:cNvSpPr/>
           <p:nvPr/>
         </p:nvSpPr>
         <p:spPr>
           <a:xfrm>
-            <a:off x="8727948" y="2286000"/>
-            <a:ext cx="3003804" cy="3063240"/>
+            <a:off x="8727948" y="2560320"/>
+            <a:ext cx="3003804" cy="2788920"/>
           </a:xfrm>
           <a:prstGeom prst="rect">
             <a:avLst/>
@@ -5180,14 +5120,14 @@
       </p:sp>
       <p:sp>
         <p:nvSpPr>
-          <p:cNvPr id="28" name="Shape 25"/>
+          <p:cNvPr id="28" name="Shape 24"/>
           <p:cNvSpPr/>
           <p:nvPr/>
         </p:nvSpPr>
         <p:spPr>
           <a:xfrm>
-            <a:off x="8727948" y="2286000"/>
-            <a:ext cx="480609" cy="41148"/>
+            <a:off x="8727948" y="2560320"/>
+            <a:ext cx="446227" cy="41148"/>
           </a:xfrm>
           <a:prstGeom prst="rect">
             <a:avLst/>
@@ -5200,14 +5140,14 @@
       </p:sp>
       <p:sp>
         <p:nvSpPr>
-          <p:cNvPr id="29" name="Shape 26"/>
+          <p:cNvPr id="29" name="Shape 25"/>
           <p:cNvSpPr/>
           <p:nvPr/>
         </p:nvSpPr>
         <p:spPr>
           <a:xfrm>
-            <a:off x="8727948" y="2286000"/>
-            <a:ext cx="41148" cy="480609"/>
+            <a:off x="8727948" y="2560320"/>
+            <a:ext cx="41148" cy="446227"/>
           </a:xfrm>
           <a:prstGeom prst="rect">
             <a:avLst/>
@@ -5220,13 +5160,13 @@
       </p:sp>
       <p:sp>
         <p:nvSpPr>
-          <p:cNvPr id="30" name="Shape 27"/>
+          <p:cNvPr id="30" name="Shape 26"/>
           <p:cNvSpPr/>
           <p:nvPr/>
         </p:nvSpPr>
         <p:spPr>
           <a:xfrm>
-            <a:off x="9452610" y="3040380"/>
+            <a:off x="9452610" y="3177540"/>
             <a:ext cx="274320" cy="274320"/>
           </a:xfrm>
           <a:prstGeom prst="ellipse">
@@ -5240,13 +5180,13 @@
       </p:sp>
       <p:sp>
         <p:nvSpPr>
-          <p:cNvPr id="31" name="Shape 28"/>
+          <p:cNvPr id="31" name="Shape 27"/>
           <p:cNvSpPr/>
           <p:nvPr/>
         </p:nvSpPr>
         <p:spPr>
           <a:xfrm>
-            <a:off x="9544050" y="3360420"/>
+            <a:off x="9544050" y="3497580"/>
             <a:ext cx="1005840" cy="685800"/>
           </a:xfrm>
           <a:prstGeom prst="triangle">
@@ -5260,13 +5200,13 @@
       </p:sp>
       <p:sp>
         <p:nvSpPr>
-          <p:cNvPr id="32" name="Shape 29"/>
+          <p:cNvPr id="32" name="Shape 28"/>
           <p:cNvSpPr/>
           <p:nvPr/>
         </p:nvSpPr>
         <p:spPr>
           <a:xfrm>
-            <a:off x="10092690" y="3177540"/>
+            <a:off x="10092690" y="3314700"/>
             <a:ext cx="868680" cy="868680"/>
           </a:xfrm>
           <a:prstGeom prst="triangle">
@@ -5280,13 +5220,13 @@
       </p:sp>
       <p:sp>
         <p:nvSpPr>
-          <p:cNvPr id="33" name="Text 30"/>
-          <p:cNvSpPr txBox="1"/>
-          <p:nvPr/>
-        </p:nvSpPr>
-        <p:spPr>
-          <a:xfrm>
-            <a:off x="8910828" y="4000500"/>
+          <p:cNvPr id="33" name="Text 29"/>
+          <p:cNvSpPr txBox="1"/>
+          <p:nvPr/>
+        </p:nvSpPr>
+        <p:spPr>
+          <a:xfrm>
+            <a:off x="8910828" y="4137660"/>
             <a:ext cx="2638044" cy="274320"/>
           </a:xfrm>
           <a:prstGeom prst="rect">
@@ -5319,13 +5259,13 @@
       </p:sp>
       <p:sp>
         <p:nvSpPr>
-          <p:cNvPr id="34" name="Text 31"/>
-          <p:cNvSpPr txBox="1"/>
-          <p:nvPr/>
-        </p:nvSpPr>
-        <p:spPr>
-          <a:xfrm>
-            <a:off x="9002268" y="4293108"/>
+          <p:cNvPr id="34" name="Text 30"/>
+          <p:cNvSpPr txBox="1"/>
+          <p:nvPr/>
+        </p:nvSpPr>
+        <p:spPr>
+          <a:xfrm>
+            <a:off x="9002268" y="4430268"/>
             <a:ext cx="2455164" cy="548640"/>
           </a:xfrm>
           <a:prstGeom prst="rect">
@@ -5361,7 +5301,7 @@
       </p:sp>
       <p:sp>
         <p:nvSpPr>
-          <p:cNvPr id="35" name="Text 32"/>
+          <p:cNvPr id="35" name="Text 31"/>
           <p:cNvSpPr txBox="1"/>
           <p:nvPr/>
         </p:nvSpPr>
@@ -5400,7 +5340,7 @@
       </p:sp>
       <p:sp>
         <p:nvSpPr>
-          <p:cNvPr id="36" name="Shape 33"/>
+          <p:cNvPr id="36" name="Shape 32"/>
           <p:cNvSpPr/>
           <p:nvPr/>
         </p:nvSpPr>
@@ -5424,7 +5364,7 @@
       </p:sp>
       <p:sp>
         <p:nvSpPr>
-          <p:cNvPr id="37" name="Text 34"/>
+          <p:cNvPr id="37" name="Text 33"/>
           <p:cNvSpPr txBox="1"/>
           <p:nvPr/>
         </p:nvSpPr>
@@ -5477,7 +5417,7 @@
       </p:sp>
       <p:sp>
         <p:nvSpPr>
-          <p:cNvPr id="38" name="Text 35"/>
+          <p:cNvPr id="38" name="Text 34"/>
           <p:cNvSpPr txBox="1"/>
           <p:nvPr/>
         </p:nvSpPr>
@@ -5546,48 +5486,9 @@
           <a:chExt cx="0" cy="0"/>
         </a:xfrm>
       </p:grpSpPr>
-      <p:sp>
-        <p:nvSpPr>
-          <p:cNvPr id="2" name="Text 0"/>
-          <p:cNvSpPr txBox="1"/>
-          <p:nvPr/>
-        </p:nvSpPr>
-        <p:spPr>
-          <a:xfrm>
-            <a:off x="6949440" y="0"/>
-            <a:ext cx="5486400" cy="6858000"/>
-          </a:xfrm>
-          <a:prstGeom prst="rect">
-            <a:avLst/>
-          </a:prstGeom>
-          <a:noFill/>
-          <a:ln/>
-        </p:spPr>
-        <p:txBody>
-          <a:bodyPr wrap="square" lIns="0" tIns="0" rIns="0" bIns="0" rtlCol="0" anchor="t"/>
-          <a:lstStyle/>
-          <a:p>
-            <a:pPr algn="r" indent="0" marL="0">
-              <a:buNone/>
-            </a:pPr>
-            <a:r>
-              <a:rPr lang="en-US" sz="36000" b="1" dirty="0">
-                <a:solidFill>
-                  <a:srgbClr val="141414"/>
-                </a:solidFill>
-                <a:latin typeface="Cambria" pitchFamily="34" charset="0"/>
-                <a:ea typeface="Cambria" pitchFamily="34" charset="-122"/>
-                <a:cs typeface="Cambria" pitchFamily="34" charset="-120"/>
-              </a:rPr>
-              <a:t>05</a:t>
-            </a:r>
-            <a:endParaRPr lang="en-US" sz="36000" dirty="0"/>
-          </a:p>
-        </p:txBody>
-      </p:sp>
       <p:pic>
         <p:nvPicPr>
-          <p:cNvPr id="3" name="Image 0" descr="/home/user/valletta-design-system/assets/logo/valletta-mark.png">    </p:cNvPr>
+          <p:cNvPr id="2" name="Image 0" descr="/home/user/valletta-design-system/assets/logo/valletta-mark-ghost.png">    </p:cNvPr>
           <p:cNvPicPr>
             <a:picLocks noChangeAspect="1"/>
           </p:cNvPicPr>
@@ -5601,212 +5502,17 @@
         </p:blipFill>
         <p:spPr>
           <a:xfrm>
-            <a:off x="457200" y="365760"/>
-            <a:ext cx="365760" cy="389284"/>
+            <a:off x="7891272" y="502920"/>
+            <a:ext cx="5486400" cy="5839260"/>
           </a:xfrm>
           <a:prstGeom prst="rect">
             <a:avLst/>
           </a:prstGeom>
         </p:spPr>
       </p:pic>
-      <p:sp>
-        <p:nvSpPr>
-          <p:cNvPr id="4" name="Text 1"/>
-          <p:cNvSpPr txBox="1"/>
-          <p:nvPr/>
-        </p:nvSpPr>
-        <p:spPr>
-          <a:xfrm>
-            <a:off x="932688" y="329184"/>
-            <a:ext cx="2926080" cy="274320"/>
-          </a:xfrm>
-          <a:prstGeom prst="rect">
-            <a:avLst/>
-          </a:prstGeom>
-          <a:noFill/>
-          <a:ln/>
-        </p:spPr>
-        <p:txBody>
-          <a:bodyPr wrap="square" lIns="0" tIns="0" rIns="0" bIns="0" rtlCol="0" anchor="ctr"/>
-          <a:lstStyle/>
-          <a:p>
-            <a:pPr indent="0" marL="0">
-              <a:buNone/>
-            </a:pPr>
-            <a:r>
-              <a:rPr lang="en-US" sz="1500" spc="200" kern="0" dirty="0">
-                <a:solidFill>
-                  <a:srgbClr val="FFFFFF"/>
-                </a:solidFill>
-                <a:latin typeface="Cambria" pitchFamily="34" charset="0"/>
-                <a:ea typeface="Cambria" pitchFamily="34" charset="-122"/>
-                <a:cs typeface="Cambria" pitchFamily="34" charset="-120"/>
-              </a:rPr>
-              <a:t>VALLETTA</a:t>
-            </a:r>
-            <a:endParaRPr lang="en-US" sz="1500" dirty="0"/>
-          </a:p>
-        </p:txBody>
-      </p:sp>
-      <p:sp>
-        <p:nvSpPr>
-          <p:cNvPr id="5" name="Text 2"/>
-          <p:cNvSpPr txBox="1"/>
-          <p:nvPr/>
-        </p:nvSpPr>
-        <p:spPr>
-          <a:xfrm>
-            <a:off x="932688" y="594360"/>
-            <a:ext cx="2926080" cy="219456"/>
-          </a:xfrm>
-          <a:prstGeom prst="rect">
-            <a:avLst/>
-          </a:prstGeom>
-          <a:noFill/>
-          <a:ln/>
-        </p:spPr>
-        <p:txBody>
-          <a:bodyPr wrap="square" lIns="0" tIns="0" rIns="0" bIns="0" rtlCol="0" anchor="ctr"/>
-          <a:lstStyle/>
-          <a:p>
-            <a:pPr indent="0" marL="0">
-              <a:buNone/>
-            </a:pPr>
-            <a:r>
-              <a:rPr lang="en-US" sz="750" b="1" spc="200" kern="0" dirty="0">
-                <a:solidFill>
-                  <a:srgbClr val="5B5F66"/>
-                </a:solidFill>
-                <a:latin typeface="Arial" pitchFamily="34" charset="0"/>
-                <a:ea typeface="Arial" pitchFamily="34" charset="-122"/>
-                <a:cs typeface="Arial" pitchFamily="34" charset="-120"/>
-              </a:rPr>
-              <a:t>INDUSTRIES, INC.</a:t>
-            </a:r>
-            <a:endParaRPr lang="en-US" sz="750" dirty="0"/>
-          </a:p>
-        </p:txBody>
-      </p:sp>
-      <p:sp>
-        <p:nvSpPr>
-          <p:cNvPr id="6" name="Text 3"/>
-          <p:cNvSpPr txBox="1"/>
-          <p:nvPr/>
-        </p:nvSpPr>
-        <p:spPr>
-          <a:xfrm>
-            <a:off x="457200" y="777240"/>
-            <a:ext cx="7315200" cy="320040"/>
-          </a:xfrm>
-          <a:prstGeom prst="rect">
-            <a:avLst/>
-          </a:prstGeom>
-          <a:noFill/>
-          <a:ln/>
-        </p:spPr>
-        <p:txBody>
-          <a:bodyPr wrap="square" lIns="0" tIns="0" rIns="0" bIns="0" rtlCol="0" anchor="ctr"/>
-          <a:lstStyle/>
-          <a:p>
-            <a:pPr algn="l" indent="0" marL="0">
-              <a:buNone/>
-            </a:pPr>
-            <a:r>
-              <a:rPr lang="en-US" sz="1100" b="1" spc="150" kern="0" dirty="0">
-                <a:solidFill>
-                  <a:srgbClr val="FF002B"/>
-                </a:solidFill>
-                <a:latin typeface="Arial" pitchFamily="34" charset="0"/>
-                <a:ea typeface="Arial" pitchFamily="34" charset="-122"/>
-                <a:cs typeface="Arial" pitchFamily="34" charset="-120"/>
-              </a:rPr>
-              <a:t>FEATURED CAPABILITY</a:t>
-            </a:r>
-            <a:endParaRPr lang="en-US" sz="1100" dirty="0"/>
-          </a:p>
-        </p:txBody>
-      </p:sp>
-      <p:sp>
-        <p:nvSpPr>
-          <p:cNvPr id="7" name="Text 4"/>
-          <p:cNvSpPr txBox="1"/>
-          <p:nvPr/>
-        </p:nvSpPr>
-        <p:spPr>
-          <a:xfrm>
-            <a:off x="457200" y="1097280"/>
-            <a:ext cx="7315200" cy="731520"/>
-          </a:xfrm>
-          <a:prstGeom prst="rect">
-            <a:avLst/>
-          </a:prstGeom>
-          <a:noFill/>
-          <a:ln/>
-        </p:spPr>
-        <p:txBody>
-          <a:bodyPr wrap="square" lIns="0" tIns="0" rIns="0" bIns="0" rtlCol="0" anchor="ctr"/>
-          <a:lstStyle/>
-          <a:p>
-            <a:pPr indent="0" marL="0">
-              <a:buNone/>
-            </a:pPr>
-            <a:r>
-              <a:rPr lang="en-US" sz="3800" b="1" dirty="0">
-                <a:solidFill>
-                  <a:srgbClr val="FFFFFF"/>
-                </a:solidFill>
-                <a:latin typeface="Cambria" pitchFamily="34" charset="0"/>
-                <a:ea typeface="Cambria" pitchFamily="34" charset="-122"/>
-                <a:cs typeface="Cambria" pitchFamily="34" charset="-120"/>
-              </a:rPr>
-              <a:t>MISSION PROTECT</a:t>
-            </a:r>
-            <a:endParaRPr lang="en-US" sz="3800" dirty="0"/>
-          </a:p>
-        </p:txBody>
-      </p:sp>
-      <p:sp>
-        <p:nvSpPr>
-          <p:cNvPr id="8" name="Text 5"/>
-          <p:cNvSpPr txBox="1"/>
-          <p:nvPr/>
-        </p:nvSpPr>
-        <p:spPr>
-          <a:xfrm>
-            <a:off x="457200" y="1828800"/>
-            <a:ext cx="7315200" cy="320040"/>
-          </a:xfrm>
-          <a:prstGeom prst="rect">
-            <a:avLst/>
-          </a:prstGeom>
-          <a:noFill/>
-          <a:ln/>
-        </p:spPr>
-        <p:txBody>
-          <a:bodyPr wrap="square" lIns="0" tIns="0" rIns="0" bIns="0" rtlCol="0" anchor="ctr"/>
-          <a:lstStyle/>
-          <a:p>
-            <a:pPr indent="0" marL="0">
-              <a:buNone/>
-            </a:pPr>
-            <a:r>
-              <a:rPr lang="en-US" sz="1300" b="1" spc="150" kern="0" dirty="0">
-                <a:solidFill>
-                  <a:srgbClr val="FF002B"/>
-                </a:solidFill>
-                <a:latin typeface="Arial" pitchFamily="34" charset="0"/>
-                <a:ea typeface="Arial" pitchFamily="34" charset="-122"/>
-                <a:cs typeface="Arial" pitchFamily="34" charset="-120"/>
-              </a:rPr>
-              <a:t>A DOI-OWNED DIGITAL TRAINING PATHWAY</a:t>
-            </a:r>
-            <a:endParaRPr lang="en-US" sz="1300" dirty="0"/>
-          </a:p>
-        </p:txBody>
-      </p:sp>
       <p:pic>
         <p:nvPicPr>
-          <p:cNvPr id="9" name="Image 1" descr="/home/user/valletta-design-system/assets/mission-protect/mp-course-detail.png">    </p:cNvPr>
+          <p:cNvPr id="3" name="Image 1" descr="/home/user/valletta-design-system/assets/logo/valletta-mark.png">    </p:cNvPr>
           <p:cNvPicPr>
             <a:picLocks noChangeAspect="1"/>
           </p:cNvPicPr>
@@ -5820,6 +5526,225 @@
         </p:blipFill>
         <p:spPr>
           <a:xfrm>
+            <a:off x="457200" y="365760"/>
+            <a:ext cx="548640" cy="583926"/>
+          </a:xfrm>
+          <a:prstGeom prst="rect">
+            <a:avLst/>
+          </a:prstGeom>
+        </p:spPr>
+      </p:pic>
+      <p:sp>
+        <p:nvSpPr>
+          <p:cNvPr id="4" name="Text 0"/>
+          <p:cNvSpPr txBox="1"/>
+          <p:nvPr/>
+        </p:nvSpPr>
+        <p:spPr>
+          <a:xfrm>
+            <a:off x="1170432" y="347472"/>
+            <a:ext cx="3291840" cy="402336"/>
+          </a:xfrm>
+          <a:prstGeom prst="rect">
+            <a:avLst/>
+          </a:prstGeom>
+          <a:noFill/>
+          <a:ln/>
+        </p:spPr>
+        <p:txBody>
+          <a:bodyPr wrap="square" lIns="0" tIns="0" rIns="0" bIns="0" rtlCol="0" anchor="ctr"/>
+          <a:lstStyle/>
+          <a:p>
+            <a:pPr indent="0" marL="0">
+              <a:buNone/>
+            </a:pPr>
+            <a:r>
+              <a:rPr lang="en-US" sz="2200" spc="200" kern="0" dirty="0">
+                <a:solidFill>
+                  <a:srgbClr val="FFFFFF"/>
+                </a:solidFill>
+                <a:latin typeface="Cambria" pitchFamily="34" charset="0"/>
+                <a:ea typeface="Cambria" pitchFamily="34" charset="-122"/>
+                <a:cs typeface="Cambria" pitchFamily="34" charset="-120"/>
+              </a:rPr>
+              <a:t>VALLETTA</a:t>
+            </a:r>
+            <a:endParaRPr lang="en-US" sz="2200" dirty="0"/>
+          </a:p>
+        </p:txBody>
+      </p:sp>
+      <p:sp>
+        <p:nvSpPr>
+          <p:cNvPr id="5" name="Text 1"/>
+          <p:cNvSpPr txBox="1"/>
+          <p:nvPr/>
+        </p:nvSpPr>
+        <p:spPr>
+          <a:xfrm>
+            <a:off x="1170432" y="731520"/>
+            <a:ext cx="3291840" cy="274320"/>
+          </a:xfrm>
+          <a:prstGeom prst="rect">
+            <a:avLst/>
+          </a:prstGeom>
+          <a:noFill/>
+          <a:ln/>
+        </p:spPr>
+        <p:txBody>
+          <a:bodyPr wrap="square" lIns="0" tIns="0" rIns="0" bIns="0" rtlCol="0" anchor="ctr"/>
+          <a:lstStyle/>
+          <a:p>
+            <a:pPr indent="0" marL="0">
+              <a:buNone/>
+            </a:pPr>
+            <a:r>
+              <a:rPr lang="en-US" sz="1100" b="1" spc="200" kern="0" dirty="0">
+                <a:solidFill>
+                  <a:srgbClr val="5B5F66"/>
+                </a:solidFill>
+                <a:latin typeface="Arial" pitchFamily="34" charset="0"/>
+                <a:ea typeface="Arial" pitchFamily="34" charset="-122"/>
+                <a:cs typeface="Arial" pitchFamily="34" charset="-120"/>
+              </a:rPr>
+              <a:t>INDUSTRIES, INC.</a:t>
+            </a:r>
+            <a:endParaRPr lang="en-US" sz="1100" dirty="0"/>
+          </a:p>
+        </p:txBody>
+      </p:sp>
+      <p:sp>
+        <p:nvSpPr>
+          <p:cNvPr id="6" name="Text 2"/>
+          <p:cNvSpPr txBox="1"/>
+          <p:nvPr/>
+        </p:nvSpPr>
+        <p:spPr>
+          <a:xfrm>
+            <a:off x="457200" y="1005840"/>
+            <a:ext cx="7315200" cy="320040"/>
+          </a:xfrm>
+          <a:prstGeom prst="rect">
+            <a:avLst/>
+          </a:prstGeom>
+          <a:noFill/>
+          <a:ln/>
+        </p:spPr>
+        <p:txBody>
+          <a:bodyPr wrap="square" lIns="0" tIns="0" rIns="0" bIns="0" rtlCol="0" anchor="ctr"/>
+          <a:lstStyle/>
+          <a:p>
+            <a:pPr algn="l" indent="0" marL="0">
+              <a:buNone/>
+            </a:pPr>
+            <a:r>
+              <a:rPr lang="en-US" sz="1100" b="1" spc="150" kern="0" dirty="0">
+                <a:solidFill>
+                  <a:srgbClr val="FF002B"/>
+                </a:solidFill>
+                <a:latin typeface="Arial" pitchFamily="34" charset="0"/>
+                <a:ea typeface="Arial" pitchFamily="34" charset="-122"/>
+                <a:cs typeface="Arial" pitchFamily="34" charset="-120"/>
+              </a:rPr>
+              <a:t>FEATURED CAPABILITY</a:t>
+            </a:r>
+            <a:endParaRPr lang="en-US" sz="1100" dirty="0"/>
+          </a:p>
+        </p:txBody>
+      </p:sp>
+      <p:sp>
+        <p:nvSpPr>
+          <p:cNvPr id="7" name="Text 3"/>
+          <p:cNvSpPr txBox="1"/>
+          <p:nvPr/>
+        </p:nvSpPr>
+        <p:spPr>
+          <a:xfrm>
+            <a:off x="457200" y="1325880"/>
+            <a:ext cx="7315200" cy="731520"/>
+          </a:xfrm>
+          <a:prstGeom prst="rect">
+            <a:avLst/>
+          </a:prstGeom>
+          <a:noFill/>
+          <a:ln/>
+        </p:spPr>
+        <p:txBody>
+          <a:bodyPr wrap="square" lIns="0" tIns="0" rIns="0" bIns="0" rtlCol="0" anchor="ctr"/>
+          <a:lstStyle/>
+          <a:p>
+            <a:pPr indent="0" marL="0">
+              <a:buNone/>
+            </a:pPr>
+            <a:r>
+              <a:rPr lang="en-US" sz="3800" b="1" dirty="0">
+                <a:solidFill>
+                  <a:srgbClr val="FFFFFF"/>
+                </a:solidFill>
+                <a:latin typeface="Cambria" pitchFamily="34" charset="0"/>
+                <a:ea typeface="Cambria" pitchFamily="34" charset="-122"/>
+                <a:cs typeface="Cambria" pitchFamily="34" charset="-120"/>
+              </a:rPr>
+              <a:t>MISSION PROTECT</a:t>
+            </a:r>
+            <a:endParaRPr lang="en-US" sz="3800" dirty="0"/>
+          </a:p>
+        </p:txBody>
+      </p:sp>
+      <p:sp>
+        <p:nvSpPr>
+          <p:cNvPr id="8" name="Text 4"/>
+          <p:cNvSpPr txBox="1"/>
+          <p:nvPr/>
+        </p:nvSpPr>
+        <p:spPr>
+          <a:xfrm>
+            <a:off x="457200" y="2057400"/>
+            <a:ext cx="7315200" cy="320040"/>
+          </a:xfrm>
+          <a:prstGeom prst="rect">
+            <a:avLst/>
+          </a:prstGeom>
+          <a:noFill/>
+          <a:ln/>
+        </p:spPr>
+        <p:txBody>
+          <a:bodyPr wrap="square" lIns="0" tIns="0" rIns="0" bIns="0" rtlCol="0" anchor="ctr"/>
+          <a:lstStyle/>
+          <a:p>
+            <a:pPr indent="0" marL="0">
+              <a:buNone/>
+            </a:pPr>
+            <a:r>
+              <a:rPr lang="en-US" sz="1300" b="1" spc="150" kern="0" dirty="0">
+                <a:solidFill>
+                  <a:srgbClr val="FF002B"/>
+                </a:solidFill>
+                <a:latin typeface="Arial" pitchFamily="34" charset="0"/>
+                <a:ea typeface="Arial" pitchFamily="34" charset="-122"/>
+                <a:cs typeface="Arial" pitchFamily="34" charset="-120"/>
+              </a:rPr>
+              <a:t>A DOI-OWNED DIGITAL TRAINING PATHWAY</a:t>
+            </a:r>
+            <a:endParaRPr lang="en-US" sz="1300" dirty="0"/>
+          </a:p>
+        </p:txBody>
+      </p:sp>
+      <p:pic>
+        <p:nvPicPr>
+          <p:cNvPr id="9" name="Image 2" descr="/home/user/valletta-design-system/assets/mission-protect/mp-course-detail.png">    </p:cNvPr>
+          <p:cNvPicPr>
+            <a:picLocks noChangeAspect="1"/>
+          </p:cNvPicPr>
+          <p:nvPr/>
+        </p:nvPicPr>
+        <p:blipFill>
+          <a:blip r:embed="rId3"/>
+          <a:stretch>
+            <a:fillRect/>
+          </a:stretch>
+        </p:blipFill>
+        <p:spPr>
+          <a:xfrm>
             <a:off x="7909560" y="1234440"/>
             <a:ext cx="2862072" cy="4930330"/>
           </a:xfrm>
@@ -5837,7 +5762,7 @@
       </p:pic>
       <p:sp>
         <p:nvSpPr>
-          <p:cNvPr id="10" name="Shape 6"/>
+          <p:cNvPr id="10" name="Shape 5"/>
           <p:cNvSpPr/>
           <p:nvPr/>
         </p:nvSpPr>
@@ -5859,7 +5784,7 @@
       </p:sp>
       <p:sp>
         <p:nvSpPr>
-          <p:cNvPr id="11" name="Text 7"/>
+          <p:cNvPr id="11" name="Text 6"/>
           <p:cNvSpPr txBox="1"/>
           <p:nvPr/>
         </p:nvSpPr>
@@ -5898,7 +5823,7 @@
       </p:sp>
       <p:sp>
         <p:nvSpPr>
-          <p:cNvPr id="12" name="Shape 8"/>
+          <p:cNvPr id="12" name="Shape 7"/>
           <p:cNvSpPr/>
           <p:nvPr/>
         </p:nvSpPr>
@@ -5923,7 +5848,7 @@
       </p:sp>
       <p:sp>
         <p:nvSpPr>
-          <p:cNvPr id="13" name="Text 9"/>
+          <p:cNvPr id="13" name="Text 8"/>
           <p:cNvSpPr txBox="1"/>
           <p:nvPr/>
         </p:nvSpPr>
@@ -5962,14 +5887,14 @@
       </p:sp>
       <p:sp>
         <p:nvSpPr>
-          <p:cNvPr id="14" name="Text 10"/>
-          <p:cNvSpPr txBox="1"/>
-          <p:nvPr/>
-        </p:nvSpPr>
-        <p:spPr>
-          <a:xfrm>
-            <a:off x="457200" y="2331720"/>
-            <a:ext cx="5120640" cy="1417320"/>
+          <p:cNvPr id="14" name="Text 9"/>
+          <p:cNvSpPr txBox="1"/>
+          <p:nvPr/>
+        </p:nvSpPr>
+        <p:spPr>
+          <a:xfrm>
+            <a:off x="457200" y="2606040"/>
+            <a:ext cx="5120640" cy="1371600"/>
           </a:xfrm>
           <a:prstGeom prst="rect">
             <a:avLst/>
@@ -6004,13 +5929,13 @@
       </p:sp>
       <p:sp>
         <p:nvSpPr>
-          <p:cNvPr id="15" name="Text 11"/>
-          <p:cNvSpPr txBox="1"/>
-          <p:nvPr/>
-        </p:nvSpPr>
-        <p:spPr>
-          <a:xfrm>
-            <a:off x="457200" y="4069080"/>
+          <p:cNvPr id="15" name="Text 10"/>
+          <p:cNvSpPr txBox="1"/>
+          <p:nvPr/>
+        </p:nvSpPr>
+        <p:spPr>
+          <a:xfrm>
+            <a:off x="457200" y="4206240"/>
             <a:ext cx="5120640" cy="274320"/>
           </a:xfrm>
           <a:prstGeom prst="rect">
@@ -6043,13 +5968,13 @@
       </p:sp>
       <p:sp>
         <p:nvSpPr>
-          <p:cNvPr id="16" name="Text 12"/>
-          <p:cNvSpPr txBox="1"/>
-          <p:nvPr/>
-        </p:nvSpPr>
-        <p:spPr>
-          <a:xfrm>
-            <a:off x="457200" y="4325112"/>
+          <p:cNvPr id="16" name="Text 11"/>
+          <p:cNvSpPr txBox="1"/>
+          <p:nvPr/>
+        </p:nvSpPr>
+        <p:spPr>
+          <a:xfrm>
+            <a:off x="457200" y="4462272"/>
             <a:ext cx="5120640" cy="411480"/>
           </a:xfrm>
           <a:prstGeom prst="rect">
@@ -6085,13 +6010,13 @@
       </p:sp>
       <p:sp>
         <p:nvSpPr>
-          <p:cNvPr id="17" name="Shape 13"/>
+          <p:cNvPr id="17" name="Shape 12"/>
           <p:cNvSpPr/>
           <p:nvPr/>
         </p:nvSpPr>
         <p:spPr>
           <a:xfrm>
-            <a:off x="457200" y="4782312"/>
+            <a:off x="457200" y="4846320"/>
             <a:ext cx="5120640" cy="0"/>
           </a:xfrm>
           <a:prstGeom prst="line">
@@ -6108,13 +6033,13 @@
       </p:sp>
       <p:sp>
         <p:nvSpPr>
-          <p:cNvPr id="18" name="Text 14"/>
-          <p:cNvSpPr txBox="1"/>
-          <p:nvPr/>
-        </p:nvSpPr>
-        <p:spPr>
-          <a:xfrm>
-            <a:off x="457200" y="4873752"/>
+          <p:cNvPr id="18" name="Text 13"/>
+          <p:cNvSpPr txBox="1"/>
+          <p:nvPr/>
+        </p:nvSpPr>
+        <p:spPr>
+          <a:xfrm>
+            <a:off x="457200" y="4937760"/>
             <a:ext cx="5120640" cy="274320"/>
           </a:xfrm>
           <a:prstGeom prst="rect">
@@ -6147,13 +6072,13 @@
       </p:sp>
       <p:sp>
         <p:nvSpPr>
-          <p:cNvPr id="19" name="Text 15"/>
-          <p:cNvSpPr txBox="1"/>
-          <p:nvPr/>
-        </p:nvSpPr>
-        <p:spPr>
-          <a:xfrm>
-            <a:off x="457200" y="5129784"/>
+          <p:cNvPr id="19" name="Text 14"/>
+          <p:cNvSpPr txBox="1"/>
+          <p:nvPr/>
+        </p:nvSpPr>
+        <p:spPr>
+          <a:xfrm>
+            <a:off x="457200" y="5193792"/>
             <a:ext cx="5120640" cy="411480"/>
           </a:xfrm>
           <a:prstGeom prst="rect">
@@ -6189,13 +6114,13 @@
       </p:sp>
       <p:sp>
         <p:nvSpPr>
-          <p:cNvPr id="20" name="Shape 16"/>
+          <p:cNvPr id="20" name="Shape 15"/>
           <p:cNvSpPr/>
           <p:nvPr/>
         </p:nvSpPr>
         <p:spPr>
           <a:xfrm>
-            <a:off x="457200" y="5586984"/>
+            <a:off x="457200" y="5577840"/>
             <a:ext cx="5120640" cy="0"/>
           </a:xfrm>
           <a:prstGeom prst="line">
@@ -6212,13 +6137,13 @@
       </p:sp>
       <p:sp>
         <p:nvSpPr>
-          <p:cNvPr id="21" name="Text 17"/>
-          <p:cNvSpPr txBox="1"/>
-          <p:nvPr/>
-        </p:nvSpPr>
-        <p:spPr>
-          <a:xfrm>
-            <a:off x="457200" y="5678424"/>
+          <p:cNvPr id="21" name="Text 16"/>
+          <p:cNvSpPr txBox="1"/>
+          <p:nvPr/>
+        </p:nvSpPr>
+        <p:spPr>
+          <a:xfrm>
+            <a:off x="457200" y="5669280"/>
             <a:ext cx="5120640" cy="274320"/>
           </a:xfrm>
           <a:prstGeom prst="rect">
@@ -6251,13 +6176,13 @@
       </p:sp>
       <p:sp>
         <p:nvSpPr>
-          <p:cNvPr id="22" name="Text 18"/>
-          <p:cNvSpPr txBox="1"/>
-          <p:nvPr/>
-        </p:nvSpPr>
-        <p:spPr>
-          <a:xfrm>
-            <a:off x="457200" y="5934456"/>
+          <p:cNvPr id="22" name="Text 17"/>
+          <p:cNvSpPr txBox="1"/>
+          <p:nvPr/>
+        </p:nvSpPr>
+        <p:spPr>
+          <a:xfrm>
+            <a:off x="457200" y="5925312"/>
             <a:ext cx="5120640" cy="411480"/>
           </a:xfrm>
           <a:prstGeom prst="rect">
@@ -6293,7 +6218,7 @@
       </p:sp>
       <p:sp>
         <p:nvSpPr>
-          <p:cNvPr id="23" name="Text 19"/>
+          <p:cNvPr id="23" name="Text 18"/>
           <p:cNvSpPr txBox="1"/>
           <p:nvPr/>
         </p:nvSpPr>
@@ -6362,48 +6287,9 @@
           <a:chExt cx="0" cy="0"/>
         </a:xfrm>
       </p:grpSpPr>
-      <p:sp>
-        <p:nvSpPr>
-          <p:cNvPr id="2" name="Text 0"/>
-          <p:cNvSpPr txBox="1"/>
-          <p:nvPr/>
-        </p:nvSpPr>
-        <p:spPr>
-          <a:xfrm>
-            <a:off x="6949440" y="0"/>
-            <a:ext cx="5486400" cy="6858000"/>
-          </a:xfrm>
-          <a:prstGeom prst="rect">
-            <a:avLst/>
-          </a:prstGeom>
-          <a:noFill/>
-          <a:ln/>
-        </p:spPr>
-        <p:txBody>
-          <a:bodyPr wrap="square" lIns="0" tIns="0" rIns="0" bIns="0" rtlCol="0" anchor="t"/>
-          <a:lstStyle/>
-          <a:p>
-            <a:pPr algn="r" indent="0" marL="0">
-              <a:buNone/>
-            </a:pPr>
-            <a:r>
-              <a:rPr lang="en-US" sz="36000" b="1" dirty="0">
-                <a:solidFill>
-                  <a:srgbClr val="141414"/>
-                </a:solidFill>
-                <a:latin typeface="Cambria" pitchFamily="34" charset="0"/>
-                <a:ea typeface="Cambria" pitchFamily="34" charset="-122"/>
-                <a:cs typeface="Cambria" pitchFamily="34" charset="-120"/>
-              </a:rPr>
-              <a:t>06</a:t>
-            </a:r>
-            <a:endParaRPr lang="en-US" sz="36000" dirty="0"/>
-          </a:p>
-        </p:txBody>
-      </p:sp>
       <p:pic>
         <p:nvPicPr>
-          <p:cNvPr id="3" name="Image 0" descr="/home/user/valletta-design-system/assets/logo/valletta-mark.png">    </p:cNvPr>
+          <p:cNvPr id="2" name="Image 0" descr="/home/user/valletta-design-system/assets/logo/valletta-mark-ghost.png">    </p:cNvPr>
           <p:cNvPicPr>
             <a:picLocks noChangeAspect="1"/>
           </p:cNvPicPr>
@@ -6417,8 +6303,32 @@
         </p:blipFill>
         <p:spPr>
           <a:xfrm>
+            <a:off x="7891272" y="502920"/>
+            <a:ext cx="5486400" cy="5839260"/>
+          </a:xfrm>
+          <a:prstGeom prst="rect">
+            <a:avLst/>
+          </a:prstGeom>
+        </p:spPr>
+      </p:pic>
+      <p:pic>
+        <p:nvPicPr>
+          <p:cNvPr id="3" name="Image 1" descr="/home/user/valletta-design-system/assets/logo/valletta-mark.png">    </p:cNvPr>
+          <p:cNvPicPr>
+            <a:picLocks noChangeAspect="1"/>
+          </p:cNvPicPr>
+          <p:nvPr/>
+        </p:nvPicPr>
+        <p:blipFill>
+          <a:blip r:embed="rId2"/>
+          <a:stretch>
+            <a:fillRect/>
+          </a:stretch>
+        </p:blipFill>
+        <p:spPr>
+          <a:xfrm>
             <a:off x="457200" y="365760"/>
-            <a:ext cx="365760" cy="389284"/>
+            <a:ext cx="548640" cy="583926"/>
           </a:xfrm>
           <a:prstGeom prst="rect">
             <a:avLst/>
@@ -6427,14 +6337,14 @@
       </p:pic>
       <p:sp>
         <p:nvSpPr>
-          <p:cNvPr id="4" name="Text 1"/>
-          <p:cNvSpPr txBox="1"/>
-          <p:nvPr/>
-        </p:nvSpPr>
-        <p:spPr>
-          <a:xfrm>
-            <a:off x="932688" y="329184"/>
-            <a:ext cx="2926080" cy="274320"/>
+          <p:cNvPr id="4" name="Text 0"/>
+          <p:cNvSpPr txBox="1"/>
+          <p:nvPr/>
+        </p:nvSpPr>
+        <p:spPr>
+          <a:xfrm>
+            <a:off x="1170432" y="347472"/>
+            <a:ext cx="3291840" cy="402336"/>
           </a:xfrm>
           <a:prstGeom prst="rect">
             <a:avLst/>
@@ -6450,7 +6360,7 @@
               <a:buNone/>
             </a:pPr>
             <a:r>
-              <a:rPr lang="en-US" sz="1500" spc="200" kern="0" dirty="0">
+              <a:rPr lang="en-US" sz="2200" spc="200" kern="0" dirty="0">
                 <a:solidFill>
                   <a:srgbClr val="FFFFFF"/>
                 </a:solidFill>
@@ -6460,20 +6370,20 @@
               </a:rPr>
               <a:t>VALLETTA</a:t>
             </a:r>
-            <a:endParaRPr lang="en-US" sz="1500" dirty="0"/>
-          </a:p>
-        </p:txBody>
-      </p:sp>
-      <p:sp>
-        <p:nvSpPr>
-          <p:cNvPr id="5" name="Text 2"/>
-          <p:cNvSpPr txBox="1"/>
-          <p:nvPr/>
-        </p:nvSpPr>
-        <p:spPr>
-          <a:xfrm>
-            <a:off x="932688" y="594360"/>
-            <a:ext cx="2926080" cy="219456"/>
+            <a:endParaRPr lang="en-US" sz="2200" dirty="0"/>
+          </a:p>
+        </p:txBody>
+      </p:sp>
+      <p:sp>
+        <p:nvSpPr>
+          <p:cNvPr id="5" name="Text 1"/>
+          <p:cNvSpPr txBox="1"/>
+          <p:nvPr/>
+        </p:nvSpPr>
+        <p:spPr>
+          <a:xfrm>
+            <a:off x="1170432" y="731520"/>
+            <a:ext cx="3291840" cy="274320"/>
           </a:xfrm>
           <a:prstGeom prst="rect">
             <a:avLst/>
@@ -6489,7 +6399,7 @@
               <a:buNone/>
             </a:pPr>
             <a:r>
-              <a:rPr lang="en-US" sz="750" b="1" spc="200" kern="0" dirty="0">
+              <a:rPr lang="en-US" sz="1100" b="1" spc="200" kern="0" dirty="0">
                 <a:solidFill>
                   <a:srgbClr val="5B5F66"/>
                 </a:solidFill>
@@ -6499,19 +6409,19 @@
               </a:rPr>
               <a:t>INDUSTRIES, INC.</a:t>
             </a:r>
-            <a:endParaRPr lang="en-US" sz="750" dirty="0"/>
-          </a:p>
-        </p:txBody>
-      </p:sp>
-      <p:sp>
-        <p:nvSpPr>
-          <p:cNvPr id="6" name="Text 3"/>
-          <p:cNvSpPr txBox="1"/>
-          <p:nvPr/>
-        </p:nvSpPr>
-        <p:spPr>
-          <a:xfrm>
-            <a:off x="457200" y="777240"/>
+            <a:endParaRPr lang="en-US" sz="1100" dirty="0"/>
+          </a:p>
+        </p:txBody>
+      </p:sp>
+      <p:sp>
+        <p:nvSpPr>
+          <p:cNvPr id="6" name="Text 2"/>
+          <p:cNvSpPr txBox="1"/>
+          <p:nvPr/>
+        </p:nvSpPr>
+        <p:spPr>
+          <a:xfrm>
+            <a:off x="457200" y="1005840"/>
             <a:ext cx="5486400" cy="320040"/>
           </a:xfrm>
           <a:prstGeom prst="rect">
@@ -6544,13 +6454,13 @@
       </p:sp>
       <p:sp>
         <p:nvSpPr>
-          <p:cNvPr id="7" name="Text 4"/>
-          <p:cNvSpPr txBox="1"/>
-          <p:nvPr/>
-        </p:nvSpPr>
-        <p:spPr>
-          <a:xfrm>
-            <a:off x="457200" y="1097280"/>
+          <p:cNvPr id="7" name="Text 3"/>
+          <p:cNvSpPr txBox="1"/>
+          <p:nvPr/>
+        </p:nvSpPr>
+        <p:spPr>
+          <a:xfrm>
+            <a:off x="457200" y="1325880"/>
             <a:ext cx="6675120" cy="685800"/>
           </a:xfrm>
           <a:prstGeom prst="rect">
@@ -6583,13 +6493,13 @@
       </p:sp>
       <p:sp>
         <p:nvSpPr>
-          <p:cNvPr id="8" name="Text 5"/>
-          <p:cNvSpPr txBox="1"/>
-          <p:nvPr/>
-        </p:nvSpPr>
-        <p:spPr>
-          <a:xfrm>
-            <a:off x="457200" y="1783080"/>
+          <p:cNvPr id="8" name="Text 4"/>
+          <p:cNvSpPr txBox="1"/>
+          <p:nvPr/>
+        </p:nvSpPr>
+        <p:spPr>
+          <a:xfrm>
+            <a:off x="457200" y="2011680"/>
             <a:ext cx="6675120" cy="457200"/>
           </a:xfrm>
           <a:prstGeom prst="rect">
@@ -6622,13 +6532,13 @@
       </p:sp>
       <p:sp>
         <p:nvSpPr>
-          <p:cNvPr id="9" name="Shape 6"/>
+          <p:cNvPr id="9" name="Shape 5"/>
           <p:cNvSpPr/>
           <p:nvPr/>
         </p:nvSpPr>
         <p:spPr>
           <a:xfrm>
-            <a:off x="457200" y="2606040"/>
+            <a:off x="457200" y="2788920"/>
             <a:ext cx="256032" cy="32004"/>
           </a:xfrm>
           <a:prstGeom prst="rect">
@@ -6642,13 +6552,13 @@
       </p:sp>
       <p:sp>
         <p:nvSpPr>
-          <p:cNvPr id="10" name="Shape 7"/>
+          <p:cNvPr id="10" name="Shape 6"/>
           <p:cNvSpPr/>
           <p:nvPr/>
         </p:nvSpPr>
         <p:spPr>
           <a:xfrm>
-            <a:off x="457200" y="2606040"/>
+            <a:off x="457200" y="2788920"/>
             <a:ext cx="32004" cy="256032"/>
           </a:xfrm>
           <a:prstGeom prst="rect">
@@ -6662,13 +6572,13 @@
       </p:sp>
       <p:sp>
         <p:nvSpPr>
-          <p:cNvPr id="11" name="Text 8"/>
-          <p:cNvSpPr txBox="1"/>
-          <p:nvPr/>
-        </p:nvSpPr>
-        <p:spPr>
-          <a:xfrm>
-            <a:off x="868680" y="2569464"/>
+          <p:cNvPr id="11" name="Text 7"/>
+          <p:cNvSpPr txBox="1"/>
+          <p:nvPr/>
+        </p:nvSpPr>
+        <p:spPr>
+          <a:xfrm>
+            <a:off x="868680" y="2752344"/>
             <a:ext cx="5623560" cy="384048"/>
           </a:xfrm>
           <a:prstGeom prst="rect">
@@ -6701,13 +6611,13 @@
       </p:sp>
       <p:sp>
         <p:nvSpPr>
-          <p:cNvPr id="12" name="Text 9"/>
-          <p:cNvSpPr txBox="1"/>
-          <p:nvPr/>
-        </p:nvSpPr>
-        <p:spPr>
-          <a:xfrm>
-            <a:off x="868680" y="2935224"/>
+          <p:cNvPr id="12" name="Text 8"/>
+          <p:cNvSpPr txBox="1"/>
+          <p:nvPr/>
+        </p:nvSpPr>
+        <p:spPr>
+          <a:xfrm>
+            <a:off x="868680" y="3118104"/>
             <a:ext cx="5623560" cy="640080"/>
           </a:xfrm>
           <a:prstGeom prst="rect">
@@ -6743,13 +6653,13 @@
       </p:sp>
       <p:sp>
         <p:nvSpPr>
-          <p:cNvPr id="13" name="Shape 10"/>
+          <p:cNvPr id="13" name="Shape 9"/>
           <p:cNvSpPr/>
           <p:nvPr/>
         </p:nvSpPr>
         <p:spPr>
           <a:xfrm>
-            <a:off x="457200" y="3685032"/>
+            <a:off x="457200" y="3840480"/>
             <a:ext cx="256032" cy="32004"/>
           </a:xfrm>
           <a:prstGeom prst="rect">
@@ -6763,13 +6673,13 @@
       </p:sp>
       <p:sp>
         <p:nvSpPr>
-          <p:cNvPr id="14" name="Shape 11"/>
+          <p:cNvPr id="14" name="Shape 10"/>
           <p:cNvSpPr/>
           <p:nvPr/>
         </p:nvSpPr>
         <p:spPr>
           <a:xfrm>
-            <a:off x="457200" y="3685032"/>
+            <a:off x="457200" y="3840480"/>
             <a:ext cx="32004" cy="256032"/>
           </a:xfrm>
           <a:prstGeom prst="rect">
@@ -6783,13 +6693,13 @@
       </p:sp>
       <p:sp>
         <p:nvSpPr>
-          <p:cNvPr id="15" name="Text 12"/>
-          <p:cNvSpPr txBox="1"/>
-          <p:nvPr/>
-        </p:nvSpPr>
-        <p:spPr>
-          <a:xfrm>
-            <a:off x="868680" y="3648456"/>
+          <p:cNvPr id="15" name="Text 11"/>
+          <p:cNvSpPr txBox="1"/>
+          <p:nvPr/>
+        </p:nvSpPr>
+        <p:spPr>
+          <a:xfrm>
+            <a:off x="868680" y="3803904"/>
             <a:ext cx="5623560" cy="384048"/>
           </a:xfrm>
           <a:prstGeom prst="rect">
@@ -6822,13 +6732,13 @@
       </p:sp>
       <p:sp>
         <p:nvSpPr>
-          <p:cNvPr id="16" name="Text 13"/>
-          <p:cNvSpPr txBox="1"/>
-          <p:nvPr/>
-        </p:nvSpPr>
-        <p:spPr>
-          <a:xfrm>
-            <a:off x="868680" y="4014216"/>
+          <p:cNvPr id="16" name="Text 12"/>
+          <p:cNvSpPr txBox="1"/>
+          <p:nvPr/>
+        </p:nvSpPr>
+        <p:spPr>
+          <a:xfrm>
+            <a:off x="868680" y="4169664"/>
             <a:ext cx="5623560" cy="640080"/>
           </a:xfrm>
           <a:prstGeom prst="rect">
@@ -6864,13 +6774,13 @@
       </p:sp>
       <p:sp>
         <p:nvSpPr>
-          <p:cNvPr id="17" name="Shape 14"/>
+          <p:cNvPr id="17" name="Shape 13"/>
           <p:cNvSpPr/>
           <p:nvPr/>
         </p:nvSpPr>
         <p:spPr>
           <a:xfrm>
-            <a:off x="457200" y="4764024"/>
+            <a:off x="457200" y="4892040"/>
             <a:ext cx="256032" cy="32004"/>
           </a:xfrm>
           <a:prstGeom prst="rect">
@@ -6884,13 +6794,13 @@
       </p:sp>
       <p:sp>
         <p:nvSpPr>
-          <p:cNvPr id="18" name="Shape 15"/>
+          <p:cNvPr id="18" name="Shape 14"/>
           <p:cNvSpPr/>
           <p:nvPr/>
         </p:nvSpPr>
         <p:spPr>
           <a:xfrm>
-            <a:off x="457200" y="4764024"/>
+            <a:off x="457200" y="4892040"/>
             <a:ext cx="32004" cy="256032"/>
           </a:xfrm>
           <a:prstGeom prst="rect">
@@ -6904,13 +6814,13 @@
       </p:sp>
       <p:sp>
         <p:nvSpPr>
-          <p:cNvPr id="19" name="Text 16"/>
-          <p:cNvSpPr txBox="1"/>
-          <p:nvPr/>
-        </p:nvSpPr>
-        <p:spPr>
-          <a:xfrm>
-            <a:off x="868680" y="4727448"/>
+          <p:cNvPr id="19" name="Text 15"/>
+          <p:cNvSpPr txBox="1"/>
+          <p:nvPr/>
+        </p:nvSpPr>
+        <p:spPr>
+          <a:xfrm>
+            <a:off x="868680" y="4855464"/>
             <a:ext cx="5623560" cy="384048"/>
           </a:xfrm>
           <a:prstGeom prst="rect">
@@ -6943,13 +6853,13 @@
       </p:sp>
       <p:sp>
         <p:nvSpPr>
-          <p:cNvPr id="20" name="Text 17"/>
-          <p:cNvSpPr txBox="1"/>
-          <p:nvPr/>
-        </p:nvSpPr>
-        <p:spPr>
-          <a:xfrm>
-            <a:off x="868680" y="5093208"/>
+          <p:cNvPr id="20" name="Text 16"/>
+          <p:cNvSpPr txBox="1"/>
+          <p:nvPr/>
+        </p:nvSpPr>
+        <p:spPr>
+          <a:xfrm>
+            <a:off x="868680" y="5221224"/>
             <a:ext cx="5623560" cy="640080"/>
           </a:xfrm>
           <a:prstGeom prst="rect">
@@ -6985,7 +6895,7 @@
       </p:sp>
       <p:sp>
         <p:nvSpPr>
-          <p:cNvPr id="21" name="Shape 18"/>
+          <p:cNvPr id="21" name="Shape 17"/>
           <p:cNvSpPr/>
           <p:nvPr/>
         </p:nvSpPr>
@@ -7005,7 +6915,7 @@
       </p:sp>
       <p:sp>
         <p:nvSpPr>
-          <p:cNvPr id="22" name="Shape 19"/>
+          <p:cNvPr id="22" name="Shape 18"/>
           <p:cNvSpPr/>
           <p:nvPr/>
         </p:nvSpPr>
@@ -7025,7 +6935,7 @@
       </p:sp>
       <p:sp>
         <p:nvSpPr>
-          <p:cNvPr id="23" name="Shape 20"/>
+          <p:cNvPr id="23" name="Shape 19"/>
           <p:cNvSpPr/>
           <p:nvPr/>
         </p:nvSpPr>
@@ -7045,7 +6955,7 @@
       </p:sp>
       <p:sp>
         <p:nvSpPr>
-          <p:cNvPr id="24" name="Text 21"/>
+          <p:cNvPr id="24" name="Text 20"/>
           <p:cNvSpPr txBox="1"/>
           <p:nvPr/>
         </p:nvSpPr>
@@ -7084,7 +6994,7 @@
       </p:sp>
       <p:sp>
         <p:nvSpPr>
-          <p:cNvPr id="25" name="Text 22"/>
+          <p:cNvPr id="25" name="Text 21"/>
           <p:cNvSpPr txBox="1"/>
           <p:nvPr/>
         </p:nvSpPr>
@@ -7166,7 +7076,7 @@
       </p:sp>
       <p:sp>
         <p:nvSpPr>
-          <p:cNvPr id="26" name="Text 23"/>
+          <p:cNvPr id="26" name="Text 22"/>
           <p:cNvSpPr txBox="1"/>
           <p:nvPr/>
         </p:nvSpPr>
@@ -7205,7 +7115,7 @@
       </p:sp>
       <p:sp>
         <p:nvSpPr>
-          <p:cNvPr id="27" name="Text 24"/>
+          <p:cNvPr id="27" name="Text 23"/>
           <p:cNvSpPr txBox="1"/>
           <p:nvPr/>
         </p:nvSpPr>
@@ -7307,7 +7217,7 @@
       </p:sp>
       <p:sp>
         <p:nvSpPr>
-          <p:cNvPr id="28" name="Shape 25"/>
+          <p:cNvPr id="28" name="Shape 24"/>
           <p:cNvSpPr/>
           <p:nvPr/>
         </p:nvSpPr>
@@ -7330,7 +7240,7 @@
       </p:sp>
       <p:sp>
         <p:nvSpPr>
-          <p:cNvPr id="29" name="Text 26"/>
+          <p:cNvPr id="29" name="Text 25"/>
           <p:cNvSpPr txBox="1"/>
           <p:nvPr/>
         </p:nvSpPr>
